--- a/笔灵·智能社媒内容生产与流量优化工具.pptx
+++ b/笔灵·智能社媒内容生产与流量优化工具.pptx
@@ -2290,9 +2290,9 @@
                 <a:solidFill>
                   <a:srgbClr val="00D4FF"/>
                 </a:solidFill>
-                <a:latin typeface="Inter" pitchFamily="34" charset="0"/>
-                <a:ea typeface="Inter" pitchFamily="34" charset="-122"/>
-                <a:cs typeface="Inter" pitchFamily="34" charset="-120"/>
+                <a:latin typeface="Calibri" pitchFamily="34" charset="0"/>
+                <a:ea typeface="Microsoft YaHei UI" pitchFamily="34" charset="-122"/>
+                <a:cs typeface="Calibri" pitchFamily="34" charset="-120"/>
               </a:rPr>
               <a:t>COMPETITIVE RESEARCH &amp; BRAINSTORM</a:t>
             </a:r>
@@ -2334,9 +2334,9 @@
                 <a:solidFill>
                   <a:srgbClr val="A78BFA"/>
                 </a:solidFill>
-                <a:latin typeface="Space Grotesk" pitchFamily="34" charset="0"/>
-                <a:ea typeface="Space Grotesk" pitchFamily="34" charset="-122"/>
-                <a:cs typeface="Space Grotesk" pitchFamily="34" charset="-120"/>
+                <a:latin typeface="Calibri" pitchFamily="34" charset="0"/>
+                <a:ea typeface="Microsoft YaHei UI" pitchFamily="34" charset="-122"/>
+                <a:cs typeface="Calibri" pitchFamily="34" charset="-120"/>
               </a:rPr>
               <a:t>笔灵</a:t>
             </a:r>
@@ -2380,9 +2380,9 @@
                     <a:alpha val="85000"/>
                   </a:srgbClr>
                 </a:solidFill>
-                <a:latin typeface="Inter" pitchFamily="34" charset="0"/>
-                <a:ea typeface="Inter" pitchFamily="34" charset="-122"/>
-                <a:cs typeface="Inter" pitchFamily="34" charset="-120"/>
+                <a:latin typeface="Calibri" pitchFamily="34" charset="0"/>
+                <a:ea typeface="Microsoft YaHei UI" pitchFamily="34" charset="-122"/>
+                <a:cs typeface="Calibri" pitchFamily="34" charset="-120"/>
               </a:rPr>
               <a:t>智能社媒内容生产与流量优化工具</a:t>
             </a:r>
@@ -2426,9 +2426,9 @@
                     <a:alpha val="35000"/>
                   </a:srgbClr>
                 </a:solidFill>
-                <a:latin typeface="Inter" pitchFamily="34" charset="0"/>
-                <a:ea typeface="Inter" pitchFamily="34" charset="-122"/>
-                <a:cs typeface="Inter" pitchFamily="34" charset="-120"/>
+                <a:latin typeface="Calibri" pitchFamily="34" charset="0"/>
+                <a:ea typeface="Microsoft YaHei UI" pitchFamily="34" charset="-122"/>
+                <a:cs typeface="Calibri" pitchFamily="34" charset="-120"/>
               </a:rPr>
               <a:t>2026 年 3 月</a:t>
             </a:r>
@@ -2519,9 +2519,9 @@
                 <a:solidFill>
                   <a:srgbClr val="00D4FF"/>
                 </a:solidFill>
-                <a:latin typeface="Inter" pitchFamily="34" charset="0"/>
-                <a:ea typeface="Inter" pitchFamily="34" charset="-122"/>
-                <a:cs typeface="Inter" pitchFamily="34" charset="-120"/>
+                <a:latin typeface="Calibri" pitchFamily="34" charset="0"/>
+                <a:ea typeface="Microsoft YaHei UI" pitchFamily="34" charset="-122"/>
+                <a:cs typeface="Calibri" pitchFamily="34" charset="-120"/>
               </a:rPr>
               <a:t>GO-TO-MARKET</a:t>
             </a:r>
@@ -2563,9 +2563,9 @@
                 <a:solidFill>
                   <a:srgbClr val="FFFFFF"/>
                 </a:solidFill>
-                <a:latin typeface="Space Grotesk" pitchFamily="34" charset="0"/>
-                <a:ea typeface="Space Grotesk" pitchFamily="34" charset="-122"/>
-                <a:cs typeface="Space Grotesk" pitchFamily="34" charset="-120"/>
+                <a:latin typeface="Calibri" pitchFamily="34" charset="0"/>
+                <a:ea typeface="Microsoft YaHei UI" pitchFamily="34" charset="-122"/>
+                <a:cs typeface="Calibri" pitchFamily="34" charset="-120"/>
               </a:rPr>
               <a:t>三阶段 MVP → 增长 → 规模化执行路线</a:t>
             </a:r>
@@ -2636,9 +2636,9 @@
                 <a:solidFill>
                   <a:srgbClr val="00D4FF"/>
                 </a:solidFill>
-                <a:latin typeface="Inter" pitchFamily="34" charset="0"/>
-                <a:ea typeface="Inter" pitchFamily="34" charset="-122"/>
-                <a:cs typeface="Inter" pitchFamily="34" charset="-120"/>
+                <a:latin typeface="Calibri" pitchFamily="34" charset="0"/>
+                <a:ea typeface="Microsoft YaHei UI" pitchFamily="34" charset="-122"/>
+                <a:cs typeface="Calibri" pitchFamily="34" charset="-120"/>
               </a:rPr>
               <a:t>PHASE 01</a:t>
             </a:r>
@@ -2680,9 +2680,9 @@
                 <a:solidFill>
                   <a:srgbClr val="FFFFFF"/>
                 </a:solidFill>
-                <a:latin typeface="Space Grotesk" pitchFamily="34" charset="0"/>
-                <a:ea typeface="Space Grotesk" pitchFamily="34" charset="-122"/>
-                <a:cs typeface="Space Grotesk" pitchFamily="34" charset="-120"/>
+                <a:latin typeface="Calibri" pitchFamily="34" charset="0"/>
+                <a:ea typeface="Microsoft YaHei UI" pitchFamily="34" charset="-122"/>
+                <a:cs typeface="Calibri" pitchFamily="34" charset="-120"/>
               </a:rPr>
               <a:t>MVP 验证期</a:t>
             </a:r>
@@ -2724,9 +2724,9 @@
                 <a:solidFill>
                   <a:srgbClr val="8B949E"/>
                 </a:solidFill>
-                <a:latin typeface="Inter" pitchFamily="34" charset="0"/>
-                <a:ea typeface="Inter" pitchFamily="34" charset="-122"/>
-                <a:cs typeface="Inter" pitchFamily="34" charset="-120"/>
+                <a:latin typeface="Calibri" pitchFamily="34" charset="0"/>
+                <a:ea typeface="Microsoft YaHei UI" pitchFamily="34" charset="-122"/>
+                <a:cs typeface="Calibri" pitchFamily="34" charset="-120"/>
               </a:rPr>
               <a:t>0 – 6 个月</a:t>
             </a:r>
@@ -2795,9 +2795,9 @@
                 <a:solidFill>
                   <a:srgbClr val="00D4FF"/>
                 </a:solidFill>
-                <a:latin typeface="Space Grotesk" pitchFamily="34" charset="0"/>
-                <a:ea typeface="Space Grotesk" pitchFamily="34" charset="-122"/>
-                <a:cs typeface="Space Grotesk" pitchFamily="34" charset="-120"/>
+                <a:latin typeface="Calibri" pitchFamily="34" charset="0"/>
+                <a:ea typeface="Microsoft YaHei UI" pitchFamily="34" charset="-122"/>
+                <a:cs typeface="Calibri" pitchFamily="34" charset="-120"/>
               </a:rPr>
               <a:t>500</a:t>
             </a:r>
@@ -2839,9 +2839,9 @@
                 <a:solidFill>
                   <a:srgbClr val="8B949E"/>
                 </a:solidFill>
-                <a:latin typeface="Inter" pitchFamily="34" charset="0"/>
-                <a:ea typeface="Inter" pitchFamily="34" charset="-122"/>
-                <a:cs typeface="Inter" pitchFamily="34" charset="-120"/>
+                <a:latin typeface="Calibri" pitchFamily="34" charset="0"/>
+                <a:ea typeface="Microsoft YaHei UI" pitchFamily="34" charset="-122"/>
+                <a:cs typeface="Calibri" pitchFamily="34" charset="-120"/>
               </a:rPr>
               <a:t>目标种子用户（付费转化率 ≥ 10%）</a:t>
             </a:r>
@@ -2910,9 +2910,9 @@
                 <a:solidFill>
                   <a:srgbClr val="00D4FF"/>
                 </a:solidFill>
-                <a:latin typeface="Space Grotesk" pitchFamily="34" charset="0"/>
-                <a:ea typeface="Space Grotesk" pitchFamily="34" charset="-122"/>
-                <a:cs typeface="Space Grotesk" pitchFamily="34" charset="-120"/>
+                <a:latin typeface="Calibri" pitchFamily="34" charset="0"/>
+                <a:ea typeface="Microsoft YaHei UI" pitchFamily="34" charset="-122"/>
+                <a:cs typeface="Calibri" pitchFamily="34" charset="-120"/>
               </a:rPr>
               <a:t>¥99</a:t>
             </a:r>
@@ -2954,9 +2954,9 @@
                 <a:solidFill>
                   <a:srgbClr val="8B949E"/>
                 </a:solidFill>
-                <a:latin typeface="Inter" pitchFamily="34" charset="0"/>
-                <a:ea typeface="Inter" pitchFamily="34" charset="-122"/>
-                <a:cs typeface="Inter" pitchFamily="34" charset="-120"/>
+                <a:latin typeface="Calibri" pitchFamily="34" charset="0"/>
+                <a:ea typeface="Microsoft YaHei UI" pitchFamily="34" charset="-122"/>
+                <a:cs typeface="Calibri" pitchFamily="34" charset="-120"/>
               </a:rPr>
               <a:t>Pro 月订阅起步定价</a:t>
             </a:r>
@@ -3025,9 +3025,9 @@
                 <a:solidFill>
                   <a:srgbClr val="8B949E"/>
                 </a:solidFill>
-                <a:latin typeface="Inter" pitchFamily="34" charset="0"/>
-                <a:ea typeface="Inter" pitchFamily="34" charset="-122"/>
-                <a:cs typeface="Inter" pitchFamily="34" charset="-120"/>
+                <a:latin typeface="Calibri" pitchFamily="34" charset="0"/>
+                <a:ea typeface="Microsoft YaHei UI" pitchFamily="34" charset="-122"/>
+                <a:cs typeface="Calibri" pitchFamily="34" charset="-120"/>
               </a:rPr>
               <a:t>核心行动</a:t>
             </a:r>
@@ -3069,9 +3069,9 @@
                 <a:solidFill>
                   <a:srgbClr val="FFFFFF"/>
                 </a:solidFill>
-                <a:latin typeface="Inter" pitchFamily="34" charset="0"/>
-                <a:ea typeface="Inter" pitchFamily="34" charset="-122"/>
-                <a:cs typeface="Inter" pitchFamily="34" charset="-120"/>
+                <a:latin typeface="Calibri" pitchFamily="34" charset="0"/>
+                <a:ea typeface="Microsoft YaHei UI" pitchFamily="34" charset="-122"/>
+                <a:cs typeface="Calibri" pitchFamily="34" charset="-120"/>
               </a:rPr>
               <a:t>冷启动渠道：</a:t>
             </a:r>
@@ -3088,9 +3088,9 @@
                     <a:alpha val="75000"/>
                   </a:srgbClr>
                 </a:solidFill>
-                <a:latin typeface="Inter" pitchFamily="34" charset="0"/>
-                <a:ea typeface="Inter" pitchFamily="34" charset="-122"/>
-                <a:cs typeface="Inter" pitchFamily="34" charset="-120"/>
+                <a:latin typeface="Calibri" pitchFamily="34" charset="0"/>
+                <a:ea typeface="Microsoft YaHei UI" pitchFamily="34" charset="-122"/>
+                <a:cs typeface="Calibri" pitchFamily="34" charset="-120"/>
               </a:rPr>
               <a:t>内容创作者社群（微信群/即刻/小红书）定向邀测，</a:t>
             </a:r>
@@ -3107,9 +3107,9 @@
                     <a:alpha val="75000"/>
                   </a:srgbClr>
                 </a:solidFill>
-                <a:latin typeface="Inter" pitchFamily="34" charset="0"/>
-                <a:ea typeface="Inter" pitchFamily="34" charset="-122"/>
-                <a:cs typeface="Inter" pitchFamily="34" charset="-120"/>
+                <a:latin typeface="Calibri" pitchFamily="34" charset="0"/>
+                <a:ea typeface="Microsoft YaHei UI" pitchFamily="34" charset="-122"/>
+                <a:cs typeface="Calibri" pitchFamily="34" charset="-120"/>
               </a:rPr>
               <a:t>建立早期反馈闭环</a:t>
             </a:r>
@@ -3151,9 +3151,9 @@
                 <a:solidFill>
                   <a:srgbClr val="FFFFFF"/>
                 </a:solidFill>
-                <a:latin typeface="Inter" pitchFamily="34" charset="0"/>
-                <a:ea typeface="Inter" pitchFamily="34" charset="-122"/>
-                <a:cs typeface="Inter" pitchFamily="34" charset="-120"/>
+                <a:latin typeface="Calibri" pitchFamily="34" charset="0"/>
+                <a:ea typeface="Microsoft YaHei UI" pitchFamily="34" charset="-122"/>
+                <a:cs typeface="Calibri" pitchFamily="34" charset="-120"/>
               </a:rPr>
               <a:t>核心功能验证：</a:t>
             </a:r>
@@ -3170,9 +3170,9 @@
                     <a:alpha val="75000"/>
                   </a:srgbClr>
                 </a:solidFill>
-                <a:latin typeface="Inter" pitchFamily="34" charset="0"/>
-                <a:ea typeface="Inter" pitchFamily="34" charset="-122"/>
-                <a:cs typeface="Inter" pitchFamily="34" charset="-120"/>
+                <a:latin typeface="Calibri" pitchFamily="34" charset="0"/>
+                <a:ea typeface="Microsoft YaHei UI" pitchFamily="34" charset="-122"/>
+                <a:cs typeface="Calibri" pitchFamily="34" charset="-120"/>
               </a:rPr>
               <a:t>AI文案生成 + 多平台格式适配 + 热点看板三项核</a:t>
             </a:r>
@@ -3189,9 +3189,9 @@
                     <a:alpha val="75000"/>
                   </a:srgbClr>
                 </a:solidFill>
-                <a:latin typeface="Inter" pitchFamily="34" charset="0"/>
-                <a:ea typeface="Inter" pitchFamily="34" charset="-122"/>
-                <a:cs typeface="Inter" pitchFamily="34" charset="-120"/>
+                <a:latin typeface="Calibri" pitchFamily="34" charset="0"/>
+                <a:ea typeface="Microsoft YaHei UI" pitchFamily="34" charset="-122"/>
+                <a:cs typeface="Calibri" pitchFamily="34" charset="-120"/>
               </a:rPr>
               <a:t>心功能 NPS ≥ 40</a:t>
             </a:r>
@@ -3233,9 +3233,9 @@
                 <a:solidFill>
                   <a:srgbClr val="FFFFFF"/>
                 </a:solidFill>
-                <a:latin typeface="Inter" pitchFamily="34" charset="0"/>
-                <a:ea typeface="Inter" pitchFamily="34" charset="-122"/>
-                <a:cs typeface="Inter" pitchFamily="34" charset="-120"/>
+                <a:latin typeface="Calibri" pitchFamily="34" charset="0"/>
+                <a:ea typeface="Microsoft YaHei UI" pitchFamily="34" charset="-122"/>
+                <a:cs typeface="Calibri" pitchFamily="34" charset="-120"/>
               </a:rPr>
               <a:t>视频功能灰度：</a:t>
             </a:r>
@@ -3252,9 +3252,9 @@
                     <a:alpha val="75000"/>
                   </a:srgbClr>
                 </a:solidFill>
-                <a:latin typeface="Inter" pitchFamily="34" charset="0"/>
-                <a:ea typeface="Inter" pitchFamily="34" charset="-122"/>
-                <a:cs typeface="Inter" pitchFamily="34" charset="-120"/>
+                <a:latin typeface="Calibri" pitchFamily="34" charset="0"/>
+                <a:ea typeface="Microsoft YaHei UI" pitchFamily="34" charset="-122"/>
+                <a:cs typeface="Calibri" pitchFamily="34" charset="-120"/>
               </a:rPr>
               <a:t>向高活跃用户开放 AI 视频生成，收集真实使用场</a:t>
             </a:r>
@@ -3271,9 +3271,9 @@
                     <a:alpha val="75000"/>
                   </a:srgbClr>
                 </a:solidFill>
-                <a:latin typeface="Inter" pitchFamily="34" charset="0"/>
-                <a:ea typeface="Inter" pitchFamily="34" charset="-122"/>
-                <a:cs typeface="Inter" pitchFamily="34" charset="-120"/>
+                <a:latin typeface="Calibri" pitchFamily="34" charset="0"/>
+                <a:ea typeface="Microsoft YaHei UI" pitchFamily="34" charset="-122"/>
+                <a:cs typeface="Calibri" pitchFamily="34" charset="-120"/>
               </a:rPr>
               <a:t>景数据</a:t>
             </a:r>
@@ -3315,9 +3315,9 @@
                 <a:solidFill>
                   <a:srgbClr val="FFFFFF"/>
                 </a:solidFill>
-                <a:latin typeface="Inter" pitchFamily="34" charset="0"/>
-                <a:ea typeface="Inter" pitchFamily="34" charset="-122"/>
-                <a:cs typeface="Inter" pitchFamily="34" charset="-120"/>
+                <a:latin typeface="Calibri" pitchFamily="34" charset="0"/>
+                <a:ea typeface="Microsoft YaHei UI" pitchFamily="34" charset="-122"/>
+                <a:cs typeface="Calibri" pitchFamily="34" charset="-120"/>
               </a:rPr>
               <a:t>数据闭环建立：</a:t>
             </a:r>
@@ -3334,9 +3334,9 @@
                     <a:alpha val="75000"/>
                   </a:srgbClr>
                 </a:solidFill>
-                <a:latin typeface="Inter" pitchFamily="34" charset="0"/>
-                <a:ea typeface="Inter" pitchFamily="34" charset="-122"/>
-                <a:cs typeface="Inter" pitchFamily="34" charset="-120"/>
+                <a:latin typeface="Calibri" pitchFamily="34" charset="0"/>
+                <a:ea typeface="Microsoft YaHei UI" pitchFamily="34" charset="-122"/>
+                <a:cs typeface="Calibri" pitchFamily="34" charset="-120"/>
               </a:rPr>
               <a:t>打通发布后数据回流，验证"热点→内容→发布→</a:t>
             </a:r>
@@ -3353,9 +3353,9 @@
                     <a:alpha val="75000"/>
                   </a:srgbClr>
                 </a:solidFill>
-                <a:latin typeface="Inter" pitchFamily="34" charset="0"/>
-                <a:ea typeface="Inter" pitchFamily="34" charset="-122"/>
-                <a:cs typeface="Inter" pitchFamily="34" charset="-120"/>
+                <a:latin typeface="Calibri" pitchFamily="34" charset="0"/>
+                <a:ea typeface="Microsoft YaHei UI" pitchFamily="34" charset="-122"/>
+                <a:cs typeface="Calibri" pitchFamily="34" charset="-120"/>
               </a:rPr>
               <a:t>数据"完整链路</a:t>
             </a:r>
@@ -3426,9 +3426,9 @@
                 <a:solidFill>
                   <a:srgbClr val="A78BFA"/>
                 </a:solidFill>
-                <a:latin typeface="Inter" pitchFamily="34" charset="0"/>
-                <a:ea typeface="Inter" pitchFamily="34" charset="-122"/>
-                <a:cs typeface="Inter" pitchFamily="34" charset="-120"/>
+                <a:latin typeface="Calibri" pitchFamily="34" charset="0"/>
+                <a:ea typeface="Microsoft YaHei UI" pitchFamily="34" charset="-122"/>
+                <a:cs typeface="Calibri" pitchFamily="34" charset="-120"/>
               </a:rPr>
               <a:t>PHASE 02</a:t>
             </a:r>
@@ -3470,9 +3470,9 @@
                 <a:solidFill>
                   <a:srgbClr val="FFFFFF"/>
                 </a:solidFill>
-                <a:latin typeface="Space Grotesk" pitchFamily="34" charset="0"/>
-                <a:ea typeface="Space Grotesk" pitchFamily="34" charset="-122"/>
-                <a:cs typeface="Space Grotesk" pitchFamily="34" charset="-120"/>
+                <a:latin typeface="Calibri" pitchFamily="34" charset="0"/>
+                <a:ea typeface="Microsoft YaHei UI" pitchFamily="34" charset="-122"/>
+                <a:cs typeface="Calibri" pitchFamily="34" charset="-120"/>
               </a:rPr>
               <a:t>增长期</a:t>
             </a:r>
@@ -3514,9 +3514,9 @@
                 <a:solidFill>
                   <a:srgbClr val="8B949E"/>
                 </a:solidFill>
-                <a:latin typeface="Inter" pitchFamily="34" charset="0"/>
-                <a:ea typeface="Inter" pitchFamily="34" charset="-122"/>
-                <a:cs typeface="Inter" pitchFamily="34" charset="-120"/>
+                <a:latin typeface="Calibri" pitchFamily="34" charset="0"/>
+                <a:ea typeface="Microsoft YaHei UI" pitchFamily="34" charset="-122"/>
+                <a:cs typeface="Calibri" pitchFamily="34" charset="-120"/>
               </a:rPr>
               <a:t>6 – 18 个月</a:t>
             </a:r>
@@ -3585,9 +3585,9 @@
                 <a:solidFill>
                   <a:srgbClr val="A78BFA"/>
                 </a:solidFill>
-                <a:latin typeface="Space Grotesk" pitchFamily="34" charset="0"/>
-                <a:ea typeface="Space Grotesk" pitchFamily="34" charset="-122"/>
-                <a:cs typeface="Space Grotesk" pitchFamily="34" charset="-120"/>
+                <a:latin typeface="Calibri" pitchFamily="34" charset="0"/>
+                <a:ea typeface="Microsoft YaHei UI" pitchFamily="34" charset="-122"/>
+                <a:cs typeface="Calibri" pitchFamily="34" charset="-120"/>
               </a:rPr>
               <a:t>1 万</a:t>
             </a:r>
@@ -3629,9 +3629,9 @@
                 <a:solidFill>
                   <a:srgbClr val="8B949E"/>
                 </a:solidFill>
-                <a:latin typeface="Inter" pitchFamily="34" charset="0"/>
-                <a:ea typeface="Inter" pitchFamily="34" charset="-122"/>
-                <a:cs typeface="Inter" pitchFamily="34" charset="-120"/>
+                <a:latin typeface="Calibri" pitchFamily="34" charset="0"/>
+                <a:ea typeface="Microsoft YaHei UI" pitchFamily="34" charset="-122"/>
+                <a:cs typeface="Calibri" pitchFamily="34" charset="-120"/>
               </a:rPr>
               <a:t>付费用户目标（MRR ≥ ¥100 万）</a:t>
             </a:r>
@@ -3700,9 +3700,9 @@
                 <a:solidFill>
                   <a:srgbClr val="A78BFA"/>
                 </a:solidFill>
-                <a:latin typeface="Space Grotesk" pitchFamily="34" charset="0"/>
-                <a:ea typeface="Space Grotesk" pitchFamily="34" charset="-122"/>
-                <a:cs typeface="Space Grotesk" pitchFamily="34" charset="-120"/>
+                <a:latin typeface="Calibri" pitchFamily="34" charset="0"/>
+                <a:ea typeface="Microsoft YaHei UI" pitchFamily="34" charset="-122"/>
+                <a:cs typeface="Calibri" pitchFamily="34" charset="-120"/>
               </a:rPr>
               <a:t>3 档</a:t>
             </a:r>
@@ -3744,9 +3744,9 @@
                 <a:solidFill>
                   <a:srgbClr val="8B949E"/>
                 </a:solidFill>
-                <a:latin typeface="Inter" pitchFamily="34" charset="0"/>
-                <a:ea typeface="Inter" pitchFamily="34" charset="-122"/>
-                <a:cs typeface="Inter" pitchFamily="34" charset="-120"/>
+                <a:latin typeface="Calibri" pitchFamily="34" charset="0"/>
+                <a:ea typeface="Microsoft YaHei UI" pitchFamily="34" charset="-122"/>
+                <a:cs typeface="Calibri" pitchFamily="34" charset="-120"/>
               </a:rPr>
               <a:t>个人 / 团队 / 企业分层订阅</a:t>
             </a:r>
@@ -3815,9 +3815,9 @@
                 <a:solidFill>
                   <a:srgbClr val="8B949E"/>
                 </a:solidFill>
-                <a:latin typeface="Inter" pitchFamily="34" charset="0"/>
-                <a:ea typeface="Inter" pitchFamily="34" charset="-122"/>
-                <a:cs typeface="Inter" pitchFamily="34" charset="-120"/>
+                <a:latin typeface="Calibri" pitchFamily="34" charset="0"/>
+                <a:ea typeface="Microsoft YaHei UI" pitchFamily="34" charset="-122"/>
+                <a:cs typeface="Calibri" pitchFamily="34" charset="-120"/>
               </a:rPr>
               <a:t>核心行动</a:t>
             </a:r>
@@ -3859,9 +3859,9 @@
                 <a:solidFill>
                   <a:srgbClr val="FFFFFF"/>
                 </a:solidFill>
-                <a:latin typeface="Inter" pitchFamily="34" charset="0"/>
-                <a:ea typeface="Inter" pitchFamily="34" charset="-122"/>
-                <a:cs typeface="Inter" pitchFamily="34" charset="-120"/>
+                <a:latin typeface="Calibri" pitchFamily="34" charset="0"/>
+                <a:ea typeface="Microsoft YaHei UI" pitchFamily="34" charset="-122"/>
+                <a:cs typeface="Calibri" pitchFamily="34" charset="-120"/>
               </a:rPr>
               <a:t>分层定价落地：</a:t>
             </a:r>
@@ -3878,9 +3878,9 @@
                     <a:alpha val="75000"/>
                   </a:srgbClr>
                 </a:solidFill>
-                <a:latin typeface="Inter" pitchFamily="34" charset="0"/>
-                <a:ea typeface="Inter" pitchFamily="34" charset="-122"/>
-                <a:cs typeface="Inter" pitchFamily="34" charset="-120"/>
+                <a:latin typeface="Calibri" pitchFamily="34" charset="0"/>
+                <a:ea typeface="Microsoft YaHei UI" pitchFamily="34" charset="-122"/>
+                <a:cs typeface="Calibri" pitchFamily="34" charset="-120"/>
               </a:rPr>
               <a:t>个人 ¥99 / 团队 ¥299 / 企业 ¥999，按视频生成</a:t>
             </a:r>
@@ -3897,9 +3897,9 @@
                     <a:alpha val="75000"/>
                   </a:srgbClr>
                 </a:solidFill>
-                <a:latin typeface="Inter" pitchFamily="34" charset="0"/>
-                <a:ea typeface="Inter" pitchFamily="34" charset="-122"/>
-                <a:cs typeface="Inter" pitchFamily="34" charset="-120"/>
+                <a:latin typeface="Calibri" pitchFamily="34" charset="0"/>
+                <a:ea typeface="Microsoft YaHei UI" pitchFamily="34" charset="-122"/>
+                <a:cs typeface="Calibri" pitchFamily="34" charset="-120"/>
               </a:rPr>
               <a:t>量和账号数差异化</a:t>
             </a:r>
@@ -3941,9 +3941,9 @@
                 <a:solidFill>
                   <a:srgbClr val="FFFFFF"/>
                 </a:solidFill>
-                <a:latin typeface="Inter" pitchFamily="34" charset="0"/>
-                <a:ea typeface="Inter" pitchFamily="34" charset="-122"/>
-                <a:cs typeface="Inter" pitchFamily="34" charset="-120"/>
+                <a:latin typeface="Calibri" pitchFamily="34" charset="0"/>
+                <a:ea typeface="Microsoft YaHei UI" pitchFamily="34" charset="-122"/>
+                <a:cs typeface="Calibri" pitchFamily="34" charset="-120"/>
               </a:rPr>
               <a:t>内容营销获客：</a:t>
             </a:r>
@@ -3960,9 +3960,9 @@
                     <a:alpha val="75000"/>
                   </a:srgbClr>
                 </a:solidFill>
-                <a:latin typeface="Inter" pitchFamily="34" charset="0"/>
-                <a:ea typeface="Inter" pitchFamily="34" charset="-122"/>
-                <a:cs typeface="Inter" pitchFamily="34" charset="-120"/>
+                <a:latin typeface="Calibri" pitchFamily="34" charset="0"/>
+                <a:ea typeface="Microsoft YaHei UI" pitchFamily="34" charset="-122"/>
+                <a:cs typeface="Calibri" pitchFamily="34" charset="-120"/>
               </a:rPr>
               <a:t>用笔灵自身生产高质量内容，在抖音/小红书展示</a:t>
             </a:r>
@@ -3979,9 +3979,9 @@
                     <a:alpha val="75000"/>
                   </a:srgbClr>
                 </a:solidFill>
-                <a:latin typeface="Inter" pitchFamily="34" charset="0"/>
-                <a:ea typeface="Inter" pitchFamily="34" charset="-122"/>
-                <a:cs typeface="Inter" pitchFamily="34" charset="-120"/>
+                <a:latin typeface="Calibri" pitchFamily="34" charset="0"/>
+                <a:ea typeface="Microsoft YaHei UI" pitchFamily="34" charset="-122"/>
+                <a:cs typeface="Calibri" pitchFamily="34" charset="-120"/>
               </a:rPr>
               <a:t>产品效果，形成"产品即广告"</a:t>
             </a:r>
@@ -4023,9 +4023,9 @@
                 <a:solidFill>
                   <a:srgbClr val="FFFFFF"/>
                 </a:solidFill>
-                <a:latin typeface="Inter" pitchFamily="34" charset="0"/>
-                <a:ea typeface="Inter" pitchFamily="34" charset="-122"/>
-                <a:cs typeface="Inter" pitchFamily="34" charset="-120"/>
+                <a:latin typeface="Calibri" pitchFamily="34" charset="0"/>
+                <a:ea typeface="Microsoft YaHei UI" pitchFamily="34" charset="-122"/>
+                <a:cs typeface="Calibri" pitchFamily="34" charset="-120"/>
               </a:rPr>
               <a:t>KOL 合作计划：</a:t>
             </a:r>
@@ -4042,9 +4042,9 @@
                     <a:alpha val="75000"/>
                   </a:srgbClr>
                 </a:solidFill>
-                <a:latin typeface="Inter" pitchFamily="34" charset="0"/>
-                <a:ea typeface="Inter" pitchFamily="34" charset="-122"/>
-                <a:cs typeface="Inter" pitchFamily="34" charset="-120"/>
+                <a:latin typeface="Calibri" pitchFamily="34" charset="0"/>
+                <a:ea typeface="Microsoft YaHei UI" pitchFamily="34" charset="-122"/>
+                <a:cs typeface="Calibri" pitchFamily="34" charset="-120"/>
               </a:rPr>
               <a:t>与 100 位中腰部创作者合作，提供免费 Pro 账号</a:t>
             </a:r>
@@ -4061,9 +4061,9 @@
                     <a:alpha val="75000"/>
                   </a:srgbClr>
                 </a:solidFill>
-                <a:latin typeface="Inter" pitchFamily="34" charset="0"/>
-                <a:ea typeface="Inter" pitchFamily="34" charset="-122"/>
-                <a:cs typeface="Inter" pitchFamily="34" charset="-120"/>
+                <a:latin typeface="Calibri" pitchFamily="34" charset="0"/>
+                <a:ea typeface="Microsoft YaHei UI" pitchFamily="34" charset="-122"/>
+                <a:cs typeface="Calibri" pitchFamily="34" charset="-120"/>
               </a:rPr>
               <a:t>换取真实使用案例</a:t>
             </a:r>
@@ -4105,9 +4105,9 @@
                 <a:solidFill>
                   <a:srgbClr val="FFFFFF"/>
                 </a:solidFill>
-                <a:latin typeface="Inter" pitchFamily="34" charset="0"/>
-                <a:ea typeface="Inter" pitchFamily="34" charset="-122"/>
-                <a:cs typeface="Inter" pitchFamily="34" charset="-120"/>
+                <a:latin typeface="Calibri" pitchFamily="34" charset="0"/>
+                <a:ea typeface="Microsoft YaHei UI" pitchFamily="34" charset="-122"/>
+                <a:cs typeface="Calibri" pitchFamily="34" charset="-120"/>
               </a:rPr>
               <a:t>MCN 机构切入：</a:t>
             </a:r>
@@ -4124,9 +4124,9 @@
                     <a:alpha val="75000"/>
                   </a:srgbClr>
                 </a:solidFill>
-                <a:latin typeface="Inter" pitchFamily="34" charset="0"/>
-                <a:ea typeface="Inter" pitchFamily="34" charset="-122"/>
-                <a:cs typeface="Inter" pitchFamily="34" charset="-120"/>
+                <a:latin typeface="Calibri" pitchFamily="34" charset="0"/>
+                <a:ea typeface="Microsoft YaHei UI" pitchFamily="34" charset="-122"/>
+                <a:cs typeface="Calibri" pitchFamily="34" charset="-120"/>
               </a:rPr>
               <a:t>推出 MCN 批量管理方案，单签约 MCN 可带来 </a:t>
             </a:r>
@@ -4143,9 +4143,9 @@
                     <a:alpha val="75000"/>
                   </a:srgbClr>
                 </a:solidFill>
-                <a:latin typeface="Inter" pitchFamily="34" charset="0"/>
-                <a:ea typeface="Inter" pitchFamily="34" charset="-122"/>
-                <a:cs typeface="Inter" pitchFamily="34" charset="-120"/>
+                <a:latin typeface="Calibri" pitchFamily="34" charset="0"/>
+                <a:ea typeface="Microsoft YaHei UI" pitchFamily="34" charset="-122"/>
+                <a:cs typeface="Calibri" pitchFamily="34" charset="-120"/>
               </a:rPr>
               <a:t>50–200 个账号</a:t>
             </a:r>
@@ -4216,9 +4216,9 @@
                 <a:solidFill>
                   <a:srgbClr val="7C3AED"/>
                 </a:solidFill>
-                <a:latin typeface="Inter" pitchFamily="34" charset="0"/>
-                <a:ea typeface="Inter" pitchFamily="34" charset="-122"/>
-                <a:cs typeface="Inter" pitchFamily="34" charset="-120"/>
+                <a:latin typeface="Calibri" pitchFamily="34" charset="0"/>
+                <a:ea typeface="Microsoft YaHei UI" pitchFamily="34" charset="-122"/>
+                <a:cs typeface="Calibri" pitchFamily="34" charset="-120"/>
               </a:rPr>
               <a:t>PHASE 03</a:t>
             </a:r>
@@ -4260,9 +4260,9 @@
                 <a:solidFill>
                   <a:srgbClr val="FFFFFF"/>
                 </a:solidFill>
-                <a:latin typeface="Space Grotesk" pitchFamily="34" charset="0"/>
-                <a:ea typeface="Space Grotesk" pitchFamily="34" charset="-122"/>
-                <a:cs typeface="Space Grotesk" pitchFamily="34" charset="-120"/>
+                <a:latin typeface="Calibri" pitchFamily="34" charset="0"/>
+                <a:ea typeface="Microsoft YaHei UI" pitchFamily="34" charset="-122"/>
+                <a:cs typeface="Calibri" pitchFamily="34" charset="-120"/>
               </a:rPr>
               <a:t>规模化期</a:t>
             </a:r>
@@ -4304,9 +4304,9 @@
                 <a:solidFill>
                   <a:srgbClr val="8B949E"/>
                 </a:solidFill>
-                <a:latin typeface="Inter" pitchFamily="34" charset="0"/>
-                <a:ea typeface="Inter" pitchFamily="34" charset="-122"/>
-                <a:cs typeface="Inter" pitchFamily="34" charset="-120"/>
+                <a:latin typeface="Calibri" pitchFamily="34" charset="0"/>
+                <a:ea typeface="Microsoft YaHei UI" pitchFamily="34" charset="-122"/>
+                <a:cs typeface="Calibri" pitchFamily="34" charset="-120"/>
               </a:rPr>
               <a:t>18 个月+</a:t>
             </a:r>
@@ -4375,9 +4375,9 @@
                 <a:solidFill>
                   <a:srgbClr val="7C3AED"/>
                 </a:solidFill>
-                <a:latin typeface="Space Grotesk" pitchFamily="34" charset="0"/>
-                <a:ea typeface="Space Grotesk" pitchFamily="34" charset="-122"/>
-                <a:cs typeface="Space Grotesk" pitchFamily="34" charset="-120"/>
+                <a:latin typeface="Calibri" pitchFamily="34" charset="0"/>
+                <a:ea typeface="Microsoft YaHei UI" pitchFamily="34" charset="-122"/>
+                <a:cs typeface="Calibri" pitchFamily="34" charset="-120"/>
               </a:rPr>
               <a:t>10 万</a:t>
             </a:r>
@@ -4419,9 +4419,9 @@
                 <a:solidFill>
                   <a:srgbClr val="8B949E"/>
                 </a:solidFill>
-                <a:latin typeface="Inter" pitchFamily="34" charset="0"/>
-                <a:ea typeface="Inter" pitchFamily="34" charset="-122"/>
-                <a:cs typeface="Inter" pitchFamily="34" charset="-120"/>
+                <a:latin typeface="Calibri" pitchFamily="34" charset="0"/>
+                <a:ea typeface="Microsoft YaHei UI" pitchFamily="34" charset="-122"/>
+                <a:cs typeface="Calibri" pitchFamily="34" charset="-120"/>
               </a:rPr>
               <a:t>注册用户目标（ARR ≥ ¥1000 万）</a:t>
             </a:r>
@@ -4490,9 +4490,9 @@
                 <a:solidFill>
                   <a:srgbClr val="7C3AED"/>
                 </a:solidFill>
-                <a:latin typeface="Space Grotesk" pitchFamily="34" charset="0"/>
-                <a:ea typeface="Space Grotesk" pitchFamily="34" charset="-122"/>
-                <a:cs typeface="Space Grotesk" pitchFamily="34" charset="-120"/>
+                <a:latin typeface="Calibri" pitchFamily="34" charset="0"/>
+                <a:ea typeface="Microsoft YaHei UI" pitchFamily="34" charset="-122"/>
+                <a:cs typeface="Calibri" pitchFamily="34" charset="-120"/>
               </a:rPr>
               <a:t>API</a:t>
             </a:r>
@@ -4534,9 +4534,9 @@
                 <a:solidFill>
                   <a:srgbClr val="8B949E"/>
                 </a:solidFill>
-                <a:latin typeface="Inter" pitchFamily="34" charset="0"/>
-                <a:ea typeface="Inter" pitchFamily="34" charset="-122"/>
-                <a:cs typeface="Inter" pitchFamily="34" charset="-120"/>
+                <a:latin typeface="Calibri" pitchFamily="34" charset="0"/>
+                <a:ea typeface="Microsoft YaHei UI" pitchFamily="34" charset="-122"/>
+                <a:cs typeface="Calibri" pitchFamily="34" charset="-120"/>
               </a:rPr>
               <a:t>开放平台接入第三方生态</a:t>
             </a:r>
@@ -4605,9 +4605,9 @@
                 <a:solidFill>
                   <a:srgbClr val="8B949E"/>
                 </a:solidFill>
-                <a:latin typeface="Inter" pitchFamily="34" charset="0"/>
-                <a:ea typeface="Inter" pitchFamily="34" charset="-122"/>
-                <a:cs typeface="Inter" pitchFamily="34" charset="-120"/>
+                <a:latin typeface="Calibri" pitchFamily="34" charset="0"/>
+                <a:ea typeface="Microsoft YaHei UI" pitchFamily="34" charset="-122"/>
+                <a:cs typeface="Calibri" pitchFamily="34" charset="-120"/>
               </a:rPr>
               <a:t>核心行动</a:t>
             </a:r>
@@ -4649,9 +4649,9 @@
                 <a:solidFill>
                   <a:srgbClr val="FFFFFF"/>
                 </a:solidFill>
-                <a:latin typeface="Inter" pitchFamily="34" charset="0"/>
-                <a:ea typeface="Inter" pitchFamily="34" charset="-122"/>
-                <a:cs typeface="Inter" pitchFamily="34" charset="-120"/>
+                <a:latin typeface="Calibri" pitchFamily="34" charset="0"/>
+                <a:ea typeface="Microsoft YaHei UI" pitchFamily="34" charset="-122"/>
+                <a:cs typeface="Calibri" pitchFamily="34" charset="-120"/>
               </a:rPr>
               <a:t>Agent 全自动化：</a:t>
             </a:r>
@@ -4668,9 +4668,9 @@
                     <a:alpha val="75000"/>
                   </a:srgbClr>
                 </a:solidFill>
-                <a:latin typeface="Inter" pitchFamily="34" charset="0"/>
-                <a:ea typeface="Inter" pitchFamily="34" charset="-122"/>
-                <a:cs typeface="Inter" pitchFamily="34" charset="-120"/>
+                <a:latin typeface="Calibri" pitchFamily="34" charset="0"/>
+                <a:ea typeface="Microsoft YaHei UI" pitchFamily="34" charset="-122"/>
+                <a:cs typeface="Calibri" pitchFamily="34" charset="-120"/>
               </a:rPr>
               <a:t>从热点发现到内容发布全链路 Agent 自动执</a:t>
             </a:r>
@@ -4687,9 +4687,9 @@
                     <a:alpha val="75000"/>
                   </a:srgbClr>
                 </a:solidFill>
-                <a:latin typeface="Inter" pitchFamily="34" charset="0"/>
-                <a:ea typeface="Inter" pitchFamily="34" charset="-122"/>
-                <a:cs typeface="Inter" pitchFamily="34" charset="-120"/>
+                <a:latin typeface="Calibri" pitchFamily="34" charset="0"/>
+                <a:ea typeface="Microsoft YaHei UI" pitchFamily="34" charset="-122"/>
+                <a:cs typeface="Calibri" pitchFamily="34" charset="-120"/>
               </a:rPr>
               <a:t>行，人工干预降至最低</a:t>
             </a:r>
@@ -4731,9 +4731,9 @@
                 <a:solidFill>
                   <a:srgbClr val="FFFFFF"/>
                 </a:solidFill>
-                <a:latin typeface="Inter" pitchFamily="34" charset="0"/>
-                <a:ea typeface="Inter" pitchFamily="34" charset="-122"/>
-                <a:cs typeface="Inter" pitchFamily="34" charset="-120"/>
+                <a:latin typeface="Calibri" pitchFamily="34" charset="0"/>
+                <a:ea typeface="Microsoft YaHei UI" pitchFamily="34" charset="-122"/>
+                <a:cs typeface="Calibri" pitchFamily="34" charset="-120"/>
               </a:rPr>
               <a:t>开放 API 生态：</a:t>
             </a:r>
@@ -4750,9 +4750,9 @@
                     <a:alpha val="75000"/>
                   </a:srgbClr>
                 </a:solidFill>
-                <a:latin typeface="Inter" pitchFamily="34" charset="0"/>
-                <a:ea typeface="Inter" pitchFamily="34" charset="-122"/>
-                <a:cs typeface="Inter" pitchFamily="34" charset="-120"/>
+                <a:latin typeface="Calibri" pitchFamily="34" charset="0"/>
+                <a:ea typeface="Microsoft YaHei UI" pitchFamily="34" charset="-122"/>
+                <a:cs typeface="Calibri" pitchFamily="34" charset="-120"/>
               </a:rPr>
               <a:t>向第三方工具开放内容生成 API，构建笔灵为中</a:t>
             </a:r>
@@ -4769,9 +4769,9 @@
                     <a:alpha val="75000"/>
                   </a:srgbClr>
                 </a:solidFill>
-                <a:latin typeface="Inter" pitchFamily="34" charset="0"/>
-                <a:ea typeface="Inter" pitchFamily="34" charset="-122"/>
-                <a:cs typeface="Inter" pitchFamily="34" charset="-120"/>
+                <a:latin typeface="Calibri" pitchFamily="34" charset="0"/>
+                <a:ea typeface="Microsoft YaHei UI" pitchFamily="34" charset="-122"/>
+                <a:cs typeface="Calibri" pitchFamily="34" charset="-120"/>
               </a:rPr>
               <a:t>心的内容创作生态</a:t>
             </a:r>
@@ -4813,9 +4813,9 @@
                 <a:solidFill>
                   <a:srgbClr val="FFFFFF"/>
                 </a:solidFill>
-                <a:latin typeface="Inter" pitchFamily="34" charset="0"/>
-                <a:ea typeface="Inter" pitchFamily="34" charset="-122"/>
-                <a:cs typeface="Inter" pitchFamily="34" charset="-120"/>
+                <a:latin typeface="Calibri" pitchFamily="34" charset="0"/>
+                <a:ea typeface="Microsoft YaHei UI" pitchFamily="34" charset="-122"/>
+                <a:cs typeface="Calibri" pitchFamily="34" charset="-120"/>
               </a:rPr>
               <a:t>海外版本拓展：</a:t>
             </a:r>
@@ -4832,9 +4832,9 @@
                     <a:alpha val="75000"/>
                   </a:srgbClr>
                 </a:solidFill>
-                <a:latin typeface="Inter" pitchFamily="34" charset="0"/>
-                <a:ea typeface="Inter" pitchFamily="34" charset="-122"/>
-                <a:cs typeface="Inter" pitchFamily="34" charset="-120"/>
+                <a:latin typeface="Calibri" pitchFamily="34" charset="0"/>
+                <a:ea typeface="Microsoft YaHei UI" pitchFamily="34" charset="-122"/>
+                <a:cs typeface="Calibri" pitchFamily="34" charset="-120"/>
               </a:rPr>
               <a:t>基于 TikTok / YouTube / Instagram 推出国际</a:t>
             </a:r>
@@ -4851,9 +4851,9 @@
                     <a:alpha val="75000"/>
                   </a:srgbClr>
                 </a:solidFill>
-                <a:latin typeface="Inter" pitchFamily="34" charset="0"/>
-                <a:ea typeface="Inter" pitchFamily="34" charset="-122"/>
-                <a:cs typeface="Inter" pitchFamily="34" charset="-120"/>
+                <a:latin typeface="Calibri" pitchFamily="34" charset="0"/>
+                <a:ea typeface="Microsoft YaHei UI" pitchFamily="34" charset="-122"/>
+                <a:cs typeface="Calibri" pitchFamily="34" charset="-120"/>
               </a:rPr>
               <a:t>版，复用核心技术栈</a:t>
             </a:r>
@@ -4895,9 +4895,9 @@
                 <a:solidFill>
                   <a:srgbClr val="FFFFFF"/>
                 </a:solidFill>
-                <a:latin typeface="Inter" pitchFamily="34" charset="0"/>
-                <a:ea typeface="Inter" pitchFamily="34" charset="-122"/>
-                <a:cs typeface="Inter" pitchFamily="34" charset="-120"/>
+                <a:latin typeface="Calibri" pitchFamily="34" charset="0"/>
+                <a:ea typeface="Microsoft YaHei UI" pitchFamily="34" charset="-122"/>
+                <a:cs typeface="Calibri" pitchFamily="34" charset="-120"/>
               </a:rPr>
               <a:t>数据资产变现：</a:t>
             </a:r>
@@ -4914,9 +4914,9 @@
                     <a:alpha val="75000"/>
                   </a:srgbClr>
                 </a:solidFill>
-                <a:latin typeface="Inter" pitchFamily="34" charset="0"/>
-                <a:ea typeface="Inter" pitchFamily="34" charset="-122"/>
-                <a:cs typeface="Inter" pitchFamily="34" charset="-120"/>
+                <a:latin typeface="Calibri" pitchFamily="34" charset="0"/>
+                <a:ea typeface="Microsoft YaHei UI" pitchFamily="34" charset="-122"/>
+                <a:cs typeface="Calibri" pitchFamily="34" charset="-120"/>
               </a:rPr>
               <a:t>匿名化热点趋势数据向品牌方和广告公司提供洞</a:t>
             </a:r>
@@ -4933,9 +4933,9 @@
                     <a:alpha val="75000"/>
                   </a:srgbClr>
                 </a:solidFill>
-                <a:latin typeface="Inter" pitchFamily="34" charset="0"/>
-                <a:ea typeface="Inter" pitchFamily="34" charset="-122"/>
-                <a:cs typeface="Inter" pitchFamily="34" charset="-120"/>
+                <a:latin typeface="Calibri" pitchFamily="34" charset="0"/>
+                <a:ea typeface="Microsoft YaHei UI" pitchFamily="34" charset="-122"/>
+                <a:cs typeface="Calibri" pitchFamily="34" charset="-120"/>
               </a:rPr>
               <a:t>察报告服务</a:t>
             </a:r>
@@ -5048,9 +5048,9 @@
                 <a:solidFill>
                   <a:srgbClr val="A78BFA"/>
                 </a:solidFill>
-                <a:latin typeface="Inter" pitchFamily="34" charset="0"/>
-                <a:ea typeface="Inter" pitchFamily="34" charset="-122"/>
-                <a:cs typeface="Inter" pitchFamily="34" charset="-120"/>
+                <a:latin typeface="Calibri" pitchFamily="34" charset="0"/>
+                <a:ea typeface="Microsoft YaHei UI" pitchFamily="34" charset="-122"/>
+                <a:cs typeface="Calibri" pitchFamily="34" charset="-120"/>
               </a:rPr>
               <a:t>种子用户</a:t>
             </a:r>
@@ -5065,9 +5065,9 @@
                 <a:solidFill>
                   <a:srgbClr val="A78BFA"/>
                 </a:solidFill>
-                <a:latin typeface="Inter" pitchFamily="34" charset="0"/>
-                <a:ea typeface="Inter" pitchFamily="34" charset="-122"/>
-                <a:cs typeface="Inter" pitchFamily="34" charset="-120"/>
+                <a:latin typeface="Calibri" pitchFamily="34" charset="0"/>
+                <a:ea typeface="Microsoft YaHei UI" pitchFamily="34" charset="-122"/>
+                <a:cs typeface="Calibri" pitchFamily="34" charset="-120"/>
               </a:rPr>
               <a:t>
 </a:t>
@@ -5083,9 +5083,9 @@
                 <a:solidFill>
                   <a:srgbClr val="A78BFA"/>
                 </a:solidFill>
-                <a:latin typeface="Inter" pitchFamily="34" charset="0"/>
-                <a:ea typeface="Inter" pitchFamily="34" charset="-122"/>
-                <a:cs typeface="Inter" pitchFamily="34" charset="-120"/>
+                <a:latin typeface="Calibri" pitchFamily="34" charset="0"/>
+                <a:ea typeface="Microsoft YaHei UI" pitchFamily="34" charset="-122"/>
+                <a:cs typeface="Calibri" pitchFamily="34" charset="-120"/>
               </a:rPr>
               <a:t>获取策略</a:t>
             </a:r>
@@ -5127,9 +5127,9 @@
                 <a:solidFill>
                   <a:srgbClr val="FFFFFF"/>
                 </a:solidFill>
-                <a:latin typeface="Inter" pitchFamily="34" charset="0"/>
-                <a:ea typeface="Inter" pitchFamily="34" charset="-122"/>
-                <a:cs typeface="Inter" pitchFamily="34" charset="-120"/>
+                <a:latin typeface="Calibri" pitchFamily="34" charset="0"/>
+                <a:ea typeface="Microsoft YaHei UI" pitchFamily="34" charset="-122"/>
+                <a:cs typeface="Calibri" pitchFamily="34" charset="-120"/>
               </a:rPr>
               <a:t>三条并行渠道：</a:t>
             </a:r>
@@ -5146,9 +5146,9 @@
                     <a:alpha val="75000"/>
                   </a:srgbClr>
                 </a:solidFill>
-                <a:latin typeface="Inter" pitchFamily="34" charset="0"/>
-                <a:ea typeface="Inter" pitchFamily="34" charset="-122"/>
-                <a:cs typeface="Inter" pitchFamily="34" charset="-120"/>
+                <a:latin typeface="Calibri" pitchFamily="34" charset="0"/>
+                <a:ea typeface="Microsoft YaHei UI" pitchFamily="34" charset="-122"/>
+                <a:cs typeface="Calibri" pitchFamily="34" charset="-120"/>
               </a:rPr>
               <a:t>① 内容创作者社群定向邀测（即刻/微信群）获取高意愿早期用户；② 在小红书/抖音发布"AI生成内容 vs 手动创作"对比视频，产品即内容；③ 联系 10–20 家中小 MCN 机构提供免费试用，以</a:t>
             </a:r>
@@ -5165,9 +5165,9 @@
                     <a:alpha val="75000"/>
                   </a:srgbClr>
                 </a:solidFill>
-                <a:latin typeface="Inter" pitchFamily="34" charset="0"/>
-                <a:ea typeface="Inter" pitchFamily="34" charset="-122"/>
-                <a:cs typeface="Inter" pitchFamily="34" charset="-120"/>
+                <a:latin typeface="Calibri" pitchFamily="34" charset="0"/>
+                <a:ea typeface="Microsoft YaHei UI" pitchFamily="34" charset="-122"/>
+                <a:cs typeface="Calibri" pitchFamily="34" charset="-120"/>
               </a:rPr>
               <a:t>机构背书换口碑传播。</a:t>
             </a:r>
@@ -5182,9 +5182,9 @@
                 <a:solidFill>
                   <a:srgbClr val="FFFFFF"/>
                 </a:solidFill>
-                <a:latin typeface="Inter" pitchFamily="34" charset="0"/>
-                <a:ea typeface="Inter" pitchFamily="34" charset="-122"/>
-                <a:cs typeface="Inter" pitchFamily="34" charset="-120"/>
+                <a:latin typeface="Calibri" pitchFamily="34" charset="0"/>
+                <a:ea typeface="Microsoft YaHei UI" pitchFamily="34" charset="-122"/>
+                <a:cs typeface="Calibri" pitchFamily="34" charset="-120"/>
               </a:rPr>
               <a:t>目标：首月 100 名付费用户，CAC ≤ ¥200。</a:t>
             </a:r>
@@ -5275,9 +5275,9 @@
                 <a:solidFill>
                   <a:srgbClr val="00D4FF"/>
                 </a:solidFill>
-                <a:latin typeface="Inter" pitchFamily="34" charset="0"/>
-                <a:ea typeface="Inter" pitchFamily="34" charset="-122"/>
-                <a:cs typeface="Inter" pitchFamily="34" charset="-120"/>
+                <a:latin typeface="Calibri" pitchFamily="34" charset="0"/>
+                <a:ea typeface="Microsoft YaHei UI" pitchFamily="34" charset="-122"/>
+                <a:cs typeface="Calibri" pitchFamily="34" charset="-120"/>
               </a:rPr>
               <a:t>PRODUCT ROADMAP</a:t>
             </a:r>
@@ -5319,9 +5319,9 @@
                 <a:solidFill>
                   <a:srgbClr val="FFFFFF"/>
                 </a:solidFill>
-                <a:latin typeface="Space Grotesk" pitchFamily="34" charset="0"/>
-                <a:ea typeface="Space Grotesk" pitchFamily="34" charset="-122"/>
-                <a:cs typeface="Space Grotesk" pitchFamily="34" charset="-120"/>
+                <a:latin typeface="Calibri" pitchFamily="34" charset="0"/>
+                <a:ea typeface="Microsoft YaHei UI" pitchFamily="34" charset="-122"/>
+                <a:cs typeface="Calibri" pitchFamily="34" charset="-120"/>
               </a:rPr>
               <a:t>已实现核心功能全景与四阶段进化路线图</a:t>
             </a:r>
@@ -5390,9 +5390,9 @@
                 <a:solidFill>
                   <a:srgbClr val="FFFFFF"/>
                 </a:solidFill>
-                <a:latin typeface="Space Grotesk" pitchFamily="34" charset="0"/>
-                <a:ea typeface="Space Grotesk" pitchFamily="34" charset="-122"/>
-                <a:cs typeface="Space Grotesk" pitchFamily="34" charset="-120"/>
+                <a:latin typeface="Calibri" pitchFamily="34" charset="0"/>
+                <a:ea typeface="Microsoft YaHei UI" pitchFamily="34" charset="-122"/>
+                <a:cs typeface="Calibri" pitchFamily="34" charset="-120"/>
               </a:rPr>
               <a:t>热点数据看板</a:t>
             </a:r>
@@ -5463,9 +5463,9 @@
                 <a:solidFill>
                   <a:srgbClr val="22C55E"/>
                 </a:solidFill>
-                <a:latin typeface="Inter" pitchFamily="34" charset="0"/>
-                <a:ea typeface="Inter" pitchFamily="34" charset="-122"/>
-                <a:cs typeface="Inter" pitchFamily="34" charset="-120"/>
+                <a:latin typeface="Calibri" pitchFamily="34" charset="0"/>
+                <a:ea typeface="Microsoft YaHei UI" pitchFamily="34" charset="-122"/>
+                <a:cs typeface="Calibri" pitchFamily="34" charset="-120"/>
               </a:rPr>
               <a:t>已上线</a:t>
             </a:r>
@@ -5507,9 +5507,9 @@
                 <a:solidFill>
                   <a:srgbClr val="8B949E"/>
                 </a:solidFill>
-                <a:latin typeface="Inter" pitchFamily="34" charset="0"/>
-                <a:ea typeface="Inter" pitchFamily="34" charset="-122"/>
-                <a:cs typeface="Inter" pitchFamily="34" charset="-120"/>
+                <a:latin typeface="Calibri" pitchFamily="34" charset="0"/>
+                <a:ea typeface="Microsoft YaHei UI" pitchFamily="34" charset="-122"/>
+                <a:cs typeface="Calibri" pitchFamily="34" charset="-120"/>
               </a:rPr>
               <a:t>多维度数据指标、渐变面积图、Sparkline 趋势线</a:t>
             </a:r>
@@ -5578,9 +5578,9 @@
                 <a:solidFill>
                   <a:srgbClr val="FFFFFF"/>
                 </a:solidFill>
-                <a:latin typeface="Space Grotesk" pitchFamily="34" charset="0"/>
-                <a:ea typeface="Space Grotesk" pitchFamily="34" charset="-122"/>
-                <a:cs typeface="Space Grotesk" pitchFamily="34" charset="-120"/>
+                <a:latin typeface="Calibri" pitchFamily="34" charset="0"/>
+                <a:ea typeface="Microsoft YaHei UI" pitchFamily="34" charset="-122"/>
+                <a:cs typeface="Calibri" pitchFamily="34" charset="-120"/>
               </a:rPr>
               <a:t>AI 文案生成</a:t>
             </a:r>
@@ -5651,9 +5651,9 @@
                 <a:solidFill>
                   <a:srgbClr val="22C55E"/>
                 </a:solidFill>
-                <a:latin typeface="Inter" pitchFamily="34" charset="0"/>
-                <a:ea typeface="Inter" pitchFamily="34" charset="-122"/>
-                <a:cs typeface="Inter" pitchFamily="34" charset="-120"/>
+                <a:latin typeface="Calibri" pitchFamily="34" charset="0"/>
+                <a:ea typeface="Microsoft YaHei UI" pitchFamily="34" charset="-122"/>
+                <a:cs typeface="Calibri" pitchFamily="34" charset="-120"/>
               </a:rPr>
               <a:t>已上线</a:t>
             </a:r>
@@ -5695,9 +5695,9 @@
                 <a:solidFill>
                   <a:srgbClr val="8B949E"/>
                 </a:solidFill>
-                <a:latin typeface="Inter" pitchFamily="34" charset="0"/>
-                <a:ea typeface="Inter" pitchFamily="34" charset="-122"/>
-                <a:cs typeface="Inter" pitchFamily="34" charset="-120"/>
+                <a:latin typeface="Calibri" pitchFamily="34" charset="0"/>
+                <a:ea typeface="Microsoft YaHei UI" pitchFamily="34" charset="-122"/>
+                <a:cs typeface="Calibri" pitchFamily="34" charset="-120"/>
               </a:rPr>
               <a:t>多平台格式适配，一键生成标题/正文/标签</a:t>
             </a:r>
@@ -5766,9 +5766,9 @@
                 <a:solidFill>
                   <a:srgbClr val="FFFFFF"/>
                 </a:solidFill>
-                <a:latin typeface="Space Grotesk" pitchFamily="34" charset="0"/>
-                <a:ea typeface="Space Grotesk" pitchFamily="34" charset="-122"/>
-                <a:cs typeface="Space Grotesk" pitchFamily="34" charset="-120"/>
+                <a:latin typeface="Calibri" pitchFamily="34" charset="0"/>
+                <a:ea typeface="Microsoft YaHei UI" pitchFamily="34" charset="-122"/>
+                <a:cs typeface="Calibri" pitchFamily="34" charset="-120"/>
               </a:rPr>
               <a:t>AI 视频生成</a:t>
             </a:r>
@@ -5839,9 +5839,9 @@
                 <a:solidFill>
                   <a:srgbClr val="00D4FF"/>
                 </a:solidFill>
-                <a:latin typeface="Inter" pitchFamily="34" charset="0"/>
-                <a:ea typeface="Inter" pitchFamily="34" charset="-122"/>
-                <a:cs typeface="Inter" pitchFamily="34" charset="-120"/>
+                <a:latin typeface="Calibri" pitchFamily="34" charset="0"/>
+                <a:ea typeface="Microsoft YaHei UI" pitchFamily="34" charset="-122"/>
+                <a:cs typeface="Calibri" pitchFamily="34" charset="-120"/>
               </a:rPr>
               <a:t>新功能</a:t>
             </a:r>
@@ -5883,9 +5883,9 @@
                 <a:solidFill>
                   <a:srgbClr val="8B949E"/>
                 </a:solidFill>
-                <a:latin typeface="Inter" pitchFamily="34" charset="0"/>
-                <a:ea typeface="Inter" pitchFamily="34" charset="-122"/>
-                <a:cs typeface="Inter" pitchFamily="34" charset="-120"/>
+                <a:latin typeface="Calibri" pitchFamily="34" charset="0"/>
+                <a:ea typeface="Microsoft YaHei UI" pitchFamily="34" charset="-122"/>
+                <a:cs typeface="Calibri" pitchFamily="34" charset="-120"/>
               </a:rPr>
               <a:t>文生视频 + 图生视频（i2v），内置火山引擎 doubao-seedance</a:t>
             </a:r>
@@ -5954,9 +5954,9 @@
                 <a:solidFill>
                   <a:srgbClr val="FFFFFF"/>
                 </a:solidFill>
-                <a:latin typeface="Space Grotesk" pitchFamily="34" charset="0"/>
-                <a:ea typeface="Space Grotesk" pitchFamily="34" charset="-122"/>
-                <a:cs typeface="Space Grotesk" pitchFamily="34" charset="-120"/>
+                <a:latin typeface="Calibri" pitchFamily="34" charset="0"/>
+                <a:ea typeface="Microsoft YaHei UI" pitchFamily="34" charset="-122"/>
+                <a:cs typeface="Calibri" pitchFamily="34" charset="-120"/>
               </a:rPr>
               <a:t>多平台分发</a:t>
             </a:r>
@@ -6027,9 +6027,9 @@
                 <a:solidFill>
                   <a:srgbClr val="22C55E"/>
                 </a:solidFill>
-                <a:latin typeface="Inter" pitchFamily="34" charset="0"/>
-                <a:ea typeface="Inter" pitchFamily="34" charset="-122"/>
-                <a:cs typeface="Inter" pitchFamily="34" charset="-120"/>
+                <a:latin typeface="Calibri" pitchFamily="34" charset="0"/>
+                <a:ea typeface="Microsoft YaHei UI" pitchFamily="34" charset="-122"/>
+                <a:cs typeface="Calibri" pitchFamily="34" charset="-120"/>
               </a:rPr>
               <a:t>已上线</a:t>
             </a:r>
@@ -6071,9 +6071,9 @@
                 <a:solidFill>
                   <a:srgbClr val="8B949E"/>
                 </a:solidFill>
-                <a:latin typeface="Inter" pitchFamily="34" charset="0"/>
-                <a:ea typeface="Inter" pitchFamily="34" charset="-122"/>
-                <a:cs typeface="Inter" pitchFamily="34" charset="-120"/>
+                <a:latin typeface="Calibri" pitchFamily="34" charset="0"/>
+                <a:ea typeface="Microsoft YaHei UI" pitchFamily="34" charset="-122"/>
+                <a:cs typeface="Calibri" pitchFamily="34" charset="-120"/>
               </a:rPr>
               <a:t>8 大平台辅助发布，自动匹配最佳视频比例</a:t>
             </a:r>
@@ -6142,9 +6142,9 @@
                 <a:solidFill>
                   <a:srgbClr val="FFFFFF"/>
                 </a:solidFill>
-                <a:latin typeface="Space Grotesk" pitchFamily="34" charset="0"/>
-                <a:ea typeface="Space Grotesk" pitchFamily="34" charset="-122"/>
-                <a:cs typeface="Space Grotesk" pitchFamily="34" charset="-120"/>
+                <a:latin typeface="Calibri" pitchFamily="34" charset="0"/>
+                <a:ea typeface="Microsoft YaHei UI" pitchFamily="34" charset="-122"/>
+                <a:cs typeface="Calibri" pitchFamily="34" charset="-120"/>
               </a:rPr>
               <a:t>内容日历</a:t>
             </a:r>
@@ -6215,9 +6215,9 @@
                 <a:solidFill>
                   <a:srgbClr val="22C55E"/>
                 </a:solidFill>
-                <a:latin typeface="Inter" pitchFamily="34" charset="0"/>
-                <a:ea typeface="Inter" pitchFamily="34" charset="-122"/>
-                <a:cs typeface="Inter" pitchFamily="34" charset="-120"/>
+                <a:latin typeface="Calibri" pitchFamily="34" charset="0"/>
+                <a:ea typeface="Microsoft YaHei UI" pitchFamily="34" charset="-122"/>
+                <a:cs typeface="Calibri" pitchFamily="34" charset="-120"/>
               </a:rPr>
               <a:t>已上线</a:t>
             </a:r>
@@ -6259,9 +6259,9 @@
                 <a:solidFill>
                   <a:srgbClr val="8B949E"/>
                 </a:solidFill>
-                <a:latin typeface="Inter" pitchFamily="34" charset="0"/>
-                <a:ea typeface="Inter" pitchFamily="34" charset="-122"/>
-                <a:cs typeface="Inter" pitchFamily="34" charset="-120"/>
+                <a:latin typeface="Calibri" pitchFamily="34" charset="0"/>
+                <a:ea typeface="Microsoft YaHei UI" pitchFamily="34" charset="-122"/>
+                <a:cs typeface="Calibri" pitchFamily="34" charset="-120"/>
               </a:rPr>
               <a:t>可视化排期管理，发布状态追踪与提醒</a:t>
             </a:r>
@@ -6330,9 +6330,9 @@
                 <a:solidFill>
                   <a:srgbClr val="FFFFFF"/>
                 </a:solidFill>
-                <a:latin typeface="Space Grotesk" pitchFamily="34" charset="0"/>
-                <a:ea typeface="Space Grotesk" pitchFamily="34" charset="-122"/>
-                <a:cs typeface="Space Grotesk" pitchFamily="34" charset="-120"/>
+                <a:latin typeface="Calibri" pitchFamily="34" charset="0"/>
+                <a:ea typeface="Microsoft YaHei UI" pitchFamily="34" charset="-122"/>
+                <a:cs typeface="Calibri" pitchFamily="34" charset="-120"/>
               </a:rPr>
               <a:t>数据反馈闭环</a:t>
             </a:r>
@@ -6403,9 +6403,9 @@
                 <a:solidFill>
                   <a:srgbClr val="22C55E"/>
                 </a:solidFill>
-                <a:latin typeface="Inter" pitchFamily="34" charset="0"/>
-                <a:ea typeface="Inter" pitchFamily="34" charset="-122"/>
-                <a:cs typeface="Inter" pitchFamily="34" charset="-120"/>
+                <a:latin typeface="Calibri" pitchFamily="34" charset="0"/>
+                <a:ea typeface="Microsoft YaHei UI" pitchFamily="34" charset="-122"/>
+                <a:cs typeface="Calibri" pitchFamily="34" charset="-120"/>
               </a:rPr>
               <a:t>已上线</a:t>
             </a:r>
@@ -6447,9 +6447,9 @@
                 <a:solidFill>
                   <a:srgbClr val="8B949E"/>
                 </a:solidFill>
-                <a:latin typeface="Inter" pitchFamily="34" charset="0"/>
-                <a:ea typeface="Inter" pitchFamily="34" charset="-122"/>
-                <a:cs typeface="Inter" pitchFamily="34" charset="-120"/>
+                <a:latin typeface="Calibri" pitchFamily="34" charset="0"/>
+                <a:ea typeface="Microsoft YaHei UI" pitchFamily="34" charset="-122"/>
+                <a:cs typeface="Calibri" pitchFamily="34" charset="-120"/>
               </a:rPr>
               <a:t>点赞/评论/收藏录入，内容效果分析与迭代</a:t>
             </a:r>
@@ -6518,9 +6518,9 @@
                 <a:solidFill>
                   <a:srgbClr val="FFFFFF"/>
                 </a:solidFill>
-                <a:latin typeface="Space Grotesk" pitchFamily="34" charset="0"/>
-                <a:ea typeface="Space Grotesk" pitchFamily="34" charset="-122"/>
-                <a:cs typeface="Space Grotesk" pitchFamily="34" charset="-120"/>
+                <a:latin typeface="Calibri" pitchFamily="34" charset="0"/>
+                <a:ea typeface="Microsoft YaHei UI" pitchFamily="34" charset="-122"/>
+                <a:cs typeface="Calibri" pitchFamily="34" charset="-120"/>
               </a:rPr>
               <a:t>AI 配图生成</a:t>
             </a:r>
@@ -6591,9 +6591,9 @@
                 <a:solidFill>
                   <a:srgbClr val="22C55E"/>
                 </a:solidFill>
-                <a:latin typeface="Inter" pitchFamily="34" charset="0"/>
-                <a:ea typeface="Inter" pitchFamily="34" charset="-122"/>
-                <a:cs typeface="Inter" pitchFamily="34" charset="-120"/>
+                <a:latin typeface="Calibri" pitchFamily="34" charset="0"/>
+                <a:ea typeface="Microsoft YaHei UI" pitchFamily="34" charset="-122"/>
+                <a:cs typeface="Calibri" pitchFamily="34" charset="-120"/>
               </a:rPr>
               <a:t>已上线</a:t>
             </a:r>
@@ -6635,9 +6635,9 @@
                 <a:solidFill>
                   <a:srgbClr val="8B949E"/>
                 </a:solidFill>
-                <a:latin typeface="Inter" pitchFamily="34" charset="0"/>
-                <a:ea typeface="Inter" pitchFamily="34" charset="-122"/>
-                <a:cs typeface="Inter" pitchFamily="34" charset="-120"/>
+                <a:latin typeface="Calibri" pitchFamily="34" charset="0"/>
+                <a:ea typeface="Microsoft YaHei UI" pitchFamily="34" charset="-122"/>
+                <a:cs typeface="Calibri" pitchFamily="34" charset="-120"/>
               </a:rPr>
               <a:t>文案联动配图，一键生成封面与配套图片</a:t>
             </a:r>
@@ -6706,9 +6706,9 @@
                 <a:solidFill>
                   <a:srgbClr val="FFFFFF"/>
                 </a:solidFill>
-                <a:latin typeface="Space Grotesk" pitchFamily="34" charset="0"/>
-                <a:ea typeface="Space Grotesk" pitchFamily="34" charset="-122"/>
-                <a:cs typeface="Space Grotesk" pitchFamily="34" charset="-120"/>
+                <a:latin typeface="Calibri" pitchFamily="34" charset="0"/>
+                <a:ea typeface="Microsoft YaHei UI" pitchFamily="34" charset="-122"/>
+                <a:cs typeface="Calibri" pitchFamily="34" charset="-120"/>
               </a:rPr>
               <a:t>Agent 工作流</a:t>
             </a:r>
@@ -6779,9 +6779,9 @@
                 <a:solidFill>
                   <a:srgbClr val="22C55E"/>
                 </a:solidFill>
-                <a:latin typeface="Inter" pitchFamily="34" charset="0"/>
-                <a:ea typeface="Inter" pitchFamily="34" charset="-122"/>
-                <a:cs typeface="Inter" pitchFamily="34" charset="-120"/>
+                <a:latin typeface="Calibri" pitchFamily="34" charset="0"/>
+                <a:ea typeface="Microsoft YaHei UI" pitchFamily="34" charset="-122"/>
+                <a:cs typeface="Calibri" pitchFamily="34" charset="-120"/>
               </a:rPr>
               <a:t>已上线</a:t>
             </a:r>
@@ -6823,9 +6823,9 @@
                 <a:solidFill>
                   <a:srgbClr val="8B949E"/>
                 </a:solidFill>
-                <a:latin typeface="Inter" pitchFamily="34" charset="0"/>
-                <a:ea typeface="Inter" pitchFamily="34" charset="-122"/>
-                <a:cs typeface="Inter" pitchFamily="34" charset="-120"/>
+                <a:latin typeface="Calibri" pitchFamily="34" charset="0"/>
+                <a:ea typeface="Microsoft YaHei UI" pitchFamily="34" charset="-122"/>
+                <a:cs typeface="Calibri" pitchFamily="34" charset="-120"/>
               </a:rPr>
               <a:t>全链路自动化：热点→文案→视频→分发一键执行</a:t>
             </a:r>
@@ -6867,9 +6867,9 @@
                 <a:solidFill>
                   <a:srgbClr val="00D4FF"/>
                 </a:solidFill>
-                <a:latin typeface="Inter" pitchFamily="34" charset="0"/>
-                <a:ea typeface="Inter" pitchFamily="34" charset="-122"/>
-                <a:cs typeface="Inter" pitchFamily="34" charset="-120"/>
+                <a:latin typeface="Calibri" pitchFamily="34" charset="0"/>
+                <a:ea typeface="Microsoft YaHei UI" pitchFamily="34" charset="-122"/>
+                <a:cs typeface="Calibri" pitchFamily="34" charset="-120"/>
               </a:rPr>
               <a:t>四阶段进化路线图</a:t>
             </a:r>
@@ -6911,9 +6911,9 @@
                 <a:solidFill>
                   <a:srgbClr val="8B949E"/>
                 </a:solidFill>
-                <a:latin typeface="Inter" pitchFamily="34" charset="0"/>
-                <a:ea typeface="Inter" pitchFamily="34" charset="-122"/>
-                <a:cs typeface="Inter" pitchFamily="34" charset="-120"/>
+                <a:latin typeface="Calibri" pitchFamily="34" charset="0"/>
+                <a:ea typeface="Microsoft YaHei UI" pitchFamily="34" charset="-122"/>
+                <a:cs typeface="Calibri" pitchFamily="34" charset="-120"/>
               </a:rPr>
               <a:t>总计 6–8 个月</a:t>
             </a:r>
@@ -6984,9 +6984,9 @@
                 <a:solidFill>
                   <a:srgbClr val="8B949E"/>
                 </a:solidFill>
-                <a:latin typeface="Inter" pitchFamily="34" charset="0"/>
-                <a:ea typeface="Inter" pitchFamily="34" charset="-122"/>
-                <a:cs typeface="Inter" pitchFamily="34" charset="-120"/>
+                <a:latin typeface="Calibri" pitchFamily="34" charset="0"/>
+                <a:ea typeface="Microsoft YaHei UI" pitchFamily="34" charset="-122"/>
+                <a:cs typeface="Calibri" pitchFamily="34" charset="-120"/>
               </a:rPr>
               <a:t>PHASE 01 · 当前</a:t>
             </a:r>
@@ -7028,9 +7028,9 @@
                 <a:solidFill>
                   <a:srgbClr val="FFFFFF"/>
                 </a:solidFill>
-                <a:latin typeface="Space Grotesk" pitchFamily="34" charset="0"/>
-                <a:ea typeface="Space Grotesk" pitchFamily="34" charset="-122"/>
-                <a:cs typeface="Space Grotesk" pitchFamily="34" charset="-120"/>
+                <a:latin typeface="Calibri" pitchFamily="34" charset="0"/>
+                <a:ea typeface="Microsoft YaHei UI" pitchFamily="34" charset="-122"/>
+                <a:cs typeface="Calibri" pitchFamily="34" charset="-120"/>
               </a:rPr>
               <a:t>数据根基与基础功能</a:t>
             </a:r>
@@ -7072,9 +7072,9 @@
                 <a:solidFill>
                   <a:srgbClr val="00D4FF"/>
                 </a:solidFill>
-                <a:latin typeface="Inter" pitchFamily="34" charset="0"/>
-                <a:ea typeface="Inter" pitchFamily="34" charset="-122"/>
-                <a:cs typeface="Inter" pitchFamily="34" charset="-120"/>
+                <a:latin typeface="Calibri" pitchFamily="34" charset="0"/>
+                <a:ea typeface="Microsoft YaHei UI" pitchFamily="34" charset="-122"/>
+                <a:cs typeface="Calibri" pitchFamily="34" charset="-120"/>
               </a:rPr>
               <a:t>0–6 周</a:t>
             </a:r>
@@ -7118,9 +7118,9 @@
                     <a:alpha val="65000"/>
                   </a:srgbClr>
                 </a:solidFill>
-                <a:latin typeface="Inter" pitchFamily="34" charset="0"/>
-                <a:ea typeface="Inter" pitchFamily="34" charset="-122"/>
-                <a:cs typeface="Inter" pitchFamily="34" charset="-120"/>
+                <a:latin typeface="Calibri" pitchFamily="34" charset="0"/>
+                <a:ea typeface="Microsoft YaHei UI" pitchFamily="34" charset="-122"/>
+                <a:cs typeface="Calibri" pitchFamily="34" charset="-120"/>
               </a:rPr>
               <a:t>接入真实热点数据源</a:t>
             </a:r>
@@ -7164,9 +7164,9 @@
                     <a:alpha val="65000"/>
                   </a:srgbClr>
                 </a:solidFill>
-                <a:latin typeface="Inter" pitchFamily="34" charset="0"/>
-                <a:ea typeface="Inter" pitchFamily="34" charset="-122"/>
-                <a:cs typeface="Inter" pitchFamily="34" charset="-120"/>
+                <a:latin typeface="Calibri" pitchFamily="34" charset="0"/>
+                <a:ea typeface="Microsoft YaHei UI" pitchFamily="34" charset="-122"/>
+                <a:cs typeface="Calibri" pitchFamily="34" charset="-120"/>
               </a:rPr>
               <a:t>AI 文案 + 视频生成闭环</a:t>
             </a:r>
@@ -7210,9 +7210,9 @@
                     <a:alpha val="65000"/>
                   </a:srgbClr>
                 </a:solidFill>
-                <a:latin typeface="Inter" pitchFamily="34" charset="0"/>
-                <a:ea typeface="Inter" pitchFamily="34" charset="-122"/>
-                <a:cs typeface="Inter" pitchFamily="34" charset="-120"/>
+                <a:latin typeface="Calibri" pitchFamily="34" charset="0"/>
+                <a:ea typeface="Microsoft YaHei UI" pitchFamily="34" charset="-122"/>
+                <a:cs typeface="Calibri" pitchFamily="34" charset="-120"/>
               </a:rPr>
               <a:t>多平台分发辅助工具</a:t>
             </a:r>
@@ -7256,9 +7256,9 @@
                     <a:alpha val="65000"/>
                   </a:srgbClr>
                 </a:solidFill>
-                <a:latin typeface="Inter" pitchFamily="34" charset="0"/>
-                <a:ea typeface="Inter" pitchFamily="34" charset="-122"/>
-                <a:cs typeface="Inter" pitchFamily="34" charset="-120"/>
+                <a:latin typeface="Calibri" pitchFamily="34" charset="0"/>
+                <a:ea typeface="Microsoft YaHei UI" pitchFamily="34" charset="-122"/>
+                <a:cs typeface="Calibri" pitchFamily="34" charset="-120"/>
               </a:rPr>
               <a:t>病毒性预测模型 V1</a:t>
             </a:r>
@@ -7327,9 +7327,9 @@
                 <a:solidFill>
                   <a:srgbClr val="8B949E"/>
                 </a:solidFill>
-                <a:latin typeface="Inter" pitchFamily="34" charset="0"/>
-                <a:ea typeface="Inter" pitchFamily="34" charset="-122"/>
-                <a:cs typeface="Inter" pitchFamily="34" charset="-120"/>
+                <a:latin typeface="Calibri" pitchFamily="34" charset="0"/>
+                <a:ea typeface="Microsoft YaHei UI" pitchFamily="34" charset="-122"/>
+                <a:cs typeface="Calibri" pitchFamily="34" charset="-120"/>
               </a:rPr>
               <a:t>PHASE 02 · 规划中</a:t>
             </a:r>
@@ -7371,9 +7371,9 @@
                 <a:solidFill>
                   <a:srgbClr val="FFFFFF"/>
                 </a:solidFill>
-                <a:latin typeface="Space Grotesk" pitchFamily="34" charset="0"/>
-                <a:ea typeface="Space Grotesk" pitchFamily="34" charset="-122"/>
-                <a:cs typeface="Space Grotesk" pitchFamily="34" charset="-120"/>
+                <a:latin typeface="Calibri" pitchFamily="34" charset="0"/>
+                <a:ea typeface="Microsoft YaHei UI" pitchFamily="34" charset="-122"/>
+                <a:cs typeface="Calibri" pitchFamily="34" charset="-120"/>
               </a:rPr>
               <a:t>RAG 增强与反馈闭环</a:t>
             </a:r>
@@ -7415,9 +7415,9 @@
                 <a:solidFill>
                   <a:srgbClr val="00D4FF"/>
                 </a:solidFill>
-                <a:latin typeface="Inter" pitchFamily="34" charset="0"/>
-                <a:ea typeface="Inter" pitchFamily="34" charset="-122"/>
-                <a:cs typeface="Inter" pitchFamily="34" charset="-120"/>
+                <a:latin typeface="Calibri" pitchFamily="34" charset="0"/>
+                <a:ea typeface="Microsoft YaHei UI" pitchFamily="34" charset="-122"/>
+                <a:cs typeface="Calibri" pitchFamily="34" charset="-120"/>
               </a:rPr>
               <a:t>5–7 周</a:t>
             </a:r>
@@ -7461,9 +7461,9 @@
                     <a:alpha val="65000"/>
                   </a:srgbClr>
                 </a:solidFill>
-                <a:latin typeface="Inter" pitchFamily="34" charset="0"/>
-                <a:ea typeface="Inter" pitchFamily="34" charset="-122"/>
-                <a:cs typeface="Inter" pitchFamily="34" charset="-120"/>
+                <a:latin typeface="Calibri" pitchFamily="34" charset="0"/>
+                <a:ea typeface="Microsoft YaHei UI" pitchFamily="34" charset="-122"/>
+                <a:cs typeface="Calibri" pitchFamily="34" charset="-120"/>
               </a:rPr>
               <a:t>向量知识库 + 高分案例库</a:t>
             </a:r>
@@ -7507,9 +7507,9 @@
                     <a:alpha val="65000"/>
                   </a:srgbClr>
                 </a:solidFill>
-                <a:latin typeface="Inter" pitchFamily="34" charset="0"/>
-                <a:ea typeface="Inter" pitchFamily="34" charset="-122"/>
-                <a:cs typeface="Inter" pitchFamily="34" charset="-120"/>
+                <a:latin typeface="Calibri" pitchFamily="34" charset="0"/>
+                <a:ea typeface="Microsoft YaHei UI" pitchFamily="34" charset="-122"/>
+                <a:cs typeface="Calibri" pitchFamily="34" charset="-120"/>
               </a:rPr>
               <a:t>RAG 增强内容生成质量</a:t>
             </a:r>
@@ -7553,9 +7553,9 @@
                     <a:alpha val="65000"/>
                   </a:srgbClr>
                 </a:solidFill>
-                <a:latin typeface="Inter" pitchFamily="34" charset="0"/>
-                <a:ea typeface="Inter" pitchFamily="34" charset="-122"/>
-                <a:cs typeface="Inter" pitchFamily="34" charset="-120"/>
+                <a:latin typeface="Calibri" pitchFamily="34" charset="0"/>
+                <a:ea typeface="Microsoft YaHei UI" pitchFamily="34" charset="-122"/>
+                <a:cs typeface="Calibri" pitchFamily="34" charset="-120"/>
               </a:rPr>
               <a:t>数据飞轮自动迭代</a:t>
             </a:r>
@@ -7599,9 +7599,9 @@
                     <a:alpha val="65000"/>
                   </a:srgbClr>
                 </a:solidFill>
-                <a:latin typeface="Inter" pitchFamily="34" charset="0"/>
-                <a:ea typeface="Inter" pitchFamily="34" charset="-122"/>
-                <a:cs typeface="Inter" pitchFamily="34" charset="-120"/>
+                <a:latin typeface="Calibri" pitchFamily="34" charset="0"/>
+                <a:ea typeface="Microsoft YaHei UI" pitchFamily="34" charset="-122"/>
+                <a:cs typeface="Calibri" pitchFamily="34" charset="-120"/>
               </a:rPr>
               <a:t>视频配额管理与预警</a:t>
             </a:r>
@@ -7670,9 +7670,9 @@
                 <a:solidFill>
                   <a:srgbClr val="8B949E"/>
                 </a:solidFill>
-                <a:latin typeface="Inter" pitchFamily="34" charset="0"/>
-                <a:ea typeface="Inter" pitchFamily="34" charset="-122"/>
-                <a:cs typeface="Inter" pitchFamily="34" charset="-120"/>
+                <a:latin typeface="Calibri" pitchFamily="34" charset="0"/>
+                <a:ea typeface="Microsoft YaHei UI" pitchFamily="34" charset="-122"/>
+                <a:cs typeface="Calibri" pitchFamily="34" charset="-120"/>
               </a:rPr>
               <a:t>PHASE 03 · 规划中</a:t>
             </a:r>
@@ -7714,9 +7714,9 @@
                 <a:solidFill>
                   <a:srgbClr val="FFFFFF"/>
                 </a:solidFill>
-                <a:latin typeface="Space Grotesk" pitchFamily="34" charset="0"/>
-                <a:ea typeface="Space Grotesk" pitchFamily="34" charset="-122"/>
-                <a:cs typeface="Space Grotesk" pitchFamily="34" charset="-120"/>
+                <a:latin typeface="Calibri" pitchFamily="34" charset="0"/>
+                <a:ea typeface="Microsoft YaHei UI" pitchFamily="34" charset="-122"/>
+                <a:cs typeface="Calibri" pitchFamily="34" charset="-120"/>
               </a:rPr>
               <a:t>多模态深度集成</a:t>
             </a:r>
@@ -7758,9 +7758,9 @@
                 <a:solidFill>
                   <a:srgbClr val="00D4FF"/>
                 </a:solidFill>
-                <a:latin typeface="Inter" pitchFamily="34" charset="0"/>
-                <a:ea typeface="Inter" pitchFamily="34" charset="-122"/>
-                <a:cs typeface="Inter" pitchFamily="34" charset="-120"/>
+                <a:latin typeface="Calibri" pitchFamily="34" charset="0"/>
+                <a:ea typeface="Microsoft YaHei UI" pitchFamily="34" charset="-122"/>
+                <a:cs typeface="Calibri" pitchFamily="34" charset="-120"/>
               </a:rPr>
               <a:t>6–8 周</a:t>
             </a:r>
@@ -7804,9 +7804,9 @@
                     <a:alpha val="65000"/>
                   </a:srgbClr>
                 </a:solidFill>
-                <a:latin typeface="Inter" pitchFamily="34" charset="0"/>
-                <a:ea typeface="Inter" pitchFamily="34" charset="-122"/>
-                <a:cs typeface="Inter" pitchFamily="34" charset="-120"/>
+                <a:latin typeface="Calibri" pitchFamily="34" charset="0"/>
+                <a:ea typeface="Microsoft YaHei UI" pitchFamily="34" charset="-122"/>
+                <a:cs typeface="Calibri" pitchFamily="34" charset="-120"/>
               </a:rPr>
               <a:t>CLIP/Whisper 多模态特征</a:t>
             </a:r>
@@ -7850,9 +7850,9 @@
                     <a:alpha val="65000"/>
                   </a:srgbClr>
                 </a:solidFill>
-                <a:latin typeface="Inter" pitchFamily="34" charset="0"/>
-                <a:ea typeface="Inter" pitchFamily="34" charset="-122"/>
-                <a:cs typeface="Inter" pitchFamily="34" charset="-120"/>
+                <a:latin typeface="Calibri" pitchFamily="34" charset="0"/>
+                <a:ea typeface="Microsoft YaHei UI" pitchFamily="34" charset="-122"/>
+                <a:cs typeface="Calibri" pitchFamily="34" charset="-120"/>
               </a:rPr>
               <a:t>病毒性预测模型 V2</a:t>
             </a:r>
@@ -7896,9 +7896,9 @@
                     <a:alpha val="65000"/>
                   </a:srgbClr>
                 </a:solidFill>
-                <a:latin typeface="Inter" pitchFamily="34" charset="0"/>
-                <a:ea typeface="Inter" pitchFamily="34" charset="-122"/>
-                <a:cs typeface="Inter" pitchFamily="34" charset="-120"/>
+                <a:latin typeface="Calibri" pitchFamily="34" charset="0"/>
+                <a:ea typeface="Microsoft YaHei UI" pitchFamily="34" charset="-122"/>
+                <a:cs typeface="Calibri" pitchFamily="34" charset="-120"/>
               </a:rPr>
               <a:t>A/B 测试自动化框架</a:t>
             </a:r>
@@ -7942,9 +7942,9 @@
                     <a:alpha val="65000"/>
                   </a:srgbClr>
                 </a:solidFill>
-                <a:latin typeface="Inter" pitchFamily="34" charset="0"/>
-                <a:ea typeface="Inter" pitchFamily="34" charset="-122"/>
-                <a:cs typeface="Inter" pitchFamily="34" charset="-120"/>
+                <a:latin typeface="Calibri" pitchFamily="34" charset="0"/>
+                <a:ea typeface="Microsoft YaHei UI" pitchFamily="34" charset="-122"/>
+                <a:cs typeface="Calibri" pitchFamily="34" charset="-120"/>
               </a:rPr>
               <a:t>发布时机智能推荐</a:t>
             </a:r>
@@ -8013,9 +8013,9 @@
                 <a:solidFill>
                   <a:srgbClr val="8B949E"/>
                 </a:solidFill>
-                <a:latin typeface="Inter" pitchFamily="34" charset="0"/>
-                <a:ea typeface="Inter" pitchFamily="34" charset="-122"/>
-                <a:cs typeface="Inter" pitchFamily="34" charset="-120"/>
+                <a:latin typeface="Calibri" pitchFamily="34" charset="0"/>
+                <a:ea typeface="Microsoft YaHei UI" pitchFamily="34" charset="-122"/>
+                <a:cs typeface="Calibri" pitchFamily="34" charset="-120"/>
               </a:rPr>
               <a:t>PHASE 04 · 远期</a:t>
             </a:r>
@@ -8057,9 +8057,9 @@
                 <a:solidFill>
                   <a:srgbClr val="FFFFFF"/>
                 </a:solidFill>
-                <a:latin typeface="Space Grotesk" pitchFamily="34" charset="0"/>
-                <a:ea typeface="Space Grotesk" pitchFamily="34" charset="-122"/>
-                <a:cs typeface="Space Grotesk" pitchFamily="34" charset="-120"/>
+                <a:latin typeface="Calibri" pitchFamily="34" charset="0"/>
+                <a:ea typeface="Microsoft YaHei UI" pitchFamily="34" charset="-122"/>
+                <a:cs typeface="Calibri" pitchFamily="34" charset="-120"/>
               </a:rPr>
               <a:t>全自主 Agent 生态</a:t>
             </a:r>
@@ -8101,9 +8101,9 @@
                 <a:solidFill>
                   <a:srgbClr val="00D4FF"/>
                 </a:solidFill>
-                <a:latin typeface="Inter" pitchFamily="34" charset="0"/>
-                <a:ea typeface="Inter" pitchFamily="34" charset="-122"/>
-                <a:cs typeface="Inter" pitchFamily="34" charset="-120"/>
+                <a:latin typeface="Calibri" pitchFamily="34" charset="0"/>
+                <a:ea typeface="Microsoft YaHei UI" pitchFamily="34" charset="-122"/>
+                <a:cs typeface="Calibri" pitchFamily="34" charset="-120"/>
               </a:rPr>
               <a:t>5–7 周</a:t>
             </a:r>
@@ -8147,9 +8147,9 @@
                     <a:alpha val="65000"/>
                   </a:srgbClr>
                 </a:solidFill>
-                <a:latin typeface="Inter" pitchFamily="34" charset="0"/>
-                <a:ea typeface="Inter" pitchFamily="34" charset="-122"/>
-                <a:cs typeface="Inter" pitchFamily="34" charset="-120"/>
+                <a:latin typeface="Calibri" pitchFamily="34" charset="0"/>
+                <a:ea typeface="Microsoft YaHei UI" pitchFamily="34" charset="-122"/>
+                <a:cs typeface="Calibri" pitchFamily="34" charset="-120"/>
               </a:rPr>
               <a:t>全链路自主流水线</a:t>
             </a:r>
@@ -8193,9 +8193,9 @@
                     <a:alpha val="65000"/>
                   </a:srgbClr>
                 </a:solidFill>
-                <a:latin typeface="Inter" pitchFamily="34" charset="0"/>
-                <a:ea typeface="Inter" pitchFamily="34" charset="-122"/>
-                <a:cs typeface="Inter" pitchFamily="34" charset="-120"/>
+                <a:latin typeface="Calibri" pitchFamily="34" charset="0"/>
+                <a:ea typeface="Microsoft YaHei UI" pitchFamily="34" charset="-122"/>
+                <a:cs typeface="Calibri" pitchFamily="34" charset="-120"/>
               </a:rPr>
               <a:t>跨平台内容矩阵管理</a:t>
             </a:r>
@@ -8239,9 +8239,9 @@
                     <a:alpha val="65000"/>
                   </a:srgbClr>
                 </a:solidFill>
-                <a:latin typeface="Inter" pitchFamily="34" charset="0"/>
-                <a:ea typeface="Inter" pitchFamily="34" charset="-122"/>
-                <a:cs typeface="Inter" pitchFamily="34" charset="-120"/>
+                <a:latin typeface="Calibri" pitchFamily="34" charset="0"/>
+                <a:ea typeface="Microsoft YaHei UI" pitchFamily="34" charset="-122"/>
+                <a:cs typeface="Calibri" pitchFamily="34" charset="-120"/>
               </a:rPr>
               <a:t>开放 API + 第三方集成</a:t>
             </a:r>
@@ -8285,9 +8285,9 @@
                     <a:alpha val="65000"/>
                   </a:srgbClr>
                 </a:solidFill>
-                <a:latin typeface="Inter" pitchFamily="34" charset="0"/>
-                <a:ea typeface="Inter" pitchFamily="34" charset="-122"/>
-                <a:cs typeface="Inter" pitchFamily="34" charset="-120"/>
+                <a:latin typeface="Calibri" pitchFamily="34" charset="0"/>
+                <a:ea typeface="Microsoft YaHei UI" pitchFamily="34" charset="-122"/>
+                <a:cs typeface="Calibri" pitchFamily="34" charset="-120"/>
               </a:rPr>
               <a:t>MCN 批量管理 + 效果分成</a:t>
             </a:r>
@@ -8371,9 +8371,9 @@
                 <a:solidFill>
                   <a:srgbClr val="FFFFFF"/>
                 </a:solidFill>
-                <a:latin typeface="Inter" pitchFamily="34" charset="0"/>
-                <a:ea typeface="Inter" pitchFamily="34" charset="-122"/>
-                <a:cs typeface="Inter" pitchFamily="34" charset="-120"/>
+                <a:latin typeface="Calibri" pitchFamily="34" charset="0"/>
+                <a:ea typeface="Microsoft YaHei UI" pitchFamily="34" charset="-122"/>
+                <a:cs typeface="Calibri" pitchFamily="34" charset="-120"/>
               </a:rPr>
               <a:t>当前里程碑：</a:t>
             </a:r>
@@ -8390,9 +8390,9 @@
                     <a:alpha val="70000"/>
                   </a:srgbClr>
                 </a:solidFill>
-                <a:latin typeface="Inter" pitchFamily="34" charset="0"/>
-                <a:ea typeface="Inter" pitchFamily="34" charset="-122"/>
-                <a:cs typeface="Inter" pitchFamily="34" charset="-120"/>
+                <a:latin typeface="Calibri" pitchFamily="34" charset="0"/>
+                <a:ea typeface="Microsoft YaHei UI" pitchFamily="34" charset="-122"/>
+                <a:cs typeface="Calibri" pitchFamily="34" charset="-120"/>
               </a:rPr>
               <a:t>Phase 01 核心功能已全面上线，AI视频生成（含图生视频）、Agent 全链路工作流均已可用。Phase 02 重点攻克热点数据合规获取、RAG 知识库建设与 </a:t>
             </a:r>
@@ -8407,9 +8407,9 @@
                 <a:solidFill>
                   <a:srgbClr val="00D4FF"/>
                 </a:solidFill>
-                <a:latin typeface="Inter" pitchFamily="34" charset="0"/>
-                <a:ea typeface="Inter" pitchFamily="34" charset="-122"/>
-                <a:cs typeface="Inter" pitchFamily="34" charset="-120"/>
+                <a:latin typeface="Calibri" pitchFamily="34" charset="0"/>
+                <a:ea typeface="Microsoft YaHei UI" pitchFamily="34" charset="-122"/>
+                <a:cs typeface="Calibri" pitchFamily="34" charset="-120"/>
               </a:rPr>
               <a:t>AI 数字人集成</a:t>
             </a:r>
@@ -8426,9 +8426,9 @@
                     <a:alpha val="70000"/>
                   </a:srgbClr>
                 </a:solidFill>
-                <a:latin typeface="Inter" pitchFamily="34" charset="0"/>
-                <a:ea typeface="Inter" pitchFamily="34" charset="-122"/>
-                <a:cs typeface="Inter" pitchFamily="34" charset="-120"/>
+                <a:latin typeface="Calibri" pitchFamily="34" charset="0"/>
+                <a:ea typeface="Microsoft YaHei UI" pitchFamily="34" charset="-122"/>
+                <a:cs typeface="Calibri" pitchFamily="34" charset="-120"/>
               </a:rPr>
               <a:t>（应对真人 IP 出镜结构性短板），详见下一</a:t>
             </a:r>
@@ -8445,9 +8445,9 @@
                     <a:alpha val="70000"/>
                   </a:srgbClr>
                 </a:solidFill>
-                <a:latin typeface="Inter" pitchFamily="34" charset="0"/>
-                <a:ea typeface="Inter" pitchFamily="34" charset="-122"/>
-                <a:cs typeface="Inter" pitchFamily="34" charset="-120"/>
+                <a:latin typeface="Calibri" pitchFamily="34" charset="0"/>
+                <a:ea typeface="Microsoft YaHei UI" pitchFamily="34" charset="-122"/>
+                <a:cs typeface="Calibri" pitchFamily="34" charset="-120"/>
               </a:rPr>
               <a:t>页策略分析。</a:t>
             </a:r>
@@ -8538,9 +8538,9 @@
                 <a:solidFill>
                   <a:srgbClr val="00D4FF"/>
                 </a:solidFill>
-                <a:latin typeface="Inter" pitchFamily="34" charset="0"/>
-                <a:ea typeface="Inter" pitchFamily="34" charset="-122"/>
-                <a:cs typeface="Inter" pitchFamily="34" charset="-120"/>
+                <a:latin typeface="Calibri" pitchFamily="34" charset="0"/>
+                <a:ea typeface="Microsoft YaHei UI" pitchFamily="34" charset="-122"/>
+                <a:cs typeface="Calibri" pitchFamily="34" charset="-120"/>
               </a:rPr>
               <a:t>IP STRATEGY · PRODUCT ROADMAP</a:t>
             </a:r>
@@ -8582,9 +8582,9 @@
                 <a:solidFill>
                   <a:srgbClr val="FFFFFF"/>
                 </a:solidFill>
-                <a:latin typeface="Space Grotesk" pitchFamily="34" charset="0"/>
-                <a:ea typeface="Space Grotesk" pitchFamily="34" charset="-122"/>
-                <a:cs typeface="Space Grotesk" pitchFamily="34" charset="-120"/>
+                <a:latin typeface="Calibri" pitchFamily="34" charset="0"/>
+                <a:ea typeface="Microsoft YaHei UI" pitchFamily="34" charset="-122"/>
+                <a:cs typeface="Calibri" pitchFamily="34" charset="-120"/>
               </a:rPr>
               <a:t>AI 视频无法替代真人 IP 出镜的五大应对策略</a:t>
             </a:r>
@@ -8626,9 +8626,9 @@
                 <a:solidFill>
                   <a:srgbClr val="8B949E"/>
                 </a:solidFill>
-                <a:latin typeface="Inter" pitchFamily="34" charset="0"/>
-                <a:ea typeface="Inter" pitchFamily="34" charset="-122"/>
-                <a:cs typeface="Inter" pitchFamily="34" charset="-120"/>
+                <a:latin typeface="Calibri" pitchFamily="34" charset="0"/>
+                <a:ea typeface="Microsoft YaHei UI" pitchFamily="34" charset="-122"/>
+                <a:cs typeface="Calibri" pitchFamily="34" charset="-120"/>
               </a:rPr>
               <a:t>规避结构性短板，以差异化内容定位 + 技术补强构建完整解决方案</a:t>
             </a:r>
@@ -8701,9 +8701,9 @@
                     <a:alpha val="8000"/>
                   </a:srgbClr>
                 </a:solidFill>
-                <a:latin typeface="Space Grotesk" pitchFamily="34" charset="0"/>
-                <a:ea typeface="Space Grotesk" pitchFamily="34" charset="-122"/>
-                <a:cs typeface="Space Grotesk" pitchFamily="34" charset="-120"/>
+                <a:latin typeface="Calibri" pitchFamily="34" charset="0"/>
+                <a:ea typeface="Microsoft YaHei UI" pitchFamily="34" charset="-122"/>
+                <a:cs typeface="Calibri" pitchFamily="34" charset="-120"/>
               </a:rPr>
               <a:t>01</a:t>
             </a:r>
@@ -8745,9 +8745,9 @@
                 <a:solidFill>
                   <a:srgbClr val="FFFFFF"/>
                 </a:solidFill>
-                <a:latin typeface="Space Grotesk" pitchFamily="34" charset="0"/>
-                <a:ea typeface="Space Grotesk" pitchFamily="34" charset="-122"/>
-                <a:cs typeface="Space Grotesk" pitchFamily="34" charset="-120"/>
+                <a:latin typeface="Calibri" pitchFamily="34" charset="0"/>
+                <a:ea typeface="Microsoft YaHei UI" pitchFamily="34" charset="-122"/>
+                <a:cs typeface="Calibri" pitchFamily="34" charset="-120"/>
               </a:rPr>
               <a:t>差异化内容</a:t>
             </a:r>
@@ -8762,9 +8762,9 @@
                 <a:solidFill>
                   <a:srgbClr val="FFFFFF"/>
                 </a:solidFill>
-                <a:latin typeface="Space Grotesk" pitchFamily="34" charset="0"/>
-                <a:ea typeface="Space Grotesk" pitchFamily="34" charset="-122"/>
-                <a:cs typeface="Space Grotesk" pitchFamily="34" charset="-120"/>
+                <a:latin typeface="Calibri" pitchFamily="34" charset="0"/>
+                <a:ea typeface="Microsoft YaHei UI" pitchFamily="34" charset="-122"/>
+                <a:cs typeface="Calibri" pitchFamily="34" charset="-120"/>
               </a:rPr>
               <a:t>
 </a:t>
@@ -8780,9 +8780,9 @@
                 <a:solidFill>
                   <a:srgbClr val="FFFFFF"/>
                 </a:solidFill>
-                <a:latin typeface="Space Grotesk" pitchFamily="34" charset="0"/>
-                <a:ea typeface="Space Grotesk" pitchFamily="34" charset="-122"/>
-                <a:cs typeface="Space Grotesk" pitchFamily="34" charset="-120"/>
+                <a:latin typeface="Calibri" pitchFamily="34" charset="0"/>
+                <a:ea typeface="Microsoft YaHei UI" pitchFamily="34" charset="-122"/>
+                <a:cs typeface="Calibri" pitchFamily="34" charset="-120"/>
               </a:rPr>
               <a:t>定位</a:t>
             </a:r>
@@ -8853,9 +8853,9 @@
                 <a:solidFill>
                   <a:srgbClr val="22C55E"/>
                 </a:solidFill>
-                <a:latin typeface="Inter" pitchFamily="34" charset="0"/>
-                <a:ea typeface="Inter" pitchFamily="34" charset="-122"/>
-                <a:cs typeface="Inter" pitchFamily="34" charset="-120"/>
+                <a:latin typeface="Calibri" pitchFamily="34" charset="0"/>
+                <a:ea typeface="Microsoft YaHei UI" pitchFamily="34" charset="-122"/>
+                <a:cs typeface="Calibri" pitchFamily="34" charset="-120"/>
               </a:rPr>
               <a:t>立即执行</a:t>
             </a:r>
@@ -8897,9 +8897,9 @@
                 <a:solidFill>
                   <a:srgbClr val="8B949E"/>
                 </a:solidFill>
-                <a:latin typeface="Inter" pitchFamily="34" charset="0"/>
-                <a:ea typeface="Inter" pitchFamily="34" charset="-122"/>
-                <a:cs typeface="Inter" pitchFamily="34" charset="-120"/>
+                <a:latin typeface="Calibri" pitchFamily="34" charset="0"/>
+                <a:ea typeface="Microsoft YaHei UI" pitchFamily="34" charset="-122"/>
+                <a:cs typeface="Calibri" pitchFamily="34" charset="-120"/>
               </a:rPr>
               <a:t>不与真人出镜正面竞争，专注 AI 视频天然擅长的内容类型</a:t>
             </a:r>
@@ -8943,9 +8943,9 @@
                     <a:alpha val="55000"/>
                   </a:srgbClr>
                 </a:solidFill>
-                <a:latin typeface="Inter" pitchFamily="34" charset="0"/>
-                <a:ea typeface="Inter" pitchFamily="34" charset="-122"/>
-                <a:cs typeface="Inter" pitchFamily="34" charset="-120"/>
+                <a:latin typeface="Calibri" pitchFamily="34" charset="0"/>
+                <a:ea typeface="Microsoft YaHei UI" pitchFamily="34" charset="-122"/>
+                <a:cs typeface="Calibri" pitchFamily="34" charset="-120"/>
               </a:rPr>
               <a:t>产品展示 / 开箱测评</a:t>
             </a:r>
@@ -8989,9 +8989,9 @@
                     <a:alpha val="55000"/>
                   </a:srgbClr>
                 </a:solidFill>
-                <a:latin typeface="Inter" pitchFamily="34" charset="0"/>
-                <a:ea typeface="Inter" pitchFamily="34" charset="-122"/>
-                <a:cs typeface="Inter" pitchFamily="34" charset="-120"/>
+                <a:latin typeface="Calibri" pitchFamily="34" charset="0"/>
+                <a:ea typeface="Microsoft YaHei UI" pitchFamily="34" charset="-122"/>
+                <a:cs typeface="Calibri" pitchFamily="34" charset="-120"/>
               </a:rPr>
               <a:t>知识科普 / 图文解说</a:t>
             </a:r>
@@ -9035,9 +9035,9 @@
                     <a:alpha val="55000"/>
                   </a:srgbClr>
                 </a:solidFill>
-                <a:latin typeface="Inter" pitchFamily="34" charset="0"/>
-                <a:ea typeface="Inter" pitchFamily="34" charset="-122"/>
-                <a:cs typeface="Inter" pitchFamily="34" charset="-120"/>
+                <a:latin typeface="Calibri" pitchFamily="34" charset="0"/>
+                <a:ea typeface="Microsoft YaHei UI" pitchFamily="34" charset="-122"/>
+                <a:cs typeface="Calibri" pitchFamily="34" charset="-120"/>
               </a:rPr>
               <a:t>风景旅行 / 美食探店</a:t>
             </a:r>
@@ -9081,9 +9081,9 @@
                     <a:alpha val="55000"/>
                   </a:srgbClr>
                 </a:solidFill>
-                <a:latin typeface="Inter" pitchFamily="34" charset="0"/>
-                <a:ea typeface="Inter" pitchFamily="34" charset="-122"/>
-                <a:cs typeface="Inter" pitchFamily="34" charset="-120"/>
+                <a:latin typeface="Calibri" pitchFamily="34" charset="0"/>
+                <a:ea typeface="Microsoft YaHei UI" pitchFamily="34" charset="-122"/>
+                <a:cs typeface="Calibri" pitchFamily="34" charset="-120"/>
               </a:rPr>
               <a:t>品牌宣传 / 数据动画</a:t>
             </a:r>
@@ -9154,9 +9154,9 @@
                     <a:alpha val="8000"/>
                   </a:srgbClr>
                 </a:solidFill>
-                <a:latin typeface="Space Grotesk" pitchFamily="34" charset="0"/>
-                <a:ea typeface="Space Grotesk" pitchFamily="34" charset="-122"/>
-                <a:cs typeface="Space Grotesk" pitchFamily="34" charset="-120"/>
+                <a:latin typeface="Calibri" pitchFamily="34" charset="0"/>
+                <a:ea typeface="Microsoft YaHei UI" pitchFamily="34" charset="-122"/>
+                <a:cs typeface="Calibri" pitchFamily="34" charset="-120"/>
               </a:rPr>
               <a:t>02</a:t>
             </a:r>
@@ -9198,9 +9198,9 @@
                 <a:solidFill>
                   <a:srgbClr val="FFFFFF"/>
                 </a:solidFill>
-                <a:latin typeface="Space Grotesk" pitchFamily="34" charset="0"/>
-                <a:ea typeface="Space Grotesk" pitchFamily="34" charset="-122"/>
-                <a:cs typeface="Space Grotesk" pitchFamily="34" charset="-120"/>
+                <a:latin typeface="Calibri" pitchFamily="34" charset="0"/>
+                <a:ea typeface="Microsoft YaHei UI" pitchFamily="34" charset="-122"/>
+                <a:cs typeface="Calibri" pitchFamily="34" charset="-120"/>
               </a:rPr>
               <a:t>真人素材 +</a:t>
             </a:r>
@@ -9215,9 +9215,9 @@
                 <a:solidFill>
                   <a:srgbClr val="FFFFFF"/>
                 </a:solidFill>
-                <a:latin typeface="Space Grotesk" pitchFamily="34" charset="0"/>
-                <a:ea typeface="Space Grotesk" pitchFamily="34" charset="-122"/>
-                <a:cs typeface="Space Grotesk" pitchFamily="34" charset="-120"/>
+                <a:latin typeface="Calibri" pitchFamily="34" charset="0"/>
+                <a:ea typeface="Microsoft YaHei UI" pitchFamily="34" charset="-122"/>
+                <a:cs typeface="Calibri" pitchFamily="34" charset="-120"/>
               </a:rPr>
               <a:t>
 </a:t>
@@ -9233,9 +9233,9 @@
                 <a:solidFill>
                   <a:srgbClr val="FFFFFF"/>
                 </a:solidFill>
-                <a:latin typeface="Space Grotesk" pitchFamily="34" charset="0"/>
-                <a:ea typeface="Space Grotesk" pitchFamily="34" charset="-122"/>
-                <a:cs typeface="Space Grotesk" pitchFamily="34" charset="-120"/>
+                <a:latin typeface="Calibri" pitchFamily="34" charset="0"/>
+                <a:ea typeface="Microsoft YaHei UI" pitchFamily="34" charset="-122"/>
+                <a:cs typeface="Calibri" pitchFamily="34" charset="-120"/>
               </a:rPr>
               <a:t>AI 剪辑混合</a:t>
             </a:r>
@@ -9306,9 +9306,9 @@
                 <a:solidFill>
                   <a:srgbClr val="00D4FF"/>
                 </a:solidFill>
-                <a:latin typeface="Inter" pitchFamily="34" charset="0"/>
-                <a:ea typeface="Inter" pitchFamily="34" charset="-122"/>
-                <a:cs typeface="Inter" pitchFamily="34" charset="-120"/>
+                <a:latin typeface="Calibri" pitchFamily="34" charset="0"/>
+                <a:ea typeface="Microsoft YaHei UI" pitchFamily="34" charset="-122"/>
+                <a:cs typeface="Calibri" pitchFamily="34" charset="-120"/>
               </a:rPr>
               <a:t>PHASE 2 优先</a:t>
             </a:r>
@@ -9350,9 +9350,9 @@
                 <a:solidFill>
                   <a:srgbClr val="8B949E"/>
                 </a:solidFill>
-                <a:latin typeface="Inter" pitchFamily="34" charset="0"/>
-                <a:ea typeface="Inter" pitchFamily="34" charset="-122"/>
-                <a:cs typeface="Inter" pitchFamily="34" charset="-120"/>
+                <a:latin typeface="Calibri" pitchFamily="34" charset="0"/>
+                <a:ea typeface="Microsoft YaHei UI" pitchFamily="34" charset="-122"/>
+                <a:cs typeface="Calibri" pitchFamily="34" charset="-120"/>
               </a:rPr>
               <a:t>降低真人出镜门槛，AI 承担脚本、剪辑、字幕、配音</a:t>
             </a:r>
@@ -9396,9 +9396,9 @@
                     <a:alpha val="55000"/>
                   </a:srgbClr>
                 </a:solidFill>
-                <a:latin typeface="Inter" pitchFamily="34" charset="0"/>
-                <a:ea typeface="Inter" pitchFamily="34" charset="-122"/>
-                <a:cs typeface="Inter" pitchFamily="34" charset="-120"/>
+                <a:latin typeface="Calibri" pitchFamily="34" charset="0"/>
+                <a:ea typeface="Microsoft YaHei UI" pitchFamily="34" charset="-122"/>
+                <a:cs typeface="Calibri" pitchFamily="34" charset="-120"/>
               </a:rPr>
               <a:t>AI 生成口播脚本</a:t>
             </a:r>
@@ -9442,9 +9442,9 @@
                     <a:alpha val="55000"/>
                   </a:srgbClr>
                 </a:solidFill>
-                <a:latin typeface="Inter" pitchFamily="34" charset="0"/>
-                <a:ea typeface="Inter" pitchFamily="34" charset="-122"/>
-                <a:cs typeface="Inter" pitchFamily="34" charset="-120"/>
+                <a:latin typeface="Calibri" pitchFamily="34" charset="0"/>
+                <a:ea typeface="Microsoft YaHei UI" pitchFamily="34" charset="-122"/>
+                <a:cs typeface="Calibri" pitchFamily="34" charset="-120"/>
               </a:rPr>
               <a:t>用户录制 → AI 自动剪辑</a:t>
             </a:r>
@@ -9488,9 +9488,9 @@
                     <a:alpha val="55000"/>
                   </a:srgbClr>
                 </a:solidFill>
-                <a:latin typeface="Inter" pitchFamily="34" charset="0"/>
-                <a:ea typeface="Inter" pitchFamily="34" charset="-122"/>
-                <a:cs typeface="Inter" pitchFamily="34" charset="-120"/>
+                <a:latin typeface="Calibri" pitchFamily="34" charset="0"/>
+                <a:ea typeface="Microsoft YaHei UI" pitchFamily="34" charset="-122"/>
+                <a:cs typeface="Calibri" pitchFamily="34" charset="-120"/>
               </a:rPr>
               <a:t>AI 声音克隆配音</a:t>
             </a:r>
@@ -9534,9 +9534,9 @@
                     <a:alpha val="55000"/>
                   </a:srgbClr>
                 </a:solidFill>
-                <a:latin typeface="Inter" pitchFamily="34" charset="0"/>
-                <a:ea typeface="Inter" pitchFamily="34" charset="-122"/>
-                <a:cs typeface="Inter" pitchFamily="34" charset="-120"/>
+                <a:latin typeface="Calibri" pitchFamily="34" charset="0"/>
+                <a:ea typeface="Microsoft YaHei UI" pitchFamily="34" charset="-122"/>
+                <a:cs typeface="Calibri" pitchFamily="34" charset="-120"/>
               </a:rPr>
               <a:t>AI 补帧 / 画质增强</a:t>
             </a:r>
@@ -9607,9 +9607,9 @@
                     <a:alpha val="8000"/>
                   </a:srgbClr>
                 </a:solidFill>
-                <a:latin typeface="Space Grotesk" pitchFamily="34" charset="0"/>
-                <a:ea typeface="Space Grotesk" pitchFamily="34" charset="-122"/>
-                <a:cs typeface="Space Grotesk" pitchFamily="34" charset="-120"/>
+                <a:latin typeface="Calibri" pitchFamily="34" charset="0"/>
+                <a:ea typeface="Microsoft YaHei UI" pitchFamily="34" charset="-122"/>
+                <a:cs typeface="Calibri" pitchFamily="34" charset="-120"/>
               </a:rPr>
               <a:t>03</a:t>
             </a:r>
@@ -9651,9 +9651,9 @@
                 <a:solidFill>
                   <a:srgbClr val="FFFFFF"/>
                 </a:solidFill>
-                <a:latin typeface="Space Grotesk" pitchFamily="34" charset="0"/>
-                <a:ea typeface="Space Grotesk" pitchFamily="34" charset="-122"/>
-                <a:cs typeface="Space Grotesk" pitchFamily="34" charset="-120"/>
+                <a:latin typeface="Calibri" pitchFamily="34" charset="0"/>
+                <a:ea typeface="Microsoft YaHei UI" pitchFamily="34" charset="-122"/>
+                <a:cs typeface="Calibri" pitchFamily="34" charset="-120"/>
               </a:rPr>
               <a:t>AI 数字人</a:t>
             </a:r>
@@ -9668,9 +9668,9 @@
                 <a:solidFill>
                   <a:srgbClr val="FFFFFF"/>
                 </a:solidFill>
-                <a:latin typeface="Space Grotesk" pitchFamily="34" charset="0"/>
-                <a:ea typeface="Space Grotesk" pitchFamily="34" charset="-122"/>
-                <a:cs typeface="Space Grotesk" pitchFamily="34" charset="-120"/>
+                <a:latin typeface="Calibri" pitchFamily="34" charset="0"/>
+                <a:ea typeface="Microsoft YaHei UI" pitchFamily="34" charset="-122"/>
+                <a:cs typeface="Calibri" pitchFamily="34" charset="-120"/>
               </a:rPr>
               <a:t>
 </a:t>
@@ -9686,9 +9686,9 @@
                 <a:solidFill>
                   <a:srgbClr val="FFFFFF"/>
                 </a:solidFill>
-                <a:latin typeface="Space Grotesk" pitchFamily="34" charset="0"/>
-                <a:ea typeface="Space Grotesk" pitchFamily="34" charset="-122"/>
-                <a:cs typeface="Space Grotesk" pitchFamily="34" charset="-120"/>
+                <a:latin typeface="Calibri" pitchFamily="34" charset="0"/>
+                <a:ea typeface="Microsoft YaHei UI" pitchFamily="34" charset="-122"/>
+                <a:cs typeface="Calibri" pitchFamily="34" charset="-120"/>
               </a:rPr>
               <a:t>技术集成</a:t>
             </a:r>
@@ -9759,9 +9759,9 @@
                 <a:solidFill>
                   <a:srgbClr val="00D4FF"/>
                 </a:solidFill>
-                <a:latin typeface="Inter" pitchFamily="34" charset="0"/>
-                <a:ea typeface="Inter" pitchFamily="34" charset="-122"/>
-                <a:cs typeface="Inter" pitchFamily="34" charset="-120"/>
+                <a:latin typeface="Calibri" pitchFamily="34" charset="0"/>
+                <a:ea typeface="Microsoft YaHei UI" pitchFamily="34" charset="-122"/>
+                <a:cs typeface="Calibri" pitchFamily="34" charset="-120"/>
               </a:rPr>
               <a:t>PHASE 2</a:t>
             </a:r>
@@ -9803,9 +9803,9 @@
                 <a:solidFill>
                   <a:srgbClr val="8B949E"/>
                 </a:solidFill>
-                <a:latin typeface="Inter" pitchFamily="34" charset="0"/>
-                <a:ea typeface="Inter" pitchFamily="34" charset="-122"/>
-                <a:cs typeface="Inter" pitchFamily="34" charset="-120"/>
+                <a:latin typeface="Calibri" pitchFamily="34" charset="0"/>
+                <a:ea typeface="Microsoft YaHei UI" pitchFamily="34" charset="-122"/>
+                <a:cs typeface="Calibri" pitchFamily="34" charset="-120"/>
               </a:rPr>
               <a:t>接入数字人 API，用户上传照片即可生成专属 AI 形象出镜</a:t>
             </a:r>
@@ -9849,9 +9849,9 @@
                     <a:alpha val="55000"/>
                   </a:srgbClr>
                 </a:solidFill>
-                <a:latin typeface="Inter" pitchFamily="34" charset="0"/>
-                <a:ea typeface="Inter" pitchFamily="34" charset="-122"/>
-                <a:cs typeface="Inter" pitchFamily="34" charset="-120"/>
+                <a:latin typeface="Calibri" pitchFamily="34" charset="0"/>
+                <a:ea typeface="Microsoft YaHei UI" pitchFamily="34" charset="-122"/>
+                <a:cs typeface="Calibri" pitchFamily="34" charset="-120"/>
               </a:rPr>
               <a:t>HeyGen / 腾讯智影 API</a:t>
             </a:r>
@@ -9895,9 +9895,9 @@
                     <a:alpha val="55000"/>
                   </a:srgbClr>
                 </a:solidFill>
-                <a:latin typeface="Inter" pitchFamily="34" charset="0"/>
-                <a:ea typeface="Inter" pitchFamily="34" charset="-122"/>
-                <a:cs typeface="Inter" pitchFamily="34" charset="-120"/>
+                <a:latin typeface="Calibri" pitchFamily="34" charset="0"/>
+                <a:ea typeface="Microsoft YaHei UI" pitchFamily="34" charset="-122"/>
+                <a:cs typeface="Calibri" pitchFamily="34" charset="-120"/>
               </a:rPr>
               <a:t>剪映数字人（字节系）</a:t>
             </a:r>
@@ -9941,9 +9941,9 @@
                     <a:alpha val="55000"/>
                   </a:srgbClr>
                 </a:solidFill>
-                <a:latin typeface="Inter" pitchFamily="34" charset="0"/>
-                <a:ea typeface="Inter" pitchFamily="34" charset="-122"/>
-                <a:cs typeface="Inter" pitchFamily="34" charset="-120"/>
+                <a:latin typeface="Calibri" pitchFamily="34" charset="0"/>
+                <a:ea typeface="Microsoft YaHei UI" pitchFamily="34" charset="-122"/>
+                <a:cs typeface="Calibri" pitchFamily="34" charset="-120"/>
               </a:rPr>
               <a:t>照片驱动口型同步</a:t>
             </a:r>
@@ -9987,9 +9987,9 @@
                     <a:alpha val="55000"/>
                   </a:srgbClr>
                 </a:solidFill>
-                <a:latin typeface="Inter" pitchFamily="34" charset="0"/>
-                <a:ea typeface="Inter" pitchFamily="34" charset="-122"/>
-                <a:cs typeface="Inter" pitchFamily="34" charset="-120"/>
+                <a:latin typeface="Calibri" pitchFamily="34" charset="0"/>
+                <a:ea typeface="Microsoft YaHei UI" pitchFamily="34" charset="-122"/>
+                <a:cs typeface="Calibri" pitchFamily="34" charset="-120"/>
               </a:rPr>
               <a:t>多语言配音支持</a:t>
             </a:r>
@@ -10060,9 +10060,9 @@
                     <a:alpha val="8000"/>
                   </a:srgbClr>
                 </a:solidFill>
-                <a:latin typeface="Space Grotesk" pitchFamily="34" charset="0"/>
-                <a:ea typeface="Space Grotesk" pitchFamily="34" charset="-122"/>
-                <a:cs typeface="Space Grotesk" pitchFamily="34" charset="-120"/>
+                <a:latin typeface="Calibri" pitchFamily="34" charset="0"/>
+                <a:ea typeface="Microsoft YaHei UI" pitchFamily="34" charset="-122"/>
+                <a:cs typeface="Calibri" pitchFamily="34" charset="-120"/>
               </a:rPr>
               <a:t>04</a:t>
             </a:r>
@@ -10104,9 +10104,9 @@
                 <a:solidFill>
                   <a:srgbClr val="FFFFFF"/>
                 </a:solidFill>
-                <a:latin typeface="Space Grotesk" pitchFamily="34" charset="0"/>
-                <a:ea typeface="Space Grotesk" pitchFamily="34" charset="-122"/>
-                <a:cs typeface="Space Grotesk" pitchFamily="34" charset="-120"/>
+                <a:latin typeface="Calibri" pitchFamily="34" charset="0"/>
+                <a:ea typeface="Microsoft YaHei UI" pitchFamily="34" charset="-122"/>
+                <a:cs typeface="Calibri" pitchFamily="34" charset="-120"/>
               </a:rPr>
               <a:t>AI 虚拟 IP</a:t>
             </a:r>
@@ -10121,9 +10121,9 @@
                 <a:solidFill>
                   <a:srgbClr val="FFFFFF"/>
                 </a:solidFill>
-                <a:latin typeface="Space Grotesk" pitchFamily="34" charset="0"/>
-                <a:ea typeface="Space Grotesk" pitchFamily="34" charset="-122"/>
-                <a:cs typeface="Space Grotesk" pitchFamily="34" charset="-120"/>
+                <a:latin typeface="Calibri" pitchFamily="34" charset="0"/>
+                <a:ea typeface="Microsoft YaHei UI" pitchFamily="34" charset="-122"/>
+                <a:cs typeface="Calibri" pitchFamily="34" charset="-120"/>
               </a:rPr>
               <a:t>
 </a:t>
@@ -10139,9 +10139,9 @@
                 <a:solidFill>
                   <a:srgbClr val="FFFFFF"/>
                 </a:solidFill>
-                <a:latin typeface="Space Grotesk" pitchFamily="34" charset="0"/>
-                <a:ea typeface="Space Grotesk" pitchFamily="34" charset="-122"/>
-                <a:cs typeface="Space Grotesk" pitchFamily="34" charset="-120"/>
+                <a:latin typeface="Calibri" pitchFamily="34" charset="0"/>
+                <a:ea typeface="Microsoft YaHei UI" pitchFamily="34" charset="-122"/>
+                <a:cs typeface="Calibri" pitchFamily="34" charset="-120"/>
               </a:rPr>
               <a:t>形象设计</a:t>
             </a:r>
@@ -10212,9 +10212,9 @@
                 <a:solidFill>
                   <a:srgbClr val="A78BFA"/>
                 </a:solidFill>
-                <a:latin typeface="Inter" pitchFamily="34" charset="0"/>
-                <a:ea typeface="Inter" pitchFamily="34" charset="-122"/>
-                <a:cs typeface="Inter" pitchFamily="34" charset="-120"/>
+                <a:latin typeface="Calibri" pitchFamily="34" charset="0"/>
+                <a:ea typeface="Microsoft YaHei UI" pitchFamily="34" charset="-122"/>
+                <a:cs typeface="Calibri" pitchFamily="34" charset="-120"/>
               </a:rPr>
               <a:t>PHASE 3</a:t>
             </a:r>
@@ -10256,9 +10256,9 @@
                 <a:solidFill>
                   <a:srgbClr val="8B949E"/>
                 </a:solidFill>
-                <a:latin typeface="Inter" pitchFamily="34" charset="0"/>
-                <a:ea typeface="Inter" pitchFamily="34" charset="-122"/>
-                <a:cs typeface="Inter" pitchFamily="34" charset="-120"/>
+                <a:latin typeface="Calibri" pitchFamily="34" charset="0"/>
+                <a:ea typeface="Microsoft YaHei UI" pitchFamily="34" charset="-122"/>
+                <a:cs typeface="Calibri" pitchFamily="34" charset="-120"/>
               </a:rPr>
               <a:t>引导用户建立不依赖真人的 IP 形态，AI 生成专属卡通形象</a:t>
             </a:r>
@@ -10302,9 +10302,9 @@
                     <a:alpha val="55000"/>
                   </a:srgbClr>
                 </a:solidFill>
-                <a:latin typeface="Inter" pitchFamily="34" charset="0"/>
-                <a:ea typeface="Inter" pitchFamily="34" charset="-122"/>
-                <a:cs typeface="Inter" pitchFamily="34" charset="-120"/>
+                <a:latin typeface="Calibri" pitchFamily="34" charset="0"/>
+                <a:ea typeface="Microsoft YaHei UI" pitchFamily="34" charset="-122"/>
+                <a:cs typeface="Calibri" pitchFamily="34" charset="-120"/>
               </a:rPr>
               <a:t>输入 IP 定位 → 生成形象</a:t>
             </a:r>
@@ -10348,9 +10348,9 @@
                     <a:alpha val="55000"/>
                   </a:srgbClr>
                 </a:solidFill>
-                <a:latin typeface="Inter" pitchFamily="34" charset="0"/>
-                <a:ea typeface="Inter" pitchFamily="34" charset="-122"/>
-                <a:cs typeface="Inter" pitchFamily="34" charset="-120"/>
+                <a:latin typeface="Calibri" pitchFamily="34" charset="0"/>
+                <a:ea typeface="Microsoft YaHei UI" pitchFamily="34" charset="-122"/>
+                <a:cs typeface="Calibri" pitchFamily="34" charset="-120"/>
               </a:rPr>
               <a:t>统一视觉 IP 矩阵</a:t>
             </a:r>
@@ -10394,9 +10394,9 @@
                     <a:alpha val="55000"/>
                   </a:srgbClr>
                 </a:solidFill>
-                <a:latin typeface="Inter" pitchFamily="34" charset="0"/>
-                <a:ea typeface="Inter" pitchFamily="34" charset="-122"/>
-                <a:cs typeface="Inter" pitchFamily="34" charset="-120"/>
+                <a:latin typeface="Calibri" pitchFamily="34" charset="0"/>
+                <a:ea typeface="Microsoft YaHei UI" pitchFamily="34" charset="-122"/>
+                <a:cs typeface="Calibri" pitchFamily="34" charset="-120"/>
               </a:rPr>
               <a:t>参考：一禅小和尚模式</a:t>
             </a:r>
@@ -10440,9 +10440,9 @@
                     <a:alpha val="55000"/>
                   </a:srgbClr>
                 </a:solidFill>
-                <a:latin typeface="Inter" pitchFamily="34" charset="0"/>
-                <a:ea typeface="Inter" pitchFamily="34" charset="-122"/>
-                <a:cs typeface="Inter" pitchFamily="34" charset="-120"/>
+                <a:latin typeface="Calibri" pitchFamily="34" charset="0"/>
+                <a:ea typeface="Microsoft YaHei UI" pitchFamily="34" charset="-122"/>
+                <a:cs typeface="Calibri" pitchFamily="34" charset="-120"/>
               </a:rPr>
               <a:t>无颜值依赖的粉丝积累</a:t>
             </a:r>
@@ -10515,9 +10515,9 @@
                     <a:alpha val="8000"/>
                   </a:srgbClr>
                 </a:solidFill>
-                <a:latin typeface="Space Grotesk" pitchFamily="34" charset="0"/>
-                <a:ea typeface="Space Grotesk" pitchFamily="34" charset="-122"/>
-                <a:cs typeface="Space Grotesk" pitchFamily="34" charset="-120"/>
+                <a:latin typeface="Calibri" pitchFamily="34" charset="0"/>
+                <a:ea typeface="Microsoft YaHei UI" pitchFamily="34" charset="-122"/>
+                <a:cs typeface="Calibri" pitchFamily="34" charset="-120"/>
               </a:rPr>
               <a:t>05</a:t>
             </a:r>
@@ -10559,9 +10559,9 @@
                 <a:solidFill>
                   <a:srgbClr val="FFFFFF"/>
                 </a:solidFill>
-                <a:latin typeface="Space Grotesk" pitchFamily="34" charset="0"/>
-                <a:ea typeface="Space Grotesk" pitchFamily="34" charset="-122"/>
-                <a:cs typeface="Space Grotesk" pitchFamily="34" charset="-120"/>
+                <a:latin typeface="Calibri" pitchFamily="34" charset="0"/>
+                <a:ea typeface="Microsoft YaHei UI" pitchFamily="34" charset="-122"/>
+                <a:cs typeface="Calibri" pitchFamily="34" charset="-120"/>
               </a:rPr>
               <a:t>明确产品</a:t>
             </a:r>
@@ -10576,9 +10576,9 @@
                 <a:solidFill>
                   <a:srgbClr val="FFFFFF"/>
                 </a:solidFill>
-                <a:latin typeface="Space Grotesk" pitchFamily="34" charset="0"/>
-                <a:ea typeface="Space Grotesk" pitchFamily="34" charset="-122"/>
-                <a:cs typeface="Space Grotesk" pitchFamily="34" charset="-120"/>
+                <a:latin typeface="Calibri" pitchFamily="34" charset="0"/>
+                <a:ea typeface="Microsoft YaHei UI" pitchFamily="34" charset="-122"/>
+                <a:cs typeface="Calibri" pitchFamily="34" charset="-120"/>
               </a:rPr>
               <a:t>
 </a:t>
@@ -10594,9 +10594,9 @@
                 <a:solidFill>
                   <a:srgbClr val="FFFFFF"/>
                 </a:solidFill>
-                <a:latin typeface="Space Grotesk" pitchFamily="34" charset="0"/>
-                <a:ea typeface="Space Grotesk" pitchFamily="34" charset="-122"/>
-                <a:cs typeface="Space Grotesk" pitchFamily="34" charset="-120"/>
+                <a:latin typeface="Calibri" pitchFamily="34" charset="0"/>
+                <a:ea typeface="Microsoft YaHei UI" pitchFamily="34" charset="-122"/>
+                <a:cs typeface="Calibri" pitchFamily="34" charset="-120"/>
               </a:rPr>
               <a:t>定位边界</a:t>
             </a:r>
@@ -10667,9 +10667,9 @@
                 <a:solidFill>
                   <a:srgbClr val="22C55E"/>
                 </a:solidFill>
-                <a:latin typeface="Inter" pitchFamily="34" charset="0"/>
-                <a:ea typeface="Inter" pitchFamily="34" charset="-122"/>
-                <a:cs typeface="Inter" pitchFamily="34" charset="-120"/>
+                <a:latin typeface="Calibri" pitchFamily="34" charset="0"/>
+                <a:ea typeface="Microsoft YaHei UI" pitchFamily="34" charset="-122"/>
+                <a:cs typeface="Calibri" pitchFamily="34" charset="-120"/>
               </a:rPr>
               <a:t>立即执行</a:t>
             </a:r>
@@ -10711,9 +10711,9 @@
                 <a:solidFill>
                   <a:srgbClr val="8B949E"/>
                 </a:solidFill>
-                <a:latin typeface="Inter" pitchFamily="34" charset="0"/>
-                <a:ea typeface="Inter" pitchFamily="34" charset="-122"/>
-                <a:cs typeface="Inter" pitchFamily="34" charset="-120"/>
+                <a:latin typeface="Calibri" pitchFamily="34" charset="0"/>
+                <a:ea typeface="Microsoft YaHei UI" pitchFamily="34" charset="-122"/>
+                <a:cs typeface="Calibri" pitchFamily="34" charset="-120"/>
               </a:rPr>
               <a:t>在获客文案中主动声明适用场景，减少错误预期导致的用户流失</a:t>
             </a:r>
@@ -10757,9 +10757,9 @@
                     <a:alpha val="55000"/>
                   </a:srgbClr>
                 </a:solidFill>
-                <a:latin typeface="Inter" pitchFamily="34" charset="0"/>
-                <a:ea typeface="Inter" pitchFamily="34" charset="-122"/>
-                <a:cs typeface="Inter" pitchFamily="34" charset="-120"/>
+                <a:latin typeface="Calibri" pitchFamily="34" charset="0"/>
+                <a:ea typeface="Microsoft YaHei UI" pitchFamily="34" charset="-122"/>
+                <a:cs typeface="Calibri" pitchFamily="34" charset="-120"/>
               </a:rPr>
               <a:t>品牌账号 / 知识博主</a:t>
             </a:r>
@@ -10803,9 +10803,9 @@
                     <a:alpha val="55000"/>
                   </a:srgbClr>
                 </a:solidFill>
-                <a:latin typeface="Inter" pitchFamily="34" charset="0"/>
-                <a:ea typeface="Inter" pitchFamily="34" charset="-122"/>
-                <a:cs typeface="Inter" pitchFamily="34" charset="-120"/>
+                <a:latin typeface="Calibri" pitchFamily="34" charset="0"/>
+                <a:ea typeface="Microsoft YaHei UI" pitchFamily="34" charset="-122"/>
+                <a:cs typeface="Calibri" pitchFamily="34" charset="-120"/>
               </a:rPr>
               <a:t>产品测评 / 旅行美食</a:t>
             </a:r>
@@ -10849,9 +10849,9 @@
                     <a:alpha val="55000"/>
                   </a:srgbClr>
                 </a:solidFill>
-                <a:latin typeface="Inter" pitchFamily="34" charset="0"/>
-                <a:ea typeface="Inter" pitchFamily="34" charset="-122"/>
-                <a:cs typeface="Inter" pitchFamily="34" charset="-120"/>
+                <a:latin typeface="Calibri" pitchFamily="34" charset="0"/>
+                <a:ea typeface="Microsoft YaHei UI" pitchFamily="34" charset="-122"/>
+                <a:cs typeface="Calibri" pitchFamily="34" charset="-120"/>
               </a:rPr>
               <a:t>明确不适合：个人情感 / 才艺</a:t>
             </a:r>
@@ -10895,9 +10895,9 @@
                     <a:alpha val="55000"/>
                   </a:srgbClr>
                 </a:solidFill>
-                <a:latin typeface="Inter" pitchFamily="34" charset="0"/>
-                <a:ea typeface="Inter" pitchFamily="34" charset="-122"/>
-                <a:cs typeface="Inter" pitchFamily="34" charset="-120"/>
+                <a:latin typeface="Calibri" pitchFamily="34" charset="0"/>
+                <a:ea typeface="Microsoft YaHei UI" pitchFamily="34" charset="-122"/>
+                <a:cs typeface="Calibri" pitchFamily="34" charset="-120"/>
               </a:rPr>
               <a:t>引导混合工作流使用</a:t>
             </a:r>
@@ -10939,9 +10939,9 @@
                 <a:solidFill>
                   <a:srgbClr val="7C3AED"/>
                 </a:solidFill>
-                <a:latin typeface="Inter" pitchFamily="34" charset="0"/>
-                <a:ea typeface="Inter" pitchFamily="34" charset="-122"/>
-                <a:cs typeface="Inter" pitchFamily="34" charset="-120"/>
+                <a:latin typeface="Calibri" pitchFamily="34" charset="0"/>
+                <a:ea typeface="Microsoft YaHei UI" pitchFamily="34" charset="-122"/>
+                <a:cs typeface="Calibri" pitchFamily="34" charset="-120"/>
               </a:rPr>
               <a:t>落地优先级矩阵</a:t>
             </a:r>
@@ -10983,9 +10983,9 @@
                 <a:solidFill>
                   <a:srgbClr val="8B949E"/>
                 </a:solidFill>
-                <a:latin typeface="Inter" pitchFamily="34" charset="0"/>
-                <a:ea typeface="Inter" pitchFamily="34" charset="-122"/>
-                <a:cs typeface="Inter" pitchFamily="34" charset="-120"/>
+                <a:latin typeface="Calibri" pitchFamily="34" charset="0"/>
+                <a:ea typeface="Microsoft YaHei UI" pitchFamily="34" charset="-122"/>
+                <a:cs typeface="Calibri" pitchFamily="34" charset="-120"/>
               </a:rPr>
               <a:t>立即执行</a:t>
             </a:r>
@@ -11056,9 +11056,9 @@
                 <a:solidFill>
                   <a:srgbClr val="22C55E"/>
                 </a:solidFill>
-                <a:latin typeface="Inter" pitchFamily="34" charset="0"/>
-                <a:ea typeface="Inter" pitchFamily="34" charset="-122"/>
-                <a:cs typeface="Inter" pitchFamily="34" charset="-120"/>
+                <a:latin typeface="Calibri" pitchFamily="34" charset="0"/>
+                <a:ea typeface="Microsoft YaHei UI" pitchFamily="34" charset="-122"/>
+                <a:cs typeface="Calibri" pitchFamily="34" charset="-120"/>
               </a:rPr>
               <a:t>① 差异化内容定位</a:t>
             </a:r>
@@ -11073,9 +11073,9 @@
                 <a:solidFill>
                   <a:srgbClr val="22C55E"/>
                 </a:solidFill>
-                <a:latin typeface="Inter" pitchFamily="34" charset="0"/>
-                <a:ea typeface="Inter" pitchFamily="34" charset="-122"/>
-                <a:cs typeface="Inter" pitchFamily="34" charset="-120"/>
+                <a:latin typeface="Calibri" pitchFamily="34" charset="0"/>
+                <a:ea typeface="Microsoft YaHei UI" pitchFamily="34" charset="-122"/>
+                <a:cs typeface="Calibri" pitchFamily="34" charset="-120"/>
               </a:rPr>
               <a:t>
 </a:t>
@@ -11091,9 +11091,9 @@
                 <a:solidFill>
                   <a:srgbClr val="22C55E"/>
                 </a:solidFill>
-                <a:latin typeface="Inter" pitchFamily="34" charset="0"/>
-                <a:ea typeface="Inter" pitchFamily="34" charset="-122"/>
-                <a:cs typeface="Inter" pitchFamily="34" charset="-120"/>
+                <a:latin typeface="Calibri" pitchFamily="34" charset="0"/>
+                <a:ea typeface="Microsoft YaHei UI" pitchFamily="34" charset="-122"/>
+                <a:cs typeface="Calibri" pitchFamily="34" charset="-120"/>
               </a:rPr>
               <a:t>产品文案 + 场景推荐模块</a:t>
             </a:r>
@@ -11164,9 +11164,9 @@
                 <a:solidFill>
                   <a:srgbClr val="22C55E"/>
                 </a:solidFill>
-                <a:latin typeface="Inter" pitchFamily="34" charset="0"/>
-                <a:ea typeface="Inter" pitchFamily="34" charset="-122"/>
-                <a:cs typeface="Inter" pitchFamily="34" charset="-120"/>
+                <a:latin typeface="Calibri" pitchFamily="34" charset="0"/>
+                <a:ea typeface="Microsoft YaHei UI" pitchFamily="34" charset="-122"/>
+                <a:cs typeface="Calibri" pitchFamily="34" charset="-120"/>
               </a:rPr>
               <a:t>⑤ 产品边界声明</a:t>
             </a:r>
@@ -11181,9 +11181,9 @@
                 <a:solidFill>
                   <a:srgbClr val="22C55E"/>
                 </a:solidFill>
-                <a:latin typeface="Inter" pitchFamily="34" charset="0"/>
-                <a:ea typeface="Inter" pitchFamily="34" charset="-122"/>
-                <a:cs typeface="Inter" pitchFamily="34" charset="-120"/>
+                <a:latin typeface="Calibri" pitchFamily="34" charset="0"/>
+                <a:ea typeface="Microsoft YaHei UI" pitchFamily="34" charset="-122"/>
+                <a:cs typeface="Calibri" pitchFamily="34" charset="-120"/>
               </a:rPr>
               <a:t>
 </a:t>
@@ -11199,9 +11199,9 @@
                 <a:solidFill>
                   <a:srgbClr val="22C55E"/>
                 </a:solidFill>
-                <a:latin typeface="Inter" pitchFamily="34" charset="0"/>
-                <a:ea typeface="Inter" pitchFamily="34" charset="-122"/>
-                <a:cs typeface="Inter" pitchFamily="34" charset="-120"/>
+                <a:latin typeface="Calibri" pitchFamily="34" charset="0"/>
+                <a:ea typeface="Microsoft YaHei UI" pitchFamily="34" charset="-122"/>
+                <a:cs typeface="Calibri" pitchFamily="34" charset="-120"/>
               </a:rPr>
               <a:t>获客页面 + 引导文案</a:t>
             </a:r>
@@ -11245,9 +11245,9 @@
                     <a:alpha val="15000"/>
                   </a:srgbClr>
                 </a:solidFill>
-                <a:latin typeface="Inter" pitchFamily="34" charset="0"/>
-                <a:ea typeface="Inter" pitchFamily="34" charset="-122"/>
-                <a:cs typeface="Inter" pitchFamily="34" charset="-120"/>
+                <a:latin typeface="Calibri" pitchFamily="34" charset="0"/>
+                <a:ea typeface="Microsoft YaHei UI" pitchFamily="34" charset="-122"/>
+                <a:cs typeface="Calibri" pitchFamily="34" charset="-120"/>
               </a:rPr>
               <a:t>—</a:t>
             </a:r>
@@ -11291,9 +11291,9 @@
                     <a:alpha val="15000"/>
                   </a:srgbClr>
                 </a:solidFill>
-                <a:latin typeface="Inter" pitchFamily="34" charset="0"/>
-                <a:ea typeface="Inter" pitchFamily="34" charset="-122"/>
-                <a:cs typeface="Inter" pitchFamily="34" charset="-120"/>
+                <a:latin typeface="Calibri" pitchFamily="34" charset="0"/>
+                <a:ea typeface="Microsoft YaHei UI" pitchFamily="34" charset="-122"/>
+                <a:cs typeface="Calibri" pitchFamily="34" charset="-120"/>
               </a:rPr>
               <a:t>—</a:t>
             </a:r>
@@ -11335,9 +11335,9 @@
                 <a:solidFill>
                   <a:srgbClr val="8B949E"/>
                 </a:solidFill>
-                <a:latin typeface="Inter" pitchFamily="34" charset="0"/>
-                <a:ea typeface="Inter" pitchFamily="34" charset="-122"/>
-                <a:cs typeface="Inter" pitchFamily="34" charset="-120"/>
+                <a:latin typeface="Calibri" pitchFamily="34" charset="0"/>
+                <a:ea typeface="Microsoft YaHei UI" pitchFamily="34" charset="-122"/>
+                <a:cs typeface="Calibri" pitchFamily="34" charset="-120"/>
               </a:rPr>
               <a:t>Phase 2</a:t>
             </a:r>
@@ -11381,9 +11381,9 @@
                     <a:alpha val="15000"/>
                   </a:srgbClr>
                 </a:solidFill>
-                <a:latin typeface="Inter" pitchFamily="34" charset="0"/>
-                <a:ea typeface="Inter" pitchFamily="34" charset="-122"/>
-                <a:cs typeface="Inter" pitchFamily="34" charset="-120"/>
+                <a:latin typeface="Calibri" pitchFamily="34" charset="0"/>
+                <a:ea typeface="Microsoft YaHei UI" pitchFamily="34" charset="-122"/>
+                <a:cs typeface="Calibri" pitchFamily="34" charset="-120"/>
               </a:rPr>
               <a:t>—</a:t>
             </a:r>
@@ -11427,9 +11427,9 @@
                     <a:alpha val="15000"/>
                   </a:srgbClr>
                 </a:solidFill>
-                <a:latin typeface="Inter" pitchFamily="34" charset="0"/>
-                <a:ea typeface="Inter" pitchFamily="34" charset="-122"/>
-                <a:cs typeface="Inter" pitchFamily="34" charset="-120"/>
+                <a:latin typeface="Calibri" pitchFamily="34" charset="0"/>
+                <a:ea typeface="Microsoft YaHei UI" pitchFamily="34" charset="-122"/>
+                <a:cs typeface="Calibri" pitchFamily="34" charset="-120"/>
               </a:rPr>
               <a:t>—</a:t>
             </a:r>
@@ -11500,9 +11500,9 @@
                 <a:solidFill>
                   <a:srgbClr val="00D4FF"/>
                 </a:solidFill>
-                <a:latin typeface="Inter" pitchFamily="34" charset="0"/>
-                <a:ea typeface="Inter" pitchFamily="34" charset="-122"/>
-                <a:cs typeface="Inter" pitchFamily="34" charset="-120"/>
+                <a:latin typeface="Calibri" pitchFamily="34" charset="0"/>
+                <a:ea typeface="Microsoft YaHei UI" pitchFamily="34" charset="-122"/>
+                <a:cs typeface="Calibri" pitchFamily="34" charset="-120"/>
               </a:rPr>
               <a:t>② 混合制作工作流</a:t>
             </a:r>
@@ -11517,9 +11517,9 @@
                 <a:solidFill>
                   <a:srgbClr val="00D4FF"/>
                 </a:solidFill>
-                <a:latin typeface="Inter" pitchFamily="34" charset="0"/>
-                <a:ea typeface="Inter" pitchFamily="34" charset="-122"/>
-                <a:cs typeface="Inter" pitchFamily="34" charset="-120"/>
+                <a:latin typeface="Calibri" pitchFamily="34" charset="0"/>
+                <a:ea typeface="Microsoft YaHei UI" pitchFamily="34" charset="-122"/>
+                <a:cs typeface="Calibri" pitchFamily="34" charset="-120"/>
               </a:rPr>
               <a:t>
 </a:t>
@@ -11535,9 +11535,9 @@
                 <a:solidFill>
                   <a:srgbClr val="00D4FF"/>
                 </a:solidFill>
-                <a:latin typeface="Inter" pitchFamily="34" charset="0"/>
-                <a:ea typeface="Inter" pitchFamily="34" charset="-122"/>
-                <a:cs typeface="Inter" pitchFamily="34" charset="-120"/>
+                <a:latin typeface="Calibri" pitchFamily="34" charset="0"/>
+                <a:ea typeface="Microsoft YaHei UI" pitchFamily="34" charset="-122"/>
+                <a:cs typeface="Calibri" pitchFamily="34" charset="-120"/>
               </a:rPr>
               <a:t>口播脚本 + AI 剪辑辅助</a:t>
             </a:r>
@@ -11608,9 +11608,9 @@
                 <a:solidFill>
                   <a:srgbClr val="00D4FF"/>
                 </a:solidFill>
-                <a:latin typeface="Inter" pitchFamily="34" charset="0"/>
-                <a:ea typeface="Inter" pitchFamily="34" charset="-122"/>
-                <a:cs typeface="Inter" pitchFamily="34" charset="-120"/>
+                <a:latin typeface="Calibri" pitchFamily="34" charset="0"/>
+                <a:ea typeface="Microsoft YaHei UI" pitchFamily="34" charset="-122"/>
+                <a:cs typeface="Calibri" pitchFamily="34" charset="-120"/>
               </a:rPr>
               <a:t>③ AI 数字人集成</a:t>
             </a:r>
@@ -11625,9 +11625,9 @@
                 <a:solidFill>
                   <a:srgbClr val="00D4FF"/>
                 </a:solidFill>
-                <a:latin typeface="Inter" pitchFamily="34" charset="0"/>
-                <a:ea typeface="Inter" pitchFamily="34" charset="-122"/>
-                <a:cs typeface="Inter" pitchFamily="34" charset="-120"/>
+                <a:latin typeface="Calibri" pitchFamily="34" charset="0"/>
+                <a:ea typeface="Microsoft YaHei UI" pitchFamily="34" charset="-122"/>
+                <a:cs typeface="Calibri" pitchFamily="34" charset="-120"/>
               </a:rPr>
               <a:t>
 </a:t>
@@ -11643,9 +11643,9 @@
                 <a:solidFill>
                   <a:srgbClr val="00D4FF"/>
                 </a:solidFill>
-                <a:latin typeface="Inter" pitchFamily="34" charset="0"/>
-                <a:ea typeface="Inter" pitchFamily="34" charset="-122"/>
-                <a:cs typeface="Inter" pitchFamily="34" charset="-120"/>
+                <a:latin typeface="Calibri" pitchFamily="34" charset="0"/>
+                <a:ea typeface="Microsoft YaHei UI" pitchFamily="34" charset="-122"/>
+                <a:cs typeface="Calibri" pitchFamily="34" charset="-120"/>
               </a:rPr>
               <a:t>HeyGen / 腾讯智影 API</a:t>
             </a:r>
@@ -11687,9 +11687,9 @@
                 <a:solidFill>
                   <a:srgbClr val="8B949E"/>
                 </a:solidFill>
-                <a:latin typeface="Inter" pitchFamily="34" charset="0"/>
-                <a:ea typeface="Inter" pitchFamily="34" charset="-122"/>
-                <a:cs typeface="Inter" pitchFamily="34" charset="-120"/>
+                <a:latin typeface="Calibri" pitchFamily="34" charset="0"/>
+                <a:ea typeface="Microsoft YaHei UI" pitchFamily="34" charset="-122"/>
+                <a:cs typeface="Calibri" pitchFamily="34" charset="-120"/>
               </a:rPr>
               <a:t>Phase 3</a:t>
             </a:r>
@@ -11733,9 +11733,9 @@
                     <a:alpha val="15000"/>
                   </a:srgbClr>
                 </a:solidFill>
-                <a:latin typeface="Inter" pitchFamily="34" charset="0"/>
-                <a:ea typeface="Inter" pitchFamily="34" charset="-122"/>
-                <a:cs typeface="Inter" pitchFamily="34" charset="-120"/>
+                <a:latin typeface="Calibri" pitchFamily="34" charset="0"/>
+                <a:ea typeface="Microsoft YaHei UI" pitchFamily="34" charset="-122"/>
+                <a:cs typeface="Calibri" pitchFamily="34" charset="-120"/>
               </a:rPr>
               <a:t>—</a:t>
             </a:r>
@@ -11779,9 +11779,9 @@
                     <a:alpha val="15000"/>
                   </a:srgbClr>
                 </a:solidFill>
-                <a:latin typeface="Inter" pitchFamily="34" charset="0"/>
-                <a:ea typeface="Inter" pitchFamily="34" charset="-122"/>
-                <a:cs typeface="Inter" pitchFamily="34" charset="-120"/>
+                <a:latin typeface="Calibri" pitchFamily="34" charset="0"/>
+                <a:ea typeface="Microsoft YaHei UI" pitchFamily="34" charset="-122"/>
+                <a:cs typeface="Calibri" pitchFamily="34" charset="-120"/>
               </a:rPr>
               <a:t>—</a:t>
             </a:r>
@@ -11825,9 +11825,9 @@
                     <a:alpha val="15000"/>
                   </a:srgbClr>
                 </a:solidFill>
-                <a:latin typeface="Inter" pitchFamily="34" charset="0"/>
-                <a:ea typeface="Inter" pitchFamily="34" charset="-122"/>
-                <a:cs typeface="Inter" pitchFamily="34" charset="-120"/>
+                <a:latin typeface="Calibri" pitchFamily="34" charset="0"/>
+                <a:ea typeface="Microsoft YaHei UI" pitchFamily="34" charset="-122"/>
+                <a:cs typeface="Calibri" pitchFamily="34" charset="-120"/>
               </a:rPr>
               <a:t>—</a:t>
             </a:r>
@@ -11898,9 +11898,9 @@
                 <a:solidFill>
                   <a:srgbClr val="A78BFA"/>
                 </a:solidFill>
-                <a:latin typeface="Inter" pitchFamily="34" charset="0"/>
-                <a:ea typeface="Inter" pitchFamily="34" charset="-122"/>
-                <a:cs typeface="Inter" pitchFamily="34" charset="-120"/>
+                <a:latin typeface="Calibri" pitchFamily="34" charset="0"/>
+                <a:ea typeface="Microsoft YaHei UI" pitchFamily="34" charset="-122"/>
+                <a:cs typeface="Calibri" pitchFamily="34" charset="-120"/>
               </a:rPr>
               <a:t>④ AI 虚拟 IP 形象</a:t>
             </a:r>
@@ -11915,9 +11915,9 @@
                 <a:solidFill>
                   <a:srgbClr val="A78BFA"/>
                 </a:solidFill>
-                <a:latin typeface="Inter" pitchFamily="34" charset="0"/>
-                <a:ea typeface="Inter" pitchFamily="34" charset="-122"/>
-                <a:cs typeface="Inter" pitchFamily="34" charset="-120"/>
+                <a:latin typeface="Calibri" pitchFamily="34" charset="0"/>
+                <a:ea typeface="Microsoft YaHei UI" pitchFamily="34" charset="-122"/>
+                <a:cs typeface="Calibri" pitchFamily="34" charset="-120"/>
               </a:rPr>
               <a:t>
 </a:t>
@@ -11933,9 +11933,9 @@
                 <a:solidFill>
                   <a:srgbClr val="A78BFA"/>
                 </a:solidFill>
-                <a:latin typeface="Inter" pitchFamily="34" charset="0"/>
-                <a:ea typeface="Inter" pitchFamily="34" charset="-122"/>
-                <a:cs typeface="Inter" pitchFamily="34" charset="-120"/>
+                <a:latin typeface="Calibri" pitchFamily="34" charset="0"/>
+                <a:ea typeface="Microsoft YaHei UI" pitchFamily="34" charset="-122"/>
+                <a:cs typeface="Calibri" pitchFamily="34" charset="-120"/>
               </a:rPr>
               <a:t>专属卡通形象生成系统</a:t>
             </a:r>
@@ -12025,9 +12025,9 @@
                 <a:solidFill>
                   <a:srgbClr val="FFFFFF"/>
                 </a:solidFill>
-                <a:latin typeface="Inter" pitchFamily="34" charset="0"/>
-                <a:ea typeface="Inter" pitchFamily="34" charset="-122"/>
-                <a:cs typeface="Inter" pitchFamily="34" charset="-120"/>
+                <a:latin typeface="Calibri" pitchFamily="34" charset="0"/>
+                <a:ea typeface="Microsoft YaHei UI" pitchFamily="34" charset="-122"/>
+                <a:cs typeface="Calibri" pitchFamily="34" charset="-120"/>
               </a:rPr>
               <a:t>核心判断：</a:t>
             </a:r>
@@ -12044,9 +12044,9 @@
                     <a:alpha val="60000"/>
                   </a:srgbClr>
                 </a:solidFill>
-                <a:latin typeface="Inter" pitchFamily="34" charset="0"/>
-                <a:ea typeface="Inter" pitchFamily="34" charset="-122"/>
-                <a:cs typeface="Inter" pitchFamily="34" charset="-120"/>
+                <a:latin typeface="Calibri" pitchFamily="34" charset="0"/>
+                <a:ea typeface="Microsoft YaHei UI" pitchFamily="34" charset="-122"/>
+                <a:cs typeface="Calibri" pitchFamily="34" charset="-120"/>
               </a:rPr>
               <a:t>近期聚焦「差异化定位 + 混合模式工作流」，中期接入数字人 API——而非试图用纯 AI 视频完全替代真人出镜。真人 IP 与 AI 内容是</a:t>
             </a:r>
@@ -12061,9 +12061,9 @@
                 <a:solidFill>
                   <a:srgbClr val="FFFFFF"/>
                 </a:solidFill>
-                <a:latin typeface="Inter" pitchFamily="34" charset="0"/>
-                <a:ea typeface="Inter" pitchFamily="34" charset="-122"/>
-                <a:cs typeface="Inter" pitchFamily="34" charset="-120"/>
+                <a:latin typeface="Calibri" pitchFamily="34" charset="0"/>
+                <a:ea typeface="Microsoft YaHei UI" pitchFamily="34" charset="-122"/>
+                <a:cs typeface="Calibri" pitchFamily="34" charset="-120"/>
               </a:rPr>
               <a:t>互补关系</a:t>
             </a:r>
@@ -12080,9 +12080,9 @@
                     <a:alpha val="60000"/>
                   </a:srgbClr>
                 </a:solidFill>
-                <a:latin typeface="Inter" pitchFamily="34" charset="0"/>
-                <a:ea typeface="Inter" pitchFamily="34" charset="-122"/>
-                <a:cs typeface="Inter" pitchFamily="34" charset="-120"/>
+                <a:latin typeface="Calibri" pitchFamily="34" charset="0"/>
+                <a:ea typeface="Microsoft YaHei UI" pitchFamily="34" charset="-122"/>
+                <a:cs typeface="Calibri" pitchFamily="34" charset="-120"/>
               </a:rPr>
               <a:t>，笔灵的价值在于让两种模式都更高效。</a:t>
             </a:r>
@@ -12284,9 +12284,9 @@
                 <a:solidFill>
                   <a:srgbClr val="5050A0"/>
                 </a:solidFill>
-                <a:latin typeface="Inter" pitchFamily="34" charset="0"/>
-                <a:ea typeface="Inter" pitchFamily="34" charset="-122"/>
-                <a:cs typeface="Inter" pitchFamily="34" charset="-120"/>
+                <a:latin typeface="Calibri" pitchFamily="34" charset="0"/>
+                <a:ea typeface="Microsoft YaHei UI" pitchFamily="34" charset="-122"/>
+                <a:cs typeface="Calibri" pitchFamily="34" charset="-120"/>
               </a:rPr>
               <a:t>BILING · COMPETITIVE ADVANTAGE</a:t>
             </a:r>
@@ -12357,9 +12357,9 @@
                 <a:solidFill>
                   <a:srgbClr val="7C3AED"/>
                 </a:solidFill>
-                <a:latin typeface="Inter" pitchFamily="34" charset="0"/>
-                <a:ea typeface="Inter" pitchFamily="34" charset="-122"/>
-                <a:cs typeface="Inter" pitchFamily="34" charset="-120"/>
+                <a:latin typeface="Calibri" pitchFamily="34" charset="0"/>
+                <a:ea typeface="Microsoft YaHei UI" pitchFamily="34" charset="-122"/>
+                <a:cs typeface="Calibri" pitchFamily="34" charset="-120"/>
               </a:rPr>
               <a:t>01</a:t>
             </a:r>
@@ -12628,9 +12628,9 @@
                 <a:solidFill>
                   <a:srgbClr val="7C3AED"/>
                 </a:solidFill>
-                <a:latin typeface="Inter" pitchFamily="34" charset="0"/>
-                <a:ea typeface="Inter" pitchFamily="34" charset="-122"/>
-                <a:cs typeface="Inter" pitchFamily="34" charset="-120"/>
+                <a:latin typeface="Calibri" pitchFamily="34" charset="0"/>
+                <a:ea typeface="Microsoft YaHei UI" pitchFamily="34" charset="-122"/>
+                <a:cs typeface="Calibri" pitchFamily="34" charset="-120"/>
               </a:rPr>
               <a:t>02</a:t>
             </a:r>
@@ -12899,9 +12899,9 @@
                 <a:solidFill>
                   <a:srgbClr val="7C3AED"/>
                 </a:solidFill>
-                <a:latin typeface="Inter" pitchFamily="34" charset="0"/>
-                <a:ea typeface="Inter" pitchFamily="34" charset="-122"/>
-                <a:cs typeface="Inter" pitchFamily="34" charset="-120"/>
+                <a:latin typeface="Calibri" pitchFamily="34" charset="0"/>
+                <a:ea typeface="Microsoft YaHei UI" pitchFamily="34" charset="-122"/>
+                <a:cs typeface="Calibri" pitchFamily="34" charset="-120"/>
               </a:rPr>
               <a:t>03</a:t>
             </a:r>
@@ -13170,9 +13170,9 @@
                 <a:solidFill>
                   <a:srgbClr val="7C3AED"/>
                 </a:solidFill>
-                <a:latin typeface="Inter" pitchFamily="34" charset="0"/>
-                <a:ea typeface="Inter" pitchFamily="34" charset="-122"/>
-                <a:cs typeface="Inter" pitchFamily="34" charset="-120"/>
+                <a:latin typeface="Calibri" pitchFamily="34" charset="0"/>
+                <a:ea typeface="Microsoft YaHei UI" pitchFamily="34" charset="-122"/>
+                <a:cs typeface="Calibri" pitchFamily="34" charset="-120"/>
               </a:rPr>
               <a:t>04</a:t>
             </a:r>
@@ -13441,9 +13441,9 @@
                 <a:solidFill>
                   <a:srgbClr val="7C3AED"/>
                 </a:solidFill>
-                <a:latin typeface="Inter" pitchFamily="34" charset="0"/>
-                <a:ea typeface="Inter" pitchFamily="34" charset="-122"/>
-                <a:cs typeface="Inter" pitchFamily="34" charset="-120"/>
+                <a:latin typeface="Calibri" pitchFamily="34" charset="0"/>
+                <a:ea typeface="Microsoft YaHei UI" pitchFamily="34" charset="-122"/>
+                <a:cs typeface="Calibri" pitchFamily="34" charset="-120"/>
               </a:rPr>
               <a:t>05</a:t>
             </a:r>
@@ -13813,9 +13813,9 @@
                 <a:solidFill>
                   <a:srgbClr val="5050A0"/>
                 </a:solidFill>
-                <a:latin typeface="Inter" pitchFamily="34" charset="0"/>
-                <a:ea typeface="Inter" pitchFamily="34" charset="-122"/>
-                <a:cs typeface="Inter" pitchFamily="34" charset="-120"/>
+                <a:latin typeface="Calibri" pitchFamily="34" charset="0"/>
+                <a:ea typeface="Microsoft YaHei UI" pitchFamily="34" charset="-122"/>
+                <a:cs typeface="Calibri" pitchFamily="34" charset="-120"/>
               </a:rPr>
               <a:t>BILING · 2025</a:t>
             </a:r>
@@ -16336,9 +16336,9 @@
                 <a:solidFill>
                   <a:srgbClr val="7C3AED"/>
                 </a:solidFill>
-                <a:latin typeface="Space Grotesk" pitchFamily="34" charset="0"/>
-                <a:ea typeface="Space Grotesk" pitchFamily="34" charset="-122"/>
-                <a:cs typeface="Space Grotesk" pitchFamily="34" charset="-120"/>
+                <a:latin typeface="Calibri" pitchFamily="34" charset="0"/>
+                <a:ea typeface="Microsoft YaHei UI" pitchFamily="34" charset="-122"/>
+                <a:cs typeface="Calibri" pitchFamily="34" charset="-120"/>
               </a:rPr>
               <a:t>ACTION PLAN · 执行路径</a:t>
             </a:r>
@@ -16380,9 +16380,9 @@
                 <a:solidFill>
                   <a:srgbClr val="06B6D4"/>
                 </a:solidFill>
-                <a:latin typeface="Space Grotesk" pitchFamily="34" charset="0"/>
-                <a:ea typeface="Space Grotesk" pitchFamily="34" charset="-122"/>
-                <a:cs typeface="Space Grotesk" pitchFamily="34" charset="-120"/>
+                <a:latin typeface="Calibri" pitchFamily="34" charset="0"/>
+                <a:ea typeface="Microsoft YaHei UI" pitchFamily="34" charset="-122"/>
+                <a:cs typeface="Calibri" pitchFamily="34" charset="-120"/>
               </a:rPr>
               <a:t>下一步</a:t>
             </a:r>
@@ -16397,9 +16397,9 @@
                 <a:solidFill>
                   <a:srgbClr val="06B6D4"/>
                 </a:solidFill>
-                <a:latin typeface="Space Grotesk" pitchFamily="34" charset="0"/>
-                <a:ea typeface="Space Grotesk" pitchFamily="34" charset="-122"/>
-                <a:cs typeface="Space Grotesk" pitchFamily="34" charset="-120"/>
+                <a:latin typeface="Calibri" pitchFamily="34" charset="0"/>
+                <a:ea typeface="Microsoft YaHei UI" pitchFamily="34" charset="-122"/>
+                <a:cs typeface="Calibri" pitchFamily="34" charset="-120"/>
               </a:rPr>
               <a:t>关键决策</a:t>
             </a:r>
@@ -16441,9 +16441,9 @@
                 <a:solidFill>
                   <a:srgbClr val="8888AA"/>
                 </a:solidFill>
-                <a:latin typeface="Inter" pitchFamily="34" charset="0"/>
-                <a:ea typeface="Inter" pitchFamily="34" charset="-122"/>
-                <a:cs typeface="Inter" pitchFamily="34" charset="-120"/>
+                <a:latin typeface="Calibri" pitchFamily="34" charset="0"/>
+                <a:ea typeface="Microsoft YaHei UI" pitchFamily="34" charset="-122"/>
+                <a:cs typeface="Calibri" pitchFamily="34" charset="-120"/>
               </a:rPr>
               <a:t>五个优先级最高的执行节点，决定笔灵能否在 90 天内跑通核心闭环</a:t>
             </a:r>
@@ -16529,9 +16529,9 @@
                     <a:alpha val="25000"/>
                   </a:srgbClr>
                 </a:solidFill>
-                <a:latin typeface="Space Grotesk" pitchFamily="34" charset="0"/>
-                <a:ea typeface="Space Grotesk" pitchFamily="34" charset="-122"/>
-                <a:cs typeface="Space Grotesk" pitchFamily="34" charset="-120"/>
+                <a:latin typeface="Calibri" pitchFamily="34" charset="0"/>
+                <a:ea typeface="Microsoft YaHei UI" pitchFamily="34" charset="-122"/>
+                <a:cs typeface="Calibri" pitchFamily="34" charset="-120"/>
               </a:rPr>
               <a:t>01</a:t>
             </a:r>
@@ -16573,9 +16573,9 @@
                 <a:solidFill>
                   <a:srgbClr val="E0E0FF"/>
                 </a:solidFill>
-                <a:latin typeface="Space Grotesk" pitchFamily="34" charset="0"/>
-                <a:ea typeface="Space Grotesk" pitchFamily="34" charset="-122"/>
-                <a:cs typeface="Space Grotesk" pitchFamily="34" charset="-120"/>
+                <a:latin typeface="Calibri" pitchFamily="34" charset="0"/>
+                <a:ea typeface="Microsoft YaHei UI" pitchFamily="34" charset="-122"/>
+                <a:cs typeface="Calibri" pitchFamily="34" charset="-120"/>
               </a:rPr>
               <a:t>平台优先级</a:t>
             </a:r>
@@ -16639,9 +16639,9 @@
                 <a:solidFill>
                   <a:srgbClr val="7C3AED"/>
                 </a:solidFill>
-                <a:latin typeface="Inter" pitchFamily="34" charset="0"/>
-                <a:ea typeface="Inter" pitchFamily="34" charset="-122"/>
-                <a:cs typeface="Inter" pitchFamily="34" charset="-120"/>
+                <a:latin typeface="Calibri" pitchFamily="34" charset="0"/>
+                <a:ea typeface="Microsoft YaHei UI" pitchFamily="34" charset="-122"/>
+                <a:cs typeface="Calibri" pitchFamily="34" charset="-120"/>
               </a:rPr>
               <a:t>聚焦 → 扩展</a:t>
             </a:r>
@@ -16683,9 +16683,9 @@
                 <a:solidFill>
                   <a:srgbClr val="444466"/>
                 </a:solidFill>
-                <a:latin typeface="Inter" pitchFamily="34" charset="0"/>
-                <a:ea typeface="Inter" pitchFamily="34" charset="-122"/>
-                <a:cs typeface="Inter" pitchFamily="34" charset="-120"/>
+                <a:latin typeface="Calibri" pitchFamily="34" charset="0"/>
+                <a:ea typeface="Microsoft YaHei UI" pitchFamily="34" charset="-122"/>
+                <a:cs typeface="Calibri" pitchFamily="34" charset="-120"/>
               </a:rPr>
               <a:t>—</a:t>
             </a:r>
@@ -16727,9 +16727,9 @@
                 <a:solidFill>
                   <a:srgbClr val="9999BB"/>
                 </a:solidFill>
-                <a:latin typeface="Inter" pitchFamily="34" charset="0"/>
-                <a:ea typeface="Inter" pitchFamily="34" charset="-122"/>
-                <a:cs typeface="Inter" pitchFamily="34" charset="-120"/>
+                <a:latin typeface="Calibri" pitchFamily="34" charset="0"/>
+                <a:ea typeface="Microsoft YaHei UI" pitchFamily="34" charset="-122"/>
+                <a:cs typeface="Calibri" pitchFamily="34" charset="-120"/>
               </a:rPr>
               <a:t>Phase 1 聚焦小红书 + 抖音双平台</a:t>
             </a:r>
@@ -16771,9 +16771,9 @@
                 <a:solidFill>
                   <a:srgbClr val="444466"/>
                 </a:solidFill>
-                <a:latin typeface="Inter" pitchFamily="34" charset="0"/>
-                <a:ea typeface="Inter" pitchFamily="34" charset="-122"/>
-                <a:cs typeface="Inter" pitchFamily="34" charset="-120"/>
+                <a:latin typeface="Calibri" pitchFamily="34" charset="0"/>
+                <a:ea typeface="Microsoft YaHei UI" pitchFamily="34" charset="-122"/>
+                <a:cs typeface="Calibri" pitchFamily="34" charset="-120"/>
               </a:rPr>
               <a:t>—</a:t>
             </a:r>
@@ -16815,9 +16815,9 @@
                 <a:solidFill>
                   <a:srgbClr val="9999BB"/>
                 </a:solidFill>
-                <a:latin typeface="Inter" pitchFamily="34" charset="0"/>
-                <a:ea typeface="Inter" pitchFamily="34" charset="-122"/>
-                <a:cs typeface="Inter" pitchFamily="34" charset="-120"/>
+                <a:latin typeface="Calibri" pitchFamily="34" charset="0"/>
+                <a:ea typeface="Microsoft YaHei UI" pitchFamily="34" charset="-122"/>
+                <a:cs typeface="Calibri" pitchFamily="34" charset="-120"/>
               </a:rPr>
               <a:t>验证 PMF 后扩展微博、B站、视频号</a:t>
             </a:r>
@@ -16859,9 +16859,9 @@
                 <a:solidFill>
                   <a:srgbClr val="444466"/>
                 </a:solidFill>
-                <a:latin typeface="Inter" pitchFamily="34" charset="0"/>
-                <a:ea typeface="Inter" pitchFamily="34" charset="-122"/>
-                <a:cs typeface="Inter" pitchFamily="34" charset="-120"/>
+                <a:latin typeface="Calibri" pitchFamily="34" charset="0"/>
+                <a:ea typeface="Microsoft YaHei UI" pitchFamily="34" charset="-122"/>
+                <a:cs typeface="Calibri" pitchFamily="34" charset="-120"/>
               </a:rPr>
               <a:t>—</a:t>
             </a:r>
@@ -16903,9 +16903,9 @@
                 <a:solidFill>
                   <a:srgbClr val="9999BB"/>
                 </a:solidFill>
-                <a:latin typeface="Inter" pitchFamily="34" charset="0"/>
-                <a:ea typeface="Inter" pitchFamily="34" charset="-122"/>
-                <a:cs typeface="Inter" pitchFamily="34" charset="-120"/>
+                <a:latin typeface="Calibri" pitchFamily="34" charset="0"/>
+                <a:ea typeface="Microsoft YaHei UI" pitchFamily="34" charset="-122"/>
+                <a:cs typeface="Calibri" pitchFamily="34" charset="-120"/>
               </a:rPr>
               <a:t>各平台内容格式差异化适配</a:t>
             </a:r>
@@ -16991,9 +16991,9 @@
                     <a:alpha val="25000"/>
                   </a:srgbClr>
                 </a:solidFill>
-                <a:latin typeface="Space Grotesk" pitchFamily="34" charset="0"/>
-                <a:ea typeface="Space Grotesk" pitchFamily="34" charset="-122"/>
-                <a:cs typeface="Space Grotesk" pitchFamily="34" charset="-120"/>
+                <a:latin typeface="Calibri" pitchFamily="34" charset="0"/>
+                <a:ea typeface="Microsoft YaHei UI" pitchFamily="34" charset="-122"/>
+                <a:cs typeface="Calibri" pitchFamily="34" charset="-120"/>
               </a:rPr>
               <a:t>02</a:t>
             </a:r>
@@ -17035,9 +17035,9 @@
                 <a:solidFill>
                   <a:srgbClr val="E0E0FF"/>
                 </a:solidFill>
-                <a:latin typeface="Space Grotesk" pitchFamily="34" charset="0"/>
-                <a:ea typeface="Space Grotesk" pitchFamily="34" charset="-122"/>
-                <a:cs typeface="Space Grotesk" pitchFamily="34" charset="-120"/>
+                <a:latin typeface="Calibri" pitchFamily="34" charset="0"/>
+                <a:ea typeface="Microsoft YaHei UI" pitchFamily="34" charset="-122"/>
+                <a:cs typeface="Calibri" pitchFamily="34" charset="-120"/>
               </a:rPr>
               <a:t>定价策略</a:t>
             </a:r>
@@ -17101,9 +17101,9 @@
                 <a:solidFill>
                   <a:srgbClr val="06B6D4"/>
                 </a:solidFill>
-                <a:latin typeface="Inter" pitchFamily="34" charset="0"/>
-                <a:ea typeface="Inter" pitchFamily="34" charset="-122"/>
-                <a:cs typeface="Inter" pitchFamily="34" charset="-120"/>
+                <a:latin typeface="Calibri" pitchFamily="34" charset="0"/>
+                <a:ea typeface="Microsoft YaHei UI" pitchFamily="34" charset="-122"/>
+                <a:cs typeface="Calibri" pitchFamily="34" charset="-120"/>
               </a:rPr>
               <a:t>免费 + 订阅</a:t>
             </a:r>
@@ -17145,9 +17145,9 @@
                 <a:solidFill>
                   <a:srgbClr val="444466"/>
                 </a:solidFill>
-                <a:latin typeface="Inter" pitchFamily="34" charset="0"/>
-                <a:ea typeface="Inter" pitchFamily="34" charset="-122"/>
-                <a:cs typeface="Inter" pitchFamily="34" charset="-120"/>
+                <a:latin typeface="Calibri" pitchFamily="34" charset="0"/>
+                <a:ea typeface="Microsoft YaHei UI" pitchFamily="34" charset="-122"/>
+                <a:cs typeface="Calibri" pitchFamily="34" charset="-120"/>
               </a:rPr>
               <a:t>—</a:t>
             </a:r>
@@ -17189,9 +17189,9 @@
                 <a:solidFill>
                   <a:srgbClr val="9999BB"/>
                 </a:solidFill>
-                <a:latin typeface="Inter" pitchFamily="34" charset="0"/>
-                <a:ea typeface="Inter" pitchFamily="34" charset="-122"/>
-                <a:cs typeface="Inter" pitchFamily="34" charset="-120"/>
+                <a:latin typeface="Calibri" pitchFamily="34" charset="0"/>
+                <a:ea typeface="Microsoft YaHei UI" pitchFamily="34" charset="-122"/>
+                <a:cs typeface="Calibri" pitchFamily="34" charset="-120"/>
               </a:rPr>
               <a:t>免费版：每月 10 次 AI 生成额度</a:t>
             </a:r>
@@ -17233,9 +17233,9 @@
                 <a:solidFill>
                   <a:srgbClr val="444466"/>
                 </a:solidFill>
-                <a:latin typeface="Inter" pitchFamily="34" charset="0"/>
-                <a:ea typeface="Inter" pitchFamily="34" charset="-122"/>
-                <a:cs typeface="Inter" pitchFamily="34" charset="-120"/>
+                <a:latin typeface="Calibri" pitchFamily="34" charset="0"/>
+                <a:ea typeface="Microsoft YaHei UI" pitchFamily="34" charset="-122"/>
+                <a:cs typeface="Calibri" pitchFamily="34" charset="-120"/>
               </a:rPr>
               <a:t>—</a:t>
             </a:r>
@@ -17277,9 +17277,9 @@
                 <a:solidFill>
                   <a:srgbClr val="9999BB"/>
                 </a:solidFill>
-                <a:latin typeface="Inter" pitchFamily="34" charset="0"/>
-                <a:ea typeface="Inter" pitchFamily="34" charset="-122"/>
-                <a:cs typeface="Inter" pitchFamily="34" charset="-120"/>
+                <a:latin typeface="Calibri" pitchFamily="34" charset="0"/>
+                <a:ea typeface="Microsoft YaHei UI" pitchFamily="34" charset="-122"/>
+                <a:cs typeface="Calibri" pitchFamily="34" charset="-120"/>
               </a:rPr>
               <a:t>Pro 月付 ¥99 / 年付 ¥799</a:t>
             </a:r>
@@ -17321,9 +17321,9 @@
                 <a:solidFill>
                   <a:srgbClr val="444466"/>
                 </a:solidFill>
-                <a:latin typeface="Inter" pitchFamily="34" charset="0"/>
-                <a:ea typeface="Inter" pitchFamily="34" charset="-122"/>
-                <a:cs typeface="Inter" pitchFamily="34" charset="-120"/>
+                <a:latin typeface="Calibri" pitchFamily="34" charset="0"/>
+                <a:ea typeface="Microsoft YaHei UI" pitchFamily="34" charset="-122"/>
+                <a:cs typeface="Calibri" pitchFamily="34" charset="-120"/>
               </a:rPr>
               <a:t>—</a:t>
             </a:r>
@@ -17365,9 +17365,9 @@
                 <a:solidFill>
                   <a:srgbClr val="9999BB"/>
                 </a:solidFill>
-                <a:latin typeface="Inter" pitchFamily="34" charset="0"/>
-                <a:ea typeface="Inter" pitchFamily="34" charset="-122"/>
-                <a:cs typeface="Inter" pitchFamily="34" charset="-120"/>
+                <a:latin typeface="Calibri" pitchFamily="34" charset="0"/>
+                <a:ea typeface="Microsoft YaHei UI" pitchFamily="34" charset="-122"/>
+                <a:cs typeface="Calibri" pitchFamily="34" charset="-120"/>
               </a:rPr>
               <a:t>团队版按席位定价，含 API 接入</a:t>
             </a:r>
@@ -17453,9 +17453,9 @@
                     <a:alpha val="25000"/>
                   </a:srgbClr>
                 </a:solidFill>
-                <a:latin typeface="Space Grotesk" pitchFamily="34" charset="0"/>
-                <a:ea typeface="Space Grotesk" pitchFamily="34" charset="-122"/>
-                <a:cs typeface="Space Grotesk" pitchFamily="34" charset="-120"/>
+                <a:latin typeface="Calibri" pitchFamily="34" charset="0"/>
+                <a:ea typeface="Microsoft YaHei UI" pitchFamily="34" charset="-122"/>
+                <a:cs typeface="Calibri" pitchFamily="34" charset="-120"/>
               </a:rPr>
               <a:t>03</a:t>
             </a:r>
@@ -17497,9 +17497,9 @@
                 <a:solidFill>
                   <a:srgbClr val="E0E0FF"/>
                 </a:solidFill>
-                <a:latin typeface="Space Grotesk" pitchFamily="34" charset="0"/>
-                <a:ea typeface="Space Grotesk" pitchFamily="34" charset="-122"/>
-                <a:cs typeface="Space Grotesk" pitchFamily="34" charset="-120"/>
+                <a:latin typeface="Calibri" pitchFamily="34" charset="0"/>
+                <a:ea typeface="Microsoft YaHei UI" pitchFamily="34" charset="-122"/>
+                <a:cs typeface="Calibri" pitchFamily="34" charset="-120"/>
               </a:rPr>
               <a:t>视频模型选型</a:t>
             </a:r>
@@ -17563,9 +17563,9 @@
                 <a:solidFill>
                   <a:srgbClr val="A855F7"/>
                 </a:solidFill>
-                <a:latin typeface="Inter" pitchFamily="34" charset="0"/>
-                <a:ea typeface="Inter" pitchFamily="34" charset="-122"/>
-                <a:cs typeface="Inter" pitchFamily="34" charset="-120"/>
+                <a:latin typeface="Calibri" pitchFamily="34" charset="0"/>
+                <a:ea typeface="Microsoft YaHei UI" pitchFamily="34" charset="-122"/>
+                <a:cs typeface="Calibri" pitchFamily="34" charset="-120"/>
               </a:rPr>
               <a:t>内置 · 火山引擎</a:t>
             </a:r>
@@ -17607,9 +17607,9 @@
                 <a:solidFill>
                   <a:srgbClr val="444466"/>
                 </a:solidFill>
-                <a:latin typeface="Inter" pitchFamily="34" charset="0"/>
-                <a:ea typeface="Inter" pitchFamily="34" charset="-122"/>
-                <a:cs typeface="Inter" pitchFamily="34" charset="-120"/>
+                <a:latin typeface="Calibri" pitchFamily="34" charset="0"/>
+                <a:ea typeface="Microsoft YaHei UI" pitchFamily="34" charset="-122"/>
+                <a:cs typeface="Calibri" pitchFamily="34" charset="-120"/>
               </a:rPr>
               <a:t>—</a:t>
             </a:r>
@@ -17651,9 +17651,9 @@
                 <a:solidFill>
                   <a:srgbClr val="9999BB"/>
                 </a:solidFill>
-                <a:latin typeface="Inter" pitchFamily="34" charset="0"/>
-                <a:ea typeface="Inter" pitchFamily="34" charset="-122"/>
-                <a:cs typeface="Inter" pitchFamily="34" charset="-120"/>
+                <a:latin typeface="Calibri" pitchFamily="34" charset="0"/>
+                <a:ea typeface="Microsoft YaHei UI" pitchFamily="34" charset="-122"/>
+                <a:cs typeface="Calibri" pitchFamily="34" charset="-120"/>
               </a:rPr>
               <a:t>默认使用 Seedance Pro（720p）</a:t>
             </a:r>
@@ -17695,9 +17695,9 @@
                 <a:solidFill>
                   <a:srgbClr val="444466"/>
                 </a:solidFill>
-                <a:latin typeface="Inter" pitchFamily="34" charset="0"/>
-                <a:ea typeface="Inter" pitchFamily="34" charset="-122"/>
-                <a:cs typeface="Inter" pitchFamily="34" charset="-120"/>
+                <a:latin typeface="Calibri" pitchFamily="34" charset="0"/>
+                <a:ea typeface="Microsoft YaHei UI" pitchFamily="34" charset="-122"/>
+                <a:cs typeface="Calibri" pitchFamily="34" charset="-120"/>
               </a:rPr>
               <a:t>—</a:t>
             </a:r>
@@ -17739,9 +17739,9 @@
                 <a:solidFill>
                   <a:srgbClr val="9999BB"/>
                 </a:solidFill>
-                <a:latin typeface="Inter" pitchFamily="34" charset="0"/>
-                <a:ea typeface="Inter" pitchFamily="34" charset="-122"/>
-                <a:cs typeface="Inter" pitchFamily="34" charset="-120"/>
+                <a:latin typeface="Calibri" pitchFamily="34" charset="0"/>
+                <a:ea typeface="Microsoft YaHei UI" pitchFamily="34" charset="-122"/>
+                <a:cs typeface="Calibri" pitchFamily="34" charset="-120"/>
               </a:rPr>
               <a:t>按需开通 Pro 1.5 高清版本</a:t>
             </a:r>
@@ -17783,9 +17783,9 @@
                 <a:solidFill>
                   <a:srgbClr val="444466"/>
                 </a:solidFill>
-                <a:latin typeface="Inter" pitchFamily="34" charset="0"/>
-                <a:ea typeface="Inter" pitchFamily="34" charset="-122"/>
-                <a:cs typeface="Inter" pitchFamily="34" charset="-120"/>
+                <a:latin typeface="Calibri" pitchFamily="34" charset="0"/>
+                <a:ea typeface="Microsoft YaHei UI" pitchFamily="34" charset="-122"/>
+                <a:cs typeface="Calibri" pitchFamily="34" charset="-120"/>
               </a:rPr>
               <a:t>—</a:t>
             </a:r>
@@ -17827,9 +17827,9 @@
                 <a:solidFill>
                   <a:srgbClr val="9999BB"/>
                 </a:solidFill>
-                <a:latin typeface="Inter" pitchFamily="34" charset="0"/>
-                <a:ea typeface="Inter" pitchFamily="34" charset="-122"/>
-                <a:cs typeface="Inter" pitchFamily="34" charset="-120"/>
+                <a:latin typeface="Calibri" pitchFamily="34" charset="0"/>
+                <a:ea typeface="Microsoft YaHei UI" pitchFamily="34" charset="-122"/>
+                <a:cs typeface="Calibri" pitchFamily="34" charset="-120"/>
               </a:rPr>
               <a:t>图生视频 i2v 模式已上线</a:t>
             </a:r>
@@ -17915,9 +17915,9 @@
                     <a:alpha val="25000"/>
                   </a:srgbClr>
                 </a:solidFill>
-                <a:latin typeface="Space Grotesk" pitchFamily="34" charset="0"/>
-                <a:ea typeface="Space Grotesk" pitchFamily="34" charset="-122"/>
-                <a:cs typeface="Space Grotesk" pitchFamily="34" charset="-120"/>
+                <a:latin typeface="Calibri" pitchFamily="34" charset="0"/>
+                <a:ea typeface="Microsoft YaHei UI" pitchFamily="34" charset="-122"/>
+                <a:cs typeface="Calibri" pitchFamily="34" charset="-120"/>
               </a:rPr>
               <a:t>04</a:t>
             </a:r>
@@ -17959,9 +17959,9 @@
                 <a:solidFill>
                   <a:srgbClr val="E0E0FF"/>
                 </a:solidFill>
-                <a:latin typeface="Space Grotesk" pitchFamily="34" charset="0"/>
-                <a:ea typeface="Space Grotesk" pitchFamily="34" charset="-122"/>
-                <a:cs typeface="Space Grotesk" pitchFamily="34" charset="-120"/>
+                <a:latin typeface="Calibri" pitchFamily="34" charset="0"/>
+                <a:ea typeface="Microsoft YaHei UI" pitchFamily="34" charset="-122"/>
+                <a:cs typeface="Calibri" pitchFamily="34" charset="-120"/>
               </a:rPr>
               <a:t>内容分发模式</a:t>
             </a:r>
@@ -18025,9 +18025,9 @@
                 <a:solidFill>
                   <a:srgbClr val="22D3EE"/>
                 </a:solidFill>
-                <a:latin typeface="Inter" pitchFamily="34" charset="0"/>
-                <a:ea typeface="Inter" pitchFamily="34" charset="-122"/>
-                <a:cs typeface="Inter" pitchFamily="34" charset="-120"/>
+                <a:latin typeface="Calibri" pitchFamily="34" charset="0"/>
+                <a:ea typeface="Microsoft YaHei UI" pitchFamily="34" charset="-122"/>
+                <a:cs typeface="Calibri" pitchFamily="34" charset="-120"/>
               </a:rPr>
               <a:t>辅助 → 自动化</a:t>
             </a:r>
@@ -18069,9 +18069,9 @@
                 <a:solidFill>
                   <a:srgbClr val="444466"/>
                 </a:solidFill>
-                <a:latin typeface="Inter" pitchFamily="34" charset="0"/>
-                <a:ea typeface="Inter" pitchFamily="34" charset="-122"/>
-                <a:cs typeface="Inter" pitchFamily="34" charset="-120"/>
+                <a:latin typeface="Calibri" pitchFamily="34" charset="0"/>
+                <a:ea typeface="Microsoft YaHei UI" pitchFamily="34" charset="-122"/>
+                <a:cs typeface="Calibri" pitchFamily="34" charset="-120"/>
               </a:rPr>
               <a:t>—</a:t>
             </a:r>
@@ -18113,9 +18113,9 @@
                 <a:solidFill>
                   <a:srgbClr val="9999BB"/>
                 </a:solidFill>
-                <a:latin typeface="Inter" pitchFamily="34" charset="0"/>
-                <a:ea typeface="Inter" pitchFamily="34" charset="-122"/>
-                <a:cs typeface="Inter" pitchFamily="34" charset="-120"/>
+                <a:latin typeface="Calibri" pitchFamily="34" charset="0"/>
+                <a:ea typeface="Microsoft YaHei UI" pitchFamily="34" charset="-122"/>
+                <a:cs typeface="Calibri" pitchFamily="34" charset="-120"/>
               </a:rPr>
               <a:t>当前：一键复制文案 + 跳转平台</a:t>
             </a:r>
@@ -18157,9 +18157,9 @@
                 <a:solidFill>
                   <a:srgbClr val="444466"/>
                 </a:solidFill>
-                <a:latin typeface="Inter" pitchFamily="34" charset="0"/>
-                <a:ea typeface="Inter" pitchFamily="34" charset="-122"/>
-                <a:cs typeface="Inter" pitchFamily="34" charset="-120"/>
+                <a:latin typeface="Calibri" pitchFamily="34" charset="0"/>
+                <a:ea typeface="Microsoft YaHei UI" pitchFamily="34" charset="-122"/>
+                <a:cs typeface="Calibri" pitchFamily="34" charset="-120"/>
               </a:rPr>
               <a:t>—</a:t>
             </a:r>
@@ -18201,9 +18201,9 @@
                 <a:solidFill>
                   <a:srgbClr val="9999BB"/>
                 </a:solidFill>
-                <a:latin typeface="Inter" pitchFamily="34" charset="0"/>
-                <a:ea typeface="Inter" pitchFamily="34" charset="-122"/>
-                <a:cs typeface="Inter" pitchFamily="34" charset="-120"/>
+                <a:latin typeface="Calibri" pitchFamily="34" charset="0"/>
+                <a:ea typeface="Microsoft YaHei UI" pitchFamily="34" charset="-122"/>
+                <a:cs typeface="Calibri" pitchFamily="34" charset="-120"/>
               </a:rPr>
               <a:t>探索微信公众号官方 API 直发</a:t>
             </a:r>
@@ -18245,9 +18245,9 @@
                 <a:solidFill>
                   <a:srgbClr val="444466"/>
                 </a:solidFill>
-                <a:latin typeface="Inter" pitchFamily="34" charset="0"/>
-                <a:ea typeface="Inter" pitchFamily="34" charset="-122"/>
-                <a:cs typeface="Inter" pitchFamily="34" charset="-120"/>
+                <a:latin typeface="Calibri" pitchFamily="34" charset="0"/>
+                <a:ea typeface="Microsoft YaHei UI" pitchFamily="34" charset="-122"/>
+                <a:cs typeface="Calibri" pitchFamily="34" charset="-120"/>
               </a:rPr>
               <a:t>—</a:t>
             </a:r>
@@ -18289,9 +18289,9 @@
                 <a:solidFill>
                   <a:srgbClr val="9999BB"/>
                 </a:solidFill>
-                <a:latin typeface="Inter" pitchFamily="34" charset="0"/>
-                <a:ea typeface="Inter" pitchFamily="34" charset="-122"/>
-                <a:cs typeface="Inter" pitchFamily="34" charset="-120"/>
+                <a:latin typeface="Calibri" pitchFamily="34" charset="0"/>
+                <a:ea typeface="Microsoft YaHei UI" pitchFamily="34" charset="-122"/>
+                <a:cs typeface="Calibri" pitchFamily="34" charset="-120"/>
               </a:rPr>
               <a:t>抖音/小红书需等待开放接口</a:t>
             </a:r>
@@ -18377,9 +18377,9 @@
                     <a:alpha val="25000"/>
                   </a:srgbClr>
                 </a:solidFill>
-                <a:latin typeface="Space Grotesk" pitchFamily="34" charset="0"/>
-                <a:ea typeface="Space Grotesk" pitchFamily="34" charset="-122"/>
-                <a:cs typeface="Space Grotesk" pitchFamily="34" charset="-120"/>
+                <a:latin typeface="Calibri" pitchFamily="34" charset="0"/>
+                <a:ea typeface="Microsoft YaHei UI" pitchFamily="34" charset="-122"/>
+                <a:cs typeface="Calibri" pitchFamily="34" charset="-120"/>
               </a:rPr>
               <a:t>05</a:t>
             </a:r>
@@ -18421,9 +18421,9 @@
                 <a:solidFill>
                   <a:srgbClr val="E0E0FF"/>
                 </a:solidFill>
-                <a:latin typeface="Space Grotesk" pitchFamily="34" charset="0"/>
-                <a:ea typeface="Space Grotesk" pitchFamily="34" charset="-122"/>
-                <a:cs typeface="Space Grotesk" pitchFamily="34" charset="-120"/>
+                <a:latin typeface="Calibri" pitchFamily="34" charset="0"/>
+                <a:ea typeface="Microsoft YaHei UI" pitchFamily="34" charset="-122"/>
+                <a:cs typeface="Calibri" pitchFamily="34" charset="-120"/>
               </a:rPr>
               <a:t>种子用户获取</a:t>
             </a:r>
@@ -18487,9 +18487,9 @@
                 <a:solidFill>
                   <a:srgbClr val="7C3AED"/>
                 </a:solidFill>
-                <a:latin typeface="Inter" pitchFamily="34" charset="0"/>
-                <a:ea typeface="Inter" pitchFamily="34" charset="-122"/>
-                <a:cs typeface="Inter" pitchFamily="34" charset="-120"/>
+                <a:latin typeface="Calibri" pitchFamily="34" charset="0"/>
+                <a:ea typeface="Microsoft YaHei UI" pitchFamily="34" charset="-122"/>
+                <a:cs typeface="Calibri" pitchFamily="34" charset="-120"/>
               </a:rPr>
               <a:t>冷启动策略</a:t>
             </a:r>
@@ -18531,9 +18531,9 @@
                 <a:solidFill>
                   <a:srgbClr val="444466"/>
                 </a:solidFill>
-                <a:latin typeface="Inter" pitchFamily="34" charset="0"/>
-                <a:ea typeface="Inter" pitchFamily="34" charset="-122"/>
-                <a:cs typeface="Inter" pitchFamily="34" charset="-120"/>
+                <a:latin typeface="Calibri" pitchFamily="34" charset="0"/>
+                <a:ea typeface="Microsoft YaHei UI" pitchFamily="34" charset="-122"/>
+                <a:cs typeface="Calibri" pitchFamily="34" charset="-120"/>
               </a:rPr>
               <a:t>—</a:t>
             </a:r>
@@ -18575,9 +18575,9 @@
                 <a:solidFill>
                   <a:srgbClr val="9999BB"/>
                 </a:solidFill>
-                <a:latin typeface="Inter" pitchFamily="34" charset="0"/>
-                <a:ea typeface="Inter" pitchFamily="34" charset="-122"/>
-                <a:cs typeface="Inter" pitchFamily="34" charset="-120"/>
+                <a:latin typeface="Calibri" pitchFamily="34" charset="0"/>
+                <a:ea typeface="Microsoft YaHei UI" pitchFamily="34" charset="-122"/>
+                <a:cs typeface="Calibri" pitchFamily="34" charset="-120"/>
               </a:rPr>
               <a:t>内容创作者社群定向邀请内测</a:t>
             </a:r>
@@ -18619,9 +18619,9 @@
                 <a:solidFill>
                   <a:srgbClr val="444466"/>
                 </a:solidFill>
-                <a:latin typeface="Inter" pitchFamily="34" charset="0"/>
-                <a:ea typeface="Inter" pitchFamily="34" charset="-122"/>
-                <a:cs typeface="Inter" pitchFamily="34" charset="-120"/>
+                <a:latin typeface="Calibri" pitchFamily="34" charset="0"/>
+                <a:ea typeface="Microsoft YaHei UI" pitchFamily="34" charset="-122"/>
+                <a:cs typeface="Calibri" pitchFamily="34" charset="-120"/>
               </a:rPr>
               <a:t>—</a:t>
             </a:r>
@@ -18663,9 +18663,9 @@
                 <a:solidFill>
                   <a:srgbClr val="9999BB"/>
                 </a:solidFill>
-                <a:latin typeface="Inter" pitchFamily="34" charset="0"/>
-                <a:ea typeface="Inter" pitchFamily="34" charset="-122"/>
-                <a:cs typeface="Inter" pitchFamily="34" charset="-120"/>
+                <a:latin typeface="Calibri" pitchFamily="34" charset="0"/>
+                <a:ea typeface="Microsoft YaHei UI" pitchFamily="34" charset="-122"/>
+                <a:cs typeface="Calibri" pitchFamily="34" charset="-120"/>
               </a:rPr>
               <a:t>Product Hunt 发布获取海外曝光</a:t>
             </a:r>
@@ -18707,9 +18707,9 @@
                 <a:solidFill>
                   <a:srgbClr val="444466"/>
                 </a:solidFill>
-                <a:latin typeface="Inter" pitchFamily="34" charset="0"/>
-                <a:ea typeface="Inter" pitchFamily="34" charset="-122"/>
-                <a:cs typeface="Inter" pitchFamily="34" charset="-120"/>
+                <a:latin typeface="Calibri" pitchFamily="34" charset="0"/>
+                <a:ea typeface="Microsoft YaHei UI" pitchFamily="34" charset="-122"/>
+                <a:cs typeface="Calibri" pitchFamily="34" charset="-120"/>
               </a:rPr>
               <a:t>—</a:t>
             </a:r>
@@ -18751,9 +18751,9 @@
                 <a:solidFill>
                   <a:srgbClr val="9999BB"/>
                 </a:solidFill>
-                <a:latin typeface="Inter" pitchFamily="34" charset="0"/>
-                <a:ea typeface="Inter" pitchFamily="34" charset="-122"/>
-                <a:cs typeface="Inter" pitchFamily="34" charset="-120"/>
+                <a:latin typeface="Calibri" pitchFamily="34" charset="0"/>
+                <a:ea typeface="Microsoft YaHei UI" pitchFamily="34" charset="-122"/>
+                <a:cs typeface="Calibri" pitchFamily="34" charset="-120"/>
               </a:rPr>
               <a:t>KOC 合作换量，以内容换流量</a:t>
             </a:r>
@@ -18837,9 +18837,9 @@
                 <a:solidFill>
                   <a:srgbClr val="C4B5FD"/>
                 </a:solidFill>
-                <a:latin typeface="Space Grotesk" pitchFamily="34" charset="0"/>
-                <a:ea typeface="Space Grotesk" pitchFamily="34" charset="-122"/>
-                <a:cs typeface="Space Grotesk" pitchFamily="34" charset="-120"/>
+                <a:latin typeface="Calibri" pitchFamily="34" charset="0"/>
+                <a:ea typeface="Microsoft YaHei UI" pitchFamily="34" charset="-122"/>
+                <a:cs typeface="Calibri" pitchFamily="34" charset="-120"/>
               </a:rPr>
               <a:t>目标：90 天内完成 MVP 验证，获取 500 名付费用户</a:t>
             </a:r>
@@ -18881,9 +18881,9 @@
                 <a:solidFill>
                   <a:srgbClr val="666688"/>
                 </a:solidFill>
-                <a:latin typeface="Inter" pitchFamily="34" charset="0"/>
-                <a:ea typeface="Inter" pitchFamily="34" charset="-122"/>
-                <a:cs typeface="Inter" pitchFamily="34" charset="-120"/>
+                <a:latin typeface="Calibri" pitchFamily="34" charset="0"/>
+                <a:ea typeface="Microsoft YaHei UI" pitchFamily="34" charset="-122"/>
+                <a:cs typeface="Calibri" pitchFamily="34" charset="-120"/>
               </a:rPr>
               <a:t>核心指标：内容生成采用率 &gt; 60%，视频生成完成率 &gt; 40%，月留存率 &gt; 55%</a:t>
             </a:r>
@@ -18925,9 +18925,9 @@
                 <a:solidFill>
                   <a:srgbClr val="06B6D4"/>
                 </a:solidFill>
-                <a:latin typeface="Space Grotesk" pitchFamily="34" charset="0"/>
-                <a:ea typeface="Space Grotesk" pitchFamily="34" charset="-122"/>
-                <a:cs typeface="Space Grotesk" pitchFamily="34" charset="-120"/>
+                <a:latin typeface="Calibri" pitchFamily="34" charset="0"/>
+                <a:ea typeface="Microsoft YaHei UI" pitchFamily="34" charset="-122"/>
+                <a:cs typeface="Calibri" pitchFamily="34" charset="-120"/>
               </a:rPr>
               <a:t>BILING · 2026 →</a:t>
             </a:r>
@@ -19018,9 +19018,9 @@
                 <a:solidFill>
                   <a:srgbClr val="7C3AED"/>
                 </a:solidFill>
-                <a:latin typeface="Space Grotesk" pitchFamily="34" charset="0"/>
-                <a:ea typeface="Space Grotesk" pitchFamily="34" charset="-122"/>
-                <a:cs typeface="Space Grotesk" pitchFamily="34" charset="-120"/>
+                <a:latin typeface="Calibri" pitchFamily="34" charset="0"/>
+                <a:ea typeface="Microsoft YaHei UI" pitchFamily="34" charset="-122"/>
+                <a:cs typeface="Calibri" pitchFamily="34" charset="-120"/>
               </a:rPr>
               <a:t>CORE POSITIONING</a:t>
             </a:r>
@@ -19982,9 +19982,9 @@
                 <a:solidFill>
                   <a:srgbClr val="C4B5FD"/>
                 </a:solidFill>
-                <a:latin typeface="Space Grotesk" pitchFamily="34" charset="0"/>
-                <a:ea typeface="Space Grotesk" pitchFamily="34" charset="-122"/>
-                <a:cs typeface="Space Grotesk" pitchFamily="34" charset="-120"/>
+                <a:latin typeface="Calibri" pitchFamily="34" charset="0"/>
+                <a:ea typeface="Microsoft YaHei UI" pitchFamily="34" charset="-122"/>
+                <a:cs typeface="Calibri" pitchFamily="34" charset="-120"/>
               </a:rPr>
               <a:t>先发窗口期：6–12 个月</a:t>
             </a:r>
@@ -20070,9 +20070,9 @@
                 <a:solidFill>
                   <a:srgbClr val="A78BFA"/>
                 </a:solidFill>
-                <a:latin typeface="Space Grotesk" pitchFamily="34" charset="0"/>
-                <a:ea typeface="Space Grotesk" pitchFamily="34" charset="-122"/>
-                <a:cs typeface="Space Grotesk" pitchFamily="34" charset="-120"/>
+                <a:latin typeface="Calibri" pitchFamily="34" charset="0"/>
+                <a:ea typeface="Microsoft YaHei UI" pitchFamily="34" charset="-122"/>
+                <a:cs typeface="Calibri" pitchFamily="34" charset="-120"/>
               </a:rPr>
               <a:t>8+</a:t>
             </a:r>
@@ -20158,9 +20158,9 @@
                 <a:solidFill>
                   <a:srgbClr val="22D3EE"/>
                 </a:solidFill>
-                <a:latin typeface="Space Grotesk" pitchFamily="34" charset="0"/>
-                <a:ea typeface="Space Grotesk" pitchFamily="34" charset="-122"/>
-                <a:cs typeface="Space Grotesk" pitchFamily="34" charset="-120"/>
+                <a:latin typeface="Calibri" pitchFamily="34" charset="0"/>
+                <a:ea typeface="Microsoft YaHei UI" pitchFamily="34" charset="-122"/>
+                <a:cs typeface="Calibri" pitchFamily="34" charset="-120"/>
               </a:rPr>
               <a:t>10min</a:t>
             </a:r>
@@ -20246,9 +20246,9 @@
                 <a:solidFill>
                   <a:srgbClr val="34D399"/>
                 </a:solidFill>
-                <a:latin typeface="Space Grotesk" pitchFamily="34" charset="0"/>
-                <a:ea typeface="Space Grotesk" pitchFamily="34" charset="-122"/>
-                <a:cs typeface="Space Grotesk" pitchFamily="34" charset="-120"/>
+                <a:latin typeface="Calibri" pitchFamily="34" charset="0"/>
+                <a:ea typeface="Microsoft YaHei UI" pitchFamily="34" charset="-122"/>
+                <a:cs typeface="Calibri" pitchFamily="34" charset="-120"/>
               </a:rPr>
               <a:t>4阶段</a:t>
             </a:r>
@@ -20334,9 +20334,9 @@
                 <a:solidFill>
                   <a:srgbClr val="555577"/>
                 </a:solidFill>
-                <a:latin typeface="Space Grotesk" pitchFamily="34" charset="0"/>
-                <a:ea typeface="Space Grotesk" pitchFamily="34" charset="-122"/>
-                <a:cs typeface="Space Grotesk" pitchFamily="34" charset="-120"/>
+                <a:latin typeface="Calibri" pitchFamily="34" charset="0"/>
+                <a:ea typeface="Microsoft YaHei UI" pitchFamily="34" charset="-122"/>
+                <a:cs typeface="Calibri" pitchFamily="34" charset="-120"/>
               </a:rPr>
               <a:t>BILING · 2026</a:t>
             </a:r>
@@ -20427,9 +20427,9 @@
                 <a:solidFill>
                   <a:srgbClr val="00D4FF"/>
                 </a:solidFill>
-                <a:latin typeface="Inter" pitchFamily="34" charset="0"/>
-                <a:ea typeface="Inter" pitchFamily="34" charset="-122"/>
-                <a:cs typeface="Inter" pitchFamily="34" charset="-120"/>
+                <a:latin typeface="Calibri" pitchFamily="34" charset="0"/>
+                <a:ea typeface="Microsoft YaHei UI" pitchFamily="34" charset="-122"/>
+                <a:cs typeface="Calibri" pitchFamily="34" charset="-120"/>
               </a:rPr>
               <a:t>MARKET BACKGROUND</a:t>
             </a:r>
@@ -20471,9 +20471,9 @@
                 <a:solidFill>
                   <a:srgbClr val="FFFFFF"/>
                 </a:solidFill>
-                <a:latin typeface="Space Grotesk" pitchFamily="34" charset="0"/>
-                <a:ea typeface="Space Grotesk" pitchFamily="34" charset="-122"/>
-                <a:cs typeface="Space Grotesk" pitchFamily="34" charset="-120"/>
+                <a:latin typeface="Calibri" pitchFamily="34" charset="0"/>
+                <a:ea typeface="Microsoft YaHei UI" pitchFamily="34" charset="-122"/>
+                <a:cs typeface="Calibri" pitchFamily="34" charset="-120"/>
               </a:rPr>
               <a:t>56.6 亿社媒用户催生千亿级 AI 内容创作市场</a:t>
             </a:r>
@@ -20542,9 +20542,9 @@
                 <a:solidFill>
                   <a:srgbClr val="7C3AED"/>
                 </a:solidFill>
-                <a:latin typeface="Space Grotesk" pitchFamily="34" charset="0"/>
-                <a:ea typeface="Space Grotesk" pitchFamily="34" charset="-122"/>
-                <a:cs typeface="Space Grotesk" pitchFamily="34" charset="-120"/>
+                <a:latin typeface="Calibri" pitchFamily="34" charset="0"/>
+                <a:ea typeface="Microsoft YaHei UI" pitchFamily="34" charset="-122"/>
+                <a:cs typeface="Calibri" pitchFamily="34" charset="-120"/>
               </a:rPr>
               <a:t>56.6 亿</a:t>
             </a:r>
@@ -20586,9 +20586,9 @@
                 <a:solidFill>
                   <a:srgbClr val="8B949E"/>
                 </a:solidFill>
-                <a:latin typeface="Inter" pitchFamily="34" charset="0"/>
-                <a:ea typeface="Inter" pitchFamily="34" charset="-122"/>
-                <a:cs typeface="Inter" pitchFamily="34" charset="-120"/>
+                <a:latin typeface="Calibri" pitchFamily="34" charset="0"/>
+                <a:ea typeface="Microsoft YaHei UI" pitchFamily="34" charset="-122"/>
+                <a:cs typeface="Calibri" pitchFamily="34" charset="-120"/>
               </a:rPr>
               <a:t>全球社交媒体活跃用户（占全球人口 93.8%）</a:t>
             </a:r>
@@ -20657,9 +20657,9 @@
                 <a:solidFill>
                   <a:srgbClr val="7C3AED"/>
                 </a:solidFill>
-                <a:latin typeface="Space Grotesk" pitchFamily="34" charset="0"/>
-                <a:ea typeface="Space Grotesk" pitchFamily="34" charset="-122"/>
-                <a:cs typeface="Space Grotesk" pitchFamily="34" charset="-120"/>
+                <a:latin typeface="Calibri" pitchFamily="34" charset="0"/>
+                <a:ea typeface="Microsoft YaHei UI" pitchFamily="34" charset="-122"/>
+                <a:cs typeface="Calibri" pitchFamily="34" charset="-120"/>
               </a:rPr>
               <a:t>11.49 亿</a:t>
             </a:r>
@@ -20701,9 +20701,9 @@
                 <a:solidFill>
                   <a:srgbClr val="8B949E"/>
                 </a:solidFill>
-                <a:latin typeface="Inter" pitchFamily="34" charset="0"/>
-                <a:ea typeface="Inter" pitchFamily="34" charset="-122"/>
-                <a:cs typeface="Inter" pitchFamily="34" charset="-120"/>
+                <a:latin typeface="Calibri" pitchFamily="34" charset="0"/>
+                <a:ea typeface="Microsoft YaHei UI" pitchFamily="34" charset="-122"/>
+                <a:cs typeface="Calibri" pitchFamily="34" charset="-120"/>
               </a:rPr>
               <a:t>中国五大内容平台去重月活用户（QuestMobile 2025.10）</a:t>
             </a:r>
@@ -20772,9 +20772,9 @@
                 <a:solidFill>
                   <a:srgbClr val="7C3AED"/>
                 </a:solidFill>
-                <a:latin typeface="Space Grotesk" pitchFamily="34" charset="0"/>
-                <a:ea typeface="Space Grotesk" pitchFamily="34" charset="-122"/>
-                <a:cs typeface="Space Grotesk" pitchFamily="34" charset="-120"/>
+                <a:latin typeface="Calibri" pitchFamily="34" charset="0"/>
+                <a:ea typeface="Microsoft YaHei UI" pitchFamily="34" charset="-122"/>
+                <a:cs typeface="Calibri" pitchFamily="34" charset="-120"/>
               </a:rPr>
               <a:t>$42.6 亿</a:t>
             </a:r>
@@ -20816,9 +20816,9 @@
                 <a:solidFill>
                   <a:srgbClr val="8B949E"/>
                 </a:solidFill>
-                <a:latin typeface="Inter" pitchFamily="34" charset="0"/>
-                <a:ea typeface="Inter" pitchFamily="34" charset="-122"/>
-                <a:cs typeface="Inter" pitchFamily="34" charset="-120"/>
+                <a:latin typeface="Calibri" pitchFamily="34" charset="0"/>
+                <a:ea typeface="Microsoft YaHei UI" pitchFamily="34" charset="-122"/>
+                <a:cs typeface="Calibri" pitchFamily="34" charset="-120"/>
               </a:rPr>
               <a:t>2026 年 AI 内容创作市场规模（同比增长 21.4%）</a:t>
             </a:r>
@@ -20887,9 +20887,9 @@
                 <a:solidFill>
                   <a:srgbClr val="7C3AED"/>
                 </a:solidFill>
-                <a:latin typeface="Space Grotesk" pitchFamily="34" charset="0"/>
-                <a:ea typeface="Space Grotesk" pitchFamily="34" charset="-122"/>
-                <a:cs typeface="Space Grotesk" pitchFamily="34" charset="-120"/>
+                <a:latin typeface="Calibri" pitchFamily="34" charset="0"/>
+                <a:ea typeface="Microsoft YaHei UI" pitchFamily="34" charset="-122"/>
+                <a:cs typeface="Calibri" pitchFamily="34" charset="-120"/>
               </a:rPr>
               <a:t>$1,430 亿</a:t>
             </a:r>
@@ -20931,9 +20931,9 @@
                 <a:solidFill>
                   <a:srgbClr val="8B949E"/>
                 </a:solidFill>
-                <a:latin typeface="Inter" pitchFamily="34" charset="0"/>
-                <a:ea typeface="Inter" pitchFamily="34" charset="-122"/>
-                <a:cs typeface="Inter" pitchFamily="34" charset="-120"/>
+                <a:latin typeface="Calibri" pitchFamily="34" charset="0"/>
+                <a:ea typeface="Microsoft YaHei UI" pitchFamily="34" charset="-122"/>
+                <a:cs typeface="Calibri" pitchFamily="34" charset="-120"/>
               </a:rPr>
               <a:t>2035 年生成式 AI 内容创作市场预测（Precedence Research）</a:t>
             </a:r>
@@ -21002,9 +21002,9 @@
                 <a:solidFill>
                   <a:srgbClr val="8B949E"/>
                 </a:solidFill>
-                <a:latin typeface="Inter" pitchFamily="34" charset="0"/>
-                <a:ea typeface="Inter" pitchFamily="34" charset="-122"/>
-                <a:cs typeface="Inter" pitchFamily="34" charset="-120"/>
+                <a:latin typeface="Calibri" pitchFamily="34" charset="0"/>
+                <a:ea typeface="Microsoft YaHei UI" pitchFamily="34" charset="-122"/>
+                <a:cs typeface="Calibri" pitchFamily="34" charset="-120"/>
               </a:rPr>
               <a:t>全球 AI 内容创作市场规模增长趋势（单位：亿美元）</a:t>
             </a:r>
@@ -21112,9 +21112,9 @@
                 <a:solidFill>
                   <a:srgbClr val="FFFFFF"/>
                 </a:solidFill>
-                <a:latin typeface="Inter" pitchFamily="34" charset="0"/>
-                <a:ea typeface="Inter" pitchFamily="34" charset="-122"/>
-                <a:cs typeface="Inter" pitchFamily="34" charset="-120"/>
+                <a:latin typeface="Calibri" pitchFamily="34" charset="0"/>
+                <a:ea typeface="Microsoft YaHei UI" pitchFamily="34" charset="-122"/>
+                <a:cs typeface="Calibri" pitchFamily="34" charset="-120"/>
               </a:rPr>
               <a:t>核心洞察：</a:t>
             </a:r>
@@ -21131,9 +21131,9 @@
                     <a:alpha val="70000"/>
                   </a:srgbClr>
                 </a:solidFill>
-                <a:latin typeface="Inter" pitchFamily="34" charset="0"/>
-                <a:ea typeface="Inter" pitchFamily="34" charset="-122"/>
-                <a:cs typeface="Inter" pitchFamily="34" charset="-120"/>
+                <a:latin typeface="Calibri" pitchFamily="34" charset="0"/>
+                <a:ea typeface="Microsoft YaHei UI" pitchFamily="34" charset="-122"/>
+                <a:cs typeface="Calibri" pitchFamily="34" charset="-120"/>
               </a:rPr>
               <a:t>短视频已成为用户注意力第一入口——抖音 DAU 突破 8 亿，TikTok 全球 MAU 达 19 亿，YouTube MAU 达 27 亿。内容创作者面临"多平台 × 多格式 × 高频次"的效率瓶颈。</a:t>
             </a:r>
@@ -21175,9 +21175,9 @@
                 <a:solidFill>
                   <a:srgbClr val="8B949E"/>
                 </a:solidFill>
-                <a:latin typeface="Inter" pitchFamily="34" charset="0"/>
-                <a:ea typeface="Inter" pitchFamily="34" charset="-122"/>
-                <a:cs typeface="Inter" pitchFamily="34" charset="-120"/>
+                <a:latin typeface="Calibri" pitchFamily="34" charset="0"/>
+                <a:ea typeface="Microsoft YaHei UI" pitchFamily="34" charset="-122"/>
+                <a:cs typeface="Calibri" pitchFamily="34" charset="-120"/>
               </a:rPr>
               <a:t>数据来源：Statista, TBRC, Precedence Research, QuestMobile, WordStream 2025–2026</a:t>
             </a:r>
@@ -21268,9 +21268,9 @@
                 <a:solidFill>
                   <a:srgbClr val="00D4FF"/>
                 </a:solidFill>
-                <a:latin typeface="Inter" pitchFamily="34" charset="0"/>
-                <a:ea typeface="Inter" pitchFamily="34" charset="-122"/>
-                <a:cs typeface="Inter" pitchFamily="34" charset="-120"/>
+                <a:latin typeface="Calibri" pitchFamily="34" charset="0"/>
+                <a:ea typeface="Microsoft YaHei UI" pitchFamily="34" charset="-122"/>
+                <a:cs typeface="Calibri" pitchFamily="34" charset="-120"/>
               </a:rPr>
               <a:t>TARGET USERS</a:t>
             </a:r>
@@ -21312,9 +21312,9 @@
                 <a:solidFill>
                   <a:srgbClr val="FFFFFF"/>
                 </a:solidFill>
-                <a:latin typeface="Space Grotesk" pitchFamily="34" charset="0"/>
-                <a:ea typeface="Space Grotesk" pitchFamily="34" charset="-122"/>
-                <a:cs typeface="Space Grotesk" pitchFamily="34" charset="-120"/>
+                <a:latin typeface="Calibri" pitchFamily="34" charset="0"/>
+                <a:ea typeface="Microsoft YaHei UI" pitchFamily="34" charset="-122"/>
+                <a:cs typeface="Calibri" pitchFamily="34" charset="-120"/>
               </a:rPr>
               <a:t>三层市场：个人创作者到 MCN 机构的差异化需求</a:t>
             </a:r>
@@ -21412,9 +21412,9 @@
                 <a:solidFill>
                   <a:srgbClr val="000000"/>
                 </a:solidFill>
-                <a:latin typeface="Inter" pitchFamily="34" charset="0"/>
-                <a:ea typeface="Inter" pitchFamily="34" charset="-122"/>
-                <a:cs typeface="Inter" pitchFamily="34" charset="-120"/>
+                <a:latin typeface="Calibri" pitchFamily="34" charset="0"/>
+                <a:ea typeface="Microsoft YaHei UI" pitchFamily="34" charset="-122"/>
+                <a:cs typeface="Calibri" pitchFamily="34" charset="-120"/>
               </a:rPr>
               <a:t>👤</a:t>
             </a:r>
@@ -21456,9 +21456,9 @@
                 <a:solidFill>
                   <a:srgbClr val="00D4FF"/>
                 </a:solidFill>
-                <a:latin typeface="Inter" pitchFamily="34" charset="0"/>
-                <a:ea typeface="Inter" pitchFamily="34" charset="-122"/>
-                <a:cs typeface="Inter" pitchFamily="34" charset="-120"/>
+                <a:latin typeface="Calibri" pitchFamily="34" charset="0"/>
+                <a:ea typeface="Microsoft YaHei UI" pitchFamily="34" charset="-122"/>
+                <a:cs typeface="Calibri" pitchFamily="34" charset="-120"/>
               </a:rPr>
               <a:t>PRIMARY MARKET</a:t>
             </a:r>
@@ -21500,9 +21500,9 @@
                 <a:solidFill>
                   <a:srgbClr val="FFFFFF"/>
                 </a:solidFill>
-                <a:latin typeface="Space Grotesk" pitchFamily="34" charset="0"/>
-                <a:ea typeface="Space Grotesk" pitchFamily="34" charset="-122"/>
-                <a:cs typeface="Space Grotesk" pitchFamily="34" charset="-120"/>
+                <a:latin typeface="Calibri" pitchFamily="34" charset="0"/>
+                <a:ea typeface="Microsoft YaHei UI" pitchFamily="34" charset="-122"/>
+                <a:cs typeface="Calibri" pitchFamily="34" charset="-120"/>
               </a:rPr>
               <a:t>个人创作者</a:t>
             </a:r>
@@ -21544,9 +21544,9 @@
                 <a:solidFill>
                   <a:srgbClr val="8B949E"/>
                 </a:solidFill>
-                <a:latin typeface="Inter" pitchFamily="34" charset="0"/>
-                <a:ea typeface="Inter" pitchFamily="34" charset="-122"/>
-                <a:cs typeface="Inter" pitchFamily="34" charset="-120"/>
+                <a:latin typeface="Calibri" pitchFamily="34" charset="0"/>
+                <a:ea typeface="Microsoft YaHei UI" pitchFamily="34" charset="-122"/>
+                <a:cs typeface="Calibri" pitchFamily="34" charset="-120"/>
               </a:rPr>
               <a:t>规模：中国约 1.5 亿内容创作者，其中 KOC 约 8000 万</a:t>
             </a:r>
@@ -21588,9 +21588,9 @@
                 <a:solidFill>
                   <a:srgbClr val="7C3AED"/>
                 </a:solidFill>
-                <a:latin typeface="Inter" pitchFamily="34" charset="0"/>
-                <a:ea typeface="Inter" pitchFamily="34" charset="-122"/>
-                <a:cs typeface="Inter" pitchFamily="34" charset="-120"/>
+                <a:latin typeface="Calibri" pitchFamily="34" charset="0"/>
+                <a:ea typeface="Microsoft YaHei UI" pitchFamily="34" charset="-122"/>
+                <a:cs typeface="Calibri" pitchFamily="34" charset="-120"/>
               </a:rPr>
               <a:t>核心痛点</a:t>
             </a:r>
@@ -21634,9 +21634,9 @@
                     <a:alpha val="80000"/>
                   </a:srgbClr>
                 </a:solidFill>
-                <a:latin typeface="Inter" pitchFamily="34" charset="0"/>
-                <a:ea typeface="Inter" pitchFamily="34" charset="-122"/>
-                <a:cs typeface="Inter" pitchFamily="34" charset="-120"/>
+                <a:latin typeface="Calibri" pitchFamily="34" charset="0"/>
+                <a:ea typeface="Microsoft YaHei UI" pitchFamily="34" charset="-122"/>
+                <a:cs typeface="Calibri" pitchFamily="34" charset="-120"/>
               </a:rPr>
               <a:t>每天需为 3–5 个平台分别生产差异化内容</a:t>
             </a:r>
@@ -21680,9 +21680,9 @@
                     <a:alpha val="80000"/>
                   </a:srgbClr>
                 </a:solidFill>
-                <a:latin typeface="Inter" pitchFamily="34" charset="0"/>
-                <a:ea typeface="Inter" pitchFamily="34" charset="-122"/>
-                <a:cs typeface="Inter" pitchFamily="34" charset="-120"/>
+                <a:latin typeface="Calibri" pitchFamily="34" charset="0"/>
+                <a:ea typeface="Microsoft YaHei UI" pitchFamily="34" charset="-122"/>
+                <a:cs typeface="Calibri" pitchFamily="34" charset="-120"/>
               </a:rPr>
               <a:t>热点追踪耗时，错过最佳发布窗口</a:t>
             </a:r>
@@ -21726,9 +21726,9 @@
                     <a:alpha val="80000"/>
                   </a:srgbClr>
                 </a:solidFill>
-                <a:latin typeface="Inter" pitchFamily="34" charset="0"/>
-                <a:ea typeface="Inter" pitchFamily="34" charset="-122"/>
-                <a:cs typeface="Inter" pitchFamily="34" charset="-120"/>
+                <a:latin typeface="Calibri" pitchFamily="34" charset="0"/>
+                <a:ea typeface="Microsoft YaHei UI" pitchFamily="34" charset="-122"/>
+                <a:cs typeface="Calibri" pitchFamily="34" charset="-120"/>
               </a:rPr>
               <a:t>视频剪辑门槛高，AI 生成视频无法替代真人出镜</a:t>
             </a:r>
@@ -21772,9 +21772,9 @@
                     <a:alpha val="80000"/>
                   </a:srgbClr>
                 </a:solidFill>
-                <a:latin typeface="Inter" pitchFamily="34" charset="0"/>
-                <a:ea typeface="Inter" pitchFamily="34" charset="-122"/>
-                <a:cs typeface="Inter" pitchFamily="34" charset="-120"/>
+                <a:latin typeface="Calibri" pitchFamily="34" charset="0"/>
+                <a:ea typeface="Microsoft YaHei UI" pitchFamily="34" charset="-122"/>
+                <a:cs typeface="Calibri" pitchFamily="34" charset="-120"/>
               </a:rPr>
               <a:t>缺乏数据反馈，不知道哪类内容更受欢迎</a:t>
             </a:r>
@@ -21845,9 +21845,9 @@
                 <a:solidFill>
                   <a:srgbClr val="A78BFA"/>
                 </a:solidFill>
-                <a:latin typeface="Inter" pitchFamily="34" charset="0"/>
-                <a:ea typeface="Inter" pitchFamily="34" charset="-122"/>
-                <a:cs typeface="Inter" pitchFamily="34" charset="-120"/>
+                <a:latin typeface="Calibri" pitchFamily="34" charset="0"/>
+                <a:ea typeface="Microsoft YaHei UI" pitchFamily="34" charset="-122"/>
+                <a:cs typeface="Calibri" pitchFamily="34" charset="-120"/>
               </a:rPr>
               <a:t>付费意愿</a:t>
             </a:r>
@@ -21889,9 +21889,9 @@
                 <a:solidFill>
                   <a:srgbClr val="7C3AED"/>
                 </a:solidFill>
-                <a:latin typeface="Space Grotesk" pitchFamily="34" charset="0"/>
-                <a:ea typeface="Space Grotesk" pitchFamily="34" charset="-122"/>
-                <a:cs typeface="Space Grotesk" pitchFamily="34" charset="-120"/>
+                <a:latin typeface="Calibri" pitchFamily="34" charset="0"/>
+                <a:ea typeface="Microsoft YaHei UI" pitchFamily="34" charset="-122"/>
+                <a:cs typeface="Calibri" pitchFamily="34" charset="-120"/>
               </a:rPr>
               <a:t>¥99–299 / 月</a:t>
             </a:r>
@@ -21933,9 +21933,9 @@
                 <a:solidFill>
                   <a:srgbClr val="8B949E"/>
                 </a:solidFill>
-                <a:latin typeface="Inter" pitchFamily="34" charset="0"/>
-                <a:ea typeface="Inter" pitchFamily="34" charset="-122"/>
-                <a:cs typeface="Inter" pitchFamily="34" charset="-120"/>
+                <a:latin typeface="Calibri" pitchFamily="34" charset="0"/>
+                <a:ea typeface="Microsoft YaHei UI" pitchFamily="34" charset="-122"/>
+                <a:cs typeface="Calibri" pitchFamily="34" charset="-120"/>
               </a:rPr>
               <a:t>效率工具付费意愿强，对 ROI 敏感</a:t>
             </a:r>
@@ -22033,9 +22033,9 @@
                 <a:solidFill>
                   <a:srgbClr val="000000"/>
                 </a:solidFill>
-                <a:latin typeface="Inter" pitchFamily="34" charset="0"/>
-                <a:ea typeface="Inter" pitchFamily="34" charset="-122"/>
-                <a:cs typeface="Inter" pitchFamily="34" charset="-120"/>
+                <a:latin typeface="Calibri" pitchFamily="34" charset="0"/>
+                <a:ea typeface="Microsoft YaHei UI" pitchFamily="34" charset="-122"/>
+                <a:cs typeface="Calibri" pitchFamily="34" charset="-120"/>
               </a:rPr>
               <a:t>🏢</a:t>
             </a:r>
@@ -22077,9 +22077,9 @@
                 <a:solidFill>
                   <a:srgbClr val="00D4FF"/>
                 </a:solidFill>
-                <a:latin typeface="Inter" pitchFamily="34" charset="0"/>
-                <a:ea typeface="Inter" pitchFamily="34" charset="-122"/>
-                <a:cs typeface="Inter" pitchFamily="34" charset="-120"/>
+                <a:latin typeface="Calibri" pitchFamily="34" charset="0"/>
+                <a:ea typeface="Microsoft YaHei UI" pitchFamily="34" charset="-122"/>
+                <a:cs typeface="Calibri" pitchFamily="34" charset="-120"/>
               </a:rPr>
               <a:t>CORE MARKET</a:t>
             </a:r>
@@ -22121,9 +22121,9 @@
                 <a:solidFill>
                   <a:srgbClr val="FFFFFF"/>
                 </a:solidFill>
-                <a:latin typeface="Space Grotesk" pitchFamily="34" charset="0"/>
-                <a:ea typeface="Space Grotesk" pitchFamily="34" charset="-122"/>
-                <a:cs typeface="Space Grotesk" pitchFamily="34" charset="-120"/>
+                <a:latin typeface="Calibri" pitchFamily="34" charset="0"/>
+                <a:ea typeface="Microsoft YaHei UI" pitchFamily="34" charset="-122"/>
+                <a:cs typeface="Calibri" pitchFamily="34" charset="-120"/>
               </a:rPr>
               <a:t>中小企业 / 品牌方</a:t>
             </a:r>
@@ -22165,9 +22165,9 @@
                 <a:solidFill>
                   <a:srgbClr val="8B949E"/>
                 </a:solidFill>
-                <a:latin typeface="Inter" pitchFamily="34" charset="0"/>
-                <a:ea typeface="Inter" pitchFamily="34" charset="-122"/>
-                <a:cs typeface="Inter" pitchFamily="34" charset="-120"/>
+                <a:latin typeface="Calibri" pitchFamily="34" charset="0"/>
+                <a:ea typeface="Microsoft YaHei UI" pitchFamily="34" charset="-122"/>
+                <a:cs typeface="Calibri" pitchFamily="34" charset="-120"/>
               </a:rPr>
               <a:t>规模：中国中小企业超 5000 万家，有内容营销预算约 300 万家</a:t>
             </a:r>
@@ -22209,9 +22209,9 @@
                 <a:solidFill>
                   <a:srgbClr val="7C3AED"/>
                 </a:solidFill>
-                <a:latin typeface="Inter" pitchFamily="34" charset="0"/>
-                <a:ea typeface="Inter" pitchFamily="34" charset="-122"/>
-                <a:cs typeface="Inter" pitchFamily="34" charset="-120"/>
+                <a:latin typeface="Calibri" pitchFamily="34" charset="0"/>
+                <a:ea typeface="Microsoft YaHei UI" pitchFamily="34" charset="-122"/>
+                <a:cs typeface="Calibri" pitchFamily="34" charset="-120"/>
               </a:rPr>
               <a:t>核心痛点</a:t>
             </a:r>
@@ -22255,9 +22255,9 @@
                     <a:alpha val="80000"/>
                   </a:srgbClr>
                 </a:solidFill>
-                <a:latin typeface="Inter" pitchFamily="34" charset="0"/>
-                <a:ea typeface="Inter" pitchFamily="34" charset="-122"/>
-                <a:cs typeface="Inter" pitchFamily="34" charset="-120"/>
+                <a:latin typeface="Calibri" pitchFamily="34" charset="0"/>
+                <a:ea typeface="Microsoft YaHei UI" pitchFamily="34" charset="-122"/>
+                <a:cs typeface="Calibri" pitchFamily="34" charset="-120"/>
               </a:rPr>
               <a:t>内容团队人力成本高，1–3 人难以覆盖多平台</a:t>
             </a:r>
@@ -22301,9 +22301,9 @@
                     <a:alpha val="80000"/>
                   </a:srgbClr>
                 </a:solidFill>
-                <a:latin typeface="Inter" pitchFamily="34" charset="0"/>
-                <a:ea typeface="Inter" pitchFamily="34" charset="-122"/>
-                <a:cs typeface="Inter" pitchFamily="34" charset="-120"/>
+                <a:latin typeface="Calibri" pitchFamily="34" charset="0"/>
+                <a:ea typeface="Microsoft YaHei UI" pitchFamily="34" charset="-122"/>
+                <a:cs typeface="Calibri" pitchFamily="34" charset="-120"/>
               </a:rPr>
               <a:t>品牌调性一致性难以保持</a:t>
             </a:r>
@@ -22347,9 +22347,9 @@
                     <a:alpha val="80000"/>
                   </a:srgbClr>
                 </a:solidFill>
-                <a:latin typeface="Inter" pitchFamily="34" charset="0"/>
-                <a:ea typeface="Inter" pitchFamily="34" charset="-122"/>
-                <a:cs typeface="Inter" pitchFamily="34" charset="-120"/>
+                <a:latin typeface="Calibri" pitchFamily="34" charset="0"/>
+                <a:ea typeface="Microsoft YaHei UI" pitchFamily="34" charset="-122"/>
+                <a:cs typeface="Calibri" pitchFamily="34" charset="-120"/>
               </a:rPr>
               <a:t>投放 ROI 不透明，内容效果难以量化</a:t>
             </a:r>
@@ -22393,9 +22393,9 @@
                     <a:alpha val="80000"/>
                   </a:srgbClr>
                 </a:solidFill>
-                <a:latin typeface="Inter" pitchFamily="34" charset="0"/>
-                <a:ea typeface="Inter" pitchFamily="34" charset="-122"/>
-                <a:cs typeface="Inter" pitchFamily="34" charset="-120"/>
+                <a:latin typeface="Calibri" pitchFamily="34" charset="0"/>
+                <a:ea typeface="Microsoft YaHei UI" pitchFamily="34" charset="-122"/>
+                <a:cs typeface="Calibri" pitchFamily="34" charset="-120"/>
               </a:rPr>
               <a:t>竞品动态监控滞后，错失流量机会</a:t>
             </a:r>
@@ -22466,9 +22466,9 @@
                 <a:solidFill>
                   <a:srgbClr val="A78BFA"/>
                 </a:solidFill>
-                <a:latin typeface="Inter" pitchFamily="34" charset="0"/>
-                <a:ea typeface="Inter" pitchFamily="34" charset="-122"/>
-                <a:cs typeface="Inter" pitchFamily="34" charset="-120"/>
+                <a:latin typeface="Calibri" pitchFamily="34" charset="0"/>
+                <a:ea typeface="Microsoft YaHei UI" pitchFamily="34" charset="-122"/>
+                <a:cs typeface="Calibri" pitchFamily="34" charset="-120"/>
               </a:rPr>
               <a:t>付费意愿</a:t>
             </a:r>
@@ -22510,9 +22510,9 @@
                 <a:solidFill>
                   <a:srgbClr val="7C3AED"/>
                 </a:solidFill>
-                <a:latin typeface="Space Grotesk" pitchFamily="34" charset="0"/>
-                <a:ea typeface="Space Grotesk" pitchFamily="34" charset="-122"/>
-                <a:cs typeface="Space Grotesk" pitchFamily="34" charset="-120"/>
+                <a:latin typeface="Calibri" pitchFamily="34" charset="0"/>
+                <a:ea typeface="Microsoft YaHei UI" pitchFamily="34" charset="-122"/>
+                <a:cs typeface="Calibri" pitchFamily="34" charset="-120"/>
               </a:rPr>
               <a:t>¥999–4999 / 月</a:t>
             </a:r>
@@ -22554,9 +22554,9 @@
                 <a:solidFill>
                   <a:srgbClr val="8B949E"/>
                 </a:solidFill>
-                <a:latin typeface="Inter" pitchFamily="34" charset="0"/>
-                <a:ea typeface="Inter" pitchFamily="34" charset="-122"/>
-                <a:cs typeface="Inter" pitchFamily="34" charset="-120"/>
+                <a:latin typeface="Calibri" pitchFamily="34" charset="0"/>
+                <a:ea typeface="Microsoft YaHei UI" pitchFamily="34" charset="-122"/>
+                <a:cs typeface="Calibri" pitchFamily="34" charset="-120"/>
               </a:rPr>
               <a:t>预算充足，关注团队协作与数据分析</a:t>
             </a:r>
@@ -22654,9 +22654,9 @@
                 <a:solidFill>
                   <a:srgbClr val="000000"/>
                 </a:solidFill>
-                <a:latin typeface="Inter" pitchFamily="34" charset="0"/>
-                <a:ea typeface="Inter" pitchFamily="34" charset="-122"/>
-                <a:cs typeface="Inter" pitchFamily="34" charset="-120"/>
+                <a:latin typeface="Calibri" pitchFamily="34" charset="0"/>
+                <a:ea typeface="Microsoft YaHei UI" pitchFamily="34" charset="-122"/>
+                <a:cs typeface="Calibri" pitchFamily="34" charset="-120"/>
               </a:rPr>
               <a:t>🎬</a:t>
             </a:r>
@@ -22698,9 +22698,9 @@
                 <a:solidFill>
                   <a:srgbClr val="00D4FF"/>
                 </a:solidFill>
-                <a:latin typeface="Inter" pitchFamily="34" charset="0"/>
-                <a:ea typeface="Inter" pitchFamily="34" charset="-122"/>
-                <a:cs typeface="Inter" pitchFamily="34" charset="-120"/>
+                <a:latin typeface="Calibri" pitchFamily="34" charset="0"/>
+                <a:ea typeface="Microsoft YaHei UI" pitchFamily="34" charset="-122"/>
+                <a:cs typeface="Calibri" pitchFamily="34" charset="-120"/>
               </a:rPr>
               <a:t>ENTERPRISE MARKET</a:t>
             </a:r>
@@ -22742,9 +22742,9 @@
                 <a:solidFill>
                   <a:srgbClr val="FFFFFF"/>
                 </a:solidFill>
-                <a:latin typeface="Space Grotesk" pitchFamily="34" charset="0"/>
-                <a:ea typeface="Space Grotesk" pitchFamily="34" charset="-122"/>
-                <a:cs typeface="Space Grotesk" pitchFamily="34" charset="-120"/>
+                <a:latin typeface="Calibri" pitchFamily="34" charset="0"/>
+                <a:ea typeface="Microsoft YaHei UI" pitchFamily="34" charset="-122"/>
+                <a:cs typeface="Calibri" pitchFamily="34" charset="-120"/>
               </a:rPr>
               <a:t>MCN 机构</a:t>
             </a:r>
@@ -22786,9 +22786,9 @@
                 <a:solidFill>
                   <a:srgbClr val="8B949E"/>
                 </a:solidFill>
-                <a:latin typeface="Inter" pitchFamily="34" charset="0"/>
-                <a:ea typeface="Inter" pitchFamily="34" charset="-122"/>
-                <a:cs typeface="Inter" pitchFamily="34" charset="-120"/>
+                <a:latin typeface="Calibri" pitchFamily="34" charset="0"/>
+                <a:ea typeface="Microsoft YaHei UI" pitchFamily="34" charset="-122"/>
+                <a:cs typeface="Calibri" pitchFamily="34" charset="-120"/>
               </a:rPr>
               <a:t>规模：中国 MCN 机构超 4 万家，管理达人账号超 500 万个</a:t>
             </a:r>
@@ -22830,9 +22830,9 @@
                 <a:solidFill>
                   <a:srgbClr val="7C3AED"/>
                 </a:solidFill>
-                <a:latin typeface="Inter" pitchFamily="34" charset="0"/>
-                <a:ea typeface="Inter" pitchFamily="34" charset="-122"/>
-                <a:cs typeface="Inter" pitchFamily="34" charset="-120"/>
+                <a:latin typeface="Calibri" pitchFamily="34" charset="0"/>
+                <a:ea typeface="Microsoft YaHei UI" pitchFamily="34" charset="-122"/>
+                <a:cs typeface="Calibri" pitchFamily="34" charset="-120"/>
               </a:rPr>
               <a:t>核心痛点</a:t>
             </a:r>
@@ -22876,9 +22876,9 @@
                     <a:alpha val="80000"/>
                   </a:srgbClr>
                 </a:solidFill>
-                <a:latin typeface="Inter" pitchFamily="34" charset="0"/>
-                <a:ea typeface="Inter" pitchFamily="34" charset="-122"/>
-                <a:cs typeface="Inter" pitchFamily="34" charset="-120"/>
+                <a:latin typeface="Calibri" pitchFamily="34" charset="0"/>
+                <a:ea typeface="Microsoft YaHei UI" pitchFamily="34" charset="-122"/>
+                <a:cs typeface="Calibri" pitchFamily="34" charset="-120"/>
               </a:rPr>
               <a:t>批量管理数十至数百个账号，人工成本极高</a:t>
             </a:r>
@@ -22922,9 +22922,9 @@
                     <a:alpha val="80000"/>
                   </a:srgbClr>
                 </a:solidFill>
-                <a:latin typeface="Inter" pitchFamily="34" charset="0"/>
-                <a:ea typeface="Inter" pitchFamily="34" charset="-122"/>
-                <a:cs typeface="Inter" pitchFamily="34" charset="-120"/>
+                <a:latin typeface="Calibri" pitchFamily="34" charset="0"/>
+                <a:ea typeface="Microsoft YaHei UI" pitchFamily="34" charset="-122"/>
+                <a:cs typeface="Calibri" pitchFamily="34" charset="-120"/>
               </a:rPr>
               <a:t>内容矩阵差异化难，容易触发平台限流</a:t>
             </a:r>
@@ -22968,9 +22968,9 @@
                     <a:alpha val="80000"/>
                   </a:srgbClr>
                 </a:solidFill>
-                <a:latin typeface="Inter" pitchFamily="34" charset="0"/>
-                <a:ea typeface="Inter" pitchFamily="34" charset="-122"/>
-                <a:cs typeface="Inter" pitchFamily="34" charset="-120"/>
+                <a:latin typeface="Calibri" pitchFamily="34" charset="0"/>
+                <a:ea typeface="Microsoft YaHei UI" pitchFamily="34" charset="-122"/>
+                <a:cs typeface="Calibri" pitchFamily="34" charset="-120"/>
               </a:rPr>
               <a:t>数据孤岛：各平台数据无法统一分析</a:t>
             </a:r>
@@ -23014,9 +23014,9 @@
                     <a:alpha val="80000"/>
                   </a:srgbClr>
                 </a:solidFill>
-                <a:latin typeface="Inter" pitchFamily="34" charset="0"/>
-                <a:ea typeface="Inter" pitchFamily="34" charset="-122"/>
-                <a:cs typeface="Inter" pitchFamily="34" charset="-120"/>
+                <a:latin typeface="Calibri" pitchFamily="34" charset="0"/>
+                <a:ea typeface="Microsoft YaHei UI" pitchFamily="34" charset="-122"/>
+                <a:cs typeface="Calibri" pitchFamily="34" charset="-120"/>
               </a:rPr>
               <a:t>新人达人培育周期长，爆款复制效率低</a:t>
             </a:r>
@@ -23087,9 +23087,9 @@
                 <a:solidFill>
                   <a:srgbClr val="A78BFA"/>
                 </a:solidFill>
-                <a:latin typeface="Inter" pitchFamily="34" charset="0"/>
-                <a:ea typeface="Inter" pitchFamily="34" charset="-122"/>
-                <a:cs typeface="Inter" pitchFamily="34" charset="-120"/>
+                <a:latin typeface="Calibri" pitchFamily="34" charset="0"/>
+                <a:ea typeface="Microsoft YaHei UI" pitchFamily="34" charset="-122"/>
+                <a:cs typeface="Calibri" pitchFamily="34" charset="-120"/>
               </a:rPr>
               <a:t>付费意愿</a:t>
             </a:r>
@@ -23131,9 +23131,9 @@
                 <a:solidFill>
                   <a:srgbClr val="7C3AED"/>
                 </a:solidFill>
-                <a:latin typeface="Space Grotesk" pitchFamily="34" charset="0"/>
-                <a:ea typeface="Space Grotesk" pitchFamily="34" charset="-122"/>
-                <a:cs typeface="Space Grotesk" pitchFamily="34" charset="-120"/>
+                <a:latin typeface="Calibri" pitchFamily="34" charset="0"/>
+                <a:ea typeface="Microsoft YaHei UI" pitchFamily="34" charset="-122"/>
+                <a:cs typeface="Calibri" pitchFamily="34" charset="-120"/>
               </a:rPr>
               <a:t>¥9,999+ / 月</a:t>
             </a:r>
@@ -23175,9 +23175,9 @@
                 <a:solidFill>
                   <a:srgbClr val="8B949E"/>
                 </a:solidFill>
-                <a:latin typeface="Inter" pitchFamily="34" charset="0"/>
-                <a:ea typeface="Inter" pitchFamily="34" charset="-122"/>
-                <a:cs typeface="Inter" pitchFamily="34" charset="-120"/>
+                <a:latin typeface="Calibri" pitchFamily="34" charset="0"/>
+                <a:ea typeface="Microsoft YaHei UI" pitchFamily="34" charset="-122"/>
+                <a:cs typeface="Calibri" pitchFamily="34" charset="-120"/>
               </a:rPr>
               <a:t>需要 API 接入与定制化，按账号数计费</a:t>
             </a:r>
@@ -23261,9 +23261,9 @@
                 <a:solidFill>
                   <a:srgbClr val="FFFFFF"/>
                 </a:solidFill>
-                <a:latin typeface="Inter" pitchFamily="34" charset="0"/>
-                <a:ea typeface="Inter" pitchFamily="34" charset="-122"/>
-                <a:cs typeface="Inter" pitchFamily="34" charset="-120"/>
+                <a:latin typeface="Calibri" pitchFamily="34" charset="0"/>
+                <a:ea typeface="Microsoft YaHei UI" pitchFamily="34" charset="-122"/>
+                <a:cs typeface="Calibri" pitchFamily="34" charset="-120"/>
               </a:rPr>
               <a:t>关键洞察：</a:t>
             </a:r>
@@ -23280,9 +23280,9 @@
                     <a:alpha val="70000"/>
                   </a:srgbClr>
                 </a:solidFill>
-                <a:latin typeface="Inter" pitchFamily="34" charset="0"/>
-                <a:ea typeface="Inter" pitchFamily="34" charset="-122"/>
-                <a:cs typeface="Inter" pitchFamily="34" charset="-120"/>
+                <a:latin typeface="Calibri" pitchFamily="34" charset="0"/>
+                <a:ea typeface="Microsoft YaHei UI" pitchFamily="34" charset="-122"/>
+                <a:cs typeface="Calibri" pitchFamily="34" charset="-120"/>
               </a:rPr>
               <a:t>三类用户共同面临"多平台内容生产效率"瓶颈，但付费路径不同——个人用户需低价高频订阅，企业用户需功能深度与数据价值，MCN 需批量自动化与 API 开放能力。</a:t>
             </a:r>
@@ -23373,9 +23373,9 @@
                 <a:solidFill>
                   <a:srgbClr val="00D4FF"/>
                 </a:solidFill>
-                <a:latin typeface="Inter" pitchFamily="34" charset="0"/>
-                <a:ea typeface="Inter" pitchFamily="34" charset="-122"/>
-                <a:cs typeface="Inter" pitchFamily="34" charset="-120"/>
+                <a:latin typeface="Calibri" pitchFamily="34" charset="0"/>
+                <a:ea typeface="Microsoft YaHei UI" pitchFamily="34" charset="-122"/>
+                <a:cs typeface="Calibri" pitchFamily="34" charset="-120"/>
               </a:rPr>
               <a:t>PLATFORM ECOSYSTEM</a:t>
             </a:r>
@@ -23417,9 +23417,9 @@
                 <a:solidFill>
                   <a:srgbClr val="FFFFFF"/>
                 </a:solidFill>
-                <a:latin typeface="Space Grotesk" pitchFamily="34" charset="0"/>
-                <a:ea typeface="Space Grotesk" pitchFamily="34" charset="-122"/>
-                <a:cs typeface="Space Grotesk" pitchFamily="34" charset="-120"/>
+                <a:latin typeface="Calibri" pitchFamily="34" charset="0"/>
+                <a:ea typeface="Microsoft YaHei UI" pitchFamily="34" charset="-122"/>
+                <a:cs typeface="Calibri" pitchFamily="34" charset="-120"/>
               </a:rPr>
               <a:t>8 大高流量平台：差异化规则与 API 发布能力全景</a:t>
             </a:r>
@@ -23488,9 +23488,9 @@
                 <a:solidFill>
                   <a:srgbClr val="FFFFFF"/>
                 </a:solidFill>
-                <a:latin typeface="Space Grotesk" pitchFamily="34" charset="0"/>
-                <a:ea typeface="Space Grotesk" pitchFamily="34" charset="-122"/>
-                <a:cs typeface="Space Grotesk" pitchFamily="34" charset="-120"/>
+                <a:latin typeface="Calibri" pitchFamily="34" charset="0"/>
+                <a:ea typeface="Microsoft YaHei UI" pitchFamily="34" charset="-122"/>
+                <a:cs typeface="Calibri" pitchFamily="34" charset="-120"/>
               </a:rPr>
               <a:t>抖音</a:t>
             </a:r>
@@ -23554,9 +23554,9 @@
                 <a:solidFill>
                   <a:srgbClr val="8B949E"/>
                 </a:solidFill>
-                <a:latin typeface="Inter" pitchFamily="34" charset="0"/>
-                <a:ea typeface="Inter" pitchFamily="34" charset="-122"/>
-                <a:cs typeface="Inter" pitchFamily="34" charset="-120"/>
+                <a:latin typeface="Calibri" pitchFamily="34" charset="0"/>
+                <a:ea typeface="Microsoft YaHei UI" pitchFamily="34" charset="-122"/>
+                <a:cs typeface="Calibri" pitchFamily="34" charset="-120"/>
               </a:rPr>
               <a:t>DAU 8亿+</a:t>
             </a:r>
@@ -23598,9 +23598,9 @@
                 <a:solidFill>
                   <a:srgbClr val="00D4FF"/>
                 </a:solidFill>
-                <a:latin typeface="Inter" pitchFamily="34" charset="0"/>
-                <a:ea typeface="Inter" pitchFamily="34" charset="-122"/>
-                <a:cs typeface="Inter" pitchFamily="34" charset="-120"/>
+                <a:latin typeface="Calibri" pitchFamily="34" charset="0"/>
+                <a:ea typeface="Microsoft YaHei UI" pitchFamily="34" charset="-122"/>
+                <a:cs typeface="Calibri" pitchFamily="34" charset="-120"/>
               </a:rPr>
               <a:t>中国 · 短视频</a:t>
             </a:r>
@@ -23666,9 +23666,9 @@
                     <a:alpha val="60000"/>
                   </a:srgbClr>
                 </a:solidFill>
-                <a:latin typeface="Inter" pitchFamily="34" charset="0"/>
-                <a:ea typeface="Inter" pitchFamily="34" charset="-122"/>
-                <a:cs typeface="Inter" pitchFamily="34" charset="-120"/>
+                <a:latin typeface="Calibri" pitchFamily="34" charset="0"/>
+                <a:ea typeface="Microsoft YaHei UI" pitchFamily="34" charset="-122"/>
+                <a:cs typeface="Calibri" pitchFamily="34" charset="-120"/>
               </a:rPr>
               <a:t>竖版视频</a:t>
             </a:r>
@@ -23734,9 +23734,9 @@
                     <a:alpha val="60000"/>
                   </a:srgbClr>
                 </a:solidFill>
-                <a:latin typeface="Inter" pitchFamily="34" charset="0"/>
-                <a:ea typeface="Inter" pitchFamily="34" charset="-122"/>
-                <a:cs typeface="Inter" pitchFamily="34" charset="-120"/>
+                <a:latin typeface="Calibri" pitchFamily="34" charset="0"/>
+                <a:ea typeface="Microsoft YaHei UI" pitchFamily="34" charset="-122"/>
+                <a:cs typeface="Calibri" pitchFamily="34" charset="-120"/>
               </a:rPr>
               <a:t>9:16</a:t>
             </a:r>
@@ -23802,9 +23802,9 @@
                     <a:alpha val="60000"/>
                   </a:srgbClr>
                 </a:solidFill>
-                <a:latin typeface="Inter" pitchFamily="34" charset="0"/>
-                <a:ea typeface="Inter" pitchFamily="34" charset="-122"/>
-                <a:cs typeface="Inter" pitchFamily="34" charset="-120"/>
+                <a:latin typeface="Calibri" pitchFamily="34" charset="0"/>
+                <a:ea typeface="Microsoft YaHei UI" pitchFamily="34" charset="-122"/>
+                <a:cs typeface="Calibri" pitchFamily="34" charset="-120"/>
               </a:rPr>
               <a:t>15s–10min</a:t>
             </a:r>
@@ -23848,9 +23848,9 @@
                     <a:alpha val="55000"/>
                   </a:srgbClr>
                 </a:solidFill>
-                <a:latin typeface="Inter" pitchFamily="34" charset="0"/>
-                <a:ea typeface="Inter" pitchFamily="34" charset="-122"/>
-                <a:cs typeface="Inter" pitchFamily="34" charset="-120"/>
+                <a:latin typeface="Calibri" pitchFamily="34" charset="0"/>
+                <a:ea typeface="Microsoft YaHei UI" pitchFamily="34" charset="-122"/>
+                <a:cs typeface="Calibri" pitchFamily="34" charset="-120"/>
               </a:rPr>
               <a:t>算法强推流，前3秒完播率决定分发量级；话题标签影响权重</a:t>
             </a:r>
@@ -23892,9 +23892,9 @@
                 <a:solidFill>
                   <a:srgbClr val="8B949E"/>
                 </a:solidFill>
-                <a:latin typeface="Inter" pitchFamily="34" charset="0"/>
-                <a:ea typeface="Inter" pitchFamily="34" charset="-122"/>
-                <a:cs typeface="Inter" pitchFamily="34" charset="-120"/>
+                <a:latin typeface="Calibri" pitchFamily="34" charset="0"/>
+                <a:ea typeface="Microsoft YaHei UI" pitchFamily="34" charset="-122"/>
+                <a:cs typeface="Calibri" pitchFamily="34" charset="-120"/>
               </a:rPr>
               <a:t>API发布：</a:t>
             </a:r>
@@ -23965,9 +23965,9 @@
                 <a:solidFill>
                   <a:srgbClr val="FFA500"/>
                 </a:solidFill>
-                <a:latin typeface="Inter" pitchFamily="34" charset="0"/>
-                <a:ea typeface="Inter" pitchFamily="34" charset="-122"/>
-                <a:cs typeface="Inter" pitchFamily="34" charset="-120"/>
+                <a:latin typeface="Calibri" pitchFamily="34" charset="0"/>
+                <a:ea typeface="Microsoft YaHei UI" pitchFamily="34" charset="-122"/>
+                <a:cs typeface="Calibri" pitchFamily="34" charset="-120"/>
               </a:rPr>
               <a:t>企业限定</a:t>
             </a:r>
@@ -24036,9 +24036,9 @@
                 <a:solidFill>
                   <a:srgbClr val="FFFFFF"/>
                 </a:solidFill>
-                <a:latin typeface="Space Grotesk" pitchFamily="34" charset="0"/>
-                <a:ea typeface="Space Grotesk" pitchFamily="34" charset="-122"/>
-                <a:cs typeface="Space Grotesk" pitchFamily="34" charset="-120"/>
+                <a:latin typeface="Calibri" pitchFamily="34" charset="0"/>
+                <a:ea typeface="Microsoft YaHei UI" pitchFamily="34" charset="-122"/>
+                <a:cs typeface="Calibri" pitchFamily="34" charset="-120"/>
               </a:rPr>
               <a:t>小红书</a:t>
             </a:r>
@@ -24102,9 +24102,9 @@
                 <a:solidFill>
                   <a:srgbClr val="8B949E"/>
                 </a:solidFill>
-                <a:latin typeface="Inter" pitchFamily="34" charset="0"/>
-                <a:ea typeface="Inter" pitchFamily="34" charset="-122"/>
-                <a:cs typeface="Inter" pitchFamily="34" charset="-120"/>
+                <a:latin typeface="Calibri" pitchFamily="34" charset="0"/>
+                <a:ea typeface="Microsoft YaHei UI" pitchFamily="34" charset="-122"/>
+                <a:cs typeface="Calibri" pitchFamily="34" charset="-120"/>
               </a:rPr>
               <a:t>MAU 3亿+</a:t>
             </a:r>
@@ -24146,9 +24146,9 @@
                 <a:solidFill>
                   <a:srgbClr val="00D4FF"/>
                 </a:solidFill>
-                <a:latin typeface="Inter" pitchFamily="34" charset="0"/>
-                <a:ea typeface="Inter" pitchFamily="34" charset="-122"/>
-                <a:cs typeface="Inter" pitchFamily="34" charset="-120"/>
+                <a:latin typeface="Calibri" pitchFamily="34" charset="0"/>
+                <a:ea typeface="Microsoft YaHei UI" pitchFamily="34" charset="-122"/>
+                <a:cs typeface="Calibri" pitchFamily="34" charset="-120"/>
               </a:rPr>
               <a:t>中国 · 图文/短视频</a:t>
             </a:r>
@@ -24214,9 +24214,9 @@
                     <a:alpha val="60000"/>
                   </a:srgbClr>
                 </a:solidFill>
-                <a:latin typeface="Inter" pitchFamily="34" charset="0"/>
-                <a:ea typeface="Inter" pitchFamily="34" charset="-122"/>
-                <a:cs typeface="Inter" pitchFamily="34" charset="-120"/>
+                <a:latin typeface="Calibri" pitchFamily="34" charset="0"/>
+                <a:ea typeface="Microsoft YaHei UI" pitchFamily="34" charset="-122"/>
+                <a:cs typeface="Calibri" pitchFamily="34" charset="-120"/>
               </a:rPr>
               <a:t>图文笔记</a:t>
             </a:r>
@@ -24282,9 +24282,9 @@
                     <a:alpha val="60000"/>
                   </a:srgbClr>
                 </a:solidFill>
-                <a:latin typeface="Inter" pitchFamily="34" charset="0"/>
-                <a:ea typeface="Inter" pitchFamily="34" charset="-122"/>
-                <a:cs typeface="Inter" pitchFamily="34" charset="-120"/>
+                <a:latin typeface="Calibri" pitchFamily="34" charset="0"/>
+                <a:ea typeface="Microsoft YaHei UI" pitchFamily="34" charset="-122"/>
+                <a:cs typeface="Calibri" pitchFamily="34" charset="-120"/>
               </a:rPr>
               <a:t>短视频</a:t>
             </a:r>
@@ -24350,9 +24350,9 @@
                     <a:alpha val="60000"/>
                   </a:srgbClr>
                 </a:solidFill>
-                <a:latin typeface="Inter" pitchFamily="34" charset="0"/>
-                <a:ea typeface="Inter" pitchFamily="34" charset="-122"/>
-                <a:cs typeface="Inter" pitchFamily="34" charset="-120"/>
+                <a:latin typeface="Calibri" pitchFamily="34" charset="0"/>
+                <a:ea typeface="Microsoft YaHei UI" pitchFamily="34" charset="-122"/>
+                <a:cs typeface="Calibri" pitchFamily="34" charset="-120"/>
               </a:rPr>
               <a:t>3:4</a:t>
             </a:r>
@@ -24396,9 +24396,9 @@
                     <a:alpha val="55000"/>
                   </a:srgbClr>
                 </a:solidFill>
-                <a:latin typeface="Inter" pitchFamily="34" charset="0"/>
-                <a:ea typeface="Inter" pitchFamily="34" charset="-122"/>
-                <a:cs typeface="Inter" pitchFamily="34" charset="-120"/>
+                <a:latin typeface="Calibri" pitchFamily="34" charset="0"/>
+                <a:ea typeface="Microsoft YaHei UI" pitchFamily="34" charset="-122"/>
+                <a:cs typeface="Calibri" pitchFamily="34" charset="-120"/>
               </a:rPr>
               <a:t>搜索型平台，关键词 SEO 权重高；种草内容真实感优先</a:t>
             </a:r>
@@ -24440,9 +24440,9 @@
                 <a:solidFill>
                   <a:srgbClr val="8B949E"/>
                 </a:solidFill>
-                <a:latin typeface="Inter" pitchFamily="34" charset="0"/>
-                <a:ea typeface="Inter" pitchFamily="34" charset="-122"/>
-                <a:cs typeface="Inter" pitchFamily="34" charset="-120"/>
+                <a:latin typeface="Calibri" pitchFamily="34" charset="0"/>
+                <a:ea typeface="Microsoft YaHei UI" pitchFamily="34" charset="-122"/>
+                <a:cs typeface="Calibri" pitchFamily="34" charset="-120"/>
               </a:rPr>
               <a:t>API发布：</a:t>
             </a:r>
@@ -24513,9 +24513,9 @@
                 <a:solidFill>
                   <a:srgbClr val="FF6060"/>
                 </a:solidFill>
-                <a:latin typeface="Inter" pitchFamily="34" charset="0"/>
-                <a:ea typeface="Inter" pitchFamily="34" charset="-122"/>
-                <a:cs typeface="Inter" pitchFamily="34" charset="-120"/>
+                <a:latin typeface="Calibri" pitchFamily="34" charset="0"/>
+                <a:ea typeface="Microsoft YaHei UI" pitchFamily="34" charset="-122"/>
+                <a:cs typeface="Calibri" pitchFamily="34" charset="-120"/>
               </a:rPr>
               <a:t>无开放API</a:t>
             </a:r>
@@ -24584,9 +24584,9 @@
                 <a:solidFill>
                   <a:srgbClr val="FFFFFF"/>
                 </a:solidFill>
-                <a:latin typeface="Space Grotesk" pitchFamily="34" charset="0"/>
-                <a:ea typeface="Space Grotesk" pitchFamily="34" charset="-122"/>
-                <a:cs typeface="Space Grotesk" pitchFamily="34" charset="-120"/>
+                <a:latin typeface="Calibri" pitchFamily="34" charset="0"/>
+                <a:ea typeface="Microsoft YaHei UI" pitchFamily="34" charset="-122"/>
+                <a:cs typeface="Calibri" pitchFamily="34" charset="-120"/>
               </a:rPr>
               <a:t>微博</a:t>
             </a:r>
@@ -24650,9 +24650,9 @@
                 <a:solidFill>
                   <a:srgbClr val="8B949E"/>
                 </a:solidFill>
-                <a:latin typeface="Inter" pitchFamily="34" charset="0"/>
-                <a:ea typeface="Inter" pitchFamily="34" charset="-122"/>
-                <a:cs typeface="Inter" pitchFamily="34" charset="-120"/>
+                <a:latin typeface="Calibri" pitchFamily="34" charset="0"/>
+                <a:ea typeface="Microsoft YaHei UI" pitchFamily="34" charset="-122"/>
+                <a:cs typeface="Calibri" pitchFamily="34" charset="-120"/>
               </a:rPr>
               <a:t>MAU 2.6亿</a:t>
             </a:r>
@@ -24694,9 +24694,9 @@
                 <a:solidFill>
                   <a:srgbClr val="00D4FF"/>
                 </a:solidFill>
-                <a:latin typeface="Inter" pitchFamily="34" charset="0"/>
-                <a:ea typeface="Inter" pitchFamily="34" charset="-122"/>
-                <a:cs typeface="Inter" pitchFamily="34" charset="-120"/>
+                <a:latin typeface="Calibri" pitchFamily="34" charset="0"/>
+                <a:ea typeface="Microsoft YaHei UI" pitchFamily="34" charset="-122"/>
+                <a:cs typeface="Calibri" pitchFamily="34" charset="-120"/>
               </a:rPr>
               <a:t>中国 · 图文/话题</a:t>
             </a:r>
@@ -24762,9 +24762,9 @@
                     <a:alpha val="60000"/>
                   </a:srgbClr>
                 </a:solidFill>
-                <a:latin typeface="Inter" pitchFamily="34" charset="0"/>
-                <a:ea typeface="Inter" pitchFamily="34" charset="-122"/>
-                <a:cs typeface="Inter" pitchFamily="34" charset="-120"/>
+                <a:latin typeface="Calibri" pitchFamily="34" charset="0"/>
+                <a:ea typeface="Microsoft YaHei UI" pitchFamily="34" charset="-122"/>
+                <a:cs typeface="Calibri" pitchFamily="34" charset="-120"/>
               </a:rPr>
               <a:t>图文</a:t>
             </a:r>
@@ -24830,9 +24830,9 @@
                     <a:alpha val="60000"/>
                   </a:srgbClr>
                 </a:solidFill>
-                <a:latin typeface="Inter" pitchFamily="34" charset="0"/>
-                <a:ea typeface="Inter" pitchFamily="34" charset="-122"/>
-                <a:cs typeface="Inter" pitchFamily="34" charset="-120"/>
+                <a:latin typeface="Calibri" pitchFamily="34" charset="0"/>
+                <a:ea typeface="Microsoft YaHei UI" pitchFamily="34" charset="-122"/>
+                <a:cs typeface="Calibri" pitchFamily="34" charset="-120"/>
               </a:rPr>
               <a:t>短视频</a:t>
             </a:r>
@@ -24898,9 +24898,9 @@
                     <a:alpha val="60000"/>
                   </a:srgbClr>
                 </a:solidFill>
-                <a:latin typeface="Inter" pitchFamily="34" charset="0"/>
-                <a:ea typeface="Inter" pitchFamily="34" charset="-122"/>
-                <a:cs typeface="Inter" pitchFamily="34" charset="-120"/>
+                <a:latin typeface="Calibri" pitchFamily="34" charset="0"/>
+                <a:ea typeface="Microsoft YaHei UI" pitchFamily="34" charset="-122"/>
+                <a:cs typeface="Calibri" pitchFamily="34" charset="-120"/>
               </a:rPr>
               <a:t>热搜话题</a:t>
             </a:r>
@@ -24944,9 +24944,9 @@
                     <a:alpha val="55000"/>
                   </a:srgbClr>
                 </a:solidFill>
-                <a:latin typeface="Inter" pitchFamily="34" charset="0"/>
-                <a:ea typeface="Inter" pitchFamily="34" charset="-122"/>
-                <a:cs typeface="Inter" pitchFamily="34" charset="-120"/>
+                <a:latin typeface="Calibri" pitchFamily="34" charset="0"/>
+                <a:ea typeface="Microsoft YaHei UI" pitchFamily="34" charset="-122"/>
+                <a:cs typeface="Calibri" pitchFamily="34" charset="-120"/>
               </a:rPr>
               <a:t>热搜话题驱动流量，转发链是核心传播路径</a:t>
             </a:r>
@@ -24988,9 +24988,9 @@
                 <a:solidFill>
                   <a:srgbClr val="8B949E"/>
                 </a:solidFill>
-                <a:latin typeface="Inter" pitchFamily="34" charset="0"/>
-                <a:ea typeface="Inter" pitchFamily="34" charset="-122"/>
-                <a:cs typeface="Inter" pitchFamily="34" charset="-120"/>
+                <a:latin typeface="Calibri" pitchFamily="34" charset="0"/>
+                <a:ea typeface="Microsoft YaHei UI" pitchFamily="34" charset="-122"/>
+                <a:cs typeface="Calibri" pitchFamily="34" charset="-120"/>
               </a:rPr>
               <a:t>API发布：</a:t>
             </a:r>
@@ -25061,9 +25061,9 @@
                 <a:solidFill>
                   <a:srgbClr val="00D464"/>
                 </a:solidFill>
-                <a:latin typeface="Inter" pitchFamily="34" charset="0"/>
-                <a:ea typeface="Inter" pitchFamily="34" charset="-122"/>
-                <a:cs typeface="Inter" pitchFamily="34" charset="-120"/>
+                <a:latin typeface="Calibri" pitchFamily="34" charset="0"/>
+                <a:ea typeface="Microsoft YaHei UI" pitchFamily="34" charset="-122"/>
+                <a:cs typeface="Calibri" pitchFamily="34" charset="-120"/>
               </a:rPr>
               <a:t>开放接口</a:t>
             </a:r>
@@ -25132,9 +25132,9 @@
                 <a:solidFill>
                   <a:srgbClr val="FFFFFF"/>
                 </a:solidFill>
-                <a:latin typeface="Space Grotesk" pitchFamily="34" charset="0"/>
-                <a:ea typeface="Space Grotesk" pitchFamily="34" charset="-122"/>
-                <a:cs typeface="Space Grotesk" pitchFamily="34" charset="-120"/>
+                <a:latin typeface="Calibri" pitchFamily="34" charset="0"/>
+                <a:ea typeface="Microsoft YaHei UI" pitchFamily="34" charset="-122"/>
+                <a:cs typeface="Calibri" pitchFamily="34" charset="-120"/>
               </a:rPr>
               <a:t>B站</a:t>
             </a:r>
@@ -25198,9 +25198,9 @@
                 <a:solidFill>
                   <a:srgbClr val="8B949E"/>
                 </a:solidFill>
-                <a:latin typeface="Inter" pitchFamily="34" charset="0"/>
-                <a:ea typeface="Inter" pitchFamily="34" charset="-122"/>
-                <a:cs typeface="Inter" pitchFamily="34" charset="-120"/>
+                <a:latin typeface="Calibri" pitchFamily="34" charset="0"/>
+                <a:ea typeface="Microsoft YaHei UI" pitchFamily="34" charset="-122"/>
+                <a:cs typeface="Calibri" pitchFamily="34" charset="-120"/>
               </a:rPr>
               <a:t>MAU 3.4亿</a:t>
             </a:r>
@@ -25242,9 +25242,9 @@
                 <a:solidFill>
                   <a:srgbClr val="00D4FF"/>
                 </a:solidFill>
-                <a:latin typeface="Inter" pitchFamily="34" charset="0"/>
-                <a:ea typeface="Inter" pitchFamily="34" charset="-122"/>
-                <a:cs typeface="Inter" pitchFamily="34" charset="-120"/>
+                <a:latin typeface="Calibri" pitchFamily="34" charset="0"/>
+                <a:ea typeface="Microsoft YaHei UI" pitchFamily="34" charset="-122"/>
+                <a:cs typeface="Calibri" pitchFamily="34" charset="-120"/>
               </a:rPr>
               <a:t>中国 · 中长视频</a:t>
             </a:r>
@@ -25310,9 +25310,9 @@
                     <a:alpha val="60000"/>
                   </a:srgbClr>
                 </a:solidFill>
-                <a:latin typeface="Inter" pitchFamily="34" charset="0"/>
-                <a:ea typeface="Inter" pitchFamily="34" charset="-122"/>
-                <a:cs typeface="Inter" pitchFamily="34" charset="-120"/>
+                <a:latin typeface="Calibri" pitchFamily="34" charset="0"/>
+                <a:ea typeface="Microsoft YaHei UI" pitchFamily="34" charset="-122"/>
+                <a:cs typeface="Calibri" pitchFamily="34" charset="-120"/>
               </a:rPr>
               <a:t>横版视频</a:t>
             </a:r>
@@ -25378,9 +25378,9 @@
                     <a:alpha val="60000"/>
                   </a:srgbClr>
                 </a:solidFill>
-                <a:latin typeface="Inter" pitchFamily="34" charset="0"/>
-                <a:ea typeface="Inter" pitchFamily="34" charset="-122"/>
-                <a:cs typeface="Inter" pitchFamily="34" charset="-120"/>
+                <a:latin typeface="Calibri" pitchFamily="34" charset="0"/>
+                <a:ea typeface="Microsoft YaHei UI" pitchFamily="34" charset="-122"/>
+                <a:cs typeface="Calibri" pitchFamily="34" charset="-120"/>
               </a:rPr>
               <a:t>16:9</a:t>
             </a:r>
@@ -25446,9 +25446,9 @@
                     <a:alpha val="60000"/>
                   </a:srgbClr>
                 </a:solidFill>
-                <a:latin typeface="Inter" pitchFamily="34" charset="0"/>
-                <a:ea typeface="Inter" pitchFamily="34" charset="-122"/>
-                <a:cs typeface="Inter" pitchFamily="34" charset="-120"/>
+                <a:latin typeface="Calibri" pitchFamily="34" charset="0"/>
+                <a:ea typeface="Microsoft YaHei UI" pitchFamily="34" charset="-122"/>
+                <a:cs typeface="Calibri" pitchFamily="34" charset="-120"/>
               </a:rPr>
               <a:t>3min+</a:t>
             </a:r>
@@ -25492,9 +25492,9 @@
                     <a:alpha val="55000"/>
                   </a:srgbClr>
                 </a:solidFill>
-                <a:latin typeface="Inter" pitchFamily="34" charset="0"/>
-                <a:ea typeface="Inter" pitchFamily="34" charset="-122"/>
-                <a:cs typeface="Inter" pitchFamily="34" charset="-120"/>
+                <a:latin typeface="Calibri" pitchFamily="34" charset="0"/>
+                <a:ea typeface="Microsoft YaHei UI" pitchFamily="34" charset="-122"/>
+                <a:cs typeface="Calibri" pitchFamily="34" charset="-120"/>
               </a:rPr>
               <a:t>弹幕互动文化，完播率+互动率双权重；知识类内容高溢价</a:t>
             </a:r>
@@ -25536,9 +25536,9 @@
                 <a:solidFill>
                   <a:srgbClr val="8B949E"/>
                 </a:solidFill>
-                <a:latin typeface="Inter" pitchFamily="34" charset="0"/>
-                <a:ea typeface="Inter" pitchFamily="34" charset="-122"/>
-                <a:cs typeface="Inter" pitchFamily="34" charset="-120"/>
+                <a:latin typeface="Calibri" pitchFamily="34" charset="0"/>
+                <a:ea typeface="Microsoft YaHei UI" pitchFamily="34" charset="-122"/>
+                <a:cs typeface="Calibri" pitchFamily="34" charset="-120"/>
               </a:rPr>
               <a:t>API发布：</a:t>
             </a:r>
@@ -25609,9 +25609,9 @@
                 <a:solidFill>
                   <a:srgbClr val="FFA500"/>
                 </a:solidFill>
-                <a:latin typeface="Inter" pitchFamily="34" charset="0"/>
-                <a:ea typeface="Inter" pitchFamily="34" charset="-122"/>
-                <a:cs typeface="Inter" pitchFamily="34" charset="-120"/>
+                <a:latin typeface="Calibri" pitchFamily="34" charset="0"/>
+                <a:ea typeface="Microsoft YaHei UI" pitchFamily="34" charset="-122"/>
+                <a:cs typeface="Calibri" pitchFamily="34" charset="-120"/>
               </a:rPr>
               <a:t>非官方API</a:t>
             </a:r>
@@ -25680,9 +25680,9 @@
                 <a:solidFill>
                   <a:srgbClr val="FFFFFF"/>
                 </a:solidFill>
-                <a:latin typeface="Space Grotesk" pitchFamily="34" charset="0"/>
-                <a:ea typeface="Space Grotesk" pitchFamily="34" charset="-122"/>
-                <a:cs typeface="Space Grotesk" pitchFamily="34" charset="-120"/>
+                <a:latin typeface="Calibri" pitchFamily="34" charset="0"/>
+                <a:ea typeface="Microsoft YaHei UI" pitchFamily="34" charset="-122"/>
+                <a:cs typeface="Calibri" pitchFamily="34" charset="-120"/>
               </a:rPr>
               <a:t>微信视频号</a:t>
             </a:r>
@@ -25746,9 +25746,9 @@
                 <a:solidFill>
                   <a:srgbClr val="8B949E"/>
                 </a:solidFill>
-                <a:latin typeface="Inter" pitchFamily="34" charset="0"/>
-                <a:ea typeface="Inter" pitchFamily="34" charset="-122"/>
-                <a:cs typeface="Inter" pitchFamily="34" charset="-120"/>
+                <a:latin typeface="Calibri" pitchFamily="34" charset="0"/>
+                <a:ea typeface="Microsoft YaHei UI" pitchFamily="34" charset="-122"/>
+                <a:cs typeface="Calibri" pitchFamily="34" charset="-120"/>
               </a:rPr>
               <a:t>MAU 8亿+</a:t>
             </a:r>
@@ -25790,9 +25790,9 @@
                 <a:solidFill>
                   <a:srgbClr val="00D4FF"/>
                 </a:solidFill>
-                <a:latin typeface="Inter" pitchFamily="34" charset="0"/>
-                <a:ea typeface="Inter" pitchFamily="34" charset="-122"/>
-                <a:cs typeface="Inter" pitchFamily="34" charset="-120"/>
+                <a:latin typeface="Calibri" pitchFamily="34" charset="0"/>
+                <a:ea typeface="Microsoft YaHei UI" pitchFamily="34" charset="-122"/>
+                <a:cs typeface="Calibri" pitchFamily="34" charset="-120"/>
               </a:rPr>
               <a:t>中国 · 短视频/直播</a:t>
             </a:r>
@@ -25858,9 +25858,9 @@
                     <a:alpha val="60000"/>
                   </a:srgbClr>
                 </a:solidFill>
-                <a:latin typeface="Inter" pitchFamily="34" charset="0"/>
-                <a:ea typeface="Inter" pitchFamily="34" charset="-122"/>
-                <a:cs typeface="Inter" pitchFamily="34" charset="-120"/>
+                <a:latin typeface="Calibri" pitchFamily="34" charset="0"/>
+                <a:ea typeface="Microsoft YaHei UI" pitchFamily="34" charset="-122"/>
+                <a:cs typeface="Calibri" pitchFamily="34" charset="-120"/>
               </a:rPr>
               <a:t>竖版视频</a:t>
             </a:r>
@@ -25926,9 +25926,9 @@
                     <a:alpha val="60000"/>
                   </a:srgbClr>
                 </a:solidFill>
-                <a:latin typeface="Inter" pitchFamily="34" charset="0"/>
-                <a:ea typeface="Inter" pitchFamily="34" charset="-122"/>
-                <a:cs typeface="Inter" pitchFamily="34" charset="-120"/>
+                <a:latin typeface="Calibri" pitchFamily="34" charset="0"/>
+                <a:ea typeface="Microsoft YaHei UI" pitchFamily="34" charset="-122"/>
+                <a:cs typeface="Calibri" pitchFamily="34" charset="-120"/>
               </a:rPr>
               <a:t>朋友圈联动</a:t>
             </a:r>
@@ -25972,9 +25972,9 @@
                     <a:alpha val="55000"/>
                   </a:srgbClr>
                 </a:solidFill>
-                <a:latin typeface="Inter" pitchFamily="34" charset="0"/>
-                <a:ea typeface="Inter" pitchFamily="34" charset="-122"/>
-                <a:cs typeface="Inter" pitchFamily="34" charset="-120"/>
+                <a:latin typeface="Calibri" pitchFamily="34" charset="0"/>
+                <a:ea typeface="Microsoft YaHei UI" pitchFamily="34" charset="-122"/>
+                <a:cs typeface="Calibri" pitchFamily="34" charset="-120"/>
               </a:rPr>
               <a:t>社交裂变为核心，朋友点赞可撬动公域流量；私域转化率高</a:t>
             </a:r>
@@ -26016,9 +26016,9 @@
                 <a:solidFill>
                   <a:srgbClr val="8B949E"/>
                 </a:solidFill>
-                <a:latin typeface="Inter" pitchFamily="34" charset="0"/>
-                <a:ea typeface="Inter" pitchFamily="34" charset="-122"/>
-                <a:cs typeface="Inter" pitchFamily="34" charset="-120"/>
+                <a:latin typeface="Calibri" pitchFamily="34" charset="0"/>
+                <a:ea typeface="Microsoft YaHei UI" pitchFamily="34" charset="-122"/>
+                <a:cs typeface="Calibri" pitchFamily="34" charset="-120"/>
               </a:rPr>
               <a:t>API发布：</a:t>
             </a:r>
@@ -26089,9 +26089,9 @@
                 <a:solidFill>
                   <a:srgbClr val="FFA500"/>
                 </a:solidFill>
-                <a:latin typeface="Inter" pitchFamily="34" charset="0"/>
-                <a:ea typeface="Inter" pitchFamily="34" charset="-122"/>
-                <a:cs typeface="Inter" pitchFamily="34" charset="-120"/>
+                <a:latin typeface="Calibri" pitchFamily="34" charset="0"/>
+                <a:ea typeface="Microsoft YaHei UI" pitchFamily="34" charset="-122"/>
+                <a:cs typeface="Calibri" pitchFamily="34" charset="-120"/>
               </a:rPr>
               <a:t>公众号关联</a:t>
             </a:r>
@@ -26160,9 +26160,9 @@
                 <a:solidFill>
                   <a:srgbClr val="FFFFFF"/>
                 </a:solidFill>
-                <a:latin typeface="Space Grotesk" pitchFamily="34" charset="0"/>
-                <a:ea typeface="Space Grotesk" pitchFamily="34" charset="-122"/>
-                <a:cs typeface="Space Grotesk" pitchFamily="34" charset="-120"/>
+                <a:latin typeface="Calibri" pitchFamily="34" charset="0"/>
+                <a:ea typeface="Microsoft YaHei UI" pitchFamily="34" charset="-122"/>
+                <a:cs typeface="Calibri" pitchFamily="34" charset="-120"/>
               </a:rPr>
               <a:t>YouTube</a:t>
             </a:r>
@@ -26226,9 +26226,9 @@
                 <a:solidFill>
                   <a:srgbClr val="8B949E"/>
                 </a:solidFill>
-                <a:latin typeface="Inter" pitchFamily="34" charset="0"/>
-                <a:ea typeface="Inter" pitchFamily="34" charset="-122"/>
-                <a:cs typeface="Inter" pitchFamily="34" charset="-120"/>
+                <a:latin typeface="Calibri" pitchFamily="34" charset="0"/>
+                <a:ea typeface="Microsoft YaHei UI" pitchFamily="34" charset="-122"/>
+                <a:cs typeface="Calibri" pitchFamily="34" charset="-120"/>
               </a:rPr>
               <a:t>MAU 27亿</a:t>
             </a:r>
@@ -26270,9 +26270,9 @@
                 <a:solidFill>
                   <a:srgbClr val="00D4FF"/>
                 </a:solidFill>
-                <a:latin typeface="Inter" pitchFamily="34" charset="0"/>
-                <a:ea typeface="Inter" pitchFamily="34" charset="-122"/>
-                <a:cs typeface="Inter" pitchFamily="34" charset="-120"/>
+                <a:latin typeface="Calibri" pitchFamily="34" charset="0"/>
+                <a:ea typeface="Microsoft YaHei UI" pitchFamily="34" charset="-122"/>
+                <a:cs typeface="Calibri" pitchFamily="34" charset="-120"/>
               </a:rPr>
               <a:t>全球 · 中长视频</a:t>
             </a:r>
@@ -26338,9 +26338,9 @@
                     <a:alpha val="60000"/>
                   </a:srgbClr>
                 </a:solidFill>
-                <a:latin typeface="Inter" pitchFamily="34" charset="0"/>
-                <a:ea typeface="Inter" pitchFamily="34" charset="-122"/>
-                <a:cs typeface="Inter" pitchFamily="34" charset="-120"/>
+                <a:latin typeface="Calibri" pitchFamily="34" charset="0"/>
+                <a:ea typeface="Microsoft YaHei UI" pitchFamily="34" charset="-122"/>
+                <a:cs typeface="Calibri" pitchFamily="34" charset="-120"/>
               </a:rPr>
               <a:t>横版/竖版</a:t>
             </a:r>
@@ -26406,9 +26406,9 @@
                     <a:alpha val="60000"/>
                   </a:srgbClr>
                 </a:solidFill>
-                <a:latin typeface="Inter" pitchFamily="34" charset="0"/>
-                <a:ea typeface="Inter" pitchFamily="34" charset="-122"/>
-                <a:cs typeface="Inter" pitchFamily="34" charset="-120"/>
+                <a:latin typeface="Calibri" pitchFamily="34" charset="0"/>
+                <a:ea typeface="Microsoft YaHei UI" pitchFamily="34" charset="-122"/>
+                <a:cs typeface="Calibri" pitchFamily="34" charset="-120"/>
               </a:rPr>
               <a:t>Shorts</a:t>
             </a:r>
@@ -26474,9 +26474,9 @@
                     <a:alpha val="60000"/>
                   </a:srgbClr>
                 </a:solidFill>
-                <a:latin typeface="Inter" pitchFamily="34" charset="0"/>
-                <a:ea typeface="Inter" pitchFamily="34" charset="-122"/>
-                <a:cs typeface="Inter" pitchFamily="34" charset="-120"/>
+                <a:latin typeface="Calibri" pitchFamily="34" charset="0"/>
+                <a:ea typeface="Microsoft YaHei UI" pitchFamily="34" charset="-122"/>
+                <a:cs typeface="Calibri" pitchFamily="34" charset="-120"/>
               </a:rPr>
               <a:t>SEO强</a:t>
             </a:r>
@@ -26520,9 +26520,9 @@
                     <a:alpha val="55000"/>
                   </a:srgbClr>
                 </a:solidFill>
-                <a:latin typeface="Inter" pitchFamily="34" charset="0"/>
-                <a:ea typeface="Inter" pitchFamily="34" charset="-122"/>
-                <a:cs typeface="Inter" pitchFamily="34" charset="-120"/>
+                <a:latin typeface="Calibri" pitchFamily="34" charset="0"/>
+                <a:ea typeface="Microsoft YaHei UI" pitchFamily="34" charset="-122"/>
+                <a:cs typeface="Calibri" pitchFamily="34" charset="-120"/>
               </a:rPr>
               <a:t>搜索引擎属性强，长尾关键词 SEO 带来持续流量；广告分成成熟</a:t>
             </a:r>
@@ -26564,9 +26564,9 @@
                 <a:solidFill>
                   <a:srgbClr val="8B949E"/>
                 </a:solidFill>
-                <a:latin typeface="Inter" pitchFamily="34" charset="0"/>
-                <a:ea typeface="Inter" pitchFamily="34" charset="-122"/>
-                <a:cs typeface="Inter" pitchFamily="34" charset="-120"/>
+                <a:latin typeface="Calibri" pitchFamily="34" charset="0"/>
+                <a:ea typeface="Microsoft YaHei UI" pitchFamily="34" charset="-122"/>
+                <a:cs typeface="Calibri" pitchFamily="34" charset="-120"/>
               </a:rPr>
               <a:t>API发布：</a:t>
             </a:r>
@@ -26637,9 +26637,9 @@
                 <a:solidFill>
                   <a:srgbClr val="00D464"/>
                 </a:solidFill>
-                <a:latin typeface="Inter" pitchFamily="34" charset="0"/>
-                <a:ea typeface="Inter" pitchFamily="34" charset="-122"/>
-                <a:cs typeface="Inter" pitchFamily="34" charset="-120"/>
+                <a:latin typeface="Calibri" pitchFamily="34" charset="0"/>
+                <a:ea typeface="Microsoft YaHei UI" pitchFamily="34" charset="-122"/>
+                <a:cs typeface="Calibri" pitchFamily="34" charset="-120"/>
               </a:rPr>
               <a:t>官方Data API</a:t>
             </a:r>
@@ -26708,9 +26708,9 @@
                 <a:solidFill>
                   <a:srgbClr val="FFFFFF"/>
                 </a:solidFill>
-                <a:latin typeface="Space Grotesk" pitchFamily="34" charset="0"/>
-                <a:ea typeface="Space Grotesk" pitchFamily="34" charset="-122"/>
-                <a:cs typeface="Space Grotesk" pitchFamily="34" charset="-120"/>
+                <a:latin typeface="Calibri" pitchFamily="34" charset="0"/>
+                <a:ea typeface="Microsoft YaHei UI" pitchFamily="34" charset="-122"/>
+                <a:cs typeface="Calibri" pitchFamily="34" charset="-120"/>
               </a:rPr>
               <a:t>TikTok</a:t>
             </a:r>
@@ -26774,9 +26774,9 @@
                 <a:solidFill>
                   <a:srgbClr val="8B949E"/>
                 </a:solidFill>
-                <a:latin typeface="Inter" pitchFamily="34" charset="0"/>
-                <a:ea typeface="Inter" pitchFamily="34" charset="-122"/>
-                <a:cs typeface="Inter" pitchFamily="34" charset="-120"/>
+                <a:latin typeface="Calibri" pitchFamily="34" charset="0"/>
+                <a:ea typeface="Microsoft YaHei UI" pitchFamily="34" charset="-122"/>
+                <a:cs typeface="Calibri" pitchFamily="34" charset="-120"/>
               </a:rPr>
               <a:t>MAU 19亿</a:t>
             </a:r>
@@ -26818,9 +26818,9 @@
                 <a:solidFill>
                   <a:srgbClr val="00D4FF"/>
                 </a:solidFill>
-                <a:latin typeface="Inter" pitchFamily="34" charset="0"/>
-                <a:ea typeface="Inter" pitchFamily="34" charset="-122"/>
-                <a:cs typeface="Inter" pitchFamily="34" charset="-120"/>
+                <a:latin typeface="Calibri" pitchFamily="34" charset="0"/>
+                <a:ea typeface="Microsoft YaHei UI" pitchFamily="34" charset="-122"/>
+                <a:cs typeface="Calibri" pitchFamily="34" charset="-120"/>
               </a:rPr>
               <a:t>全球 · 短视频</a:t>
             </a:r>
@@ -26886,9 +26886,9 @@
                     <a:alpha val="60000"/>
                   </a:srgbClr>
                 </a:solidFill>
-                <a:latin typeface="Inter" pitchFamily="34" charset="0"/>
-                <a:ea typeface="Inter" pitchFamily="34" charset="-122"/>
-                <a:cs typeface="Inter" pitchFamily="34" charset="-120"/>
+                <a:latin typeface="Calibri" pitchFamily="34" charset="0"/>
+                <a:ea typeface="Microsoft YaHei UI" pitchFamily="34" charset="-122"/>
+                <a:cs typeface="Calibri" pitchFamily="34" charset="-120"/>
               </a:rPr>
               <a:t>竖版视频</a:t>
             </a:r>
@@ -26954,9 +26954,9 @@
                     <a:alpha val="60000"/>
                   </a:srgbClr>
                 </a:solidFill>
-                <a:latin typeface="Inter" pitchFamily="34" charset="0"/>
-                <a:ea typeface="Inter" pitchFamily="34" charset="-122"/>
-                <a:cs typeface="Inter" pitchFamily="34" charset="-120"/>
+                <a:latin typeface="Calibri" pitchFamily="34" charset="0"/>
+                <a:ea typeface="Microsoft YaHei UI" pitchFamily="34" charset="-122"/>
+                <a:cs typeface="Calibri" pitchFamily="34" charset="-120"/>
               </a:rPr>
               <a:t>9:16</a:t>
             </a:r>
@@ -27022,9 +27022,9 @@
                     <a:alpha val="60000"/>
                   </a:srgbClr>
                 </a:solidFill>
-                <a:latin typeface="Inter" pitchFamily="34" charset="0"/>
-                <a:ea typeface="Inter" pitchFamily="34" charset="-122"/>
-                <a:cs typeface="Inter" pitchFamily="34" charset="-120"/>
+                <a:latin typeface="Calibri" pitchFamily="34" charset="0"/>
+                <a:ea typeface="Microsoft YaHei UI" pitchFamily="34" charset="-122"/>
+                <a:cs typeface="Calibri" pitchFamily="34" charset="-120"/>
               </a:rPr>
               <a:t>7–60s</a:t>
             </a:r>
@@ -27068,9 +27068,9 @@
                     <a:alpha val="55000"/>
                   </a:srgbClr>
                 </a:solidFill>
-                <a:latin typeface="Inter" pitchFamily="34" charset="0"/>
-                <a:ea typeface="Inter" pitchFamily="34" charset="-122"/>
-                <a:cs typeface="Inter" pitchFamily="34" charset="-120"/>
+                <a:latin typeface="Calibri" pitchFamily="34" charset="0"/>
+                <a:ea typeface="Microsoft YaHei UI" pitchFamily="34" charset="-122"/>
+                <a:cs typeface="Calibri" pitchFamily="34" charset="-120"/>
               </a:rPr>
               <a:t>算法去中心化分发，新账号冷启动快；音乐+挑战赛驱动传播</a:t>
             </a:r>
@@ -27112,9 +27112,9 @@
                 <a:solidFill>
                   <a:srgbClr val="8B949E"/>
                 </a:solidFill>
-                <a:latin typeface="Inter" pitchFamily="34" charset="0"/>
-                <a:ea typeface="Inter" pitchFamily="34" charset="-122"/>
-                <a:cs typeface="Inter" pitchFamily="34" charset="-120"/>
+                <a:latin typeface="Calibri" pitchFamily="34" charset="0"/>
+                <a:ea typeface="Microsoft YaHei UI" pitchFamily="34" charset="-122"/>
+                <a:cs typeface="Calibri" pitchFamily="34" charset="-120"/>
               </a:rPr>
               <a:t>API发布：</a:t>
             </a:r>
@@ -27185,9 +27185,9 @@
                 <a:solidFill>
                   <a:srgbClr val="FFA500"/>
                 </a:solidFill>
-                <a:latin typeface="Inter" pitchFamily="34" charset="0"/>
-                <a:ea typeface="Inter" pitchFamily="34" charset="-122"/>
-                <a:cs typeface="Inter" pitchFamily="34" charset="-120"/>
+                <a:latin typeface="Calibri" pitchFamily="34" charset="0"/>
+                <a:ea typeface="Microsoft YaHei UI" pitchFamily="34" charset="-122"/>
+                <a:cs typeface="Calibri" pitchFamily="34" charset="-120"/>
               </a:rPr>
               <a:t>企业账号限定</a:t>
             </a:r>
@@ -27256,9 +27256,9 @@
                 <a:solidFill>
                   <a:srgbClr val="FFFFFF"/>
                 </a:solidFill>
-                <a:latin typeface="Space Grotesk" pitchFamily="34" charset="0"/>
-                <a:ea typeface="Space Grotesk" pitchFamily="34" charset="-122"/>
-                <a:cs typeface="Space Grotesk" pitchFamily="34" charset="-120"/>
+                <a:latin typeface="Calibri" pitchFamily="34" charset="0"/>
+                <a:ea typeface="Microsoft YaHei UI" pitchFamily="34" charset="-122"/>
+                <a:cs typeface="Calibri" pitchFamily="34" charset="-120"/>
               </a:rPr>
               <a:t>Instagram</a:t>
             </a:r>
@@ -27322,9 +27322,9 @@
                 <a:solidFill>
                   <a:srgbClr val="8B949E"/>
                 </a:solidFill>
-                <a:latin typeface="Inter" pitchFamily="34" charset="0"/>
-                <a:ea typeface="Inter" pitchFamily="34" charset="-122"/>
-                <a:cs typeface="Inter" pitchFamily="34" charset="-120"/>
+                <a:latin typeface="Calibri" pitchFamily="34" charset="0"/>
+                <a:ea typeface="Microsoft YaHei UI" pitchFamily="34" charset="-122"/>
+                <a:cs typeface="Calibri" pitchFamily="34" charset="-120"/>
               </a:rPr>
               <a:t>MAU 20亿</a:t>
             </a:r>
@@ -27366,9 +27366,9 @@
                 <a:solidFill>
                   <a:srgbClr val="00D4FF"/>
                 </a:solidFill>
-                <a:latin typeface="Inter" pitchFamily="34" charset="0"/>
-                <a:ea typeface="Inter" pitchFamily="34" charset="-122"/>
-                <a:cs typeface="Inter" pitchFamily="34" charset="-120"/>
+                <a:latin typeface="Calibri" pitchFamily="34" charset="0"/>
+                <a:ea typeface="Microsoft YaHei UI" pitchFamily="34" charset="-122"/>
+                <a:cs typeface="Calibri" pitchFamily="34" charset="-120"/>
               </a:rPr>
               <a:t>全球 · 图文/REELS</a:t>
             </a:r>
@@ -27434,9 +27434,9 @@
                     <a:alpha val="60000"/>
                   </a:srgbClr>
                 </a:solidFill>
-                <a:latin typeface="Inter" pitchFamily="34" charset="0"/>
-                <a:ea typeface="Inter" pitchFamily="34" charset="-122"/>
-                <a:cs typeface="Inter" pitchFamily="34" charset="-120"/>
+                <a:latin typeface="Calibri" pitchFamily="34" charset="0"/>
+                <a:ea typeface="Microsoft YaHei UI" pitchFamily="34" charset="-122"/>
+                <a:cs typeface="Calibri" pitchFamily="34" charset="-120"/>
               </a:rPr>
               <a:t>方图/竖图</a:t>
             </a:r>
@@ -27502,9 +27502,9 @@
                     <a:alpha val="60000"/>
                   </a:srgbClr>
                 </a:solidFill>
-                <a:latin typeface="Inter" pitchFamily="34" charset="0"/>
-                <a:ea typeface="Inter" pitchFamily="34" charset="-122"/>
-                <a:cs typeface="Inter" pitchFamily="34" charset="-120"/>
+                <a:latin typeface="Calibri" pitchFamily="34" charset="0"/>
+                <a:ea typeface="Microsoft YaHei UI" pitchFamily="34" charset="-122"/>
+                <a:cs typeface="Calibri" pitchFamily="34" charset="-120"/>
               </a:rPr>
               <a:t>Reels</a:t>
             </a:r>
@@ -27570,9 +27570,9 @@
                     <a:alpha val="60000"/>
                   </a:srgbClr>
                 </a:solidFill>
-                <a:latin typeface="Inter" pitchFamily="34" charset="0"/>
-                <a:ea typeface="Inter" pitchFamily="34" charset="-122"/>
-                <a:cs typeface="Inter" pitchFamily="34" charset="-120"/>
+                <a:latin typeface="Calibri" pitchFamily="34" charset="0"/>
+                <a:ea typeface="Microsoft YaHei UI" pitchFamily="34" charset="-122"/>
+                <a:cs typeface="Calibri" pitchFamily="34" charset="-120"/>
               </a:rPr>
               <a:t>Stories</a:t>
             </a:r>
@@ -27616,9 +27616,9 @@
                     <a:alpha val="55000"/>
                   </a:srgbClr>
                 </a:solidFill>
-                <a:latin typeface="Inter" pitchFamily="34" charset="0"/>
-                <a:ea typeface="Inter" pitchFamily="34" charset="-122"/>
-                <a:cs typeface="Inter" pitchFamily="34" charset="-120"/>
+                <a:latin typeface="Calibri" pitchFamily="34" charset="0"/>
+                <a:ea typeface="Microsoft YaHei UI" pitchFamily="34" charset="-122"/>
+                <a:cs typeface="Calibri" pitchFamily="34" charset="-120"/>
               </a:rPr>
               <a:t>视觉美学驱动，Reels 算法与 TikTok 趋同；品牌合作变现成熟</a:t>
             </a:r>
@@ -27660,9 +27660,9 @@
                 <a:solidFill>
                   <a:srgbClr val="8B949E"/>
                 </a:solidFill>
-                <a:latin typeface="Inter" pitchFamily="34" charset="0"/>
-                <a:ea typeface="Inter" pitchFamily="34" charset="-122"/>
-                <a:cs typeface="Inter" pitchFamily="34" charset="-120"/>
+                <a:latin typeface="Calibri" pitchFamily="34" charset="0"/>
+                <a:ea typeface="Microsoft YaHei UI" pitchFamily="34" charset="-122"/>
+                <a:cs typeface="Calibri" pitchFamily="34" charset="-120"/>
               </a:rPr>
               <a:t>API发布：</a:t>
             </a:r>
@@ -27733,9 +27733,9 @@
                 <a:solidFill>
                   <a:srgbClr val="00D464"/>
                 </a:solidFill>
-                <a:latin typeface="Inter" pitchFamily="34" charset="0"/>
-                <a:ea typeface="Inter" pitchFamily="34" charset="-122"/>
-                <a:cs typeface="Inter" pitchFamily="34" charset="-120"/>
+                <a:latin typeface="Calibri" pitchFamily="34" charset="0"/>
+                <a:ea typeface="Microsoft YaHei UI" pitchFamily="34" charset="-122"/>
+                <a:cs typeface="Calibri" pitchFamily="34" charset="-120"/>
               </a:rPr>
               <a:t>Graph API</a:t>
             </a:r>
@@ -27819,9 +27819,9 @@
                 <a:solidFill>
                   <a:srgbClr val="FFFFFF"/>
                 </a:solidFill>
-                <a:latin typeface="Inter" pitchFamily="34" charset="0"/>
-                <a:ea typeface="Inter" pitchFamily="34" charset="-122"/>
-                <a:cs typeface="Inter" pitchFamily="34" charset="-120"/>
+                <a:latin typeface="Calibri" pitchFamily="34" charset="0"/>
+                <a:ea typeface="Microsoft YaHei UI" pitchFamily="34" charset="-122"/>
+                <a:cs typeface="Calibri" pitchFamily="34" charset="-120"/>
               </a:rPr>
               <a:t>关键洞察：</a:t>
             </a:r>
@@ -27838,9 +27838,9 @@
                     <a:alpha val="70000"/>
                   </a:srgbClr>
                 </a:solidFill>
-                <a:latin typeface="Inter" pitchFamily="34" charset="0"/>
-                <a:ea typeface="Inter" pitchFamily="34" charset="-122"/>
-                <a:cs typeface="Inter" pitchFamily="34" charset="-120"/>
+                <a:latin typeface="Calibri" pitchFamily="34" charset="0"/>
+                <a:ea typeface="Microsoft YaHei UI" pitchFamily="34" charset="-122"/>
+                <a:cs typeface="Calibri" pitchFamily="34" charset="-120"/>
               </a:rPr>
               <a:t>8 大平台中仅微博、YouTube、Instagram 有完整开放发布 API；抖音、TikTok 仅限企业账号；小红书完全无开放接口。笔灵当前采用"辅助发布 + 剪贴板快捷"模式，规避合规风险。</a:t>
             </a:r>
@@ -27882,9 +27882,9 @@
                 <a:solidFill>
                   <a:srgbClr val="8B949E"/>
                 </a:solidFill>
-                <a:latin typeface="Inter" pitchFamily="34" charset="0"/>
-                <a:ea typeface="Inter" pitchFamily="34" charset="-122"/>
-                <a:cs typeface="Inter" pitchFamily="34" charset="-120"/>
+                <a:latin typeface="Calibri" pitchFamily="34" charset="0"/>
+                <a:ea typeface="Microsoft YaHei UI" pitchFamily="34" charset="-122"/>
+                <a:cs typeface="Calibri" pitchFamily="34" charset="-120"/>
               </a:rPr>
               <a:t>开放 API</a:t>
             </a:r>
@@ -27926,9 +27926,9 @@
                 <a:solidFill>
                   <a:srgbClr val="8B949E"/>
                 </a:solidFill>
-                <a:latin typeface="Inter" pitchFamily="34" charset="0"/>
-                <a:ea typeface="Inter" pitchFamily="34" charset="-122"/>
-                <a:cs typeface="Inter" pitchFamily="34" charset="-120"/>
+                <a:latin typeface="Calibri" pitchFamily="34" charset="0"/>
+                <a:ea typeface="Microsoft YaHei UI" pitchFamily="34" charset="-122"/>
+                <a:cs typeface="Calibri" pitchFamily="34" charset="-120"/>
               </a:rPr>
               <a:t>受限 / 企业专属</a:t>
             </a:r>
@@ -27970,9 +27970,9 @@
                 <a:solidFill>
                   <a:srgbClr val="8B949E"/>
                 </a:solidFill>
-                <a:latin typeface="Inter" pitchFamily="34" charset="0"/>
-                <a:ea typeface="Inter" pitchFamily="34" charset="-122"/>
-                <a:cs typeface="Inter" pitchFamily="34" charset="-120"/>
+                <a:latin typeface="Calibri" pitchFamily="34" charset="0"/>
+                <a:ea typeface="Microsoft YaHei UI" pitchFamily="34" charset="-122"/>
+                <a:cs typeface="Calibri" pitchFamily="34" charset="-120"/>
               </a:rPr>
               <a:t>无开放接口</a:t>
             </a:r>
@@ -28063,9 +28063,9 @@
                 <a:solidFill>
                   <a:srgbClr val="00D4FF"/>
                 </a:solidFill>
-                <a:latin typeface="Inter" pitchFamily="34" charset="0"/>
-                <a:ea typeface="Inter" pitchFamily="34" charset="-122"/>
-                <a:cs typeface="Inter" pitchFamily="34" charset="-120"/>
+                <a:latin typeface="Calibri" pitchFamily="34" charset="0"/>
+                <a:ea typeface="Microsoft YaHei UI" pitchFamily="34" charset="-122"/>
+                <a:cs typeface="Calibri" pitchFamily="34" charset="-120"/>
               </a:rPr>
               <a:t>COMPETITIVE LANDSCAPE</a:t>
             </a:r>
@@ -28107,9 +28107,9 @@
                 <a:solidFill>
                   <a:srgbClr val="FFFFFF"/>
                 </a:solidFill>
-                <a:latin typeface="Space Grotesk" pitchFamily="34" charset="0"/>
-                <a:ea typeface="Space Grotesk" pitchFamily="34" charset="-122"/>
-                <a:cs typeface="Space Grotesk" pitchFamily="34" charset="-120"/>
+                <a:latin typeface="Calibri" pitchFamily="34" charset="0"/>
+                <a:ea typeface="Microsoft YaHei UI" pitchFamily="34" charset="-122"/>
+                <a:cs typeface="Calibri" pitchFamily="34" charset="-120"/>
               </a:rPr>
               <a:t>四大赛道 14 个玩家的市场格局，笔灵的差异化机会区间</a:t>
             </a:r>
@@ -28180,9 +28180,9 @@
                 <a:solidFill>
                   <a:srgbClr val="00D4FF"/>
                 </a:solidFill>
-                <a:latin typeface="Inter" pitchFamily="34" charset="0"/>
-                <a:ea typeface="Inter" pitchFamily="34" charset="-122"/>
-                <a:cs typeface="Inter" pitchFamily="34" charset="-120"/>
+                <a:latin typeface="Calibri" pitchFamily="34" charset="0"/>
+                <a:ea typeface="Microsoft YaHei UI" pitchFamily="34" charset="-122"/>
+                <a:cs typeface="Calibri" pitchFamily="34" charset="-120"/>
               </a:rPr>
               <a:t>TRACK 01</a:t>
             </a:r>
@@ -28224,9 +28224,9 @@
                 <a:solidFill>
                   <a:srgbClr val="FFFFFF"/>
                 </a:solidFill>
-                <a:latin typeface="Space Grotesk" pitchFamily="34" charset="0"/>
-                <a:ea typeface="Space Grotesk" pitchFamily="34" charset="-122"/>
-                <a:cs typeface="Space Grotesk" pitchFamily="34" charset="-120"/>
+                <a:latin typeface="Calibri" pitchFamily="34" charset="0"/>
+                <a:ea typeface="Microsoft YaHei UI" pitchFamily="34" charset="-122"/>
+                <a:cs typeface="Calibri" pitchFamily="34" charset="-120"/>
               </a:rPr>
               <a:t>AI 文案 / 内容创作</a:t>
             </a:r>
@@ -28295,9 +28295,9 @@
                 <a:solidFill>
                   <a:srgbClr val="FFFFFF"/>
                 </a:solidFill>
-                <a:latin typeface="Space Grotesk" pitchFamily="34" charset="0"/>
-                <a:ea typeface="Space Grotesk" pitchFamily="34" charset="-122"/>
-                <a:cs typeface="Space Grotesk" pitchFamily="34" charset="-120"/>
+                <a:latin typeface="Calibri" pitchFamily="34" charset="0"/>
+                <a:ea typeface="Microsoft YaHei UI" pitchFamily="34" charset="-122"/>
+                <a:cs typeface="Calibri" pitchFamily="34" charset="-120"/>
               </a:rPr>
               <a:t>Jasper AI</a:t>
             </a:r>
@@ -28368,9 +28368,9 @@
                 <a:solidFill>
                   <a:srgbClr val="00D4FF"/>
                 </a:solidFill>
-                <a:latin typeface="Inter" pitchFamily="34" charset="0"/>
-                <a:ea typeface="Inter" pitchFamily="34" charset="-122"/>
-                <a:cs typeface="Inter" pitchFamily="34" charset="-120"/>
+                <a:latin typeface="Calibri" pitchFamily="34" charset="0"/>
+                <a:ea typeface="Microsoft YaHei UI" pitchFamily="34" charset="-122"/>
+                <a:cs typeface="Calibri" pitchFamily="34" charset="-120"/>
               </a:rPr>
               <a:t>Global</a:t>
             </a:r>
@@ -28412,9 +28412,9 @@
                 <a:solidFill>
                   <a:srgbClr val="8B949E"/>
                 </a:solidFill>
-                <a:latin typeface="Inter" pitchFamily="34" charset="0"/>
-                <a:ea typeface="Inter" pitchFamily="34" charset="-122"/>
-                <a:cs typeface="Inter" pitchFamily="34" charset="-120"/>
+                <a:latin typeface="Calibri" pitchFamily="34" charset="0"/>
+                <a:ea typeface="Microsoft YaHei UI" pitchFamily="34" charset="-122"/>
+                <a:cs typeface="Calibri" pitchFamily="34" charset="-120"/>
               </a:rPr>
               <a:t>AI 长文案生成，企业级定价，缺乏社媒分发与视频能力</a:t>
             </a:r>
@@ -28483,9 +28483,9 @@
                 <a:solidFill>
                   <a:srgbClr val="FFFFFF"/>
                 </a:solidFill>
-                <a:latin typeface="Space Grotesk" pitchFamily="34" charset="0"/>
-                <a:ea typeface="Space Grotesk" pitchFamily="34" charset="-122"/>
-                <a:cs typeface="Space Grotesk" pitchFamily="34" charset="-120"/>
+                <a:latin typeface="Calibri" pitchFamily="34" charset="0"/>
+                <a:ea typeface="Microsoft YaHei UI" pitchFamily="34" charset="-122"/>
+                <a:cs typeface="Calibri" pitchFamily="34" charset="-120"/>
               </a:rPr>
               <a:t>Copy.ai</a:t>
             </a:r>
@@ -28556,9 +28556,9 @@
                 <a:solidFill>
                   <a:srgbClr val="00D4FF"/>
                 </a:solidFill>
-                <a:latin typeface="Inter" pitchFamily="34" charset="0"/>
-                <a:ea typeface="Inter" pitchFamily="34" charset="-122"/>
-                <a:cs typeface="Inter" pitchFamily="34" charset="-120"/>
+                <a:latin typeface="Calibri" pitchFamily="34" charset="0"/>
+                <a:ea typeface="Microsoft YaHei UI" pitchFamily="34" charset="-122"/>
+                <a:cs typeface="Calibri" pitchFamily="34" charset="-120"/>
               </a:rPr>
               <a:t>Global</a:t>
             </a:r>
@@ -28600,9 +28600,9 @@
                 <a:solidFill>
                   <a:srgbClr val="8B949E"/>
                 </a:solidFill>
-                <a:latin typeface="Inter" pitchFamily="34" charset="0"/>
-                <a:ea typeface="Inter" pitchFamily="34" charset="-122"/>
-                <a:cs typeface="Inter" pitchFamily="34" charset="-120"/>
+                <a:latin typeface="Calibri" pitchFamily="34" charset="0"/>
+                <a:ea typeface="Microsoft YaHei UI" pitchFamily="34" charset="-122"/>
+                <a:cs typeface="Calibri" pitchFamily="34" charset="-120"/>
               </a:rPr>
               <a:t>营销文案自动化，工作流强，无热点数据与视频模块</a:t>
             </a:r>
@@ -28671,9 +28671,9 @@
                 <a:solidFill>
                   <a:srgbClr val="FFFFFF"/>
                 </a:solidFill>
-                <a:latin typeface="Space Grotesk" pitchFamily="34" charset="0"/>
-                <a:ea typeface="Space Grotesk" pitchFamily="34" charset="-122"/>
-                <a:cs typeface="Space Grotesk" pitchFamily="34" charset="-120"/>
+                <a:latin typeface="Calibri" pitchFamily="34" charset="0"/>
+                <a:ea typeface="Microsoft YaHei UI" pitchFamily="34" charset="-122"/>
+                <a:cs typeface="Calibri" pitchFamily="34" charset="-120"/>
               </a:rPr>
               <a:t>秘塔写作猫</a:t>
             </a:r>
@@ -28744,9 +28744,9 @@
                 <a:solidFill>
                   <a:srgbClr val="A78BFA"/>
                 </a:solidFill>
-                <a:latin typeface="Inter" pitchFamily="34" charset="0"/>
-                <a:ea typeface="Inter" pitchFamily="34" charset="-122"/>
-                <a:cs typeface="Inter" pitchFamily="34" charset="-120"/>
+                <a:latin typeface="Calibri" pitchFamily="34" charset="0"/>
+                <a:ea typeface="Microsoft YaHei UI" pitchFamily="34" charset="-122"/>
+                <a:cs typeface="Calibri" pitchFamily="34" charset="-120"/>
               </a:rPr>
               <a:t>中国</a:t>
             </a:r>
@@ -28788,9 +28788,9 @@
                 <a:solidFill>
                   <a:srgbClr val="8B949E"/>
                 </a:solidFill>
-                <a:latin typeface="Inter" pitchFamily="34" charset="0"/>
-                <a:ea typeface="Inter" pitchFamily="34" charset="-122"/>
-                <a:cs typeface="Inter" pitchFamily="34" charset="-120"/>
+                <a:latin typeface="Calibri" pitchFamily="34" charset="0"/>
+                <a:ea typeface="Microsoft YaHei UI" pitchFamily="34" charset="-122"/>
+                <a:cs typeface="Calibri" pitchFamily="34" charset="-120"/>
               </a:rPr>
               <a:t>中文写作辅助，缺乏跨平台分发与 AI 视频能力</a:t>
             </a:r>
@@ -28861,9 +28861,9 @@
                 <a:solidFill>
                   <a:srgbClr val="00D4FF"/>
                 </a:solidFill>
-                <a:latin typeface="Inter" pitchFamily="34" charset="0"/>
-                <a:ea typeface="Inter" pitchFamily="34" charset="-122"/>
-                <a:cs typeface="Inter" pitchFamily="34" charset="-120"/>
+                <a:latin typeface="Calibri" pitchFamily="34" charset="0"/>
+                <a:ea typeface="Microsoft YaHei UI" pitchFamily="34" charset="-122"/>
+                <a:cs typeface="Calibri" pitchFamily="34" charset="-120"/>
               </a:rPr>
               <a:t>TRACK 02</a:t>
             </a:r>
@@ -28905,9 +28905,9 @@
                 <a:solidFill>
                   <a:srgbClr val="FFFFFF"/>
                 </a:solidFill>
-                <a:latin typeface="Space Grotesk" pitchFamily="34" charset="0"/>
-                <a:ea typeface="Space Grotesk" pitchFamily="34" charset="-122"/>
-                <a:cs typeface="Space Grotesk" pitchFamily="34" charset="-120"/>
+                <a:latin typeface="Calibri" pitchFamily="34" charset="0"/>
+                <a:ea typeface="Microsoft YaHei UI" pitchFamily="34" charset="-122"/>
+                <a:cs typeface="Calibri" pitchFamily="34" charset="-120"/>
               </a:rPr>
               <a:t>社媒管理 / 调度</a:t>
             </a:r>
@@ -28976,9 +28976,9 @@
                 <a:solidFill>
                   <a:srgbClr val="FFFFFF"/>
                 </a:solidFill>
-                <a:latin typeface="Space Grotesk" pitchFamily="34" charset="0"/>
-                <a:ea typeface="Space Grotesk" pitchFamily="34" charset="-122"/>
-                <a:cs typeface="Space Grotesk" pitchFamily="34" charset="-120"/>
+                <a:latin typeface="Calibri" pitchFamily="34" charset="0"/>
+                <a:ea typeface="Microsoft YaHei UI" pitchFamily="34" charset="-122"/>
+                <a:cs typeface="Calibri" pitchFamily="34" charset="-120"/>
               </a:rPr>
               <a:t>Hootsuite</a:t>
             </a:r>
@@ -29049,9 +29049,9 @@
                 <a:solidFill>
                   <a:srgbClr val="00D4FF"/>
                 </a:solidFill>
-                <a:latin typeface="Inter" pitchFamily="34" charset="0"/>
-                <a:ea typeface="Inter" pitchFamily="34" charset="-122"/>
-                <a:cs typeface="Inter" pitchFamily="34" charset="-120"/>
+                <a:latin typeface="Calibri" pitchFamily="34" charset="0"/>
+                <a:ea typeface="Microsoft YaHei UI" pitchFamily="34" charset="-122"/>
+                <a:cs typeface="Calibri" pitchFamily="34" charset="-120"/>
               </a:rPr>
               <a:t>Global</a:t>
             </a:r>
@@ -29093,9 +29093,9 @@
                 <a:solidFill>
                   <a:srgbClr val="8B949E"/>
                 </a:solidFill>
-                <a:latin typeface="Inter" pitchFamily="34" charset="0"/>
-                <a:ea typeface="Inter" pitchFamily="34" charset="-122"/>
-                <a:cs typeface="Inter" pitchFamily="34" charset="-120"/>
+                <a:latin typeface="Calibri" pitchFamily="34" charset="0"/>
+                <a:ea typeface="Microsoft YaHei UI" pitchFamily="34" charset="-122"/>
+                <a:cs typeface="Calibri" pitchFamily="34" charset="-120"/>
               </a:rPr>
               <a:t>多平台调度老牌工具，AI 内容生成能力弱，不支持中国平台</a:t>
             </a:r>
@@ -29164,9 +29164,9 @@
                 <a:solidFill>
                   <a:srgbClr val="FFFFFF"/>
                 </a:solidFill>
-                <a:latin typeface="Space Grotesk" pitchFamily="34" charset="0"/>
-                <a:ea typeface="Space Grotesk" pitchFamily="34" charset="-122"/>
-                <a:cs typeface="Space Grotesk" pitchFamily="34" charset="-120"/>
+                <a:latin typeface="Calibri" pitchFamily="34" charset="0"/>
+                <a:ea typeface="Microsoft YaHei UI" pitchFamily="34" charset="-122"/>
+                <a:cs typeface="Calibri" pitchFamily="34" charset="-120"/>
               </a:rPr>
               <a:t>Buffer</a:t>
             </a:r>
@@ -29237,9 +29237,9 @@
                 <a:solidFill>
                   <a:srgbClr val="00D4FF"/>
                 </a:solidFill>
-                <a:latin typeface="Inter" pitchFamily="34" charset="0"/>
-                <a:ea typeface="Inter" pitchFamily="34" charset="-122"/>
-                <a:cs typeface="Inter" pitchFamily="34" charset="-120"/>
+                <a:latin typeface="Calibri" pitchFamily="34" charset="0"/>
+                <a:ea typeface="Microsoft YaHei UI" pitchFamily="34" charset="-122"/>
+                <a:cs typeface="Calibri" pitchFamily="34" charset="-120"/>
               </a:rPr>
               <a:t>Global</a:t>
             </a:r>
@@ -29281,9 +29281,9 @@
                 <a:solidFill>
                   <a:srgbClr val="8B949E"/>
                 </a:solidFill>
-                <a:latin typeface="Inter" pitchFamily="34" charset="0"/>
-                <a:ea typeface="Inter" pitchFamily="34" charset="-122"/>
-                <a:cs typeface="Inter" pitchFamily="34" charset="-120"/>
+                <a:latin typeface="Calibri" pitchFamily="34" charset="0"/>
+                <a:ea typeface="Microsoft YaHei UI" pitchFamily="34" charset="-122"/>
+                <a:cs typeface="Calibri" pitchFamily="34" charset="-120"/>
               </a:rPr>
               <a:t>轻量级调度工具，无 AI 视频、无热点分析、无中国平台</a:t>
             </a:r>
@@ -29352,9 +29352,9 @@
                 <a:solidFill>
                   <a:srgbClr val="FFFFFF"/>
                 </a:solidFill>
-                <a:latin typeface="Space Grotesk" pitchFamily="34" charset="0"/>
-                <a:ea typeface="Space Grotesk" pitchFamily="34" charset="-122"/>
-                <a:cs typeface="Space Grotesk" pitchFamily="34" charset="-120"/>
+                <a:latin typeface="Calibri" pitchFamily="34" charset="0"/>
+                <a:ea typeface="Microsoft YaHei UI" pitchFamily="34" charset="-122"/>
+                <a:cs typeface="Calibri" pitchFamily="34" charset="-120"/>
               </a:rPr>
               <a:t>科普拉</a:t>
             </a:r>
@@ -29425,9 +29425,9 @@
                 <a:solidFill>
                   <a:srgbClr val="A78BFA"/>
                 </a:solidFill>
-                <a:latin typeface="Inter" pitchFamily="34" charset="0"/>
-                <a:ea typeface="Inter" pitchFamily="34" charset="-122"/>
-                <a:cs typeface="Inter" pitchFamily="34" charset="-120"/>
+                <a:latin typeface="Calibri" pitchFamily="34" charset="0"/>
+                <a:ea typeface="Microsoft YaHei UI" pitchFamily="34" charset="-122"/>
+                <a:cs typeface="Calibri" pitchFamily="34" charset="-120"/>
               </a:rPr>
               <a:t>中国</a:t>
             </a:r>
@@ -29469,9 +29469,9 @@
                 <a:solidFill>
                   <a:srgbClr val="8B949E"/>
                 </a:solidFill>
-                <a:latin typeface="Inter" pitchFamily="34" charset="0"/>
-                <a:ea typeface="Inter" pitchFamily="34" charset="-122"/>
-                <a:cs typeface="Inter" pitchFamily="34" charset="-120"/>
+                <a:latin typeface="Calibri" pitchFamily="34" charset="0"/>
+                <a:ea typeface="Microsoft YaHei UI" pitchFamily="34" charset="-122"/>
+                <a:cs typeface="Calibri" pitchFamily="34" charset="-120"/>
               </a:rPr>
               <a:t>国内社媒管理，内容生成能力有限，视频功能缺失</a:t>
             </a:r>
@@ -29542,9 +29542,9 @@
                 <a:solidFill>
                   <a:srgbClr val="00D4FF"/>
                 </a:solidFill>
-                <a:latin typeface="Inter" pitchFamily="34" charset="0"/>
-                <a:ea typeface="Inter" pitchFamily="34" charset="-122"/>
-                <a:cs typeface="Inter" pitchFamily="34" charset="-120"/>
+                <a:latin typeface="Calibri" pitchFamily="34" charset="0"/>
+                <a:ea typeface="Microsoft YaHei UI" pitchFamily="34" charset="-122"/>
+                <a:cs typeface="Calibri" pitchFamily="34" charset="-120"/>
               </a:rPr>
               <a:t>TRACK 03</a:t>
             </a:r>
@@ -29586,9 +29586,9 @@
                 <a:solidFill>
                   <a:srgbClr val="FFFFFF"/>
                 </a:solidFill>
-                <a:latin typeface="Space Grotesk" pitchFamily="34" charset="0"/>
-                <a:ea typeface="Space Grotesk" pitchFamily="34" charset="-122"/>
-                <a:cs typeface="Space Grotesk" pitchFamily="34" charset="-120"/>
+                <a:latin typeface="Calibri" pitchFamily="34" charset="0"/>
+                <a:ea typeface="Microsoft YaHei UI" pitchFamily="34" charset="-122"/>
+                <a:cs typeface="Calibri" pitchFamily="34" charset="-120"/>
               </a:rPr>
               <a:t>AI 视频生成 / 剪辑</a:t>
             </a:r>
@@ -29657,9 +29657,9 @@
                 <a:solidFill>
                   <a:srgbClr val="FFFFFF"/>
                 </a:solidFill>
-                <a:latin typeface="Space Grotesk" pitchFamily="34" charset="0"/>
-                <a:ea typeface="Space Grotesk" pitchFamily="34" charset="-122"/>
-                <a:cs typeface="Space Grotesk" pitchFamily="34" charset="-120"/>
+                <a:latin typeface="Calibri" pitchFamily="34" charset="0"/>
+                <a:ea typeface="Microsoft YaHei UI" pitchFamily="34" charset="-122"/>
+                <a:cs typeface="Calibri" pitchFamily="34" charset="-120"/>
               </a:rPr>
               <a:t>Opus Clip</a:t>
             </a:r>
@@ -29730,9 +29730,9 @@
                 <a:solidFill>
                   <a:srgbClr val="06B6D4"/>
                 </a:solidFill>
-                <a:latin typeface="Inter" pitchFamily="34" charset="0"/>
-                <a:ea typeface="Inter" pitchFamily="34" charset="-122"/>
-                <a:cs typeface="Inter" pitchFamily="34" charset="-120"/>
+                <a:latin typeface="Calibri" pitchFamily="34" charset="0"/>
+                <a:ea typeface="Microsoft YaHei UI" pitchFamily="34" charset="-122"/>
+                <a:cs typeface="Calibri" pitchFamily="34" charset="-120"/>
               </a:rPr>
               <a:t>Video</a:t>
             </a:r>
@@ -29774,9 +29774,9 @@
                 <a:solidFill>
                   <a:srgbClr val="8B949E"/>
                 </a:solidFill>
-                <a:latin typeface="Inter" pitchFamily="34" charset="0"/>
-                <a:ea typeface="Inter" pitchFamily="34" charset="-122"/>
-                <a:cs typeface="Inter" pitchFamily="34" charset="-120"/>
+                <a:latin typeface="Calibri" pitchFamily="34" charset="0"/>
+                <a:ea typeface="Microsoft YaHei UI" pitchFamily="34" charset="-122"/>
+                <a:cs typeface="Calibri" pitchFamily="34" charset="-120"/>
               </a:rPr>
               <a:t>长视频切片工具，无文案生成、无热点数据、无分发功能</a:t>
             </a:r>
@@ -29845,9 +29845,9 @@
                 <a:solidFill>
                   <a:srgbClr val="FFFFFF"/>
                 </a:solidFill>
-                <a:latin typeface="Space Grotesk" pitchFamily="34" charset="0"/>
-                <a:ea typeface="Space Grotesk" pitchFamily="34" charset="-122"/>
-                <a:cs typeface="Space Grotesk" pitchFamily="34" charset="-120"/>
+                <a:latin typeface="Calibri" pitchFamily="34" charset="0"/>
+                <a:ea typeface="Microsoft YaHei UI" pitchFamily="34" charset="-122"/>
+                <a:cs typeface="Calibri" pitchFamily="34" charset="-120"/>
               </a:rPr>
               <a:t>HeyGen</a:t>
             </a:r>
@@ -29918,9 +29918,9 @@
                 <a:solidFill>
                   <a:srgbClr val="06B6D4"/>
                 </a:solidFill>
-                <a:latin typeface="Inter" pitchFamily="34" charset="0"/>
-                <a:ea typeface="Inter" pitchFamily="34" charset="-122"/>
-                <a:cs typeface="Inter" pitchFamily="34" charset="-120"/>
+                <a:latin typeface="Calibri" pitchFamily="34" charset="0"/>
+                <a:ea typeface="Microsoft YaHei UI" pitchFamily="34" charset="-122"/>
+                <a:cs typeface="Calibri" pitchFamily="34" charset="-120"/>
               </a:rPr>
               <a:t>Video</a:t>
             </a:r>
@@ -29962,9 +29962,9 @@
                 <a:solidFill>
                   <a:srgbClr val="8B949E"/>
                 </a:solidFill>
-                <a:latin typeface="Inter" pitchFamily="34" charset="0"/>
-                <a:ea typeface="Inter" pitchFamily="34" charset="-122"/>
-                <a:cs typeface="Inter" pitchFamily="34" charset="-120"/>
+                <a:latin typeface="Calibri" pitchFamily="34" charset="0"/>
+                <a:ea typeface="Microsoft YaHei UI" pitchFamily="34" charset="-122"/>
+                <a:cs typeface="Calibri" pitchFamily="34" charset="-120"/>
               </a:rPr>
               <a:t>数字人视频，高质量但价格昂贵，无内容策略与分发</a:t>
             </a:r>
@@ -30033,9 +30033,9 @@
                 <a:solidFill>
                   <a:srgbClr val="FFFFFF"/>
                 </a:solidFill>
-                <a:latin typeface="Space Grotesk" pitchFamily="34" charset="0"/>
-                <a:ea typeface="Space Grotesk" pitchFamily="34" charset="-122"/>
-                <a:cs typeface="Space Grotesk" pitchFamily="34" charset="-120"/>
+                <a:latin typeface="Calibri" pitchFamily="34" charset="0"/>
+                <a:ea typeface="Microsoft YaHei UI" pitchFamily="34" charset="-122"/>
+                <a:cs typeface="Calibri" pitchFamily="34" charset="-120"/>
               </a:rPr>
               <a:t>剪映 AI</a:t>
             </a:r>
@@ -30106,9 +30106,9 @@
                 <a:solidFill>
                   <a:srgbClr val="A78BFA"/>
                 </a:solidFill>
-                <a:latin typeface="Inter" pitchFamily="34" charset="0"/>
-                <a:ea typeface="Inter" pitchFamily="34" charset="-122"/>
-                <a:cs typeface="Inter" pitchFamily="34" charset="-120"/>
+                <a:latin typeface="Calibri" pitchFamily="34" charset="0"/>
+                <a:ea typeface="Microsoft YaHei UI" pitchFamily="34" charset="-122"/>
+                <a:cs typeface="Calibri" pitchFamily="34" charset="-120"/>
               </a:rPr>
               <a:t>中国</a:t>
             </a:r>
@@ -30150,9 +30150,9 @@
                 <a:solidFill>
                   <a:srgbClr val="8B949E"/>
                 </a:solidFill>
-                <a:latin typeface="Inter" pitchFamily="34" charset="0"/>
-                <a:ea typeface="Inter" pitchFamily="34" charset="-122"/>
-                <a:cs typeface="Inter" pitchFamily="34" charset="-120"/>
+                <a:latin typeface="Calibri" pitchFamily="34" charset="0"/>
+                <a:ea typeface="Microsoft YaHei UI" pitchFamily="34" charset="-122"/>
+                <a:cs typeface="Calibri" pitchFamily="34" charset="-120"/>
               </a:rPr>
               <a:t>字节系视频剪辑，无文案策略与热点洞察，数据封闭</a:t>
             </a:r>
@@ -30223,9 +30223,9 @@
                 <a:solidFill>
                   <a:srgbClr val="00D4FF"/>
                 </a:solidFill>
-                <a:latin typeface="Inter" pitchFamily="34" charset="0"/>
-                <a:ea typeface="Inter" pitchFamily="34" charset="-122"/>
-                <a:cs typeface="Inter" pitchFamily="34" charset="-120"/>
+                <a:latin typeface="Calibri" pitchFamily="34" charset="0"/>
+                <a:ea typeface="Microsoft YaHei UI" pitchFamily="34" charset="-122"/>
+                <a:cs typeface="Calibri" pitchFamily="34" charset="-120"/>
               </a:rPr>
               <a:t>TRACK 04</a:t>
             </a:r>
@@ -30267,9 +30267,9 @@
                 <a:solidFill>
                   <a:srgbClr val="FFFFFF"/>
                 </a:solidFill>
-                <a:latin typeface="Space Grotesk" pitchFamily="34" charset="0"/>
-                <a:ea typeface="Space Grotesk" pitchFamily="34" charset="-122"/>
-                <a:cs typeface="Space Grotesk" pitchFamily="34" charset="-120"/>
+                <a:latin typeface="Calibri" pitchFamily="34" charset="0"/>
+                <a:ea typeface="Microsoft YaHei UI" pitchFamily="34" charset="-122"/>
+                <a:cs typeface="Calibri" pitchFamily="34" charset="-120"/>
               </a:rPr>
               <a:t>中国本土全链路工具</a:t>
             </a:r>
@@ -30338,9 +30338,9 @@
                 <a:solidFill>
                   <a:srgbClr val="FFFFFF"/>
                 </a:solidFill>
-                <a:latin typeface="Space Grotesk" pitchFamily="34" charset="0"/>
-                <a:ea typeface="Space Grotesk" pitchFamily="34" charset="-122"/>
-                <a:cs typeface="Space Grotesk" pitchFamily="34" charset="-120"/>
+                <a:latin typeface="Calibri" pitchFamily="34" charset="0"/>
+                <a:ea typeface="Microsoft YaHei UI" pitchFamily="34" charset="-122"/>
+                <a:cs typeface="Calibri" pitchFamily="34" charset="-120"/>
               </a:rPr>
               <a:t>新榜 / 飞瓜数据</a:t>
             </a:r>
@@ -30411,9 +30411,9 @@
                 <a:solidFill>
                   <a:srgbClr val="A78BFA"/>
                 </a:solidFill>
-                <a:latin typeface="Inter" pitchFamily="34" charset="0"/>
-                <a:ea typeface="Inter" pitchFamily="34" charset="-122"/>
-                <a:cs typeface="Inter" pitchFamily="34" charset="-120"/>
+                <a:latin typeface="Calibri" pitchFamily="34" charset="0"/>
+                <a:ea typeface="Microsoft YaHei UI" pitchFamily="34" charset="-122"/>
+                <a:cs typeface="Calibri" pitchFamily="34" charset="-120"/>
               </a:rPr>
               <a:t>中国</a:t>
             </a:r>
@@ -30455,9 +30455,9 @@
                 <a:solidFill>
                   <a:srgbClr val="8B949E"/>
                 </a:solidFill>
-                <a:latin typeface="Inter" pitchFamily="34" charset="0"/>
-                <a:ea typeface="Inter" pitchFamily="34" charset="-122"/>
-                <a:cs typeface="Inter" pitchFamily="34" charset="-120"/>
+                <a:latin typeface="Calibri" pitchFamily="34" charset="0"/>
+                <a:ea typeface="Microsoft YaHei UI" pitchFamily="34" charset="-122"/>
+                <a:cs typeface="Calibri" pitchFamily="34" charset="-120"/>
               </a:rPr>
               <a:t>数据分析强，内容生成与 AI 视频能力弱，无分发功能</a:t>
             </a:r>
@@ -30526,9 +30526,9 @@
                 <a:solidFill>
                   <a:srgbClr val="FFFFFF"/>
                 </a:solidFill>
-                <a:latin typeface="Space Grotesk" pitchFamily="34" charset="0"/>
-                <a:ea typeface="Space Grotesk" pitchFamily="34" charset="-122"/>
-                <a:cs typeface="Space Grotesk" pitchFamily="34" charset="-120"/>
+                <a:latin typeface="Calibri" pitchFamily="34" charset="0"/>
+                <a:ea typeface="Microsoft YaHei UI" pitchFamily="34" charset="-122"/>
+                <a:cs typeface="Calibri" pitchFamily="34" charset="-120"/>
               </a:rPr>
               <a:t>蚁小二</a:t>
             </a:r>
@@ -30599,9 +30599,9 @@
                 <a:solidFill>
                   <a:srgbClr val="A78BFA"/>
                 </a:solidFill>
-                <a:latin typeface="Inter" pitchFamily="34" charset="0"/>
-                <a:ea typeface="Inter" pitchFamily="34" charset="-122"/>
-                <a:cs typeface="Inter" pitchFamily="34" charset="-120"/>
+                <a:latin typeface="Calibri" pitchFamily="34" charset="0"/>
+                <a:ea typeface="Microsoft YaHei UI" pitchFamily="34" charset="-122"/>
+                <a:cs typeface="Calibri" pitchFamily="34" charset="-120"/>
               </a:rPr>
               <a:t>中国</a:t>
             </a:r>
@@ -30643,9 +30643,9 @@
                 <a:solidFill>
                   <a:srgbClr val="8B949E"/>
                 </a:solidFill>
-                <a:latin typeface="Inter" pitchFamily="34" charset="0"/>
-                <a:ea typeface="Inter" pitchFamily="34" charset="-122"/>
-                <a:cs typeface="Inter" pitchFamily="34" charset="-120"/>
+                <a:latin typeface="Calibri" pitchFamily="34" charset="0"/>
+                <a:ea typeface="Microsoft YaHei UI" pitchFamily="34" charset="-122"/>
+                <a:cs typeface="Calibri" pitchFamily="34" charset="-120"/>
               </a:rPr>
               <a:t>多账号管理，AI 生成能力有限，视频功能缺失</a:t>
             </a:r>
@@ -30714,9 +30714,9 @@
                 <a:solidFill>
                   <a:srgbClr val="FFFFFF"/>
                 </a:solidFill>
-                <a:latin typeface="Space Grotesk" pitchFamily="34" charset="0"/>
-                <a:ea typeface="Space Grotesk" pitchFamily="34" charset="-122"/>
-                <a:cs typeface="Space Grotesk" pitchFamily="34" charset="-120"/>
+                <a:latin typeface="Calibri" pitchFamily="34" charset="0"/>
+                <a:ea typeface="Microsoft YaHei UI" pitchFamily="34" charset="-122"/>
+                <a:cs typeface="Calibri" pitchFamily="34" charset="-120"/>
               </a:rPr>
               <a:t>万兴喵影</a:t>
             </a:r>
@@ -30787,9 +30787,9 @@
                 <a:solidFill>
                   <a:srgbClr val="A78BFA"/>
                 </a:solidFill>
-                <a:latin typeface="Inter" pitchFamily="34" charset="0"/>
-                <a:ea typeface="Inter" pitchFamily="34" charset="-122"/>
-                <a:cs typeface="Inter" pitchFamily="34" charset="-120"/>
+                <a:latin typeface="Calibri" pitchFamily="34" charset="0"/>
+                <a:ea typeface="Microsoft YaHei UI" pitchFamily="34" charset="-122"/>
+                <a:cs typeface="Calibri" pitchFamily="34" charset="-120"/>
               </a:rPr>
               <a:t>中国</a:t>
             </a:r>
@@ -30831,9 +30831,9 @@
                 <a:solidFill>
                   <a:srgbClr val="8B949E"/>
                 </a:solidFill>
-                <a:latin typeface="Inter" pitchFamily="34" charset="0"/>
-                <a:ea typeface="Inter" pitchFamily="34" charset="-122"/>
-                <a:cs typeface="Inter" pitchFamily="34" charset="-120"/>
+                <a:latin typeface="Calibri" pitchFamily="34" charset="0"/>
+                <a:ea typeface="Microsoft YaHei UI" pitchFamily="34" charset="-122"/>
+                <a:cs typeface="Calibri" pitchFamily="34" charset="-120"/>
               </a:rPr>
               <a:t>视频剪辑工具，缺乏热点数据与内容策略整合</a:t>
             </a:r>
@@ -30904,9 +30904,9 @@
                 <a:solidFill>
                   <a:srgbClr val="A78BFA"/>
                 </a:solidFill>
-                <a:latin typeface="Inter" pitchFamily="34" charset="0"/>
-                <a:ea typeface="Inter" pitchFamily="34" charset="-122"/>
-                <a:cs typeface="Inter" pitchFamily="34" charset="-120"/>
+                <a:latin typeface="Calibri" pitchFamily="34" charset="0"/>
+                <a:ea typeface="Microsoft YaHei UI" pitchFamily="34" charset="-122"/>
+                <a:cs typeface="Calibri" pitchFamily="34" charset="-120"/>
               </a:rPr>
               <a:t>笔灵机会区间</a:t>
             </a:r>
@@ -30948,9 +30948,9 @@
                 <a:solidFill>
                   <a:srgbClr val="FFFFFF"/>
                 </a:solidFill>
-                <a:latin typeface="Inter" pitchFamily="34" charset="0"/>
-                <a:ea typeface="Inter" pitchFamily="34" charset="-122"/>
-                <a:cs typeface="Inter" pitchFamily="34" charset="-120"/>
+                <a:latin typeface="Calibri" pitchFamily="34" charset="0"/>
+                <a:ea typeface="Microsoft YaHei UI" pitchFamily="34" charset="-122"/>
+                <a:cs typeface="Calibri" pitchFamily="34" charset="-120"/>
               </a:rPr>
               <a:t>空白地带：</a:t>
             </a:r>
@@ -30967,9 +30967,9 @@
                     <a:alpha val="80000"/>
                   </a:srgbClr>
                 </a:solidFill>
-                <a:latin typeface="Inter" pitchFamily="34" charset="0"/>
-                <a:ea typeface="Inter" pitchFamily="34" charset="-122"/>
-                <a:cs typeface="Inter" pitchFamily="34" charset="-120"/>
+                <a:latin typeface="Calibri" pitchFamily="34" charset="0"/>
+                <a:ea typeface="Microsoft YaHei UI" pitchFamily="34" charset="-122"/>
+                <a:cs typeface="Calibri" pitchFamily="34" charset="-120"/>
               </a:rPr>
               <a:t>现有工具均在单一维度发力——文案、调度、视频或数据各自为战。</a:t>
             </a:r>
@@ -30984,9 +30984,9 @@
                 <a:solidFill>
                   <a:srgbClr val="FFFFFF"/>
                 </a:solidFill>
-                <a:latin typeface="Inter" pitchFamily="34" charset="0"/>
-                <a:ea typeface="Inter" pitchFamily="34" charset="-122"/>
-                <a:cs typeface="Inter" pitchFamily="34" charset="-120"/>
+                <a:latin typeface="Calibri" pitchFamily="34" charset="0"/>
+                <a:ea typeface="Microsoft YaHei UI" pitchFamily="34" charset="-122"/>
+                <a:cs typeface="Calibri" pitchFamily="34" charset="-120"/>
               </a:rPr>
               <a:t>笔灵是唯一将热点洞察 + AI文案 + AI视频生成 + 多平台分发整合为全链路闭环的中文工具</a:t>
             </a:r>
@@ -31003,9 +31003,9 @@
                     <a:alpha val="80000"/>
                   </a:srgbClr>
                 </a:solidFill>
-                <a:latin typeface="Inter" pitchFamily="34" charset="0"/>
-                <a:ea typeface="Inter" pitchFamily="34" charset="-122"/>
-                <a:cs typeface="Inter" pitchFamily="34" charset="-120"/>
+                <a:latin typeface="Calibri" pitchFamily="34" charset="0"/>
+                <a:ea typeface="Microsoft YaHei UI" pitchFamily="34" charset="-122"/>
+                <a:cs typeface="Calibri" pitchFamily="34" charset="-120"/>
               </a:rPr>
               <a:t>，直接覆盖中国五大主流社媒</a:t>
             </a:r>
@@ -31022,9 +31022,9 @@
                     <a:alpha val="80000"/>
                   </a:srgbClr>
                 </a:solidFill>
-                <a:latin typeface="Inter" pitchFamily="34" charset="0"/>
-                <a:ea typeface="Inter" pitchFamily="34" charset="-122"/>
-                <a:cs typeface="Inter" pitchFamily="34" charset="-120"/>
+                <a:latin typeface="Calibri" pitchFamily="34" charset="0"/>
+                <a:ea typeface="Microsoft YaHei UI" pitchFamily="34" charset="-122"/>
+                <a:cs typeface="Calibri" pitchFamily="34" charset="-120"/>
               </a:rPr>
               <a:t>平台。</a:t>
             </a:r>
@@ -31066,9 +31066,9 @@
                 <a:solidFill>
                   <a:srgbClr val="8B949E"/>
                 </a:solidFill>
-                <a:latin typeface="Inter" pitchFamily="34" charset="0"/>
-                <a:ea typeface="Inter" pitchFamily="34" charset="-122"/>
-                <a:cs typeface="Inter" pitchFamily="34" charset="-120"/>
+                <a:latin typeface="Calibri" pitchFamily="34" charset="0"/>
+                <a:ea typeface="Microsoft YaHei UI" pitchFamily="34" charset="-122"/>
+                <a:cs typeface="Calibri" pitchFamily="34" charset="-120"/>
               </a:rPr>
               <a:t>数据来源：公开产品信息、App Store 评分、G2 Crowd、各平台官网 2025–2026</a:t>
             </a:r>
@@ -31159,9 +31159,9 @@
                 <a:solidFill>
                   <a:srgbClr val="00D4FF"/>
                 </a:solidFill>
-                <a:latin typeface="Inter" pitchFamily="34" charset="0"/>
-                <a:ea typeface="Inter" pitchFamily="34" charset="-122"/>
-                <a:cs typeface="Inter" pitchFamily="34" charset="-120"/>
+                <a:latin typeface="Calibri" pitchFamily="34" charset="0"/>
+                <a:ea typeface="Microsoft YaHei UI" pitchFamily="34" charset="-122"/>
+                <a:cs typeface="Calibri" pitchFamily="34" charset="-120"/>
               </a:rPr>
               <a:t>DEEP BENCHMARK</a:t>
             </a:r>
@@ -31203,9 +31203,9 @@
                 <a:solidFill>
                   <a:srgbClr val="FFFFFF"/>
                 </a:solidFill>
-                <a:latin typeface="Space Grotesk" pitchFamily="34" charset="0"/>
-                <a:ea typeface="Space Grotesk" pitchFamily="34" charset="-122"/>
-                <a:cs typeface="Space Grotesk" pitchFamily="34" charset="-120"/>
+                <a:latin typeface="Calibri" pitchFamily="34" charset="0"/>
+                <a:ea typeface="Microsoft YaHei UI" pitchFamily="34" charset="-122"/>
+                <a:cs typeface="Calibri" pitchFamily="34" charset="-120"/>
               </a:rPr>
               <a:t>笔灵 vs 全球主流竞品：全链路能力是核心差异化</a:t>
             </a:r>
@@ -31267,9 +31267,9 @@
                 <a:solidFill>
                   <a:srgbClr val="8B949E"/>
                 </a:solidFill>
-                <a:latin typeface="Inter" pitchFamily="34" charset="0"/>
-                <a:ea typeface="Inter" pitchFamily="34" charset="-122"/>
-                <a:cs typeface="Inter" pitchFamily="34" charset="-120"/>
+                <a:latin typeface="Calibri" pitchFamily="34" charset="0"/>
+                <a:ea typeface="Microsoft YaHei UI" pitchFamily="34" charset="-122"/>
+                <a:cs typeface="Calibri" pitchFamily="34" charset="-120"/>
               </a:rPr>
               <a:t>能力维度</a:t>
             </a:r>
@@ -31311,9 +31311,9 @@
                 <a:solidFill>
                   <a:srgbClr val="8B949E"/>
                 </a:solidFill>
-                <a:latin typeface="Inter" pitchFamily="34" charset="0"/>
-                <a:ea typeface="Inter" pitchFamily="34" charset="-122"/>
-                <a:cs typeface="Inter" pitchFamily="34" charset="-120"/>
+                <a:latin typeface="Calibri" pitchFamily="34" charset="0"/>
+                <a:ea typeface="Microsoft YaHei UI" pitchFamily="34" charset="-122"/>
+                <a:cs typeface="Calibri" pitchFamily="34" charset="-120"/>
               </a:rPr>
               <a:t>JASPER</a:t>
             </a:r>
@@ -31355,9 +31355,9 @@
                 <a:solidFill>
                   <a:srgbClr val="555555"/>
                 </a:solidFill>
-                <a:latin typeface="Inter" pitchFamily="34" charset="0"/>
-                <a:ea typeface="Inter" pitchFamily="34" charset="-122"/>
-                <a:cs typeface="Inter" pitchFamily="34" charset="-120"/>
+                <a:latin typeface="Calibri" pitchFamily="34" charset="0"/>
+                <a:ea typeface="Microsoft YaHei UI" pitchFamily="34" charset="-122"/>
+                <a:cs typeface="Calibri" pitchFamily="34" charset="-120"/>
               </a:rPr>
               <a:t>AI文案工具</a:t>
             </a:r>
@@ -31399,9 +31399,9 @@
                 <a:solidFill>
                   <a:srgbClr val="8B949E"/>
                 </a:solidFill>
-                <a:latin typeface="Inter" pitchFamily="34" charset="0"/>
-                <a:ea typeface="Inter" pitchFamily="34" charset="-122"/>
-                <a:cs typeface="Inter" pitchFamily="34" charset="-120"/>
+                <a:latin typeface="Calibri" pitchFamily="34" charset="0"/>
+                <a:ea typeface="Microsoft YaHei UI" pitchFamily="34" charset="-122"/>
+                <a:cs typeface="Calibri" pitchFamily="34" charset="-120"/>
               </a:rPr>
               <a:t>HOOTSUITE</a:t>
             </a:r>
@@ -31443,9 +31443,9 @@
                 <a:solidFill>
                   <a:srgbClr val="555555"/>
                 </a:solidFill>
-                <a:latin typeface="Inter" pitchFamily="34" charset="0"/>
-                <a:ea typeface="Inter" pitchFamily="34" charset="-122"/>
-                <a:cs typeface="Inter" pitchFamily="34" charset="-120"/>
+                <a:latin typeface="Calibri" pitchFamily="34" charset="0"/>
+                <a:ea typeface="Microsoft YaHei UI" pitchFamily="34" charset="-122"/>
+                <a:cs typeface="Calibri" pitchFamily="34" charset="-120"/>
               </a:rPr>
               <a:t>社媒管理</a:t>
             </a:r>
@@ -31487,9 +31487,9 @@
                 <a:solidFill>
                   <a:srgbClr val="8B949E"/>
                 </a:solidFill>
-                <a:latin typeface="Inter" pitchFamily="34" charset="0"/>
-                <a:ea typeface="Inter" pitchFamily="34" charset="-122"/>
-                <a:cs typeface="Inter" pitchFamily="34" charset="-120"/>
+                <a:latin typeface="Calibri" pitchFamily="34" charset="0"/>
+                <a:ea typeface="Microsoft YaHei UI" pitchFamily="34" charset="-122"/>
+                <a:cs typeface="Calibri" pitchFamily="34" charset="-120"/>
               </a:rPr>
               <a:t>OPUS CLIP</a:t>
             </a:r>
@@ -31531,9 +31531,9 @@
                 <a:solidFill>
                   <a:srgbClr val="555555"/>
                 </a:solidFill>
-                <a:latin typeface="Inter" pitchFamily="34" charset="0"/>
-                <a:ea typeface="Inter" pitchFamily="34" charset="-122"/>
-                <a:cs typeface="Inter" pitchFamily="34" charset="-120"/>
+                <a:latin typeface="Calibri" pitchFamily="34" charset="0"/>
+                <a:ea typeface="Microsoft YaHei UI" pitchFamily="34" charset="-122"/>
+                <a:cs typeface="Calibri" pitchFamily="34" charset="-120"/>
               </a:rPr>
               <a:t>视频剪辑</a:t>
             </a:r>
@@ -31575,9 +31575,9 @@
                 <a:solidFill>
                   <a:srgbClr val="8B949E"/>
                 </a:solidFill>
-                <a:latin typeface="Inter" pitchFamily="34" charset="0"/>
-                <a:ea typeface="Inter" pitchFamily="34" charset="-122"/>
-                <a:cs typeface="Inter" pitchFamily="34" charset="-120"/>
+                <a:latin typeface="Calibri" pitchFamily="34" charset="0"/>
+                <a:ea typeface="Microsoft YaHei UI" pitchFamily="34" charset="-122"/>
+                <a:cs typeface="Calibri" pitchFamily="34" charset="-120"/>
               </a:rPr>
               <a:t>科握</a:t>
             </a:r>
@@ -31619,9 +31619,9 @@
                 <a:solidFill>
                   <a:srgbClr val="555555"/>
                 </a:solidFill>
-                <a:latin typeface="Inter" pitchFamily="34" charset="0"/>
-                <a:ea typeface="Inter" pitchFamily="34" charset="-122"/>
-                <a:cs typeface="Inter" pitchFamily="34" charset="-120"/>
+                <a:latin typeface="Calibri" pitchFamily="34" charset="0"/>
+                <a:ea typeface="Microsoft YaHei UI" pitchFamily="34" charset="-122"/>
+                <a:cs typeface="Calibri" pitchFamily="34" charset="-120"/>
               </a:rPr>
               <a:t>国内竞品</a:t>
             </a:r>
@@ -31745,9 +31745,9 @@
                 <a:solidFill>
                   <a:srgbClr val="00D4FF"/>
                 </a:solidFill>
-                <a:latin typeface="Inter" pitchFamily="34" charset="0"/>
-                <a:ea typeface="Inter" pitchFamily="34" charset="-122"/>
-                <a:cs typeface="Inter" pitchFamily="34" charset="-120"/>
+                <a:latin typeface="Calibri" pitchFamily="34" charset="0"/>
+                <a:ea typeface="Microsoft YaHei UI" pitchFamily="34" charset="-122"/>
+                <a:cs typeface="Calibri" pitchFamily="34" charset="-120"/>
               </a:rPr>
               <a:t>笔灵</a:t>
             </a:r>
@@ -31789,9 +31789,9 @@
                 <a:solidFill>
                   <a:srgbClr val="00D4FF"/>
                 </a:solidFill>
-                <a:latin typeface="Inter" pitchFamily="34" charset="0"/>
-                <a:ea typeface="Inter" pitchFamily="34" charset="-122"/>
-                <a:cs typeface="Inter" pitchFamily="34" charset="-120"/>
+                <a:latin typeface="Calibri" pitchFamily="34" charset="0"/>
+                <a:ea typeface="Microsoft YaHei UI" pitchFamily="34" charset="-122"/>
+                <a:cs typeface="Calibri" pitchFamily="34" charset="-120"/>
               </a:rPr>
               <a:t>全链路平台</a:t>
             </a:r>
@@ -31833,9 +31833,9 @@
                 <a:solidFill>
                   <a:srgbClr val="FFFFFF"/>
                 </a:solidFill>
-                <a:latin typeface="Inter" pitchFamily="34" charset="0"/>
-                <a:ea typeface="Inter" pitchFamily="34" charset="-122"/>
-                <a:cs typeface="Inter" pitchFamily="34" charset="-120"/>
+                <a:latin typeface="Calibri" pitchFamily="34" charset="0"/>
+                <a:ea typeface="Microsoft YaHei UI" pitchFamily="34" charset="-122"/>
+                <a:cs typeface="Calibri" pitchFamily="34" charset="-120"/>
               </a:rPr>
               <a:t>AI 文案生成</a:t>
             </a:r>
@@ -31899,9 +31899,9 @@
                 <a:solidFill>
                   <a:srgbClr val="7C3AED"/>
                 </a:solidFill>
-                <a:latin typeface="Inter" pitchFamily="34" charset="0"/>
-                <a:ea typeface="Inter" pitchFamily="34" charset="-122"/>
-                <a:cs typeface="Inter" pitchFamily="34" charset="-120"/>
+                <a:latin typeface="Calibri" pitchFamily="34" charset="0"/>
+                <a:ea typeface="Microsoft YaHei UI" pitchFamily="34" charset="-122"/>
+                <a:cs typeface="Calibri" pitchFamily="34" charset="-120"/>
               </a:rPr>
               <a:t>核心</a:t>
             </a:r>
@@ -31943,9 +31943,9 @@
                 <a:solidFill>
                   <a:srgbClr val="22C55E"/>
                 </a:solidFill>
-                <a:latin typeface="Inter" pitchFamily="34" charset="0"/>
-                <a:ea typeface="Inter" pitchFamily="34" charset="-122"/>
-                <a:cs typeface="Inter" pitchFamily="34" charset="-120"/>
+                <a:latin typeface="Calibri" pitchFamily="34" charset="0"/>
+                <a:ea typeface="Microsoft YaHei UI" pitchFamily="34" charset="-122"/>
+                <a:cs typeface="Calibri" pitchFamily="34" charset="-120"/>
               </a:rPr>
               <a:t>✓</a:t>
             </a:r>
@@ -31987,9 +31987,9 @@
                 <a:solidFill>
                   <a:srgbClr val="F59E0B"/>
                 </a:solidFill>
-                <a:latin typeface="Inter" pitchFamily="34" charset="0"/>
-                <a:ea typeface="Inter" pitchFamily="34" charset="-122"/>
-                <a:cs typeface="Inter" pitchFamily="34" charset="-120"/>
+                <a:latin typeface="Calibri" pitchFamily="34" charset="0"/>
+                <a:ea typeface="Microsoft YaHei UI" pitchFamily="34" charset="-122"/>
+                <a:cs typeface="Calibri" pitchFamily="34" charset="-120"/>
               </a:rPr>
               <a:t>部分</a:t>
             </a:r>
@@ -32031,9 +32031,9 @@
                 <a:solidFill>
                   <a:srgbClr val="EF4444"/>
                 </a:solidFill>
-                <a:latin typeface="Inter" pitchFamily="34" charset="0"/>
-                <a:ea typeface="Inter" pitchFamily="34" charset="-122"/>
-                <a:cs typeface="Inter" pitchFamily="34" charset="-120"/>
+                <a:latin typeface="Calibri" pitchFamily="34" charset="0"/>
+                <a:ea typeface="Microsoft YaHei UI" pitchFamily="34" charset="-122"/>
+                <a:cs typeface="Calibri" pitchFamily="34" charset="-120"/>
               </a:rPr>
               <a:t>✗</a:t>
             </a:r>
@@ -32075,9 +32075,9 @@
                 <a:solidFill>
                   <a:srgbClr val="22C55E"/>
                 </a:solidFill>
-                <a:latin typeface="Inter" pitchFamily="34" charset="0"/>
-                <a:ea typeface="Inter" pitchFamily="34" charset="-122"/>
-                <a:cs typeface="Inter" pitchFamily="34" charset="-120"/>
+                <a:latin typeface="Calibri" pitchFamily="34" charset="0"/>
+                <a:ea typeface="Microsoft YaHei UI" pitchFamily="34" charset="-122"/>
+                <a:cs typeface="Calibri" pitchFamily="34" charset="-120"/>
               </a:rPr>
               <a:t>✓</a:t>
             </a:r>
@@ -32181,9 +32181,9 @@
                 <a:solidFill>
                   <a:srgbClr val="00D4FF"/>
                 </a:solidFill>
-                <a:latin typeface="Inter" pitchFamily="34" charset="0"/>
-                <a:ea typeface="Inter" pitchFamily="34" charset="-122"/>
-                <a:cs typeface="Inter" pitchFamily="34" charset="-120"/>
+                <a:latin typeface="Calibri" pitchFamily="34" charset="0"/>
+                <a:ea typeface="Microsoft YaHei UI" pitchFamily="34" charset="-122"/>
+                <a:cs typeface="Calibri" pitchFamily="34" charset="-120"/>
               </a:rPr>
               <a:t>✓</a:t>
             </a:r>
@@ -32267,9 +32267,9 @@
                 <a:solidFill>
                   <a:srgbClr val="FFFFFF"/>
                 </a:solidFill>
-                <a:latin typeface="Inter" pitchFamily="34" charset="0"/>
-                <a:ea typeface="Inter" pitchFamily="34" charset="-122"/>
-                <a:cs typeface="Inter" pitchFamily="34" charset="-120"/>
+                <a:latin typeface="Calibri" pitchFamily="34" charset="0"/>
+                <a:ea typeface="Microsoft YaHei UI" pitchFamily="34" charset="-122"/>
+                <a:cs typeface="Calibri" pitchFamily="34" charset="-120"/>
               </a:rPr>
               <a:t>多平台格式适配</a:t>
             </a:r>
@@ -32311,9 +32311,9 @@
                 <a:solidFill>
                   <a:srgbClr val="F59E0B"/>
                 </a:solidFill>
-                <a:latin typeface="Inter" pitchFamily="34" charset="0"/>
-                <a:ea typeface="Inter" pitchFamily="34" charset="-122"/>
-                <a:cs typeface="Inter" pitchFamily="34" charset="-120"/>
+                <a:latin typeface="Calibri" pitchFamily="34" charset="0"/>
+                <a:ea typeface="Microsoft YaHei UI" pitchFamily="34" charset="-122"/>
+                <a:cs typeface="Calibri" pitchFamily="34" charset="-120"/>
               </a:rPr>
               <a:t>部分</a:t>
             </a:r>
@@ -32355,9 +32355,9 @@
                 <a:solidFill>
                   <a:srgbClr val="22C55E"/>
                 </a:solidFill>
-                <a:latin typeface="Inter" pitchFamily="34" charset="0"/>
-                <a:ea typeface="Inter" pitchFamily="34" charset="-122"/>
-                <a:cs typeface="Inter" pitchFamily="34" charset="-120"/>
+                <a:latin typeface="Calibri" pitchFamily="34" charset="0"/>
+                <a:ea typeface="Microsoft YaHei UI" pitchFamily="34" charset="-122"/>
+                <a:cs typeface="Calibri" pitchFamily="34" charset="-120"/>
               </a:rPr>
               <a:t>✓</a:t>
             </a:r>
@@ -32399,9 +32399,9 @@
                 <a:solidFill>
                   <a:srgbClr val="EF4444"/>
                 </a:solidFill>
-                <a:latin typeface="Inter" pitchFamily="34" charset="0"/>
-                <a:ea typeface="Inter" pitchFamily="34" charset="-122"/>
-                <a:cs typeface="Inter" pitchFamily="34" charset="-120"/>
+                <a:latin typeface="Calibri" pitchFamily="34" charset="0"/>
+                <a:ea typeface="Microsoft YaHei UI" pitchFamily="34" charset="-122"/>
+                <a:cs typeface="Calibri" pitchFamily="34" charset="-120"/>
               </a:rPr>
               <a:t>✗</a:t>
             </a:r>
@@ -32443,9 +32443,9 @@
                 <a:solidFill>
                   <a:srgbClr val="F59E0B"/>
                 </a:solidFill>
-                <a:latin typeface="Inter" pitchFamily="34" charset="0"/>
-                <a:ea typeface="Inter" pitchFamily="34" charset="-122"/>
-                <a:cs typeface="Inter" pitchFamily="34" charset="-120"/>
+                <a:latin typeface="Calibri" pitchFamily="34" charset="0"/>
+                <a:ea typeface="Microsoft YaHei UI" pitchFamily="34" charset="-122"/>
+                <a:cs typeface="Calibri" pitchFamily="34" charset="-120"/>
               </a:rPr>
               <a:t>部分</a:t>
             </a:r>
@@ -32549,9 +32549,9 @@
                 <a:solidFill>
                   <a:srgbClr val="00D4FF"/>
                 </a:solidFill>
-                <a:latin typeface="Inter" pitchFamily="34" charset="0"/>
-                <a:ea typeface="Inter" pitchFamily="34" charset="-122"/>
-                <a:cs typeface="Inter" pitchFamily="34" charset="-120"/>
+                <a:latin typeface="Calibri" pitchFamily="34" charset="0"/>
+                <a:ea typeface="Microsoft YaHei UI" pitchFamily="34" charset="-122"/>
+                <a:cs typeface="Calibri" pitchFamily="34" charset="-120"/>
               </a:rPr>
               <a:t>✓</a:t>
             </a:r>
@@ -32593,9 +32593,9 @@
                 <a:solidFill>
                   <a:srgbClr val="FFFFFF"/>
                 </a:solidFill>
-                <a:latin typeface="Inter" pitchFamily="34" charset="0"/>
-                <a:ea typeface="Inter" pitchFamily="34" charset="-122"/>
-                <a:cs typeface="Inter" pitchFamily="34" charset="-120"/>
+                <a:latin typeface="Calibri" pitchFamily="34" charset="0"/>
+                <a:ea typeface="Microsoft YaHei UI" pitchFamily="34" charset="-122"/>
+                <a:cs typeface="Calibri" pitchFamily="34" charset="-120"/>
               </a:rPr>
               <a:t>AI 视频生成</a:t>
             </a:r>
@@ -32659,9 +32659,9 @@
                 <a:solidFill>
                   <a:srgbClr val="7C3AED"/>
                 </a:solidFill>
-                <a:latin typeface="Inter" pitchFamily="34" charset="0"/>
-                <a:ea typeface="Inter" pitchFamily="34" charset="-122"/>
-                <a:cs typeface="Inter" pitchFamily="34" charset="-120"/>
+                <a:latin typeface="Calibri" pitchFamily="34" charset="0"/>
+                <a:ea typeface="Microsoft YaHei UI" pitchFamily="34" charset="-122"/>
+                <a:cs typeface="Calibri" pitchFamily="34" charset="-120"/>
               </a:rPr>
               <a:t>核心</a:t>
             </a:r>
@@ -32703,9 +32703,9 @@
                 <a:solidFill>
                   <a:srgbClr val="EF4444"/>
                 </a:solidFill>
-                <a:latin typeface="Inter" pitchFamily="34" charset="0"/>
-                <a:ea typeface="Inter" pitchFamily="34" charset="-122"/>
-                <a:cs typeface="Inter" pitchFamily="34" charset="-120"/>
+                <a:latin typeface="Calibri" pitchFamily="34" charset="0"/>
+                <a:ea typeface="Microsoft YaHei UI" pitchFamily="34" charset="-122"/>
+                <a:cs typeface="Calibri" pitchFamily="34" charset="-120"/>
               </a:rPr>
               <a:t>✗</a:t>
             </a:r>
@@ -32747,9 +32747,9 @@
                 <a:solidFill>
                   <a:srgbClr val="EF4444"/>
                 </a:solidFill>
-                <a:latin typeface="Inter" pitchFamily="34" charset="0"/>
-                <a:ea typeface="Inter" pitchFamily="34" charset="-122"/>
-                <a:cs typeface="Inter" pitchFamily="34" charset="-120"/>
+                <a:latin typeface="Calibri" pitchFamily="34" charset="0"/>
+                <a:ea typeface="Microsoft YaHei UI" pitchFamily="34" charset="-122"/>
+                <a:cs typeface="Calibri" pitchFamily="34" charset="-120"/>
               </a:rPr>
               <a:t>✗</a:t>
             </a:r>
@@ -32791,9 +32791,9 @@
                 <a:solidFill>
                   <a:srgbClr val="F59E0B"/>
                 </a:solidFill>
-                <a:latin typeface="Inter" pitchFamily="34" charset="0"/>
-                <a:ea typeface="Inter" pitchFamily="34" charset="-122"/>
-                <a:cs typeface="Inter" pitchFamily="34" charset="-120"/>
+                <a:latin typeface="Calibri" pitchFamily="34" charset="0"/>
+                <a:ea typeface="Microsoft YaHei UI" pitchFamily="34" charset="-122"/>
+                <a:cs typeface="Calibri" pitchFamily="34" charset="-120"/>
               </a:rPr>
               <a:t>剪辑为主</a:t>
             </a:r>
@@ -32835,9 +32835,9 @@
                 <a:solidFill>
                   <a:srgbClr val="F59E0B"/>
                 </a:solidFill>
-                <a:latin typeface="Inter" pitchFamily="34" charset="0"/>
-                <a:ea typeface="Inter" pitchFamily="34" charset="-122"/>
-                <a:cs typeface="Inter" pitchFamily="34" charset="-120"/>
+                <a:latin typeface="Calibri" pitchFamily="34" charset="0"/>
+                <a:ea typeface="Microsoft YaHei UI" pitchFamily="34" charset="-122"/>
+                <a:cs typeface="Calibri" pitchFamily="34" charset="-120"/>
               </a:rPr>
               <a:t>部分</a:t>
             </a:r>
@@ -32941,9 +32941,9 @@
                 <a:solidFill>
                   <a:srgbClr val="00D4FF"/>
                 </a:solidFill>
-                <a:latin typeface="Inter" pitchFamily="34" charset="0"/>
-                <a:ea typeface="Inter" pitchFamily="34" charset="-122"/>
-                <a:cs typeface="Inter" pitchFamily="34" charset="-120"/>
+                <a:latin typeface="Calibri" pitchFamily="34" charset="0"/>
+                <a:ea typeface="Microsoft YaHei UI" pitchFamily="34" charset="-122"/>
+                <a:cs typeface="Calibri" pitchFamily="34" charset="-120"/>
               </a:rPr>
               <a:t>✓</a:t>
             </a:r>
@@ -33027,9 +33027,9 @@
                 <a:solidFill>
                   <a:srgbClr val="FFFFFF"/>
                 </a:solidFill>
-                <a:latin typeface="Inter" pitchFamily="34" charset="0"/>
-                <a:ea typeface="Inter" pitchFamily="34" charset="-122"/>
-                <a:cs typeface="Inter" pitchFamily="34" charset="-120"/>
+                <a:latin typeface="Calibri" pitchFamily="34" charset="0"/>
+                <a:ea typeface="Microsoft YaHei UI" pitchFamily="34" charset="-122"/>
+                <a:cs typeface="Calibri" pitchFamily="34" charset="-120"/>
               </a:rPr>
               <a:t>图生视频（i2v）</a:t>
             </a:r>
@@ -33071,9 +33071,9 @@
                 <a:solidFill>
                   <a:srgbClr val="EF4444"/>
                 </a:solidFill>
-                <a:latin typeface="Inter" pitchFamily="34" charset="0"/>
-                <a:ea typeface="Inter" pitchFamily="34" charset="-122"/>
-                <a:cs typeface="Inter" pitchFamily="34" charset="-120"/>
+                <a:latin typeface="Calibri" pitchFamily="34" charset="0"/>
+                <a:ea typeface="Microsoft YaHei UI" pitchFamily="34" charset="-122"/>
+                <a:cs typeface="Calibri" pitchFamily="34" charset="-120"/>
               </a:rPr>
               <a:t>✗</a:t>
             </a:r>
@@ -33115,9 +33115,9 @@
                 <a:solidFill>
                   <a:srgbClr val="EF4444"/>
                 </a:solidFill>
-                <a:latin typeface="Inter" pitchFamily="34" charset="0"/>
-                <a:ea typeface="Inter" pitchFamily="34" charset="-122"/>
-                <a:cs typeface="Inter" pitchFamily="34" charset="-120"/>
+                <a:latin typeface="Calibri" pitchFamily="34" charset="0"/>
+                <a:ea typeface="Microsoft YaHei UI" pitchFamily="34" charset="-122"/>
+                <a:cs typeface="Calibri" pitchFamily="34" charset="-120"/>
               </a:rPr>
               <a:t>✗</a:t>
             </a:r>
@@ -33159,9 +33159,9 @@
                 <a:solidFill>
                   <a:srgbClr val="EF4444"/>
                 </a:solidFill>
-                <a:latin typeface="Inter" pitchFamily="34" charset="0"/>
-                <a:ea typeface="Inter" pitchFamily="34" charset="-122"/>
-                <a:cs typeface="Inter" pitchFamily="34" charset="-120"/>
+                <a:latin typeface="Calibri" pitchFamily="34" charset="0"/>
+                <a:ea typeface="Microsoft YaHei UI" pitchFamily="34" charset="-122"/>
+                <a:cs typeface="Calibri" pitchFamily="34" charset="-120"/>
               </a:rPr>
               <a:t>✗</a:t>
             </a:r>
@@ -33203,9 +33203,9 @@
                 <a:solidFill>
                   <a:srgbClr val="EF4444"/>
                 </a:solidFill>
-                <a:latin typeface="Inter" pitchFamily="34" charset="0"/>
-                <a:ea typeface="Inter" pitchFamily="34" charset="-122"/>
-                <a:cs typeface="Inter" pitchFamily="34" charset="-120"/>
+                <a:latin typeface="Calibri" pitchFamily="34" charset="0"/>
+                <a:ea typeface="Microsoft YaHei UI" pitchFamily="34" charset="-122"/>
+                <a:cs typeface="Calibri" pitchFamily="34" charset="-120"/>
               </a:rPr>
               <a:t>✗</a:t>
             </a:r>
@@ -33309,9 +33309,9 @@
                 <a:solidFill>
                   <a:srgbClr val="00D4FF"/>
                 </a:solidFill>
-                <a:latin typeface="Inter" pitchFamily="34" charset="0"/>
-                <a:ea typeface="Inter" pitchFamily="34" charset="-122"/>
-                <a:cs typeface="Inter" pitchFamily="34" charset="-120"/>
+                <a:latin typeface="Calibri" pitchFamily="34" charset="0"/>
+                <a:ea typeface="Microsoft YaHei UI" pitchFamily="34" charset="-122"/>
+                <a:cs typeface="Calibri" pitchFamily="34" charset="-120"/>
               </a:rPr>
               <a:t>✓</a:t>
             </a:r>
@@ -33353,9 +33353,9 @@
                 <a:solidFill>
                   <a:srgbClr val="FFFFFF"/>
                 </a:solidFill>
-                <a:latin typeface="Inter" pitchFamily="34" charset="0"/>
-                <a:ea typeface="Inter" pitchFamily="34" charset="-122"/>
-                <a:cs typeface="Inter" pitchFamily="34" charset="-120"/>
+                <a:latin typeface="Calibri" pitchFamily="34" charset="0"/>
+                <a:ea typeface="Microsoft YaHei UI" pitchFamily="34" charset="-122"/>
+                <a:cs typeface="Calibri" pitchFamily="34" charset="-120"/>
               </a:rPr>
               <a:t>热点洞察数据看板</a:t>
             </a:r>
@@ -33397,9 +33397,9 @@
                 <a:solidFill>
                   <a:srgbClr val="EF4444"/>
                 </a:solidFill>
-                <a:latin typeface="Inter" pitchFamily="34" charset="0"/>
-                <a:ea typeface="Inter" pitchFamily="34" charset="-122"/>
-                <a:cs typeface="Inter" pitchFamily="34" charset="-120"/>
+                <a:latin typeface="Calibri" pitchFamily="34" charset="0"/>
+                <a:ea typeface="Microsoft YaHei UI" pitchFamily="34" charset="-122"/>
+                <a:cs typeface="Calibri" pitchFamily="34" charset="-120"/>
               </a:rPr>
               <a:t>✗</a:t>
             </a:r>
@@ -33441,9 +33441,9 @@
                 <a:solidFill>
                   <a:srgbClr val="F59E0B"/>
                 </a:solidFill>
-                <a:latin typeface="Inter" pitchFamily="34" charset="0"/>
-                <a:ea typeface="Inter" pitchFamily="34" charset="-122"/>
-                <a:cs typeface="Inter" pitchFamily="34" charset="-120"/>
+                <a:latin typeface="Calibri" pitchFamily="34" charset="0"/>
+                <a:ea typeface="Microsoft YaHei UI" pitchFamily="34" charset="-122"/>
+                <a:cs typeface="Calibri" pitchFamily="34" charset="-120"/>
               </a:rPr>
               <a:t>有限</a:t>
             </a:r>
@@ -33485,9 +33485,9 @@
                 <a:solidFill>
                   <a:srgbClr val="EF4444"/>
                 </a:solidFill>
-                <a:latin typeface="Inter" pitchFamily="34" charset="0"/>
-                <a:ea typeface="Inter" pitchFamily="34" charset="-122"/>
-                <a:cs typeface="Inter" pitchFamily="34" charset="-120"/>
+                <a:latin typeface="Calibri" pitchFamily="34" charset="0"/>
+                <a:ea typeface="Microsoft YaHei UI" pitchFamily="34" charset="-122"/>
+                <a:cs typeface="Calibri" pitchFamily="34" charset="-120"/>
               </a:rPr>
               <a:t>✗</a:t>
             </a:r>
@@ -33529,9 +33529,9 @@
                 <a:solidFill>
                   <a:srgbClr val="F59E0B"/>
                 </a:solidFill>
-                <a:latin typeface="Inter" pitchFamily="34" charset="0"/>
-                <a:ea typeface="Inter" pitchFamily="34" charset="-122"/>
-                <a:cs typeface="Inter" pitchFamily="34" charset="-120"/>
+                <a:latin typeface="Calibri" pitchFamily="34" charset="0"/>
+                <a:ea typeface="Microsoft YaHei UI" pitchFamily="34" charset="-122"/>
+                <a:cs typeface="Calibri" pitchFamily="34" charset="-120"/>
               </a:rPr>
               <a:t>部分</a:t>
             </a:r>
@@ -33635,9 +33635,9 @@
                 <a:solidFill>
                   <a:srgbClr val="00D4FF"/>
                 </a:solidFill>
-                <a:latin typeface="Inter" pitchFamily="34" charset="0"/>
-                <a:ea typeface="Inter" pitchFamily="34" charset="-122"/>
-                <a:cs typeface="Inter" pitchFamily="34" charset="-120"/>
+                <a:latin typeface="Calibri" pitchFamily="34" charset="0"/>
+                <a:ea typeface="Microsoft YaHei UI" pitchFamily="34" charset="-122"/>
+                <a:cs typeface="Calibri" pitchFamily="34" charset="-120"/>
               </a:rPr>
               <a:t>✓</a:t>
             </a:r>
@@ -33721,9 +33721,9 @@
                 <a:solidFill>
                   <a:srgbClr val="FFFFFF"/>
                 </a:solidFill>
-                <a:latin typeface="Inter" pitchFamily="34" charset="0"/>
-                <a:ea typeface="Inter" pitchFamily="34" charset="-122"/>
-                <a:cs typeface="Inter" pitchFamily="34" charset="-120"/>
+                <a:latin typeface="Calibri" pitchFamily="34" charset="0"/>
+                <a:ea typeface="Microsoft YaHei UI" pitchFamily="34" charset="-122"/>
+                <a:cs typeface="Calibri" pitchFamily="34" charset="-120"/>
               </a:rPr>
               <a:t>内容日历 / 排期</a:t>
             </a:r>
@@ -33765,9 +33765,9 @@
                 <a:solidFill>
                   <a:srgbClr val="EF4444"/>
                 </a:solidFill>
-                <a:latin typeface="Inter" pitchFamily="34" charset="0"/>
-                <a:ea typeface="Inter" pitchFamily="34" charset="-122"/>
-                <a:cs typeface="Inter" pitchFamily="34" charset="-120"/>
+                <a:latin typeface="Calibri" pitchFamily="34" charset="0"/>
+                <a:ea typeface="Microsoft YaHei UI" pitchFamily="34" charset="-122"/>
+                <a:cs typeface="Calibri" pitchFamily="34" charset="-120"/>
               </a:rPr>
               <a:t>✗</a:t>
             </a:r>
@@ -33809,9 +33809,9 @@
                 <a:solidFill>
                   <a:srgbClr val="22C55E"/>
                 </a:solidFill>
-                <a:latin typeface="Inter" pitchFamily="34" charset="0"/>
-                <a:ea typeface="Inter" pitchFamily="34" charset="-122"/>
-                <a:cs typeface="Inter" pitchFamily="34" charset="-120"/>
+                <a:latin typeface="Calibri" pitchFamily="34" charset="0"/>
+                <a:ea typeface="Microsoft YaHei UI" pitchFamily="34" charset="-122"/>
+                <a:cs typeface="Calibri" pitchFamily="34" charset="-120"/>
               </a:rPr>
               <a:t>✓</a:t>
             </a:r>
@@ -33853,9 +33853,9 @@
                 <a:solidFill>
                   <a:srgbClr val="EF4444"/>
                 </a:solidFill>
-                <a:latin typeface="Inter" pitchFamily="34" charset="0"/>
-                <a:ea typeface="Inter" pitchFamily="34" charset="-122"/>
-                <a:cs typeface="Inter" pitchFamily="34" charset="-120"/>
+                <a:latin typeface="Calibri" pitchFamily="34" charset="0"/>
+                <a:ea typeface="Microsoft YaHei UI" pitchFamily="34" charset="-122"/>
+                <a:cs typeface="Calibri" pitchFamily="34" charset="-120"/>
               </a:rPr>
               <a:t>✗</a:t>
             </a:r>
@@ -33897,9 +33897,9 @@
                 <a:solidFill>
                   <a:srgbClr val="F59E0B"/>
                 </a:solidFill>
-                <a:latin typeface="Inter" pitchFamily="34" charset="0"/>
-                <a:ea typeface="Inter" pitchFamily="34" charset="-122"/>
-                <a:cs typeface="Inter" pitchFamily="34" charset="-120"/>
+                <a:latin typeface="Calibri" pitchFamily="34" charset="0"/>
+                <a:ea typeface="Microsoft YaHei UI" pitchFamily="34" charset="-122"/>
+                <a:cs typeface="Calibri" pitchFamily="34" charset="-120"/>
               </a:rPr>
               <a:t>部分</a:t>
             </a:r>
@@ -34003,9 +34003,9 @@
                 <a:solidFill>
                   <a:srgbClr val="00D4FF"/>
                 </a:solidFill>
-                <a:latin typeface="Inter" pitchFamily="34" charset="0"/>
-                <a:ea typeface="Inter" pitchFamily="34" charset="-122"/>
-                <a:cs typeface="Inter" pitchFamily="34" charset="-120"/>
+                <a:latin typeface="Calibri" pitchFamily="34" charset="0"/>
+                <a:ea typeface="Microsoft YaHei UI" pitchFamily="34" charset="-122"/>
+                <a:cs typeface="Calibri" pitchFamily="34" charset="-120"/>
               </a:rPr>
               <a:t>✓</a:t>
             </a:r>
@@ -34047,9 +34047,9 @@
                 <a:solidFill>
                   <a:srgbClr val="FFFFFF"/>
                 </a:solidFill>
-                <a:latin typeface="Inter" pitchFamily="34" charset="0"/>
-                <a:ea typeface="Inter" pitchFamily="34" charset="-122"/>
-                <a:cs typeface="Inter" pitchFamily="34" charset="-120"/>
+                <a:latin typeface="Calibri" pitchFamily="34" charset="0"/>
+                <a:ea typeface="Microsoft YaHei UI" pitchFamily="34" charset="-122"/>
+                <a:cs typeface="Calibri" pitchFamily="34" charset="-120"/>
               </a:rPr>
               <a:t>中文内容深度优化</a:t>
             </a:r>
@@ -34091,9 +34091,9 @@
                 <a:solidFill>
                   <a:srgbClr val="EF4444"/>
                 </a:solidFill>
-                <a:latin typeface="Inter" pitchFamily="34" charset="0"/>
-                <a:ea typeface="Inter" pitchFamily="34" charset="-122"/>
-                <a:cs typeface="Inter" pitchFamily="34" charset="-120"/>
+                <a:latin typeface="Calibri" pitchFamily="34" charset="0"/>
+                <a:ea typeface="Microsoft YaHei UI" pitchFamily="34" charset="-122"/>
+                <a:cs typeface="Calibri" pitchFamily="34" charset="-120"/>
               </a:rPr>
               <a:t>✗</a:t>
             </a:r>
@@ -34135,9 +34135,9 @@
                 <a:solidFill>
                   <a:srgbClr val="EF4444"/>
                 </a:solidFill>
-                <a:latin typeface="Inter" pitchFamily="34" charset="0"/>
-                <a:ea typeface="Inter" pitchFamily="34" charset="-122"/>
-                <a:cs typeface="Inter" pitchFamily="34" charset="-120"/>
+                <a:latin typeface="Calibri" pitchFamily="34" charset="0"/>
+                <a:ea typeface="Microsoft YaHei UI" pitchFamily="34" charset="-122"/>
+                <a:cs typeface="Calibri" pitchFamily="34" charset="-120"/>
               </a:rPr>
               <a:t>✗</a:t>
             </a:r>
@@ -34179,9 +34179,9 @@
                 <a:solidFill>
                   <a:srgbClr val="EF4444"/>
                 </a:solidFill>
-                <a:latin typeface="Inter" pitchFamily="34" charset="0"/>
-                <a:ea typeface="Inter" pitchFamily="34" charset="-122"/>
-                <a:cs typeface="Inter" pitchFamily="34" charset="-120"/>
+                <a:latin typeface="Calibri" pitchFamily="34" charset="0"/>
+                <a:ea typeface="Microsoft YaHei UI" pitchFamily="34" charset="-122"/>
+                <a:cs typeface="Calibri" pitchFamily="34" charset="-120"/>
               </a:rPr>
               <a:t>✗</a:t>
             </a:r>
@@ -34223,9 +34223,9 @@
                 <a:solidFill>
                   <a:srgbClr val="22C55E"/>
                 </a:solidFill>
-                <a:latin typeface="Inter" pitchFamily="34" charset="0"/>
-                <a:ea typeface="Inter" pitchFamily="34" charset="-122"/>
-                <a:cs typeface="Inter" pitchFamily="34" charset="-120"/>
+                <a:latin typeface="Calibri" pitchFamily="34" charset="0"/>
+                <a:ea typeface="Microsoft YaHei UI" pitchFamily="34" charset="-122"/>
+                <a:cs typeface="Calibri" pitchFamily="34" charset="-120"/>
               </a:rPr>
               <a:t>✓</a:t>
             </a:r>
@@ -34329,9 +34329,9 @@
                 <a:solidFill>
                   <a:srgbClr val="00D4FF"/>
                 </a:solidFill>
-                <a:latin typeface="Inter" pitchFamily="34" charset="0"/>
-                <a:ea typeface="Inter" pitchFamily="34" charset="-122"/>
-                <a:cs typeface="Inter" pitchFamily="34" charset="-120"/>
+                <a:latin typeface="Calibri" pitchFamily="34" charset="0"/>
+                <a:ea typeface="Microsoft YaHei UI" pitchFamily="34" charset="-122"/>
+                <a:cs typeface="Calibri" pitchFamily="34" charset="-120"/>
               </a:rPr>
               <a:t>✓</a:t>
             </a:r>
@@ -34415,9 +34415,9 @@
                 <a:solidFill>
                   <a:srgbClr val="FFFFFF"/>
                 </a:solidFill>
-                <a:latin typeface="Inter" pitchFamily="34" charset="0"/>
-                <a:ea typeface="Inter" pitchFamily="34" charset="-122"/>
-                <a:cs typeface="Inter" pitchFamily="34" charset="-120"/>
+                <a:latin typeface="Calibri" pitchFamily="34" charset="0"/>
+                <a:ea typeface="Microsoft YaHei UI" pitchFamily="34" charset="-122"/>
+                <a:cs typeface="Calibri" pitchFamily="34" charset="-120"/>
               </a:rPr>
               <a:t>数据反馈闭环</a:t>
             </a:r>
@@ -34459,9 +34459,9 @@
                 <a:solidFill>
                   <a:srgbClr val="EF4444"/>
                 </a:solidFill>
-                <a:latin typeface="Inter" pitchFamily="34" charset="0"/>
-                <a:ea typeface="Inter" pitchFamily="34" charset="-122"/>
-                <a:cs typeface="Inter" pitchFamily="34" charset="-120"/>
+                <a:latin typeface="Calibri" pitchFamily="34" charset="0"/>
+                <a:ea typeface="Microsoft YaHei UI" pitchFamily="34" charset="-122"/>
+                <a:cs typeface="Calibri" pitchFamily="34" charset="-120"/>
               </a:rPr>
               <a:t>✗</a:t>
             </a:r>
@@ -34503,9 +34503,9 @@
                 <a:solidFill>
                   <a:srgbClr val="F59E0B"/>
                 </a:solidFill>
-                <a:latin typeface="Inter" pitchFamily="34" charset="0"/>
-                <a:ea typeface="Inter" pitchFamily="34" charset="-122"/>
-                <a:cs typeface="Inter" pitchFamily="34" charset="-120"/>
+                <a:latin typeface="Calibri" pitchFamily="34" charset="0"/>
+                <a:ea typeface="Microsoft YaHei UI" pitchFamily="34" charset="-122"/>
+                <a:cs typeface="Calibri" pitchFamily="34" charset="-120"/>
               </a:rPr>
               <a:t>部分</a:t>
             </a:r>
@@ -34547,9 +34547,9 @@
                 <a:solidFill>
                   <a:srgbClr val="EF4444"/>
                 </a:solidFill>
-                <a:latin typeface="Inter" pitchFamily="34" charset="0"/>
-                <a:ea typeface="Inter" pitchFamily="34" charset="-122"/>
-                <a:cs typeface="Inter" pitchFamily="34" charset="-120"/>
+                <a:latin typeface="Calibri" pitchFamily="34" charset="0"/>
+                <a:ea typeface="Microsoft YaHei UI" pitchFamily="34" charset="-122"/>
+                <a:cs typeface="Calibri" pitchFamily="34" charset="-120"/>
               </a:rPr>
               <a:t>✗</a:t>
             </a:r>
@@ -34591,9 +34591,9 @@
                 <a:solidFill>
                   <a:srgbClr val="F59E0B"/>
                 </a:solidFill>
-                <a:latin typeface="Inter" pitchFamily="34" charset="0"/>
-                <a:ea typeface="Inter" pitchFamily="34" charset="-122"/>
-                <a:cs typeface="Inter" pitchFamily="34" charset="-120"/>
+                <a:latin typeface="Calibri" pitchFamily="34" charset="0"/>
+                <a:ea typeface="Microsoft YaHei UI" pitchFamily="34" charset="-122"/>
+                <a:cs typeface="Calibri" pitchFamily="34" charset="-120"/>
               </a:rPr>
               <a:t>部分</a:t>
             </a:r>
@@ -34697,9 +34697,9 @@
                 <a:solidFill>
                   <a:srgbClr val="00D4FF"/>
                 </a:solidFill>
-                <a:latin typeface="Inter" pitchFamily="34" charset="0"/>
-                <a:ea typeface="Inter" pitchFamily="34" charset="-122"/>
-                <a:cs typeface="Inter" pitchFamily="34" charset="-120"/>
+                <a:latin typeface="Calibri" pitchFamily="34" charset="0"/>
+                <a:ea typeface="Microsoft YaHei UI" pitchFamily="34" charset="-122"/>
+                <a:cs typeface="Calibri" pitchFamily="34" charset="-120"/>
               </a:rPr>
               <a:t>✓</a:t>
             </a:r>
@@ -34741,9 +34741,9 @@
                 <a:solidFill>
                   <a:srgbClr val="FFFFFF"/>
                 </a:solidFill>
-                <a:latin typeface="Inter" pitchFamily="34" charset="0"/>
-                <a:ea typeface="Inter" pitchFamily="34" charset="-122"/>
-                <a:cs typeface="Inter" pitchFamily="34" charset="-120"/>
+                <a:latin typeface="Calibri" pitchFamily="34" charset="0"/>
+                <a:ea typeface="Microsoft YaHei UI" pitchFamily="34" charset="-122"/>
+                <a:cs typeface="Calibri" pitchFamily="34" charset="-120"/>
               </a:rPr>
               <a:t>起步定价</a:t>
             </a:r>
@@ -34787,9 +34787,9 @@
                     <a:alpha val="75000"/>
                   </a:srgbClr>
                 </a:solidFill>
-                <a:latin typeface="Inter" pitchFamily="34" charset="0"/>
-                <a:ea typeface="Inter" pitchFamily="34" charset="-122"/>
-                <a:cs typeface="Inter" pitchFamily="34" charset="-120"/>
+                <a:latin typeface="Calibri" pitchFamily="34" charset="0"/>
+                <a:ea typeface="Microsoft YaHei UI" pitchFamily="34" charset="-122"/>
+                <a:cs typeface="Calibri" pitchFamily="34" charset="-120"/>
               </a:rPr>
               <a:t>$39 / 月</a:t>
             </a:r>
@@ -34833,9 +34833,9 @@
                     <a:alpha val="75000"/>
                   </a:srgbClr>
                 </a:solidFill>
-                <a:latin typeface="Inter" pitchFamily="34" charset="0"/>
-                <a:ea typeface="Inter" pitchFamily="34" charset="-122"/>
-                <a:cs typeface="Inter" pitchFamily="34" charset="-120"/>
+                <a:latin typeface="Calibri" pitchFamily="34" charset="0"/>
+                <a:ea typeface="Microsoft YaHei UI" pitchFamily="34" charset="-122"/>
+                <a:cs typeface="Calibri" pitchFamily="34" charset="-120"/>
               </a:rPr>
               <a:t>$99 / 月</a:t>
             </a:r>
@@ -34879,9 +34879,9 @@
                     <a:alpha val="75000"/>
                   </a:srgbClr>
                 </a:solidFill>
-                <a:latin typeface="Inter" pitchFamily="34" charset="0"/>
-                <a:ea typeface="Inter" pitchFamily="34" charset="-122"/>
-                <a:cs typeface="Inter" pitchFamily="34" charset="-120"/>
+                <a:latin typeface="Calibri" pitchFamily="34" charset="0"/>
+                <a:ea typeface="Microsoft YaHei UI" pitchFamily="34" charset="-122"/>
+                <a:cs typeface="Calibri" pitchFamily="34" charset="-120"/>
               </a:rPr>
               <a:t>$15 / 月</a:t>
             </a:r>
@@ -34925,9 +34925,9 @@
                     <a:alpha val="75000"/>
                   </a:srgbClr>
                 </a:solidFill>
-                <a:latin typeface="Inter" pitchFamily="34" charset="0"/>
-                <a:ea typeface="Inter" pitchFamily="34" charset="-122"/>
-                <a:cs typeface="Inter" pitchFamily="34" charset="-120"/>
+                <a:latin typeface="Calibri" pitchFamily="34" charset="0"/>
+                <a:ea typeface="Microsoft YaHei UI" pitchFamily="34" charset="-122"/>
+                <a:cs typeface="Calibri" pitchFamily="34" charset="-120"/>
               </a:rPr>
               <a:t>¥199 / 月</a:t>
             </a:r>
@@ -35031,9 +35031,9 @@
                 <a:solidFill>
                   <a:srgbClr val="00D4FF"/>
                 </a:solidFill>
-                <a:latin typeface="Inter" pitchFamily="34" charset="0"/>
-                <a:ea typeface="Inter" pitchFamily="34" charset="-122"/>
-                <a:cs typeface="Inter" pitchFamily="34" charset="-120"/>
+                <a:latin typeface="Calibri" pitchFamily="34" charset="0"/>
+                <a:ea typeface="Microsoft YaHei UI" pitchFamily="34" charset="-122"/>
+                <a:cs typeface="Calibri" pitchFamily="34" charset="-120"/>
               </a:rPr>
               <a:t>¥99 / 月</a:t>
             </a:r>
@@ -35117,9 +35117,9 @@
                 <a:solidFill>
                   <a:srgbClr val="FFFFFF"/>
                 </a:solidFill>
-                <a:latin typeface="Inter" pitchFamily="34" charset="0"/>
-                <a:ea typeface="Inter" pitchFamily="34" charset="-122"/>
-                <a:cs typeface="Inter" pitchFamily="34" charset="-120"/>
+                <a:latin typeface="Calibri" pitchFamily="34" charset="0"/>
+                <a:ea typeface="Microsoft YaHei UI" pitchFamily="34" charset="-122"/>
+                <a:cs typeface="Calibri" pitchFamily="34" charset="-120"/>
               </a:rPr>
               <a:t>全链路唯一性：</a:t>
             </a:r>
@@ -35136,9 +35136,9 @@
                     <a:alpha val="70000"/>
                   </a:srgbClr>
                 </a:solidFill>
-                <a:latin typeface="Inter" pitchFamily="34" charset="0"/>
-                <a:ea typeface="Inter" pitchFamily="34" charset="-122"/>
-                <a:cs typeface="Inter" pitchFamily="34" charset="-120"/>
+                <a:latin typeface="Calibri" pitchFamily="34" charset="0"/>
+                <a:ea typeface="Microsoft YaHei UI" pitchFamily="34" charset="-122"/>
+                <a:cs typeface="Calibri" pitchFamily="34" charset="-120"/>
               </a:rPr>
               <a:t>市面上无任何单一工具同时覆盖文案生成→视频生成</a:t>
             </a:r>
@@ -35155,9 +35155,9 @@
                     <a:alpha val="70000"/>
                   </a:srgbClr>
                 </a:solidFill>
-                <a:latin typeface="Inter" pitchFamily="34" charset="0"/>
-                <a:ea typeface="Inter" pitchFamily="34" charset="-122"/>
-                <a:cs typeface="Inter" pitchFamily="34" charset="-120"/>
+                <a:latin typeface="Calibri" pitchFamily="34" charset="0"/>
+                <a:ea typeface="Microsoft YaHei UI" pitchFamily="34" charset="-122"/>
+                <a:cs typeface="Calibri" pitchFamily="34" charset="-120"/>
               </a:rPr>
               <a:t>→多平台分发→数据反馈的完整链路</a:t>
             </a:r>
@@ -35199,9 +35199,9 @@
                 <a:solidFill>
                   <a:srgbClr val="FFFFFF"/>
                 </a:solidFill>
-                <a:latin typeface="Inter" pitchFamily="34" charset="0"/>
-                <a:ea typeface="Inter" pitchFamily="34" charset="-122"/>
-                <a:cs typeface="Inter" pitchFamily="34" charset="-120"/>
+                <a:latin typeface="Calibri" pitchFamily="34" charset="0"/>
+                <a:ea typeface="Microsoft YaHei UI" pitchFamily="34" charset="-122"/>
+                <a:cs typeface="Calibri" pitchFamily="34" charset="-120"/>
               </a:rPr>
               <a:t>中文市场壁垒：</a:t>
             </a:r>
@@ -35218,9 +35218,9 @@
                     <a:alpha val="70000"/>
                   </a:srgbClr>
                 </a:solidFill>
-                <a:latin typeface="Inter" pitchFamily="34" charset="0"/>
-                <a:ea typeface="Inter" pitchFamily="34" charset="-122"/>
-                <a:cs typeface="Inter" pitchFamily="34" charset="-120"/>
+                <a:latin typeface="Calibri" pitchFamily="34" charset="0"/>
+                <a:ea typeface="Microsoft YaHei UI" pitchFamily="34" charset="-122"/>
+                <a:cs typeface="Calibri" pitchFamily="34" charset="-120"/>
               </a:rPr>
               <a:t>Jasper/Hootsuite 对国内平台（抖音/小红书/微博）</a:t>
             </a:r>
@@ -35237,9 +35237,9 @@
                     <a:alpha val="70000"/>
                   </a:srgbClr>
                 </a:solidFill>
-                <a:latin typeface="Inter" pitchFamily="34" charset="0"/>
-                <a:ea typeface="Inter" pitchFamily="34" charset="-122"/>
-                <a:cs typeface="Inter" pitchFamily="34" charset="-120"/>
+                <a:latin typeface="Calibri" pitchFamily="34" charset="0"/>
+                <a:ea typeface="Microsoft YaHei UI" pitchFamily="34" charset="-122"/>
+                <a:cs typeface="Calibri" pitchFamily="34" charset="-120"/>
               </a:rPr>
               <a:t>适配极弱，本土化是天然护城河</a:t>
             </a:r>
@@ -35281,9 +35281,9 @@
                 <a:solidFill>
                   <a:srgbClr val="FFFFFF"/>
                 </a:solidFill>
-                <a:latin typeface="Inter" pitchFamily="34" charset="0"/>
-                <a:ea typeface="Inter" pitchFamily="34" charset="-122"/>
-                <a:cs typeface="Inter" pitchFamily="34" charset="-120"/>
+                <a:latin typeface="Calibri" pitchFamily="34" charset="0"/>
+                <a:ea typeface="Microsoft YaHei UI" pitchFamily="34" charset="-122"/>
+                <a:cs typeface="Calibri" pitchFamily="34" charset="-120"/>
               </a:rPr>
               <a:t>价格优势：</a:t>
             </a:r>
@@ -35300,9 +35300,9 @@
                     <a:alpha val="70000"/>
                   </a:srgbClr>
                 </a:solidFill>
-                <a:latin typeface="Inter" pitchFamily="34" charset="0"/>
-                <a:ea typeface="Inter" pitchFamily="34" charset="-122"/>
-                <a:cs typeface="Inter" pitchFamily="34" charset="-120"/>
+                <a:latin typeface="Calibri" pitchFamily="34" charset="0"/>
+                <a:ea typeface="Microsoft YaHei UI" pitchFamily="34" charset="-122"/>
+                <a:cs typeface="Calibri" pitchFamily="34" charset="-120"/>
               </a:rPr>
               <a:t>功能覆盖度远超竞品，起步定价仅为 Hootsuite 的 1/10，</a:t>
             </a:r>
@@ -35319,9 +35319,9 @@
                     <a:alpha val="70000"/>
                   </a:srgbClr>
                 </a:solidFill>
-                <a:latin typeface="Inter" pitchFamily="34" charset="0"/>
-                <a:ea typeface="Inter" pitchFamily="34" charset="-122"/>
-                <a:cs typeface="Inter" pitchFamily="34" charset="-120"/>
+                <a:latin typeface="Calibri" pitchFamily="34" charset="0"/>
+                <a:ea typeface="Microsoft YaHei UI" pitchFamily="34" charset="-122"/>
+                <a:cs typeface="Calibri" pitchFamily="34" charset="-120"/>
               </a:rPr>
               <a:t>降低中小创作者决策门槛</a:t>
             </a:r>
@@ -35412,9 +35412,9 @@
                 <a:solidFill>
                   <a:srgbClr val="00D4FF"/>
                 </a:solidFill>
-                <a:latin typeface="Inter" pitchFamily="34" charset="0"/>
-                <a:ea typeface="Inter" pitchFamily="34" charset="-122"/>
-                <a:cs typeface="Inter" pitchFamily="34" charset="-120"/>
+                <a:latin typeface="Calibri" pitchFamily="34" charset="0"/>
+                <a:ea typeface="Microsoft YaHei UI" pitchFamily="34" charset="-122"/>
+                <a:cs typeface="Calibri" pitchFamily="34" charset="-120"/>
               </a:rPr>
               <a:t>BUSINESS MODEL</a:t>
             </a:r>
@@ -35456,9 +35456,9 @@
                 <a:solidFill>
                   <a:srgbClr val="FFFFFF"/>
                 </a:solidFill>
-                <a:latin typeface="Space Grotesk" pitchFamily="34" charset="0"/>
-                <a:ea typeface="Space Grotesk" pitchFamily="34" charset="-122"/>
-                <a:cs typeface="Space Grotesk" pitchFamily="34" charset="-120"/>
+                <a:latin typeface="Calibri" pitchFamily="34" charset="0"/>
+                <a:ea typeface="Microsoft YaHei UI" pitchFamily="34" charset="-122"/>
+                <a:cs typeface="Calibri" pitchFamily="34" charset="-120"/>
               </a:rPr>
               <a:t>六种变现路径优劣分析与笔灵推荐三阶段路径</a:t>
             </a:r>
@@ -35527,9 +35527,9 @@
                 <a:solidFill>
                   <a:srgbClr val="FFFFFF"/>
                 </a:solidFill>
-                <a:latin typeface="Space Grotesk" pitchFamily="34" charset="0"/>
-                <a:ea typeface="Space Grotesk" pitchFamily="34" charset="-122"/>
-                <a:cs typeface="Space Grotesk" pitchFamily="34" charset="-120"/>
+                <a:latin typeface="Calibri" pitchFamily="34" charset="0"/>
+                <a:ea typeface="Microsoft YaHei UI" pitchFamily="34" charset="-122"/>
+                <a:cs typeface="Calibri" pitchFamily="34" charset="-120"/>
               </a:rPr>
               <a:t>SaaS 订阅制</a:t>
             </a:r>
@@ -35573,9 +35573,9 @@
                     <a:alpha val="65000"/>
                   </a:srgbClr>
                 </a:solidFill>
-                <a:latin typeface="Inter" pitchFamily="34" charset="0"/>
-                <a:ea typeface="Inter" pitchFamily="34" charset="-122"/>
-                <a:cs typeface="Inter" pitchFamily="34" charset="-120"/>
+                <a:latin typeface="Calibri" pitchFamily="34" charset="0"/>
+                <a:ea typeface="Microsoft YaHei UI" pitchFamily="34" charset="-122"/>
+                <a:cs typeface="Calibri" pitchFamily="34" charset="-120"/>
               </a:rPr>
               <a:t>✦ 现金流稳定，LTV 高，易预测营收</a:t>
             </a:r>
@@ -35617,9 +35617,9 @@
                 <a:solidFill>
                   <a:srgbClr val="8B949E"/>
                 </a:solidFill>
-                <a:latin typeface="Inter" pitchFamily="34" charset="0"/>
-                <a:ea typeface="Inter" pitchFamily="34" charset="-122"/>
-                <a:cs typeface="Inter" pitchFamily="34" charset="-120"/>
+                <a:latin typeface="Calibri" pitchFamily="34" charset="0"/>
+                <a:ea typeface="Microsoft YaHei UI" pitchFamily="34" charset="-122"/>
+                <a:cs typeface="Calibri" pitchFamily="34" charset="-120"/>
               </a:rPr>
               <a:t>✗ 获客成本高，需持续证明价值</a:t>
             </a:r>
@@ -35690,9 +35690,9 @@
                 <a:solidFill>
                   <a:srgbClr val="00D4FF"/>
                 </a:solidFill>
-                <a:latin typeface="Inter" pitchFamily="34" charset="0"/>
-                <a:ea typeface="Inter" pitchFamily="34" charset="-122"/>
-                <a:cs typeface="Inter" pitchFamily="34" charset="-120"/>
+                <a:latin typeface="Calibri" pitchFamily="34" charset="0"/>
+                <a:ea typeface="Microsoft YaHei UI" pitchFamily="34" charset="-122"/>
+                <a:cs typeface="Calibri" pitchFamily="34" charset="-120"/>
               </a:rPr>
               <a:t>推荐 · 主路径</a:t>
             </a:r>
@@ -35761,9 +35761,9 @@
                 <a:solidFill>
                   <a:srgbClr val="FFFFFF"/>
                 </a:solidFill>
-                <a:latin typeface="Space Grotesk" pitchFamily="34" charset="0"/>
-                <a:ea typeface="Space Grotesk" pitchFamily="34" charset="-122"/>
-                <a:cs typeface="Space Grotesk" pitchFamily="34" charset="-120"/>
+                <a:latin typeface="Calibri" pitchFamily="34" charset="0"/>
+                <a:ea typeface="Microsoft YaHei UI" pitchFamily="34" charset="-122"/>
+                <a:cs typeface="Calibri" pitchFamily="34" charset="-120"/>
               </a:rPr>
               <a:t>API 调用计费</a:t>
             </a:r>
@@ -35807,9 +35807,9 @@
                     <a:alpha val="65000"/>
                   </a:srgbClr>
                 </a:solidFill>
-                <a:latin typeface="Inter" pitchFamily="34" charset="0"/>
-                <a:ea typeface="Inter" pitchFamily="34" charset="-122"/>
-                <a:cs typeface="Inter" pitchFamily="34" charset="-120"/>
+                <a:latin typeface="Calibri" pitchFamily="34" charset="0"/>
+                <a:ea typeface="Microsoft YaHei UI" pitchFamily="34" charset="-122"/>
+                <a:cs typeface="Calibri" pitchFamily="34" charset="-120"/>
               </a:rPr>
               <a:t>✦ 按量付费门槛低，适合开发者生态</a:t>
             </a:r>
@@ -35851,9 +35851,9 @@
                 <a:solidFill>
                   <a:srgbClr val="8B949E"/>
                 </a:solidFill>
-                <a:latin typeface="Inter" pitchFamily="34" charset="0"/>
-                <a:ea typeface="Inter" pitchFamily="34" charset="-122"/>
-                <a:cs typeface="Inter" pitchFamily="34" charset="-120"/>
+                <a:latin typeface="Calibri" pitchFamily="34" charset="0"/>
+                <a:ea typeface="Microsoft YaHei UI" pitchFamily="34" charset="-122"/>
+                <a:cs typeface="Calibri" pitchFamily="34" charset="-120"/>
               </a:rPr>
               <a:t>✗ 收入波动大，需大量调用量支撑</a:t>
             </a:r>
@@ -35924,9 +35924,9 @@
                 <a:solidFill>
                   <a:srgbClr val="A78BFA"/>
                 </a:solidFill>
-                <a:latin typeface="Inter" pitchFamily="34" charset="0"/>
-                <a:ea typeface="Inter" pitchFamily="34" charset="-122"/>
-                <a:cs typeface="Inter" pitchFamily="34" charset="-120"/>
+                <a:latin typeface="Calibri" pitchFamily="34" charset="0"/>
+                <a:ea typeface="Microsoft YaHei UI" pitchFamily="34" charset="-122"/>
+                <a:cs typeface="Calibri" pitchFamily="34" charset="-120"/>
               </a:rPr>
               <a:t>可选 · PHASE 3</a:t>
             </a:r>
@@ -35995,9 +35995,9 @@
                 <a:solidFill>
                   <a:srgbClr val="FFFFFF"/>
                 </a:solidFill>
-                <a:latin typeface="Space Grotesk" pitchFamily="34" charset="0"/>
-                <a:ea typeface="Space Grotesk" pitchFamily="34" charset="-122"/>
-                <a:cs typeface="Space Grotesk" pitchFamily="34" charset="-120"/>
+                <a:latin typeface="Calibri" pitchFamily="34" charset="0"/>
+                <a:ea typeface="Microsoft YaHei UI" pitchFamily="34" charset="-122"/>
+                <a:cs typeface="Calibri" pitchFamily="34" charset="-120"/>
               </a:rPr>
               <a:t>增值服务</a:t>
             </a:r>
@@ -36041,9 +36041,9 @@
                     <a:alpha val="65000"/>
                   </a:srgbClr>
                 </a:solidFill>
-                <a:latin typeface="Inter" pitchFamily="34" charset="0"/>
-                <a:ea typeface="Inter" pitchFamily="34" charset="-122"/>
-                <a:cs typeface="Inter" pitchFamily="34" charset="-120"/>
+                <a:latin typeface="Calibri" pitchFamily="34" charset="0"/>
+                <a:ea typeface="Microsoft YaHei UI" pitchFamily="34" charset="-122"/>
+                <a:cs typeface="Calibri" pitchFamily="34" charset="-120"/>
               </a:rPr>
               <a:t>✦ 提升 ARPU，满足高端用户需求</a:t>
             </a:r>
@@ -36085,9 +36085,9 @@
                 <a:solidFill>
                   <a:srgbClr val="8B949E"/>
                 </a:solidFill>
-                <a:latin typeface="Inter" pitchFamily="34" charset="0"/>
-                <a:ea typeface="Inter" pitchFamily="34" charset="-122"/>
-                <a:cs typeface="Inter" pitchFamily="34" charset="-120"/>
+                <a:latin typeface="Calibri" pitchFamily="34" charset="0"/>
+                <a:ea typeface="Microsoft YaHei UI" pitchFamily="34" charset="-122"/>
+                <a:cs typeface="Calibri" pitchFamily="34" charset="-120"/>
               </a:rPr>
               <a:t>✗ 需积累用户基数，转化率有限</a:t>
             </a:r>
@@ -36158,9 +36158,9 @@
                 <a:solidFill>
                   <a:srgbClr val="00D4FF"/>
                 </a:solidFill>
-                <a:latin typeface="Inter" pitchFamily="34" charset="0"/>
-                <a:ea typeface="Inter" pitchFamily="34" charset="-122"/>
-                <a:cs typeface="Inter" pitchFamily="34" charset="-120"/>
+                <a:latin typeface="Calibri" pitchFamily="34" charset="0"/>
+                <a:ea typeface="Microsoft YaHei UI" pitchFamily="34" charset="-122"/>
+                <a:cs typeface="Calibri" pitchFamily="34" charset="-120"/>
               </a:rPr>
               <a:t>推荐 · PHASE 2</a:t>
             </a:r>
@@ -36229,9 +36229,9 @@
                 <a:solidFill>
                   <a:srgbClr val="FFFFFF"/>
                 </a:solidFill>
-                <a:latin typeface="Space Grotesk" pitchFamily="34" charset="0"/>
-                <a:ea typeface="Space Grotesk" pitchFamily="34" charset="-122"/>
-                <a:cs typeface="Space Grotesk" pitchFamily="34" charset="-120"/>
+                <a:latin typeface="Calibri" pitchFamily="34" charset="0"/>
+                <a:ea typeface="Microsoft YaHei UI" pitchFamily="34" charset="-122"/>
+                <a:cs typeface="Calibri" pitchFamily="34" charset="-120"/>
               </a:rPr>
               <a:t>企业定制</a:t>
             </a:r>
@@ -36275,9 +36275,9 @@
                     <a:alpha val="65000"/>
                   </a:srgbClr>
                 </a:solidFill>
-                <a:latin typeface="Inter" pitchFamily="34" charset="0"/>
-                <a:ea typeface="Inter" pitchFamily="34" charset="-122"/>
-                <a:cs typeface="Inter" pitchFamily="34" charset="-120"/>
+                <a:latin typeface="Calibri" pitchFamily="34" charset="0"/>
+                <a:ea typeface="Microsoft YaHei UI" pitchFamily="34" charset="-122"/>
+                <a:cs typeface="Calibri" pitchFamily="34" charset="-120"/>
               </a:rPr>
               <a:t>✦ 单客价值高，品牌背书效果强</a:t>
             </a:r>
@@ -36319,9 +36319,9 @@
                 <a:solidFill>
                   <a:srgbClr val="8B949E"/>
                 </a:solidFill>
-                <a:latin typeface="Inter" pitchFamily="34" charset="0"/>
-                <a:ea typeface="Inter" pitchFamily="34" charset="-122"/>
-                <a:cs typeface="Inter" pitchFamily="34" charset="-120"/>
+                <a:latin typeface="Calibri" pitchFamily="34" charset="0"/>
+                <a:ea typeface="Microsoft YaHei UI" pitchFamily="34" charset="-122"/>
+                <a:cs typeface="Calibri" pitchFamily="34" charset="-120"/>
               </a:rPr>
               <a:t>✗ 交付周期长，难以规模化复制</a:t>
             </a:r>
@@ -36392,9 +36392,9 @@
                 <a:solidFill>
                   <a:srgbClr val="A78BFA"/>
                 </a:solidFill>
-                <a:latin typeface="Inter" pitchFamily="34" charset="0"/>
-                <a:ea typeface="Inter" pitchFamily="34" charset="-122"/>
-                <a:cs typeface="Inter" pitchFamily="34" charset="-120"/>
+                <a:latin typeface="Calibri" pitchFamily="34" charset="0"/>
+                <a:ea typeface="Microsoft YaHei UI" pitchFamily="34" charset="-122"/>
+                <a:cs typeface="Calibri" pitchFamily="34" charset="-120"/>
               </a:rPr>
               <a:t>可选 · 机会型</a:t>
             </a:r>
@@ -36463,9 +36463,9 @@
                 <a:solidFill>
                   <a:srgbClr val="FFFFFF"/>
                 </a:solidFill>
-                <a:latin typeface="Space Grotesk" pitchFamily="34" charset="0"/>
-                <a:ea typeface="Space Grotesk" pitchFamily="34" charset="-122"/>
-                <a:cs typeface="Space Grotesk" pitchFamily="34" charset="-120"/>
+                <a:latin typeface="Calibri" pitchFamily="34" charset="0"/>
+                <a:ea typeface="Microsoft YaHei UI" pitchFamily="34" charset="-122"/>
+                <a:cs typeface="Calibri" pitchFamily="34" charset="-120"/>
               </a:rPr>
               <a:t>MCN 分成</a:t>
             </a:r>
@@ -36509,9 +36509,9 @@
                     <a:alpha val="65000"/>
                   </a:srgbClr>
                 </a:solidFill>
-                <a:latin typeface="Inter" pitchFamily="34" charset="0"/>
-                <a:ea typeface="Inter" pitchFamily="34" charset="-122"/>
-                <a:cs typeface="Inter" pitchFamily="34" charset="-120"/>
+                <a:latin typeface="Calibri" pitchFamily="34" charset="0"/>
+                <a:ea typeface="Microsoft YaHei UI" pitchFamily="34" charset="-122"/>
+                <a:cs typeface="Calibri" pitchFamily="34" charset="-120"/>
               </a:rPr>
               <a:t>✦ 与客户利益深度绑定，黏性极高</a:t>
             </a:r>
@@ -36553,9 +36553,9 @@
                 <a:solidFill>
                   <a:srgbClr val="8B949E"/>
                 </a:solidFill>
-                <a:latin typeface="Inter" pitchFamily="34" charset="0"/>
-                <a:ea typeface="Inter" pitchFamily="34" charset="-122"/>
-                <a:cs typeface="Inter" pitchFamily="34" charset="-120"/>
+                <a:latin typeface="Calibri" pitchFamily="34" charset="0"/>
+                <a:ea typeface="Microsoft YaHei UI" pitchFamily="34" charset="-122"/>
+                <a:cs typeface="Calibri" pitchFamily="34" charset="-120"/>
               </a:rPr>
               <a:t>✗ 收入滞后，需强运营能力支撑</a:t>
             </a:r>
@@ -36626,9 +36626,9 @@
                 <a:solidFill>
                   <a:srgbClr val="8B949E"/>
                 </a:solidFill>
-                <a:latin typeface="Inter" pitchFamily="34" charset="0"/>
-                <a:ea typeface="Inter" pitchFamily="34" charset="-122"/>
-                <a:cs typeface="Inter" pitchFamily="34" charset="-120"/>
+                <a:latin typeface="Calibri" pitchFamily="34" charset="0"/>
+                <a:ea typeface="Microsoft YaHei UI" pitchFamily="34" charset="-122"/>
+                <a:cs typeface="Calibri" pitchFamily="34" charset="-120"/>
               </a:rPr>
               <a:t>暂缓 · 待验证</a:t>
             </a:r>
@@ -36697,9 +36697,9 @@
                 <a:solidFill>
                   <a:srgbClr val="FFFFFF"/>
                 </a:solidFill>
-                <a:latin typeface="Space Grotesk" pitchFamily="34" charset="0"/>
-                <a:ea typeface="Space Grotesk" pitchFamily="34" charset="-122"/>
-                <a:cs typeface="Space Grotesk" pitchFamily="34" charset="-120"/>
+                <a:latin typeface="Calibri" pitchFamily="34" charset="0"/>
+                <a:ea typeface="Microsoft YaHei UI" pitchFamily="34" charset="-122"/>
+                <a:cs typeface="Calibri" pitchFamily="34" charset="-120"/>
               </a:rPr>
               <a:t>广告 / 联盟</a:t>
             </a:r>
@@ -36743,9 +36743,9 @@
                     <a:alpha val="65000"/>
                   </a:srgbClr>
                 </a:solidFill>
-                <a:latin typeface="Inter" pitchFamily="34" charset="0"/>
-                <a:ea typeface="Inter" pitchFamily="34" charset="-122"/>
-                <a:cs typeface="Inter" pitchFamily="34" charset="-120"/>
+                <a:latin typeface="Calibri" pitchFamily="34" charset="0"/>
+                <a:ea typeface="Microsoft YaHei UI" pitchFamily="34" charset="-122"/>
+                <a:cs typeface="Calibri" pitchFamily="34" charset="-120"/>
               </a:rPr>
               <a:t>✦ 零边际成本，流量变现直接</a:t>
             </a:r>
@@ -36787,9 +36787,9 @@
                 <a:solidFill>
                   <a:srgbClr val="8B949E"/>
                 </a:solidFill>
-                <a:latin typeface="Inter" pitchFamily="34" charset="0"/>
-                <a:ea typeface="Inter" pitchFamily="34" charset="-122"/>
-                <a:cs typeface="Inter" pitchFamily="34" charset="-120"/>
+                <a:latin typeface="Calibri" pitchFamily="34" charset="0"/>
+                <a:ea typeface="Microsoft YaHei UI" pitchFamily="34" charset="-122"/>
+                <a:cs typeface="Calibri" pitchFamily="34" charset="-120"/>
               </a:rPr>
               <a:t>✗ 影响用户体验，与工具定位冲突</a:t>
             </a:r>
@@ -36860,9 +36860,9 @@
                 <a:solidFill>
                   <a:srgbClr val="8B949E"/>
                 </a:solidFill>
-                <a:latin typeface="Inter" pitchFamily="34" charset="0"/>
-                <a:ea typeface="Inter" pitchFamily="34" charset="-122"/>
-                <a:cs typeface="Inter" pitchFamily="34" charset="-120"/>
+                <a:latin typeface="Calibri" pitchFamily="34" charset="0"/>
+                <a:ea typeface="Microsoft YaHei UI" pitchFamily="34" charset="-122"/>
+                <a:cs typeface="Calibri" pitchFamily="34" charset="-120"/>
               </a:rPr>
               <a:t>暂缓 · 不推荐</a:t>
             </a:r>
@@ -36904,9 +36904,9 @@
                 <a:solidFill>
                   <a:srgbClr val="7C3AED"/>
                 </a:solidFill>
-                <a:latin typeface="Inter" pitchFamily="34" charset="0"/>
-                <a:ea typeface="Inter" pitchFamily="34" charset="-122"/>
-                <a:cs typeface="Inter" pitchFamily="34" charset="-120"/>
+                <a:latin typeface="Calibri" pitchFamily="34" charset="0"/>
+                <a:ea typeface="Microsoft YaHei UI" pitchFamily="34" charset="-122"/>
+                <a:cs typeface="Calibri" pitchFamily="34" charset="-120"/>
               </a:rPr>
               <a:t>笔灵推荐变现路径</a:t>
             </a:r>
@@ -36995,9 +36995,9 @@
                 <a:solidFill>
                   <a:srgbClr val="00D4FF"/>
                 </a:solidFill>
-                <a:latin typeface="Space Grotesk" pitchFamily="34" charset="0"/>
-                <a:ea typeface="Space Grotesk" pitchFamily="34" charset="-122"/>
-                <a:cs typeface="Space Grotesk" pitchFamily="34" charset="-120"/>
+                <a:latin typeface="Calibri" pitchFamily="34" charset="0"/>
+                <a:ea typeface="Microsoft YaHei UI" pitchFamily="34" charset="-122"/>
+                <a:cs typeface="Calibri" pitchFamily="34" charset="-120"/>
               </a:rPr>
               <a:t>1</a:t>
             </a:r>
@@ -37039,9 +37039,9 @@
                 <a:solidFill>
                   <a:srgbClr val="8B949E"/>
                 </a:solidFill>
-                <a:latin typeface="Inter" pitchFamily="34" charset="0"/>
-                <a:ea typeface="Inter" pitchFamily="34" charset="-122"/>
-                <a:cs typeface="Inter" pitchFamily="34" charset="-120"/>
+                <a:latin typeface="Calibri" pitchFamily="34" charset="0"/>
+                <a:ea typeface="Microsoft YaHei UI" pitchFamily="34" charset="-122"/>
+                <a:cs typeface="Calibri" pitchFamily="34" charset="-120"/>
               </a:rPr>
               <a:t>PHASE 1 · 0–6 月</a:t>
             </a:r>
@@ -37083,9 +37083,9 @@
                 <a:solidFill>
                   <a:srgbClr val="FFFFFF"/>
                 </a:solidFill>
-                <a:latin typeface="Space Grotesk" pitchFamily="34" charset="0"/>
-                <a:ea typeface="Space Grotesk" pitchFamily="34" charset="-122"/>
-                <a:cs typeface="Space Grotesk" pitchFamily="34" charset="-120"/>
+                <a:latin typeface="Calibri" pitchFamily="34" charset="0"/>
+                <a:ea typeface="Microsoft YaHei UI" pitchFamily="34" charset="-122"/>
+                <a:cs typeface="Calibri" pitchFamily="34" charset="-120"/>
               </a:rPr>
               <a:t>免费 + 订阅验证</a:t>
             </a:r>
@@ -37127,9 +37127,9 @@
                 <a:solidFill>
                   <a:srgbClr val="8B949E"/>
                 </a:solidFill>
-                <a:latin typeface="Inter" pitchFamily="34" charset="0"/>
-                <a:ea typeface="Inter" pitchFamily="34" charset="-122"/>
-                <a:cs typeface="Inter" pitchFamily="34" charset="-120"/>
+                <a:latin typeface="Calibri" pitchFamily="34" charset="0"/>
+                <a:ea typeface="Microsoft YaHei UI" pitchFamily="34" charset="-122"/>
+                <a:cs typeface="Calibri" pitchFamily="34" charset="-120"/>
               </a:rPr>
               <a:t>免费版获取种子用户</a:t>
             </a:r>
@@ -37144,9 +37144,9 @@
                 <a:solidFill>
                   <a:srgbClr val="8B949E"/>
                 </a:solidFill>
-                <a:latin typeface="Inter" pitchFamily="34" charset="0"/>
-                <a:ea typeface="Inter" pitchFamily="34" charset="-122"/>
-                <a:cs typeface="Inter" pitchFamily="34" charset="-120"/>
+                <a:latin typeface="Calibri" pitchFamily="34" charset="0"/>
+                <a:ea typeface="Microsoft YaHei UI" pitchFamily="34" charset="-122"/>
+                <a:cs typeface="Calibri" pitchFamily="34" charset="-120"/>
               </a:rPr>
               <a:t>
 </a:t>
@@ -37162,9 +37162,9 @@
                 <a:solidFill>
                   <a:srgbClr val="8B949E"/>
                 </a:solidFill>
-                <a:latin typeface="Inter" pitchFamily="34" charset="0"/>
-                <a:ea typeface="Inter" pitchFamily="34" charset="-122"/>
-                <a:cs typeface="Inter" pitchFamily="34" charset="-120"/>
+                <a:latin typeface="Calibri" pitchFamily="34" charset="0"/>
+                <a:ea typeface="Microsoft YaHei UI" pitchFamily="34" charset="-122"/>
+                <a:cs typeface="Calibri" pitchFamily="34" charset="-120"/>
               </a:rPr>
               <a:t>Pro 订阅 ¥99/月验证付费意愿</a:t>
             </a:r>
@@ -37233,9 +37233,9 @@
                 <a:solidFill>
                   <a:srgbClr val="A78BFA"/>
                 </a:solidFill>
-                <a:latin typeface="Space Grotesk" pitchFamily="34" charset="0"/>
-                <a:ea typeface="Space Grotesk" pitchFamily="34" charset="-122"/>
-                <a:cs typeface="Space Grotesk" pitchFamily="34" charset="-120"/>
+                <a:latin typeface="Calibri" pitchFamily="34" charset="0"/>
+                <a:ea typeface="Microsoft YaHei UI" pitchFamily="34" charset="-122"/>
+                <a:cs typeface="Calibri" pitchFamily="34" charset="-120"/>
               </a:rPr>
               <a:t>2</a:t>
             </a:r>
@@ -37277,9 +37277,9 @@
                 <a:solidFill>
                   <a:srgbClr val="8B949E"/>
                 </a:solidFill>
-                <a:latin typeface="Inter" pitchFamily="34" charset="0"/>
-                <a:ea typeface="Inter" pitchFamily="34" charset="-122"/>
-                <a:cs typeface="Inter" pitchFamily="34" charset="-120"/>
+                <a:latin typeface="Calibri" pitchFamily="34" charset="0"/>
+                <a:ea typeface="Microsoft YaHei UI" pitchFamily="34" charset="-122"/>
+                <a:cs typeface="Calibri" pitchFamily="34" charset="-120"/>
               </a:rPr>
               <a:t>PHASE 2 · 6–18 月</a:t>
             </a:r>
@@ -37321,9 +37321,9 @@
                 <a:solidFill>
                   <a:srgbClr val="FFFFFF"/>
                 </a:solidFill>
-                <a:latin typeface="Space Grotesk" pitchFamily="34" charset="0"/>
-                <a:ea typeface="Space Grotesk" pitchFamily="34" charset="-122"/>
-                <a:cs typeface="Space Grotesk" pitchFamily="34" charset="-120"/>
+                <a:latin typeface="Calibri" pitchFamily="34" charset="0"/>
+                <a:ea typeface="Microsoft YaHei UI" pitchFamily="34" charset="-122"/>
+                <a:cs typeface="Calibri" pitchFamily="34" charset="-120"/>
               </a:rPr>
               <a:t>分层订阅 + 增值</a:t>
             </a:r>
@@ -37365,9 +37365,9 @@
                 <a:solidFill>
                   <a:srgbClr val="8B949E"/>
                 </a:solidFill>
-                <a:latin typeface="Inter" pitchFamily="34" charset="0"/>
-                <a:ea typeface="Inter" pitchFamily="34" charset="-122"/>
-                <a:cs typeface="Inter" pitchFamily="34" charset="-120"/>
+                <a:latin typeface="Calibri" pitchFamily="34" charset="0"/>
+                <a:ea typeface="Microsoft YaHei UI" pitchFamily="34" charset="-122"/>
+                <a:cs typeface="Calibri" pitchFamily="34" charset="-120"/>
               </a:rPr>
               <a:t>个人/团队/企业三档</a:t>
             </a:r>
@@ -37382,9 +37382,9 @@
                 <a:solidFill>
                   <a:srgbClr val="8B949E"/>
                 </a:solidFill>
-                <a:latin typeface="Inter" pitchFamily="34" charset="0"/>
-                <a:ea typeface="Inter" pitchFamily="34" charset="-122"/>
-                <a:cs typeface="Inter" pitchFamily="34" charset="-120"/>
+                <a:latin typeface="Calibri" pitchFamily="34" charset="0"/>
+                <a:ea typeface="Microsoft YaHei UI" pitchFamily="34" charset="-122"/>
+                <a:cs typeface="Calibri" pitchFamily="34" charset="-120"/>
               </a:rPr>
               <a:t>
 </a:t>
@@ -37400,9 +37400,9 @@
                 <a:solidFill>
                   <a:srgbClr val="8B949E"/>
                 </a:solidFill>
-                <a:latin typeface="Inter" pitchFamily="34" charset="0"/>
-                <a:ea typeface="Inter" pitchFamily="34" charset="-122"/>
-                <a:cs typeface="Inter" pitchFamily="34" charset="-120"/>
+                <a:latin typeface="Calibri" pitchFamily="34" charset="0"/>
+                <a:ea typeface="Microsoft YaHei UI" pitchFamily="34" charset="-122"/>
+                <a:cs typeface="Calibri" pitchFamily="34" charset="-120"/>
               </a:rPr>
               <a:t>视频生成、高级分析按量计费</a:t>
             </a:r>
@@ -37473,9 +37473,9 @@
                 <a:solidFill>
                   <a:srgbClr val="7C3AED"/>
                 </a:solidFill>
-                <a:latin typeface="Space Grotesk" pitchFamily="34" charset="0"/>
-                <a:ea typeface="Space Grotesk" pitchFamily="34" charset="-122"/>
-                <a:cs typeface="Space Grotesk" pitchFamily="34" charset="-120"/>
+                <a:latin typeface="Calibri" pitchFamily="34" charset="0"/>
+                <a:ea typeface="Microsoft YaHei UI" pitchFamily="34" charset="-122"/>
+                <a:cs typeface="Calibri" pitchFamily="34" charset="-120"/>
               </a:rPr>
               <a:t>3</a:t>
             </a:r>
@@ -37517,9 +37517,9 @@
                 <a:solidFill>
                   <a:srgbClr val="8B949E"/>
                 </a:solidFill>
-                <a:latin typeface="Inter" pitchFamily="34" charset="0"/>
-                <a:ea typeface="Inter" pitchFamily="34" charset="-122"/>
-                <a:cs typeface="Inter" pitchFamily="34" charset="-120"/>
+                <a:latin typeface="Calibri" pitchFamily="34" charset="0"/>
+                <a:ea typeface="Microsoft YaHei UI" pitchFamily="34" charset="-122"/>
+                <a:cs typeface="Calibri" pitchFamily="34" charset="-120"/>
               </a:rPr>
               <a:t>PHASE 3 · 18 月+</a:t>
             </a:r>
@@ -37561,9 +37561,9 @@
                 <a:solidFill>
                   <a:srgbClr val="FFFFFF"/>
                 </a:solidFill>
-                <a:latin typeface="Space Grotesk" pitchFamily="34" charset="0"/>
-                <a:ea typeface="Space Grotesk" pitchFamily="34" charset="-122"/>
-                <a:cs typeface="Space Grotesk" pitchFamily="34" charset="-120"/>
+                <a:latin typeface="Calibri" pitchFamily="34" charset="0"/>
+                <a:ea typeface="Microsoft YaHei UI" pitchFamily="34" charset="-122"/>
+                <a:cs typeface="Calibri" pitchFamily="34" charset="-120"/>
               </a:rPr>
               <a:t>API 开放 + MCN 生态</a:t>
             </a:r>
@@ -37605,9 +37605,9 @@
                 <a:solidFill>
                   <a:srgbClr val="8B949E"/>
                 </a:solidFill>
-                <a:latin typeface="Inter" pitchFamily="34" charset="0"/>
-                <a:ea typeface="Inter" pitchFamily="34" charset="-122"/>
-                <a:cs typeface="Inter" pitchFamily="34" charset="-120"/>
+                <a:latin typeface="Calibri" pitchFamily="34" charset="0"/>
+                <a:ea typeface="Microsoft YaHei UI" pitchFamily="34" charset="-122"/>
+                <a:cs typeface="Calibri" pitchFamily="34" charset="-120"/>
               </a:rPr>
               <a:t>开放 API 接入第三方</a:t>
             </a:r>
@@ -37622,9 +37622,9 @@
                 <a:solidFill>
                   <a:srgbClr val="8B949E"/>
                 </a:solidFill>
-                <a:latin typeface="Inter" pitchFamily="34" charset="0"/>
-                <a:ea typeface="Inter" pitchFamily="34" charset="-122"/>
-                <a:cs typeface="Inter" pitchFamily="34" charset="-120"/>
+                <a:latin typeface="Calibri" pitchFamily="34" charset="0"/>
+                <a:ea typeface="Microsoft YaHei UI" pitchFamily="34" charset="-122"/>
+                <a:cs typeface="Calibri" pitchFamily="34" charset="-120"/>
               </a:rPr>
               <a:t>
 </a:t>
@@ -37640,9 +37640,9 @@
                 <a:solidFill>
                   <a:srgbClr val="8B949E"/>
                 </a:solidFill>
-                <a:latin typeface="Inter" pitchFamily="34" charset="0"/>
-                <a:ea typeface="Inter" pitchFamily="34" charset="-122"/>
-                <a:cs typeface="Inter" pitchFamily="34" charset="-120"/>
+                <a:latin typeface="Calibri" pitchFamily="34" charset="0"/>
+                <a:ea typeface="Microsoft YaHei UI" pitchFamily="34" charset="-122"/>
+                <a:cs typeface="Calibri" pitchFamily="34" charset="-120"/>
               </a:rPr>
               <a:t>MCN 批量管理 + 效果分成</a:t>
             </a:r>
@@ -37726,9 +37726,9 @@
                 <a:solidFill>
                   <a:srgbClr val="FFFFFF"/>
                 </a:solidFill>
-                <a:latin typeface="Inter" pitchFamily="34" charset="0"/>
-                <a:ea typeface="Inter" pitchFamily="34" charset="-122"/>
-                <a:cs typeface="Inter" pitchFamily="34" charset="-120"/>
+                <a:latin typeface="Calibri" pitchFamily="34" charset="0"/>
+                <a:ea typeface="Microsoft YaHei UI" pitchFamily="34" charset="-122"/>
+                <a:cs typeface="Calibri" pitchFamily="34" charset="-120"/>
               </a:rPr>
               <a:t>核心逻辑：</a:t>
             </a:r>
@@ -37745,9 +37745,9 @@
                     <a:alpha val="70000"/>
                   </a:srgbClr>
                 </a:solidFill>
-                <a:latin typeface="Inter" pitchFamily="34" charset="0"/>
-                <a:ea typeface="Inter" pitchFamily="34" charset="-122"/>
-                <a:cs typeface="Inter" pitchFamily="34" charset="-120"/>
+                <a:latin typeface="Calibri" pitchFamily="34" charset="0"/>
+                <a:ea typeface="Microsoft YaHei UI" pitchFamily="34" charset="-122"/>
+                <a:cs typeface="Calibri" pitchFamily="34" charset="-120"/>
               </a:rPr>
               <a:t>以 SaaS 订阅为现金流基础，以增值服务提升 ARPU，以 API 开放构建生态护城河。参考 Jasper（ARR $7500 万）和 Hootsuite（ARR $3 亿）的成功路径，避免过早依赖广告或分成模式。</a:t>
             </a:r>
@@ -37838,9 +37838,9 @@
                 <a:solidFill>
                   <a:srgbClr val="00D4FF"/>
                 </a:solidFill>
-                <a:latin typeface="Inter" pitchFamily="34" charset="0"/>
-                <a:ea typeface="Inter" pitchFamily="34" charset="-122"/>
-                <a:cs typeface="Inter" pitchFamily="34" charset="-120"/>
+                <a:latin typeface="Calibri" pitchFamily="34" charset="0"/>
+                <a:ea typeface="Microsoft YaHei UI" pitchFamily="34" charset="-122"/>
+                <a:cs typeface="Calibri" pitchFamily="34" charset="-120"/>
               </a:rPr>
               <a:t>TECHNICAL ARCHITECTURE</a:t>
             </a:r>
@@ -37882,9 +37882,9 @@
                 <a:solidFill>
                   <a:srgbClr val="FFFFFF"/>
                 </a:solidFill>
-                <a:latin typeface="Space Grotesk" pitchFamily="34" charset="0"/>
-                <a:ea typeface="Space Grotesk" pitchFamily="34" charset="-122"/>
-                <a:cs typeface="Space Grotesk" pitchFamily="34" charset="-120"/>
+                <a:latin typeface="Calibri" pitchFamily="34" charset="0"/>
+                <a:ea typeface="Microsoft YaHei UI" pitchFamily="34" charset="-122"/>
+                <a:cs typeface="Calibri" pitchFamily="34" charset="-120"/>
               </a:rPr>
               <a:t>AI 内容全链路四层技术架构</a:t>
             </a:r>
@@ -37926,9 +37926,9 @@
                 <a:solidFill>
                   <a:srgbClr val="00D4FF"/>
                 </a:solidFill>
-                <a:latin typeface="Inter" pitchFamily="34" charset="0"/>
-                <a:ea typeface="Inter" pitchFamily="34" charset="-122"/>
-                <a:cs typeface="Inter" pitchFamily="34" charset="-120"/>
+                <a:latin typeface="Calibri" pitchFamily="34" charset="0"/>
+                <a:ea typeface="Microsoft YaHei UI" pitchFamily="34" charset="-122"/>
+                <a:cs typeface="Calibri" pitchFamily="34" charset="-120"/>
               </a:rPr>
               <a:t>LAYER 01</a:t>
             </a:r>
@@ -37970,9 +37970,9 @@
                 <a:solidFill>
                   <a:srgbClr val="00D4FF"/>
                 </a:solidFill>
-                <a:latin typeface="Space Grotesk" pitchFamily="34" charset="0"/>
-                <a:ea typeface="Space Grotesk" pitchFamily="34" charset="-122"/>
-                <a:cs typeface="Space Grotesk" pitchFamily="34" charset="-120"/>
+                <a:latin typeface="Calibri" pitchFamily="34" charset="0"/>
+                <a:ea typeface="Microsoft YaHei UI" pitchFamily="34" charset="-122"/>
+                <a:cs typeface="Calibri" pitchFamily="34" charset="-120"/>
               </a:rPr>
               <a:t>数据层</a:t>
             </a:r>
@@ -38041,9 +38041,9 @@
                 <a:solidFill>
                   <a:srgbClr val="FFFFFF"/>
                 </a:solidFill>
-                <a:latin typeface="Space Grotesk" pitchFamily="34" charset="0"/>
-                <a:ea typeface="Space Grotesk" pitchFamily="34" charset="-122"/>
-                <a:cs typeface="Space Grotesk" pitchFamily="34" charset="-120"/>
+                <a:latin typeface="Calibri" pitchFamily="34" charset="0"/>
+                <a:ea typeface="Microsoft YaHei UI" pitchFamily="34" charset="-122"/>
+                <a:cs typeface="Calibri" pitchFamily="34" charset="-120"/>
               </a:rPr>
               <a:t>热点数据源</a:t>
             </a:r>
@@ -38085,9 +38085,9 @@
                 <a:solidFill>
                   <a:srgbClr val="8B949E"/>
                 </a:solidFill>
-                <a:latin typeface="Inter" pitchFamily="34" charset="0"/>
-                <a:ea typeface="Inter" pitchFamily="34" charset="-122"/>
-                <a:cs typeface="Inter" pitchFamily="34" charset="-120"/>
+                <a:latin typeface="Calibri" pitchFamily="34" charset="0"/>
+                <a:ea typeface="Microsoft YaHei UI" pitchFamily="34" charset="-122"/>
+                <a:cs typeface="Calibri" pitchFamily="34" charset="-120"/>
               </a:rPr>
               <a:t>微博热搜、百度热搜、知乎热榜、B站热门，公开接口合规采集</a:t>
             </a:r>
@@ -38158,9 +38158,9 @@
                 <a:solidFill>
                   <a:srgbClr val="00D4FF"/>
                 </a:solidFill>
-                <a:latin typeface="Inter" pitchFamily="34" charset="0"/>
-                <a:ea typeface="Inter" pitchFamily="34" charset="-122"/>
-                <a:cs typeface="Inter" pitchFamily="34" charset="-120"/>
+                <a:latin typeface="Calibri" pitchFamily="34" charset="0"/>
+                <a:ea typeface="Microsoft YaHei UI" pitchFamily="34" charset="-122"/>
+                <a:cs typeface="Calibri" pitchFamily="34" charset="-120"/>
               </a:rPr>
               <a:t>合规爬取</a:t>
             </a:r>
@@ -38229,9 +38229,9 @@
                 <a:solidFill>
                   <a:srgbClr val="FFFFFF"/>
                 </a:solidFill>
-                <a:latin typeface="Space Grotesk" pitchFamily="34" charset="0"/>
-                <a:ea typeface="Space Grotesk" pitchFamily="34" charset="-122"/>
-                <a:cs typeface="Space Grotesk" pitchFamily="34" charset="-120"/>
+                <a:latin typeface="Calibri" pitchFamily="34" charset="0"/>
+                <a:ea typeface="Microsoft YaHei UI" pitchFamily="34" charset="-122"/>
+                <a:cs typeface="Calibri" pitchFamily="34" charset="-120"/>
               </a:rPr>
               <a:t>用户历史数据</a:t>
             </a:r>
@@ -38273,9 +38273,9 @@
                 <a:solidFill>
                   <a:srgbClr val="8B949E"/>
                 </a:solidFill>
-                <a:latin typeface="Inter" pitchFamily="34" charset="0"/>
-                <a:ea typeface="Inter" pitchFamily="34" charset="-122"/>
-                <a:cs typeface="Inter" pitchFamily="34" charset="-120"/>
+                <a:latin typeface="Calibri" pitchFamily="34" charset="0"/>
+                <a:ea typeface="Microsoft YaHei UI" pitchFamily="34" charset="-122"/>
+                <a:cs typeface="Calibri" pitchFamily="34" charset="-120"/>
               </a:rPr>
               <a:t>发布记录、互动数据（点赞/评论/收藏）、内容表现时序数据</a:t>
             </a:r>
@@ -38346,9 +38346,9 @@
                 <a:solidFill>
                   <a:srgbClr val="00D4FF"/>
                 </a:solidFill>
-                <a:latin typeface="Inter" pitchFamily="34" charset="0"/>
-                <a:ea typeface="Inter" pitchFamily="34" charset="-122"/>
-                <a:cs typeface="Inter" pitchFamily="34" charset="-120"/>
+                <a:latin typeface="Calibri" pitchFamily="34" charset="0"/>
+                <a:ea typeface="Microsoft YaHei UI" pitchFamily="34" charset="-122"/>
+                <a:cs typeface="Calibri" pitchFamily="34" charset="-120"/>
               </a:rPr>
               <a:t>MySQL / TiDB</a:t>
             </a:r>
@@ -38417,9 +38417,9 @@
                 <a:solidFill>
                   <a:srgbClr val="FFFFFF"/>
                 </a:solidFill>
-                <a:latin typeface="Space Grotesk" pitchFamily="34" charset="0"/>
-                <a:ea typeface="Space Grotesk" pitchFamily="34" charset="-122"/>
-                <a:cs typeface="Space Grotesk" pitchFamily="34" charset="-120"/>
+                <a:latin typeface="Calibri" pitchFamily="34" charset="0"/>
+                <a:ea typeface="Microsoft YaHei UI" pitchFamily="34" charset="-122"/>
+                <a:cs typeface="Calibri" pitchFamily="34" charset="-120"/>
               </a:rPr>
               <a:t>平台内容数据</a:t>
             </a:r>
@@ -38461,9 +38461,9 @@
                 <a:solidFill>
                   <a:srgbClr val="8B949E"/>
                 </a:solidFill>
-                <a:latin typeface="Inter" pitchFamily="34" charset="0"/>
-                <a:ea typeface="Inter" pitchFamily="34" charset="-122"/>
-                <a:cs typeface="Inter" pitchFamily="34" charset="-120"/>
+                <a:latin typeface="Calibri" pitchFamily="34" charset="0"/>
+                <a:ea typeface="Microsoft YaHei UI" pitchFamily="34" charset="-122"/>
+                <a:cs typeface="Calibri" pitchFamily="34" charset="-120"/>
               </a:rPr>
               <a:t>多平台账号绑定、内容日历、发布状态追踪、效果回流</a:t>
             </a:r>
@@ -38534,9 +38534,9 @@
                 <a:solidFill>
                   <a:srgbClr val="00D4FF"/>
                 </a:solidFill>
-                <a:latin typeface="Inter" pitchFamily="34" charset="0"/>
-                <a:ea typeface="Inter" pitchFamily="34" charset="-122"/>
-                <a:cs typeface="Inter" pitchFamily="34" charset="-120"/>
+                <a:latin typeface="Calibri" pitchFamily="34" charset="0"/>
+                <a:ea typeface="Microsoft YaHei UI" pitchFamily="34" charset="-122"/>
+                <a:cs typeface="Calibri" pitchFamily="34" charset="-120"/>
               </a:rPr>
               <a:t>S3 存储</a:t>
             </a:r>
@@ -38605,9 +38605,9 @@
                 <a:solidFill>
                   <a:srgbClr val="FFFFFF"/>
                 </a:solidFill>
-                <a:latin typeface="Space Grotesk" pitchFamily="34" charset="0"/>
-                <a:ea typeface="Space Grotesk" pitchFamily="34" charset="-122"/>
-                <a:cs typeface="Space Grotesk" pitchFamily="34" charset="-120"/>
+                <a:latin typeface="Calibri" pitchFamily="34" charset="0"/>
+                <a:ea typeface="Microsoft YaHei UI" pitchFamily="34" charset="-122"/>
+                <a:cs typeface="Calibri" pitchFamily="34" charset="-120"/>
               </a:rPr>
               <a:t>向量知识库</a:t>
             </a:r>
@@ -38649,9 +38649,9 @@
                 <a:solidFill>
                   <a:srgbClr val="8B949E"/>
                 </a:solidFill>
-                <a:latin typeface="Inter" pitchFamily="34" charset="0"/>
-                <a:ea typeface="Inter" pitchFamily="34" charset="-122"/>
-                <a:cs typeface="Inter" pitchFamily="34" charset="-120"/>
+                <a:latin typeface="Calibri" pitchFamily="34" charset="0"/>
+                <a:ea typeface="Microsoft YaHei UI" pitchFamily="34" charset="-122"/>
+                <a:cs typeface="Calibri" pitchFamily="34" charset="-120"/>
               </a:rPr>
               <a:t>高分案例 RAG 增强，病毒性内容特征向量化存储（Phase 2）</a:t>
             </a:r>
@@ -38722,9 +38722,9 @@
                 <a:solidFill>
                   <a:srgbClr val="00D4FF"/>
                 </a:solidFill>
-                <a:latin typeface="Inter" pitchFamily="34" charset="0"/>
-                <a:ea typeface="Inter" pitchFamily="34" charset="-122"/>
-                <a:cs typeface="Inter" pitchFamily="34" charset="-120"/>
+                <a:latin typeface="Calibri" pitchFamily="34" charset="0"/>
+                <a:ea typeface="Microsoft YaHei UI" pitchFamily="34" charset="-122"/>
+                <a:cs typeface="Calibri" pitchFamily="34" charset="-120"/>
               </a:rPr>
               <a:t>Phase 2</a:t>
             </a:r>
@@ -38768,9 +38768,9 @@
                     <a:alpha val="20000"/>
                   </a:srgbClr>
                 </a:solidFill>
-                <a:latin typeface="Inter" pitchFamily="34" charset="0"/>
-                <a:ea typeface="Inter" pitchFamily="34" charset="-122"/>
-                <a:cs typeface="Inter" pitchFamily="34" charset="-120"/>
+                <a:latin typeface="Calibri" pitchFamily="34" charset="0"/>
+                <a:ea typeface="Microsoft YaHei UI" pitchFamily="34" charset="-122"/>
+                <a:cs typeface="Calibri" pitchFamily="34" charset="-120"/>
               </a:rPr>
               <a:t>↓ 数据输入</a:t>
             </a:r>
@@ -38814,9 +38814,9 @@
                     <a:alpha val="20000"/>
                   </a:srgbClr>
                 </a:solidFill>
-                <a:latin typeface="Inter" pitchFamily="34" charset="0"/>
-                <a:ea typeface="Inter" pitchFamily="34" charset="-122"/>
-                <a:cs typeface="Inter" pitchFamily="34" charset="-120"/>
+                <a:latin typeface="Calibri" pitchFamily="34" charset="0"/>
+                <a:ea typeface="Microsoft YaHei UI" pitchFamily="34" charset="-122"/>
+                <a:cs typeface="Calibri" pitchFamily="34" charset="-120"/>
               </a:rPr>
               <a:t>↓ 上下文注入</a:t>
             </a:r>
@@ -38860,9 +38860,9 @@
                     <a:alpha val="20000"/>
                   </a:srgbClr>
                 </a:solidFill>
-                <a:latin typeface="Inter" pitchFamily="34" charset="0"/>
-                <a:ea typeface="Inter" pitchFamily="34" charset="-122"/>
-                <a:cs typeface="Inter" pitchFamily="34" charset="-120"/>
+                <a:latin typeface="Calibri" pitchFamily="34" charset="0"/>
+                <a:ea typeface="Microsoft YaHei UI" pitchFamily="34" charset="-122"/>
+                <a:cs typeface="Calibri" pitchFamily="34" charset="-120"/>
               </a:rPr>
               <a:t>↓ 历史参考</a:t>
             </a:r>
@@ -38906,9 +38906,9 @@
                     <a:alpha val="20000"/>
                   </a:srgbClr>
                 </a:solidFill>
-                <a:latin typeface="Inter" pitchFamily="34" charset="0"/>
-                <a:ea typeface="Inter" pitchFamily="34" charset="-122"/>
-                <a:cs typeface="Inter" pitchFamily="34" charset="-120"/>
+                <a:latin typeface="Calibri" pitchFamily="34" charset="0"/>
+                <a:ea typeface="Microsoft YaHei UI" pitchFamily="34" charset="-122"/>
+                <a:cs typeface="Calibri" pitchFamily="34" charset="-120"/>
               </a:rPr>
               <a:t>↓ RAG 检索</a:t>
             </a:r>
@@ -38950,9 +38950,9 @@
                 <a:solidFill>
                   <a:srgbClr val="A78BFA"/>
                 </a:solidFill>
-                <a:latin typeface="Inter" pitchFamily="34" charset="0"/>
-                <a:ea typeface="Inter" pitchFamily="34" charset="-122"/>
-                <a:cs typeface="Inter" pitchFamily="34" charset="-120"/>
+                <a:latin typeface="Calibri" pitchFamily="34" charset="0"/>
+                <a:ea typeface="Microsoft YaHei UI" pitchFamily="34" charset="-122"/>
+                <a:cs typeface="Calibri" pitchFamily="34" charset="-120"/>
               </a:rPr>
               <a:t>LAYER 02</a:t>
             </a:r>
@@ -38994,9 +38994,9 @@
                 <a:solidFill>
                   <a:srgbClr val="A78BFA"/>
                 </a:solidFill>
-                <a:latin typeface="Space Grotesk" pitchFamily="34" charset="0"/>
-                <a:ea typeface="Space Grotesk" pitchFamily="34" charset="-122"/>
-                <a:cs typeface="Space Grotesk" pitchFamily="34" charset="-120"/>
+                <a:latin typeface="Calibri" pitchFamily="34" charset="0"/>
+                <a:ea typeface="Microsoft YaHei UI" pitchFamily="34" charset="-122"/>
+                <a:cs typeface="Calibri" pitchFamily="34" charset="-120"/>
               </a:rPr>
               <a:t>AI 引擎层</a:t>
             </a:r>
@@ -39065,9 +39065,9 @@
                 <a:solidFill>
                   <a:srgbClr val="FFFFFF"/>
                 </a:solidFill>
-                <a:latin typeface="Space Grotesk" pitchFamily="34" charset="0"/>
-                <a:ea typeface="Space Grotesk" pitchFamily="34" charset="-122"/>
-                <a:cs typeface="Space Grotesk" pitchFamily="34" charset="-120"/>
+                <a:latin typeface="Calibri" pitchFamily="34" charset="0"/>
+                <a:ea typeface="Microsoft YaHei UI" pitchFamily="34" charset="-122"/>
+                <a:cs typeface="Calibri" pitchFamily="34" charset="-120"/>
               </a:rPr>
               <a:t>LLM 文案引擎</a:t>
             </a:r>
@@ -39109,9 +39109,9 @@
                 <a:solidFill>
                   <a:srgbClr val="8B949E"/>
                 </a:solidFill>
-                <a:latin typeface="Inter" pitchFamily="34" charset="0"/>
-                <a:ea typeface="Inter" pitchFamily="34" charset="-122"/>
-                <a:cs typeface="Inter" pitchFamily="34" charset="-120"/>
+                <a:latin typeface="Calibri" pitchFamily="34" charset="0"/>
+                <a:ea typeface="Microsoft YaHei UI" pitchFamily="34" charset="-122"/>
+                <a:cs typeface="Calibri" pitchFamily="34" charset="-120"/>
               </a:rPr>
               <a:t>Manus 内置 LLM（GPT-4o 级），多平台文案风格适配，结构化输出</a:t>
             </a:r>
@@ -39182,9 +39182,9 @@
                 <a:solidFill>
                   <a:srgbClr val="A78BFA"/>
                 </a:solidFill>
-                <a:latin typeface="Inter" pitchFamily="34" charset="0"/>
-                <a:ea typeface="Inter" pitchFamily="34" charset="-122"/>
-                <a:cs typeface="Inter" pitchFamily="34" charset="-120"/>
+                <a:latin typeface="Calibri" pitchFamily="34" charset="0"/>
+                <a:ea typeface="Microsoft YaHei UI" pitchFamily="34" charset="-122"/>
+                <a:cs typeface="Calibri" pitchFamily="34" charset="-120"/>
               </a:rPr>
               <a:t>invokeLLM</a:t>
             </a:r>
@@ -39253,9 +39253,9 @@
                 <a:solidFill>
                   <a:srgbClr val="FFFFFF"/>
                 </a:solidFill>
-                <a:latin typeface="Space Grotesk" pitchFamily="34" charset="0"/>
-                <a:ea typeface="Space Grotesk" pitchFamily="34" charset="-122"/>
-                <a:cs typeface="Space Grotesk" pitchFamily="34" charset="-120"/>
+                <a:latin typeface="Calibri" pitchFamily="34" charset="0"/>
+                <a:ea typeface="Microsoft YaHei UI" pitchFamily="34" charset="-122"/>
+                <a:cs typeface="Calibri" pitchFamily="34" charset="-120"/>
               </a:rPr>
               <a:t>AI 视频引擎</a:t>
             </a:r>
@@ -39297,9 +39297,9 @@
                 <a:solidFill>
                   <a:srgbClr val="8B949E"/>
                 </a:solidFill>
-                <a:latin typeface="Inter" pitchFamily="34" charset="0"/>
-                <a:ea typeface="Inter" pitchFamily="34" charset="-122"/>
-                <a:cs typeface="Inter" pitchFamily="34" charset="-120"/>
+                <a:latin typeface="Calibri" pitchFamily="34" charset="0"/>
+                <a:ea typeface="Microsoft YaHei UI" pitchFamily="34" charset="-122"/>
+                <a:cs typeface="Calibri" pitchFamily="34" charset="-120"/>
               </a:rPr>
               <a:t>火山引擎 doubao-seedance-1-0-pro / 1-5-pro，文生视频 + 图生视频（i2v）</a:t>
             </a:r>
@@ -39370,9 +39370,9 @@
                 <a:solidFill>
                   <a:srgbClr val="C4B5FD"/>
                 </a:solidFill>
-                <a:latin typeface="Inter" pitchFamily="34" charset="0"/>
-                <a:ea typeface="Inter" pitchFamily="34" charset="-122"/>
-                <a:cs typeface="Inter" pitchFamily="34" charset="-120"/>
+                <a:latin typeface="Calibri" pitchFamily="34" charset="0"/>
+                <a:ea typeface="Microsoft YaHei UI" pitchFamily="34" charset="-122"/>
+                <a:cs typeface="Calibri" pitchFamily="34" charset="-120"/>
               </a:rPr>
               <a:t>已更新 · 国内版</a:t>
             </a:r>
@@ -39441,9 +39441,9 @@
                 <a:solidFill>
                   <a:srgbClr val="FFFFFF"/>
                 </a:solidFill>
-                <a:latin typeface="Space Grotesk" pitchFamily="34" charset="0"/>
-                <a:ea typeface="Space Grotesk" pitchFamily="34" charset="-122"/>
-                <a:cs typeface="Space Grotesk" pitchFamily="34" charset="-120"/>
+                <a:latin typeface="Calibri" pitchFamily="34" charset="0"/>
+                <a:ea typeface="Microsoft YaHei UI" pitchFamily="34" charset="-122"/>
+                <a:cs typeface="Calibri" pitchFamily="34" charset="-120"/>
               </a:rPr>
               <a:t>AI 配图引擎</a:t>
             </a:r>
@@ -39485,9 +39485,9 @@
                 <a:solidFill>
                   <a:srgbClr val="8B949E"/>
                 </a:solidFill>
-                <a:latin typeface="Inter" pitchFamily="34" charset="0"/>
-                <a:ea typeface="Inter" pitchFamily="34" charset="-122"/>
-                <a:cs typeface="Inter" pitchFamily="34" charset="-120"/>
+                <a:latin typeface="Calibri" pitchFamily="34" charset="0"/>
+                <a:ea typeface="Microsoft YaHei UI" pitchFamily="34" charset="-122"/>
+                <a:cs typeface="Calibri" pitchFamily="34" charset="-120"/>
               </a:rPr>
               <a:t>Manus 内置图像生成，多风格配图，与文案内容语义对齐</a:t>
             </a:r>
@@ -39558,9 +39558,9 @@
                 <a:solidFill>
                   <a:srgbClr val="A78BFA"/>
                 </a:solidFill>
-                <a:latin typeface="Inter" pitchFamily="34" charset="0"/>
-                <a:ea typeface="Inter" pitchFamily="34" charset="-122"/>
-                <a:cs typeface="Inter" pitchFamily="34" charset="-120"/>
+                <a:latin typeface="Calibri" pitchFamily="34" charset="0"/>
+                <a:ea typeface="Microsoft YaHei UI" pitchFamily="34" charset="-122"/>
+                <a:cs typeface="Calibri" pitchFamily="34" charset="-120"/>
               </a:rPr>
               <a:t>generateImage</a:t>
             </a:r>
@@ -39629,9 +39629,9 @@
                 <a:solidFill>
                   <a:srgbClr val="FFFFFF"/>
                 </a:solidFill>
-                <a:latin typeface="Space Grotesk" pitchFamily="34" charset="0"/>
-                <a:ea typeface="Space Grotesk" pitchFamily="34" charset="-122"/>
-                <a:cs typeface="Space Grotesk" pitchFamily="34" charset="-120"/>
+                <a:latin typeface="Calibri" pitchFamily="34" charset="0"/>
+                <a:ea typeface="Microsoft YaHei UI" pitchFamily="34" charset="-122"/>
+                <a:cs typeface="Calibri" pitchFamily="34" charset="-120"/>
               </a:rPr>
               <a:t>Agent 编排引擎</a:t>
             </a:r>
@@ -39673,9 +39673,9 @@
                 <a:solidFill>
                   <a:srgbClr val="8B949E"/>
                 </a:solidFill>
-                <a:latin typeface="Inter" pitchFamily="34" charset="0"/>
-                <a:ea typeface="Inter" pitchFamily="34" charset="-122"/>
-                <a:cs typeface="Inter" pitchFamily="34" charset="-120"/>
+                <a:latin typeface="Calibri" pitchFamily="34" charset="0"/>
+                <a:ea typeface="Microsoft YaHei UI" pitchFamily="34" charset="-122"/>
+                <a:cs typeface="Calibri" pitchFamily="34" charset="-120"/>
               </a:rPr>
               <a:t>多步骤 LLM 链式调用，热点→文案→配图→视频全自动流水线</a:t>
             </a:r>
@@ -39746,9 +39746,9 @@
                 <a:solidFill>
                   <a:srgbClr val="A78BFA"/>
                 </a:solidFill>
-                <a:latin typeface="Inter" pitchFamily="34" charset="0"/>
-                <a:ea typeface="Inter" pitchFamily="34" charset="-122"/>
-                <a:cs typeface="Inter" pitchFamily="34" charset="-120"/>
+                <a:latin typeface="Calibri" pitchFamily="34" charset="0"/>
+                <a:ea typeface="Microsoft YaHei UI" pitchFamily="34" charset="-122"/>
+                <a:cs typeface="Calibri" pitchFamily="34" charset="-120"/>
               </a:rPr>
               <a:t>tRPC Procedures</a:t>
             </a:r>
@@ -39792,9 +39792,9 @@
                     <a:alpha val="20000"/>
                   </a:srgbClr>
                 </a:solidFill>
-                <a:latin typeface="Inter" pitchFamily="34" charset="0"/>
-                <a:ea typeface="Inter" pitchFamily="34" charset="-122"/>
-                <a:cs typeface="Inter" pitchFamily="34" charset="-120"/>
+                <a:latin typeface="Calibri" pitchFamily="34" charset="0"/>
+                <a:ea typeface="Microsoft YaHei UI" pitchFamily="34" charset="-122"/>
+                <a:cs typeface="Calibri" pitchFamily="34" charset="-120"/>
               </a:rPr>
               <a:t>↓ 生成结果</a:t>
             </a:r>
@@ -39838,9 +39838,9 @@
                     <a:alpha val="20000"/>
                   </a:srgbClr>
                 </a:solidFill>
-                <a:latin typeface="Inter" pitchFamily="34" charset="0"/>
-                <a:ea typeface="Inter" pitchFamily="34" charset="-122"/>
-                <a:cs typeface="Inter" pitchFamily="34" charset="-120"/>
+                <a:latin typeface="Calibri" pitchFamily="34" charset="0"/>
+                <a:ea typeface="Microsoft YaHei UI" pitchFamily="34" charset="-122"/>
+                <a:cs typeface="Calibri" pitchFamily="34" charset="-120"/>
               </a:rPr>
               <a:t>↓ 内容对象</a:t>
             </a:r>
@@ -39884,9 +39884,9 @@
                     <a:alpha val="20000"/>
                   </a:srgbClr>
                 </a:solidFill>
-                <a:latin typeface="Inter" pitchFamily="34" charset="0"/>
-                <a:ea typeface="Inter" pitchFamily="34" charset="-122"/>
-                <a:cs typeface="Inter" pitchFamily="34" charset="-120"/>
+                <a:latin typeface="Calibri" pitchFamily="34" charset="0"/>
+                <a:ea typeface="Microsoft YaHei UI" pitchFamily="34" charset="-122"/>
+                <a:cs typeface="Calibri" pitchFamily="34" charset="-120"/>
               </a:rPr>
               <a:t>↓ 媒体资产</a:t>
             </a:r>
@@ -39930,9 +39930,9 @@
                     <a:alpha val="20000"/>
                   </a:srgbClr>
                 </a:solidFill>
-                <a:latin typeface="Inter" pitchFamily="34" charset="0"/>
-                <a:ea typeface="Inter" pitchFamily="34" charset="-122"/>
-                <a:cs typeface="Inter" pitchFamily="34" charset="-120"/>
+                <a:latin typeface="Calibri" pitchFamily="34" charset="0"/>
+                <a:ea typeface="Microsoft YaHei UI" pitchFamily="34" charset="-122"/>
+                <a:cs typeface="Calibri" pitchFamily="34" charset="-120"/>
               </a:rPr>
               <a:t>↓ 任务状态</a:t>
             </a:r>
@@ -39974,9 +39974,9 @@
                 <a:solidFill>
                   <a:srgbClr val="06B6D4"/>
                 </a:solidFill>
-                <a:latin typeface="Inter" pitchFamily="34" charset="0"/>
-                <a:ea typeface="Inter" pitchFamily="34" charset="-122"/>
-                <a:cs typeface="Inter" pitchFamily="34" charset="-120"/>
+                <a:latin typeface="Calibri" pitchFamily="34" charset="0"/>
+                <a:ea typeface="Microsoft YaHei UI" pitchFamily="34" charset="-122"/>
+                <a:cs typeface="Calibri" pitchFamily="34" charset="-120"/>
               </a:rPr>
               <a:t>LAYER 03</a:t>
             </a:r>
@@ -40018,9 +40018,9 @@
                 <a:solidFill>
                   <a:srgbClr val="06B6D4"/>
                 </a:solidFill>
-                <a:latin typeface="Space Grotesk" pitchFamily="34" charset="0"/>
-                <a:ea typeface="Space Grotesk" pitchFamily="34" charset="-122"/>
-                <a:cs typeface="Space Grotesk" pitchFamily="34" charset="-120"/>
+                <a:latin typeface="Calibri" pitchFamily="34" charset="0"/>
+                <a:ea typeface="Microsoft YaHei UI" pitchFamily="34" charset="-122"/>
+                <a:cs typeface="Calibri" pitchFamily="34" charset="-120"/>
               </a:rPr>
               <a:t>业务逻辑层</a:t>
             </a:r>
@@ -40089,9 +40089,9 @@
                 <a:solidFill>
                   <a:srgbClr val="FFFFFF"/>
                 </a:solidFill>
-                <a:latin typeface="Space Grotesk" pitchFamily="34" charset="0"/>
-                <a:ea typeface="Space Grotesk" pitchFamily="34" charset="-122"/>
-                <a:cs typeface="Space Grotesk" pitchFamily="34" charset="-120"/>
+                <a:latin typeface="Calibri" pitchFamily="34" charset="0"/>
+                <a:ea typeface="Microsoft YaHei UI" pitchFamily="34" charset="-122"/>
+                <a:cs typeface="Calibri" pitchFamily="34" charset="-120"/>
               </a:rPr>
               <a:t>内容策略引擎</a:t>
             </a:r>
@@ -40133,9 +40133,9 @@
                 <a:solidFill>
                   <a:srgbClr val="8B949E"/>
                 </a:solidFill>
-                <a:latin typeface="Inter" pitchFamily="34" charset="0"/>
-                <a:ea typeface="Inter" pitchFamily="34" charset="-122"/>
-                <a:cs typeface="Inter" pitchFamily="34" charset="-120"/>
+                <a:latin typeface="Calibri" pitchFamily="34" charset="0"/>
+                <a:ea typeface="Microsoft YaHei UI" pitchFamily="34" charset="-122"/>
+                <a:cs typeface="Calibri" pitchFamily="34" charset="-120"/>
               </a:rPr>
               <a:t>热点匹配、平台格式适配（9:16/16:9/1:1）、最优发布时间推荐</a:t>
             </a:r>
@@ -40206,9 +40206,9 @@
                 <a:solidFill>
                   <a:srgbClr val="06B6D4"/>
                 </a:solidFill>
-                <a:latin typeface="Inter" pitchFamily="34" charset="0"/>
-                <a:ea typeface="Inter" pitchFamily="34" charset="-122"/>
-                <a:cs typeface="Inter" pitchFamily="34" charset="-120"/>
+                <a:latin typeface="Calibri" pitchFamily="34" charset="0"/>
+                <a:ea typeface="Microsoft YaHei UI" pitchFamily="34" charset="-122"/>
+                <a:cs typeface="Calibri" pitchFamily="34" charset="-120"/>
               </a:rPr>
               <a:t>server/routers.ts</a:t>
             </a:r>
@@ -40277,9 +40277,9 @@
                 <a:solidFill>
                   <a:srgbClr val="FFFFFF"/>
                 </a:solidFill>
-                <a:latin typeface="Space Grotesk" pitchFamily="34" charset="0"/>
-                <a:ea typeface="Space Grotesk" pitchFamily="34" charset="-122"/>
-                <a:cs typeface="Space Grotesk" pitchFamily="34" charset="-120"/>
+                <a:latin typeface="Calibri" pitchFamily="34" charset="0"/>
+                <a:ea typeface="Microsoft YaHei UI" pitchFamily="34" charset="-122"/>
+                <a:cs typeface="Calibri" pitchFamily="34" charset="-120"/>
               </a:rPr>
               <a:t>发布调度系统</a:t>
             </a:r>
@@ -40321,9 +40321,9 @@
                 <a:solidFill>
                   <a:srgbClr val="8B949E"/>
                 </a:solidFill>
-                <a:latin typeface="Inter" pitchFamily="34" charset="0"/>
-                <a:ea typeface="Inter" pitchFamily="34" charset="-122"/>
-                <a:cs typeface="Inter" pitchFamily="34" charset="-120"/>
+                <a:latin typeface="Calibri" pitchFamily="34" charset="0"/>
+                <a:ea typeface="Microsoft YaHei UI" pitchFamily="34" charset="-122"/>
+                <a:cs typeface="Calibri" pitchFamily="34" charset="-120"/>
               </a:rPr>
               <a:t>内容日历管理、一键分发、剪贴板快捷、发布状态追踪</a:t>
             </a:r>
@@ -40394,9 +40394,9 @@
                 <a:solidFill>
                   <a:srgbClr val="06B6D4"/>
                 </a:solidFill>
-                <a:latin typeface="Inter" pitchFamily="34" charset="0"/>
-                <a:ea typeface="Inter" pitchFamily="34" charset="-122"/>
-                <a:cs typeface="Inter" pitchFamily="34" charset="-120"/>
+                <a:latin typeface="Calibri" pitchFamily="34" charset="0"/>
+                <a:ea typeface="Microsoft YaHei UI" pitchFamily="34" charset="-122"/>
+                <a:cs typeface="Calibri" pitchFamily="34" charset="-120"/>
               </a:rPr>
               <a:t>distributionRouter</a:t>
             </a:r>
@@ -40465,9 +40465,9 @@
                 <a:solidFill>
                   <a:srgbClr val="FFFFFF"/>
                 </a:solidFill>
-                <a:latin typeface="Space Grotesk" pitchFamily="34" charset="0"/>
-                <a:ea typeface="Space Grotesk" pitchFamily="34" charset="-122"/>
-                <a:cs typeface="Space Grotesk" pitchFamily="34" charset="-120"/>
+                <a:latin typeface="Calibri" pitchFamily="34" charset="0"/>
+                <a:ea typeface="Microsoft YaHei UI" pitchFamily="34" charset="-122"/>
+                <a:cs typeface="Calibri" pitchFamily="34" charset="-120"/>
               </a:rPr>
               <a:t>数据分析引擎</a:t>
             </a:r>
@@ -40509,9 +40509,9 @@
                 <a:solidFill>
                   <a:srgbClr val="8B949E"/>
                 </a:solidFill>
-                <a:latin typeface="Inter" pitchFamily="34" charset="0"/>
-                <a:ea typeface="Inter" pitchFamily="34" charset="-122"/>
-                <a:cs typeface="Inter" pitchFamily="34" charset="-120"/>
+                <a:latin typeface="Calibri" pitchFamily="34" charset="0"/>
+                <a:ea typeface="Microsoft YaHei UI" pitchFamily="34" charset="-122"/>
+                <a:cs typeface="Calibri" pitchFamily="34" charset="-120"/>
               </a:rPr>
               <a:t>互动率计算、内容表现对比、平台效果排行、趋势预测</a:t>
             </a:r>
@@ -40582,9 +40582,9 @@
                 <a:solidFill>
                   <a:srgbClr val="06B6D4"/>
                 </a:solidFill>
-                <a:latin typeface="Inter" pitchFamily="34" charset="0"/>
-                <a:ea typeface="Inter" pitchFamily="34" charset="-122"/>
-                <a:cs typeface="Inter" pitchFamily="34" charset="-120"/>
+                <a:latin typeface="Calibri" pitchFamily="34" charset="0"/>
+                <a:ea typeface="Microsoft YaHei UI" pitchFamily="34" charset="-122"/>
+                <a:cs typeface="Calibri" pitchFamily="34" charset="-120"/>
               </a:rPr>
               <a:t>analyticsRouter</a:t>
             </a:r>
@@ -40653,9 +40653,9 @@
                 <a:solidFill>
                   <a:srgbClr val="FFFFFF"/>
                 </a:solidFill>
-                <a:latin typeface="Space Grotesk" pitchFamily="34" charset="0"/>
-                <a:ea typeface="Space Grotesk" pitchFamily="34" charset="-122"/>
-                <a:cs typeface="Space Grotesk" pitchFamily="34" charset="-120"/>
+                <a:latin typeface="Calibri" pitchFamily="34" charset="0"/>
+                <a:ea typeface="Microsoft YaHei UI" pitchFamily="34" charset="-122"/>
+                <a:cs typeface="Calibri" pitchFamily="34" charset="-120"/>
               </a:rPr>
               <a:t>用户权限系统</a:t>
             </a:r>
@@ -40697,9 +40697,9 @@
                 <a:solidFill>
                   <a:srgbClr val="8B949E"/>
                 </a:solidFill>
-                <a:latin typeface="Inter" pitchFamily="34" charset="0"/>
-                <a:ea typeface="Inter" pitchFamily="34" charset="-122"/>
-                <a:cs typeface="Inter" pitchFamily="34" charset="-120"/>
+                <a:latin typeface="Calibri" pitchFamily="34" charset="0"/>
+                <a:ea typeface="Microsoft YaHei UI" pitchFamily="34" charset="-122"/>
+                <a:cs typeface="Calibri" pitchFamily="34" charset="-120"/>
               </a:rPr>
               <a:t>Manus OAuth 认证、角色权限（admin/user）、API 配额管理</a:t>
             </a:r>
@@ -40770,9 +40770,9 @@
                 <a:solidFill>
                   <a:srgbClr val="06B6D4"/>
                 </a:solidFill>
-                <a:latin typeface="Inter" pitchFamily="34" charset="0"/>
-                <a:ea typeface="Inter" pitchFamily="34" charset="-122"/>
-                <a:cs typeface="Inter" pitchFamily="34" charset="-120"/>
+                <a:latin typeface="Calibri" pitchFamily="34" charset="0"/>
+                <a:ea typeface="Microsoft YaHei UI" pitchFamily="34" charset="-122"/>
+                <a:cs typeface="Calibri" pitchFamily="34" charset="-120"/>
               </a:rPr>
               <a:t>protectedProcedure</a:t>
             </a:r>
@@ -40816,9 +40816,9 @@
                     <a:alpha val="20000"/>
                   </a:srgbClr>
                 </a:solidFill>
-                <a:latin typeface="Inter" pitchFamily="34" charset="0"/>
-                <a:ea typeface="Inter" pitchFamily="34" charset="-122"/>
-                <a:cs typeface="Inter" pitchFamily="34" charset="-120"/>
+                <a:latin typeface="Calibri" pitchFamily="34" charset="0"/>
+                <a:ea typeface="Microsoft YaHei UI" pitchFamily="34" charset="-122"/>
+                <a:cs typeface="Calibri" pitchFamily="34" charset="-120"/>
               </a:rPr>
               <a:t>↓ UI 数据</a:t>
             </a:r>
@@ -40862,9 +40862,9 @@
                     <a:alpha val="20000"/>
                   </a:srgbClr>
                 </a:solidFill>
-                <a:latin typeface="Inter" pitchFamily="34" charset="0"/>
-                <a:ea typeface="Inter" pitchFamily="34" charset="-122"/>
-                <a:cs typeface="Inter" pitchFamily="34" charset="-120"/>
+                <a:latin typeface="Calibri" pitchFamily="34" charset="0"/>
+                <a:ea typeface="Microsoft YaHei UI" pitchFamily="34" charset="-122"/>
+                <a:cs typeface="Calibri" pitchFamily="34" charset="-120"/>
               </a:rPr>
               <a:t>↓ 操作响应</a:t>
             </a:r>
@@ -40908,9 +40908,9 @@
                     <a:alpha val="20000"/>
                   </a:srgbClr>
                 </a:solidFill>
-                <a:latin typeface="Inter" pitchFamily="34" charset="0"/>
-                <a:ea typeface="Inter" pitchFamily="34" charset="-122"/>
-                <a:cs typeface="Inter" pitchFamily="34" charset="-120"/>
+                <a:latin typeface="Calibri" pitchFamily="34" charset="0"/>
+                <a:ea typeface="Microsoft YaHei UI" pitchFamily="34" charset="-122"/>
+                <a:cs typeface="Calibri" pitchFamily="34" charset="-120"/>
               </a:rPr>
               <a:t>↓ 状态更新</a:t>
             </a:r>
@@ -40954,9 +40954,9 @@
                     <a:alpha val="20000"/>
                   </a:srgbClr>
                 </a:solidFill>
-                <a:latin typeface="Inter" pitchFamily="34" charset="0"/>
-                <a:ea typeface="Inter" pitchFamily="34" charset="-122"/>
-                <a:cs typeface="Inter" pitchFamily="34" charset="-120"/>
+                <a:latin typeface="Calibri" pitchFamily="34" charset="0"/>
+                <a:ea typeface="Microsoft YaHei UI" pitchFamily="34" charset="-122"/>
+                <a:cs typeface="Calibri" pitchFamily="34" charset="-120"/>
               </a:rPr>
               <a:t>↓ 权限校验</a:t>
             </a:r>
@@ -40998,9 +40998,9 @@
                 <a:solidFill>
                   <a:srgbClr val="22C55E"/>
                 </a:solidFill>
-                <a:latin typeface="Inter" pitchFamily="34" charset="0"/>
-                <a:ea typeface="Inter" pitchFamily="34" charset="-122"/>
-                <a:cs typeface="Inter" pitchFamily="34" charset="-120"/>
+                <a:latin typeface="Calibri" pitchFamily="34" charset="0"/>
+                <a:ea typeface="Microsoft YaHei UI" pitchFamily="34" charset="-122"/>
+                <a:cs typeface="Calibri" pitchFamily="34" charset="-120"/>
               </a:rPr>
               <a:t>LAYER 04</a:t>
             </a:r>
@@ -41042,9 +41042,9 @@
                 <a:solidFill>
                   <a:srgbClr val="22C55E"/>
                 </a:solidFill>
-                <a:latin typeface="Space Grotesk" pitchFamily="34" charset="0"/>
-                <a:ea typeface="Space Grotesk" pitchFamily="34" charset="-122"/>
-                <a:cs typeface="Space Grotesk" pitchFamily="34" charset="-120"/>
+                <a:latin typeface="Calibri" pitchFamily="34" charset="0"/>
+                <a:ea typeface="Microsoft YaHei UI" pitchFamily="34" charset="-122"/>
+                <a:cs typeface="Calibri" pitchFamily="34" charset="-120"/>
               </a:rPr>
               <a:t>用户界面层</a:t>
             </a:r>
@@ -41113,9 +41113,9 @@
                 <a:solidFill>
                   <a:srgbClr val="FFFFFF"/>
                 </a:solidFill>
-                <a:latin typeface="Space Grotesk" pitchFamily="34" charset="0"/>
-                <a:ea typeface="Space Grotesk" pitchFamily="34" charset="-122"/>
-                <a:cs typeface="Space Grotesk" pitchFamily="34" charset="-120"/>
+                <a:latin typeface="Calibri" pitchFamily="34" charset="0"/>
+                <a:ea typeface="Microsoft YaHei UI" pitchFamily="34" charset="-122"/>
+                <a:cs typeface="Calibri" pitchFamily="34" charset="-120"/>
               </a:rPr>
               <a:t>首页数据看板</a:t>
             </a:r>
@@ -41157,9 +41157,9 @@
                 <a:solidFill>
                   <a:srgbClr val="8B949E"/>
                 </a:solidFill>
-                <a:latin typeface="Inter" pitchFamily="34" charset="0"/>
-                <a:ea typeface="Inter" pitchFamily="34" charset="-122"/>
-                <a:cs typeface="Inter" pitchFamily="34" charset="-120"/>
+                <a:latin typeface="Calibri" pitchFamily="34" charset="0"/>
+                <a:ea typeface="Microsoft YaHei UI" pitchFamily="34" charset="-122"/>
+                <a:cs typeface="Calibri" pitchFamily="34" charset="-120"/>
               </a:rPr>
               <a:t>渐变面积图、Sparkline 趋势卡片、实时数据概览</a:t>
             </a:r>
@@ -41230,9 +41230,9 @@
                 <a:solidFill>
                   <a:srgbClr val="22C55E"/>
                 </a:solidFill>
-                <a:latin typeface="Inter" pitchFamily="34" charset="0"/>
-                <a:ea typeface="Inter" pitchFamily="34" charset="-122"/>
-                <a:cs typeface="Inter" pitchFamily="34" charset="-120"/>
+                <a:latin typeface="Calibri" pitchFamily="34" charset="0"/>
+                <a:ea typeface="Microsoft YaHei UI" pitchFamily="34" charset="-122"/>
+                <a:cs typeface="Calibri" pitchFamily="34" charset="-120"/>
               </a:rPr>
               <a:t>Home.tsx</a:t>
             </a:r>
@@ -41301,9 +41301,9 @@
                 <a:solidFill>
                   <a:srgbClr val="FFFFFF"/>
                 </a:solidFill>
-                <a:latin typeface="Space Grotesk" pitchFamily="34" charset="0"/>
-                <a:ea typeface="Space Grotesk" pitchFamily="34" charset="-122"/>
-                <a:cs typeface="Space Grotesk" pitchFamily="34" charset="-120"/>
+                <a:latin typeface="Calibri" pitchFamily="34" charset="0"/>
+                <a:ea typeface="Microsoft YaHei UI" pitchFamily="34" charset="-122"/>
+                <a:cs typeface="Calibri" pitchFamily="34" charset="-120"/>
               </a:rPr>
               <a:t>内容生成工作台</a:t>
             </a:r>
@@ -41345,9 +41345,9 @@
                 <a:solidFill>
                   <a:srgbClr val="8B949E"/>
                 </a:solidFill>
-                <a:latin typeface="Inter" pitchFamily="34" charset="0"/>
-                <a:ea typeface="Inter" pitchFamily="34" charset="-122"/>
-                <a:cs typeface="Inter" pitchFamily="34" charset="-120"/>
+                <a:latin typeface="Calibri" pitchFamily="34" charset="0"/>
+                <a:ea typeface="Microsoft YaHei UI" pitchFamily="34" charset="-122"/>
+                <a:cs typeface="Calibri" pitchFamily="34" charset="-120"/>
               </a:rPr>
               <a:t>AI 文案 + 配图 + Agent 全自动生成，多平台预览</a:t>
             </a:r>
@@ -41418,9 +41418,9 @@
                 <a:solidFill>
                   <a:srgbClr val="22C55E"/>
                 </a:solidFill>
-                <a:latin typeface="Inter" pitchFamily="34" charset="0"/>
-                <a:ea typeface="Inter" pitchFamily="34" charset="-122"/>
-                <a:cs typeface="Inter" pitchFamily="34" charset="-120"/>
+                <a:latin typeface="Calibri" pitchFamily="34" charset="0"/>
+                <a:ea typeface="Microsoft YaHei UI" pitchFamily="34" charset="-122"/>
+                <a:cs typeface="Calibri" pitchFamily="34" charset="-120"/>
               </a:rPr>
               <a:t>Generate.tsx</a:t>
             </a:r>
@@ -41489,9 +41489,9 @@
                 <a:solidFill>
                   <a:srgbClr val="FFFFFF"/>
                 </a:solidFill>
-                <a:latin typeface="Space Grotesk" pitchFamily="34" charset="0"/>
-                <a:ea typeface="Space Grotesk" pitchFamily="34" charset="-122"/>
-                <a:cs typeface="Space Grotesk" pitchFamily="34" charset="-120"/>
+                <a:latin typeface="Calibri" pitchFamily="34" charset="0"/>
+                <a:ea typeface="Microsoft YaHei UI" pitchFamily="34" charset="-122"/>
+                <a:cs typeface="Calibri" pitchFamily="34" charset="-120"/>
               </a:rPr>
               <a:t>AI 视频工作台</a:t>
             </a:r>
@@ -41533,9 +41533,9 @@
                 <a:solidFill>
                   <a:srgbClr val="8B949E"/>
                 </a:solidFill>
-                <a:latin typeface="Inter" pitchFamily="34" charset="0"/>
-                <a:ea typeface="Inter" pitchFamily="34" charset="-122"/>
-                <a:cs typeface="Inter" pitchFamily="34" charset="-120"/>
+                <a:latin typeface="Calibri" pitchFamily="34" charset="0"/>
+                <a:ea typeface="Microsoft YaHei UI" pitchFamily="34" charset="-122"/>
+                <a:cs typeface="Calibri" pitchFamily="34" charset="-120"/>
               </a:rPr>
               <a:t>文生/图生视频、倒计时进度、批量多比例生成</a:t>
             </a:r>
@@ -41606,9 +41606,9 @@
                 <a:solidFill>
                   <a:srgbClr val="22C55E"/>
                 </a:solidFill>
-                <a:latin typeface="Inter" pitchFamily="34" charset="0"/>
-                <a:ea typeface="Inter" pitchFamily="34" charset="-122"/>
-                <a:cs typeface="Inter" pitchFamily="34" charset="-120"/>
+                <a:latin typeface="Calibri" pitchFamily="34" charset="0"/>
+                <a:ea typeface="Microsoft YaHei UI" pitchFamily="34" charset="-122"/>
+                <a:cs typeface="Calibri" pitchFamily="34" charset="-120"/>
               </a:rPr>
               <a:t>VideoGenerator.tsx</a:t>
             </a:r>
@@ -41677,9 +41677,9 @@
                 <a:solidFill>
                   <a:srgbClr val="FFFFFF"/>
                 </a:solidFill>
-                <a:latin typeface="Space Grotesk" pitchFamily="34" charset="0"/>
-                <a:ea typeface="Space Grotesk" pitchFamily="34" charset="-122"/>
-                <a:cs typeface="Space Grotesk" pitchFamily="34" charset="-120"/>
+                <a:latin typeface="Calibri" pitchFamily="34" charset="0"/>
+                <a:ea typeface="Microsoft YaHei UI" pitchFamily="34" charset="-122"/>
+                <a:cs typeface="Calibri" pitchFamily="34" charset="-120"/>
               </a:rPr>
               <a:t>发布 / 分析中心</a:t>
             </a:r>
@@ -41721,9 +41721,9 @@
                 <a:solidFill>
                   <a:srgbClr val="8B949E"/>
                 </a:solidFill>
-                <a:latin typeface="Inter" pitchFamily="34" charset="0"/>
-                <a:ea typeface="Inter" pitchFamily="34" charset="-122"/>
-                <a:cs typeface="Inter" pitchFamily="34" charset="-120"/>
+                <a:latin typeface="Calibri" pitchFamily="34" charset="0"/>
+                <a:ea typeface="Microsoft YaHei UI" pitchFamily="34" charset="-122"/>
+                <a:cs typeface="Calibri" pitchFamily="34" charset="-120"/>
               </a:rPr>
               <a:t>内容日历、一键分发、效果追踪、互动数据录入</a:t>
             </a:r>
@@ -41794,9 +41794,9 @@
                 <a:solidFill>
                   <a:srgbClr val="22C55E"/>
                 </a:solidFill>
-                <a:latin typeface="Inter" pitchFamily="34" charset="0"/>
-                <a:ea typeface="Inter" pitchFamily="34" charset="-122"/>
-                <a:cs typeface="Inter" pitchFamily="34" charset="-120"/>
+                <a:latin typeface="Calibri" pitchFamily="34" charset="0"/>
+                <a:ea typeface="Microsoft YaHei UI" pitchFamily="34" charset="-122"/>
+                <a:cs typeface="Calibri" pitchFamily="34" charset="-120"/>
               </a:rPr>
               <a:t>Publish / Analytics</a:t>
             </a:r>
@@ -41886,9 +41886,9 @@
                 <a:solidFill>
                   <a:srgbClr val="FFFFFF"/>
                 </a:solidFill>
-                <a:latin typeface="Inter" pitchFamily="34" charset="0"/>
-                <a:ea typeface="Inter" pitchFamily="34" charset="-122"/>
-                <a:cs typeface="Inter" pitchFamily="34" charset="-120"/>
+                <a:latin typeface="Calibri" pitchFamily="34" charset="0"/>
+                <a:ea typeface="Microsoft YaHei UI" pitchFamily="34" charset="-122"/>
+                <a:cs typeface="Calibri" pitchFamily="34" charset="-120"/>
               </a:rPr>
               <a:t>技术栈：</a:t>
             </a:r>
@@ -41905,9 +41905,9 @@
                     <a:alpha val="70000"/>
                   </a:srgbClr>
                 </a:solidFill>
-                <a:latin typeface="Inter" pitchFamily="34" charset="0"/>
-                <a:ea typeface="Inter" pitchFamily="34" charset="-122"/>
-                <a:cs typeface="Inter" pitchFamily="34" charset="-120"/>
+                <a:latin typeface="Calibri" pitchFamily="34" charset="0"/>
+                <a:ea typeface="Microsoft YaHei UI" pitchFamily="34" charset="-122"/>
+                <a:cs typeface="Calibri" pitchFamily="34" charset="-120"/>
               </a:rPr>
               <a:t>React 19 + TypeScript + tRPC 11 + Drizzle ORM + MySQL/TiDB + S3 存储 + Manus OAuth。 AI 能力全部通过内置 API 调用，无需用户配置密钥；视频引擎已切换至</a:t>
             </a:r>
@@ -41922,9 +41922,9 @@
                 <a:solidFill>
                   <a:srgbClr val="FFFFFF"/>
                 </a:solidFill>
-                <a:latin typeface="Inter" pitchFamily="34" charset="0"/>
-                <a:ea typeface="Inter" pitchFamily="34" charset="-122"/>
-                <a:cs typeface="Inter" pitchFamily="34" charset="-120"/>
+                <a:latin typeface="Calibri" pitchFamily="34" charset="0"/>
+                <a:ea typeface="Microsoft YaHei UI" pitchFamily="34" charset="-122"/>
+                <a:cs typeface="Calibri" pitchFamily="34" charset="-120"/>
               </a:rPr>
               <a:t>火山引擎国内版</a:t>
             </a:r>
@@ -41941,9 +41941,9 @@
                     <a:alpha val="70000"/>
                   </a:srgbClr>
                 </a:solidFill>
-                <a:latin typeface="Inter" pitchFamily="34" charset="0"/>
-                <a:ea typeface="Inter" pitchFamily="34" charset="-122"/>
-                <a:cs typeface="Inter" pitchFamily="34" charset="-120"/>
+                <a:latin typeface="Calibri" pitchFamily="34" charset="0"/>
+                <a:ea typeface="Microsoft YaHei UI" pitchFamily="34" charset="-122"/>
+                <a:cs typeface="Calibri" pitchFamily="34" charset="-120"/>
               </a:rPr>
               <a:t>（ark.cn-beijing.volces.com），模型 ID 格式为 doubao-seedance-*。</a:t>
             </a:r>
@@ -41985,9 +41985,9 @@
                 <a:solidFill>
                   <a:srgbClr val="8B949E"/>
                 </a:solidFill>
-                <a:latin typeface="Inter" pitchFamily="34" charset="0"/>
-                <a:ea typeface="Inter" pitchFamily="34" charset="-122"/>
-                <a:cs typeface="Inter" pitchFamily="34" charset="-120"/>
+                <a:latin typeface="Calibri" pitchFamily="34" charset="0"/>
+                <a:ea typeface="Microsoft YaHei UI" pitchFamily="34" charset="-122"/>
+                <a:cs typeface="Calibri" pitchFamily="34" charset="-120"/>
               </a:rPr>
               <a:t>前端：React 19 + Vite + TailwindCSS 4</a:t>
             </a:r>
@@ -42029,9 +42029,9 @@
                 <a:solidFill>
                   <a:srgbClr val="8B949E"/>
                 </a:solidFill>
-                <a:latin typeface="Inter" pitchFamily="34" charset="0"/>
-                <a:ea typeface="Inter" pitchFamily="34" charset="-122"/>
-                <a:cs typeface="Inter" pitchFamily="34" charset="-120"/>
+                <a:latin typeface="Calibri" pitchFamily="34" charset="0"/>
+                <a:ea typeface="Microsoft YaHei UI" pitchFamily="34" charset="-122"/>
+                <a:cs typeface="Calibri" pitchFamily="34" charset="-120"/>
               </a:rPr>
               <a:t>后端：Express 4 + tRPC 11 + Superjson</a:t>
             </a:r>
@@ -42073,9 +42073,9 @@
                 <a:solidFill>
                   <a:srgbClr val="8B949E"/>
                 </a:solidFill>
-                <a:latin typeface="Inter" pitchFamily="34" charset="0"/>
-                <a:ea typeface="Inter" pitchFamily="34" charset="-122"/>
-                <a:cs typeface="Inter" pitchFamily="34" charset="-120"/>
+                <a:latin typeface="Calibri" pitchFamily="34" charset="0"/>
+                <a:ea typeface="Microsoft YaHei UI" pitchFamily="34" charset="-122"/>
+                <a:cs typeface="Calibri" pitchFamily="34" charset="-120"/>
               </a:rPr>
               <a:t>数据库：MySQL/TiDB + Drizzle ORM</a:t>
             </a:r>
@@ -42117,9 +42117,9 @@
                 <a:solidFill>
                   <a:srgbClr val="8B949E"/>
                 </a:solidFill>
-                <a:latin typeface="Inter" pitchFamily="34" charset="0"/>
-                <a:ea typeface="Inter" pitchFamily="34" charset="-122"/>
-                <a:cs typeface="Inter" pitchFamily="34" charset="-120"/>
+                <a:latin typeface="Calibri" pitchFamily="34" charset="0"/>
+                <a:ea typeface="Microsoft YaHei UI" pitchFamily="34" charset="-122"/>
+                <a:cs typeface="Calibri" pitchFamily="34" charset="-120"/>
               </a:rPr>
               <a:t>AI：Manus LLM + 火山引擎 Seedance + S3</a:t>
             </a:r>
@@ -42210,9 +42210,9 @@
                 <a:solidFill>
                   <a:srgbClr val="00D4FF"/>
                 </a:solidFill>
-                <a:latin typeface="Inter" pitchFamily="34" charset="0"/>
-                <a:ea typeface="Inter" pitchFamily="34" charset="-122"/>
-                <a:cs typeface="Inter" pitchFamily="34" charset="-120"/>
+                <a:latin typeface="Calibri" pitchFamily="34" charset="0"/>
+                <a:ea typeface="Microsoft YaHei UI" pitchFamily="34" charset="-122"/>
+                <a:cs typeface="Calibri" pitchFamily="34" charset="-120"/>
               </a:rPr>
               <a:t>VIDEO AI TECHNOLOGY</a:t>
             </a:r>
@@ -42254,9 +42254,9 @@
                 <a:solidFill>
                   <a:srgbClr val="FFFFFF"/>
                 </a:solidFill>
-                <a:latin typeface="Space Grotesk" pitchFamily="34" charset="0"/>
-                <a:ea typeface="Space Grotesk" pitchFamily="34" charset="-122"/>
-                <a:cs typeface="Space Grotesk" pitchFamily="34" charset="-120"/>
+                <a:latin typeface="Calibri" pitchFamily="34" charset="0"/>
+                <a:ea typeface="Microsoft YaHei UI" pitchFamily="34" charset="-122"/>
+                <a:cs typeface="Calibri" pitchFamily="34" charset="-120"/>
               </a:rPr>
               <a:t>AI 视频生成技术选型：doubao-seedance 系列全面集成</a:t>
             </a:r>
@@ -42298,9 +42298,9 @@
                 <a:solidFill>
                   <a:srgbClr val="7C3AED"/>
                 </a:solidFill>
-                <a:latin typeface="Inter" pitchFamily="34" charset="0"/>
-                <a:ea typeface="Inter" pitchFamily="34" charset="-122"/>
-                <a:cs typeface="Inter" pitchFamily="34" charset="-120"/>
+                <a:latin typeface="Calibri" pitchFamily="34" charset="0"/>
+                <a:ea typeface="Microsoft YaHei UI" pitchFamily="34" charset="-122"/>
+                <a:cs typeface="Calibri" pitchFamily="34" charset="-120"/>
               </a:rPr>
               <a:t>六大模型能力对比</a:t>
             </a:r>
@@ -42362,9 +42362,9 @@
                 <a:solidFill>
                   <a:srgbClr val="8B949E"/>
                 </a:solidFill>
-                <a:latin typeface="Inter" pitchFamily="34" charset="0"/>
-                <a:ea typeface="Inter" pitchFamily="34" charset="-122"/>
-                <a:cs typeface="Inter" pitchFamily="34" charset="-120"/>
+                <a:latin typeface="Calibri" pitchFamily="34" charset="0"/>
+                <a:ea typeface="Microsoft YaHei UI" pitchFamily="34" charset="-122"/>
+                <a:cs typeface="Calibri" pitchFamily="34" charset="-120"/>
               </a:rPr>
               <a:t>模型</a:t>
             </a:r>
@@ -42406,9 +42406,9 @@
                 <a:solidFill>
                   <a:srgbClr val="8B949E"/>
                 </a:solidFill>
-                <a:latin typeface="Inter" pitchFamily="34" charset="0"/>
-                <a:ea typeface="Inter" pitchFamily="34" charset="-122"/>
-                <a:cs typeface="Inter" pitchFamily="34" charset="-120"/>
+                <a:latin typeface="Calibri" pitchFamily="34" charset="0"/>
+                <a:ea typeface="Microsoft YaHei UI" pitchFamily="34" charset="-122"/>
+                <a:cs typeface="Calibri" pitchFamily="34" charset="-120"/>
               </a:rPr>
               <a:t>提供商</a:t>
             </a:r>
@@ -42450,9 +42450,9 @@
                 <a:solidFill>
                   <a:srgbClr val="8B949E"/>
                 </a:solidFill>
-                <a:latin typeface="Inter" pitchFamily="34" charset="0"/>
-                <a:ea typeface="Inter" pitchFamily="34" charset="-122"/>
-                <a:cs typeface="Inter" pitchFamily="34" charset="-120"/>
+                <a:latin typeface="Calibri" pitchFamily="34" charset="0"/>
+                <a:ea typeface="Microsoft YaHei UI" pitchFamily="34" charset="-122"/>
+                <a:cs typeface="Calibri" pitchFamily="34" charset="-120"/>
               </a:rPr>
               <a:t>最长时长</a:t>
             </a:r>
@@ -42494,9 +42494,9 @@
                 <a:solidFill>
                   <a:srgbClr val="8B949E"/>
                 </a:solidFill>
-                <a:latin typeface="Inter" pitchFamily="34" charset="0"/>
-                <a:ea typeface="Inter" pitchFamily="34" charset="-122"/>
-                <a:cs typeface="Inter" pitchFamily="34" charset="-120"/>
+                <a:latin typeface="Calibri" pitchFamily="34" charset="0"/>
+                <a:ea typeface="Microsoft YaHei UI" pitchFamily="34" charset="-122"/>
+                <a:cs typeface="Calibri" pitchFamily="34" charset="-120"/>
               </a:rPr>
               <a:t>最高分辨率</a:t>
             </a:r>
@@ -42538,9 +42538,9 @@
                 <a:solidFill>
                   <a:srgbClr val="8B949E"/>
                 </a:solidFill>
-                <a:latin typeface="Inter" pitchFamily="34" charset="0"/>
-                <a:ea typeface="Inter" pitchFamily="34" charset="-122"/>
-                <a:cs typeface="Inter" pitchFamily="34" charset="-120"/>
+                <a:latin typeface="Calibri" pitchFamily="34" charset="0"/>
+                <a:ea typeface="Microsoft YaHei UI" pitchFamily="34" charset="-122"/>
+                <a:cs typeface="Calibri" pitchFamily="34" charset="-120"/>
               </a:rPr>
               <a:t>图生视频</a:t>
             </a:r>
@@ -42582,9 +42582,9 @@
                 <a:solidFill>
                   <a:srgbClr val="8B949E"/>
                 </a:solidFill>
-                <a:latin typeface="Inter" pitchFamily="34" charset="0"/>
-                <a:ea typeface="Inter" pitchFamily="34" charset="-122"/>
-                <a:cs typeface="Inter" pitchFamily="34" charset="-120"/>
+                <a:latin typeface="Calibri" pitchFamily="34" charset="0"/>
+                <a:ea typeface="Microsoft YaHei UI" pitchFamily="34" charset="-122"/>
+                <a:cs typeface="Calibri" pitchFamily="34" charset="-120"/>
               </a:rPr>
               <a:t>集成状态</a:t>
             </a:r>
@@ -42626,9 +42626,9 @@
                 <a:solidFill>
                   <a:srgbClr val="FFFFFF"/>
                 </a:solidFill>
-                <a:latin typeface="Space Grotesk" pitchFamily="34" charset="0"/>
-                <a:ea typeface="Space Grotesk" pitchFamily="34" charset="-122"/>
-                <a:cs typeface="Space Grotesk" pitchFamily="34" charset="-120"/>
+                <a:latin typeface="Calibri" pitchFamily="34" charset="0"/>
+                <a:ea typeface="Microsoft YaHei UI" pitchFamily="34" charset="-122"/>
+                <a:cs typeface="Calibri" pitchFamily="34" charset="-120"/>
               </a:rPr>
               <a:t>Seedance 1.0 Pro</a:t>
             </a:r>
@@ -42670,9 +42670,9 @@
                 <a:solidFill>
                   <a:srgbClr val="8B949E"/>
                 </a:solidFill>
-                <a:latin typeface="Inter" pitchFamily="34" charset="0"/>
-                <a:ea typeface="Inter" pitchFamily="34" charset="-122"/>
-                <a:cs typeface="Inter" pitchFamily="34" charset="-120"/>
+                <a:latin typeface="Calibri" pitchFamily="34" charset="0"/>
+                <a:ea typeface="Microsoft YaHei UI" pitchFamily="34" charset="-122"/>
+                <a:cs typeface="Calibri" pitchFamily="34" charset="-120"/>
               </a:rPr>
               <a:t>doubao-seedance-1-0-pro-250528</a:t>
             </a:r>
@@ -42743,9 +42743,9 @@
                 <a:solidFill>
                   <a:srgbClr val="00D4FF"/>
                 </a:solidFill>
-                <a:latin typeface="Inter" pitchFamily="34" charset="0"/>
-                <a:ea typeface="Inter" pitchFamily="34" charset="-122"/>
-                <a:cs typeface="Inter" pitchFamily="34" charset="-120"/>
+                <a:latin typeface="Calibri" pitchFamily="34" charset="0"/>
+                <a:ea typeface="Microsoft YaHei UI" pitchFamily="34" charset="-122"/>
+                <a:cs typeface="Calibri" pitchFamily="34" charset="-120"/>
               </a:rPr>
               <a:t>火山引擎</a:t>
             </a:r>
@@ -42789,9 +42789,9 @@
                     <a:alpha val="75000"/>
                   </a:srgbClr>
                 </a:solidFill>
-                <a:latin typeface="Inter" pitchFamily="34" charset="0"/>
-                <a:ea typeface="Inter" pitchFamily="34" charset="-122"/>
-                <a:cs typeface="Inter" pitchFamily="34" charset="-120"/>
+                <a:latin typeface="Calibri" pitchFamily="34" charset="0"/>
+                <a:ea typeface="Microsoft YaHei UI" pitchFamily="34" charset="-122"/>
+                <a:cs typeface="Calibri" pitchFamily="34" charset="-120"/>
               </a:rPr>
               <a:t>10s</a:t>
             </a:r>
@@ -42835,9 +42835,9 @@
                     <a:alpha val="75000"/>
                   </a:srgbClr>
                 </a:solidFill>
-                <a:latin typeface="Inter" pitchFamily="34" charset="0"/>
-                <a:ea typeface="Inter" pitchFamily="34" charset="-122"/>
-                <a:cs typeface="Inter" pitchFamily="34" charset="-120"/>
+                <a:latin typeface="Calibri" pitchFamily="34" charset="0"/>
+                <a:ea typeface="Microsoft YaHei UI" pitchFamily="34" charset="-122"/>
+                <a:cs typeface="Calibri" pitchFamily="34" charset="-120"/>
               </a:rPr>
               <a:t>1080p</a:t>
             </a:r>
@@ -42879,9 +42879,9 @@
                 <a:solidFill>
                   <a:srgbClr val="EF4444"/>
                 </a:solidFill>
-                <a:latin typeface="Inter" pitchFamily="34" charset="0"/>
-                <a:ea typeface="Inter" pitchFamily="34" charset="-122"/>
-                <a:cs typeface="Inter" pitchFamily="34" charset="-120"/>
+                <a:latin typeface="Calibri" pitchFamily="34" charset="0"/>
+                <a:ea typeface="Microsoft YaHei UI" pitchFamily="34" charset="-122"/>
+                <a:cs typeface="Calibri" pitchFamily="34" charset="-120"/>
               </a:rPr>
               <a:t>✗</a:t>
             </a:r>
@@ -42952,9 +42952,9 @@
                 <a:solidFill>
                   <a:srgbClr val="00D4FF"/>
                 </a:solidFill>
-                <a:latin typeface="Inter" pitchFamily="34" charset="0"/>
-                <a:ea typeface="Inter" pitchFamily="34" charset="-122"/>
-                <a:cs typeface="Inter" pitchFamily="34" charset="-120"/>
+                <a:latin typeface="Calibri" pitchFamily="34" charset="0"/>
+                <a:ea typeface="Microsoft YaHei UI" pitchFamily="34" charset="-122"/>
+                <a:cs typeface="Calibri" pitchFamily="34" charset="-120"/>
               </a:rPr>
               <a:t>已集成</a:t>
             </a:r>
@@ -43038,9 +43038,9 @@
                 <a:solidFill>
                   <a:srgbClr val="FFFFFF"/>
                 </a:solidFill>
-                <a:latin typeface="Space Grotesk" pitchFamily="34" charset="0"/>
-                <a:ea typeface="Space Grotesk" pitchFamily="34" charset="-122"/>
-                <a:cs typeface="Space Grotesk" pitchFamily="34" charset="-120"/>
+                <a:latin typeface="Calibri" pitchFamily="34" charset="0"/>
+                <a:ea typeface="Microsoft YaHei UI" pitchFamily="34" charset="-122"/>
+                <a:cs typeface="Calibri" pitchFamily="34" charset="-120"/>
               </a:rPr>
               <a:t>Seedance 1.0 Pro Fast</a:t>
             </a:r>
@@ -43082,9 +43082,9 @@
                 <a:solidFill>
                   <a:srgbClr val="8B949E"/>
                 </a:solidFill>
-                <a:latin typeface="Inter" pitchFamily="34" charset="0"/>
-                <a:ea typeface="Inter" pitchFamily="34" charset="-122"/>
-                <a:cs typeface="Inter" pitchFamily="34" charset="-120"/>
+                <a:latin typeface="Calibri" pitchFamily="34" charset="0"/>
+                <a:ea typeface="Microsoft YaHei UI" pitchFamily="34" charset="-122"/>
+                <a:cs typeface="Calibri" pitchFamily="34" charset="-120"/>
               </a:rPr>
               <a:t>doubao-seedance-1-0-pro-fast-251015</a:t>
             </a:r>
@@ -43155,9 +43155,9 @@
                 <a:solidFill>
                   <a:srgbClr val="00D4FF"/>
                 </a:solidFill>
-                <a:latin typeface="Inter" pitchFamily="34" charset="0"/>
-                <a:ea typeface="Inter" pitchFamily="34" charset="-122"/>
-                <a:cs typeface="Inter" pitchFamily="34" charset="-120"/>
+                <a:latin typeface="Calibri" pitchFamily="34" charset="0"/>
+                <a:ea typeface="Microsoft YaHei UI" pitchFamily="34" charset="-122"/>
+                <a:cs typeface="Calibri" pitchFamily="34" charset="-120"/>
               </a:rPr>
               <a:t>火山引擎</a:t>
             </a:r>
@@ -43201,9 +43201,9 @@
                     <a:alpha val="75000"/>
                   </a:srgbClr>
                 </a:solidFill>
-                <a:latin typeface="Inter" pitchFamily="34" charset="0"/>
-                <a:ea typeface="Inter" pitchFamily="34" charset="-122"/>
-                <a:cs typeface="Inter" pitchFamily="34" charset="-120"/>
+                <a:latin typeface="Calibri" pitchFamily="34" charset="0"/>
+                <a:ea typeface="Microsoft YaHei UI" pitchFamily="34" charset="-122"/>
+                <a:cs typeface="Calibri" pitchFamily="34" charset="-120"/>
               </a:rPr>
               <a:t>10s</a:t>
             </a:r>
@@ -43247,9 +43247,9 @@
                     <a:alpha val="75000"/>
                   </a:srgbClr>
                 </a:solidFill>
-                <a:latin typeface="Inter" pitchFamily="34" charset="0"/>
-                <a:ea typeface="Inter" pitchFamily="34" charset="-122"/>
-                <a:cs typeface="Inter" pitchFamily="34" charset="-120"/>
+                <a:latin typeface="Calibri" pitchFamily="34" charset="0"/>
+                <a:ea typeface="Microsoft YaHei UI" pitchFamily="34" charset="-122"/>
+                <a:cs typeface="Calibri" pitchFamily="34" charset="-120"/>
               </a:rPr>
               <a:t>1080p</a:t>
             </a:r>
@@ -43291,9 +43291,9 @@
                 <a:solidFill>
                   <a:srgbClr val="EF4444"/>
                 </a:solidFill>
-                <a:latin typeface="Inter" pitchFamily="34" charset="0"/>
-                <a:ea typeface="Inter" pitchFamily="34" charset="-122"/>
-                <a:cs typeface="Inter" pitchFamily="34" charset="-120"/>
+                <a:latin typeface="Calibri" pitchFamily="34" charset="0"/>
+                <a:ea typeface="Microsoft YaHei UI" pitchFamily="34" charset="-122"/>
+                <a:cs typeface="Calibri" pitchFamily="34" charset="-120"/>
               </a:rPr>
               <a:t>✗</a:t>
             </a:r>
@@ -43364,9 +43364,9 @@
                 <a:solidFill>
                   <a:srgbClr val="00D4FF"/>
                 </a:solidFill>
-                <a:latin typeface="Inter" pitchFamily="34" charset="0"/>
-                <a:ea typeface="Inter" pitchFamily="34" charset="-122"/>
-                <a:cs typeface="Inter" pitchFamily="34" charset="-120"/>
+                <a:latin typeface="Calibri" pitchFamily="34" charset="0"/>
+                <a:ea typeface="Microsoft YaHei UI" pitchFamily="34" charset="-122"/>
+                <a:cs typeface="Calibri" pitchFamily="34" charset="-120"/>
               </a:rPr>
               <a:t>已集成</a:t>
             </a:r>
@@ -43408,9 +43408,9 @@
                 <a:solidFill>
                   <a:srgbClr val="FFFFFF"/>
                 </a:solidFill>
-                <a:latin typeface="Space Grotesk" pitchFamily="34" charset="0"/>
-                <a:ea typeface="Space Grotesk" pitchFamily="34" charset="-122"/>
-                <a:cs typeface="Space Grotesk" pitchFamily="34" charset="-120"/>
+                <a:latin typeface="Calibri" pitchFamily="34" charset="0"/>
+                <a:ea typeface="Microsoft YaHei UI" pitchFamily="34" charset="-122"/>
+                <a:cs typeface="Calibri" pitchFamily="34" charset="-120"/>
               </a:rPr>
               <a:t>Seedance 1.0 Lite T2V</a:t>
             </a:r>
@@ -43452,9 +43452,9 @@
                 <a:solidFill>
                   <a:srgbClr val="8B949E"/>
                 </a:solidFill>
-                <a:latin typeface="Inter" pitchFamily="34" charset="0"/>
-                <a:ea typeface="Inter" pitchFamily="34" charset="-122"/>
-                <a:cs typeface="Inter" pitchFamily="34" charset="-120"/>
+                <a:latin typeface="Calibri" pitchFamily="34" charset="0"/>
+                <a:ea typeface="Microsoft YaHei UI" pitchFamily="34" charset="-122"/>
+                <a:cs typeface="Calibri" pitchFamily="34" charset="-120"/>
               </a:rPr>
               <a:t>doubao-seedance-1-0-lite-t2v-250428</a:t>
             </a:r>
@@ -43525,9 +43525,9 @@
                 <a:solidFill>
                   <a:srgbClr val="00D4FF"/>
                 </a:solidFill>
-                <a:latin typeface="Inter" pitchFamily="34" charset="0"/>
-                <a:ea typeface="Inter" pitchFamily="34" charset="-122"/>
-                <a:cs typeface="Inter" pitchFamily="34" charset="-120"/>
+                <a:latin typeface="Calibri" pitchFamily="34" charset="0"/>
+                <a:ea typeface="Microsoft YaHei UI" pitchFamily="34" charset="-122"/>
+                <a:cs typeface="Calibri" pitchFamily="34" charset="-120"/>
               </a:rPr>
               <a:t>火山引擎</a:t>
             </a:r>
@@ -43571,9 +43571,9 @@
                     <a:alpha val="75000"/>
                   </a:srgbClr>
                 </a:solidFill>
-                <a:latin typeface="Inter" pitchFamily="34" charset="0"/>
-                <a:ea typeface="Inter" pitchFamily="34" charset="-122"/>
-                <a:cs typeface="Inter" pitchFamily="34" charset="-120"/>
+                <a:latin typeface="Calibri" pitchFamily="34" charset="0"/>
+                <a:ea typeface="Microsoft YaHei UI" pitchFamily="34" charset="-122"/>
+                <a:cs typeface="Calibri" pitchFamily="34" charset="-120"/>
               </a:rPr>
               <a:t>10s</a:t>
             </a:r>
@@ -43617,9 +43617,9 @@
                     <a:alpha val="75000"/>
                   </a:srgbClr>
                 </a:solidFill>
-                <a:latin typeface="Inter" pitchFamily="34" charset="0"/>
-                <a:ea typeface="Inter" pitchFamily="34" charset="-122"/>
-                <a:cs typeface="Inter" pitchFamily="34" charset="-120"/>
+                <a:latin typeface="Calibri" pitchFamily="34" charset="0"/>
+                <a:ea typeface="Microsoft YaHei UI" pitchFamily="34" charset="-122"/>
+                <a:cs typeface="Calibri" pitchFamily="34" charset="-120"/>
               </a:rPr>
               <a:t>720p</a:t>
             </a:r>
@@ -43661,9 +43661,9 @@
                 <a:solidFill>
                   <a:srgbClr val="EF4444"/>
                 </a:solidFill>
-                <a:latin typeface="Inter" pitchFamily="34" charset="0"/>
-                <a:ea typeface="Inter" pitchFamily="34" charset="-122"/>
-                <a:cs typeface="Inter" pitchFamily="34" charset="-120"/>
+                <a:latin typeface="Calibri" pitchFamily="34" charset="0"/>
+                <a:ea typeface="Microsoft YaHei UI" pitchFamily="34" charset="-122"/>
+                <a:cs typeface="Calibri" pitchFamily="34" charset="-120"/>
               </a:rPr>
               <a:t>✗</a:t>
             </a:r>
@@ -43734,9 +43734,9 @@
                 <a:solidFill>
                   <a:srgbClr val="00D4FF"/>
                 </a:solidFill>
-                <a:latin typeface="Inter" pitchFamily="34" charset="0"/>
-                <a:ea typeface="Inter" pitchFamily="34" charset="-122"/>
-                <a:cs typeface="Inter" pitchFamily="34" charset="-120"/>
+                <a:latin typeface="Calibri" pitchFamily="34" charset="0"/>
+                <a:ea typeface="Microsoft YaHei UI" pitchFamily="34" charset="-122"/>
+                <a:cs typeface="Calibri" pitchFamily="34" charset="-120"/>
               </a:rPr>
               <a:t>已集成</a:t>
             </a:r>
@@ -43820,9 +43820,9 @@
                 <a:solidFill>
                   <a:srgbClr val="FFFFFF"/>
                 </a:solidFill>
-                <a:latin typeface="Space Grotesk" pitchFamily="34" charset="0"/>
-                <a:ea typeface="Space Grotesk" pitchFamily="34" charset="-122"/>
-                <a:cs typeface="Space Grotesk" pitchFamily="34" charset="-120"/>
+                <a:latin typeface="Calibri" pitchFamily="34" charset="0"/>
+                <a:ea typeface="Microsoft YaHei UI" pitchFamily="34" charset="-122"/>
+                <a:cs typeface="Calibri" pitchFamily="34" charset="-120"/>
               </a:rPr>
               <a:t>Seedance 1.0 Lite I2V</a:t>
             </a:r>
@@ -43864,9 +43864,9 @@
                 <a:solidFill>
                   <a:srgbClr val="8B949E"/>
                 </a:solidFill>
-                <a:latin typeface="Inter" pitchFamily="34" charset="0"/>
-                <a:ea typeface="Inter" pitchFamily="34" charset="-122"/>
-                <a:cs typeface="Inter" pitchFamily="34" charset="-120"/>
+                <a:latin typeface="Calibri" pitchFamily="34" charset="0"/>
+                <a:ea typeface="Microsoft YaHei UI" pitchFamily="34" charset="-122"/>
+                <a:cs typeface="Calibri" pitchFamily="34" charset="-120"/>
               </a:rPr>
               <a:t>doubao-seedance-1-0-lite-i2v-250428</a:t>
             </a:r>
@@ -43937,9 +43937,9 @@
                 <a:solidFill>
                   <a:srgbClr val="00D4FF"/>
                 </a:solidFill>
-                <a:latin typeface="Inter" pitchFamily="34" charset="0"/>
-                <a:ea typeface="Inter" pitchFamily="34" charset="-122"/>
-                <a:cs typeface="Inter" pitchFamily="34" charset="-120"/>
+                <a:latin typeface="Calibri" pitchFamily="34" charset="0"/>
+                <a:ea typeface="Microsoft YaHei UI" pitchFamily="34" charset="-122"/>
+                <a:cs typeface="Calibri" pitchFamily="34" charset="-120"/>
               </a:rPr>
               <a:t>火山引擎</a:t>
             </a:r>
@@ -43983,9 +43983,9 @@
                     <a:alpha val="75000"/>
                   </a:srgbClr>
                 </a:solidFill>
-                <a:latin typeface="Inter" pitchFamily="34" charset="0"/>
-                <a:ea typeface="Inter" pitchFamily="34" charset="-122"/>
-                <a:cs typeface="Inter" pitchFamily="34" charset="-120"/>
+                <a:latin typeface="Calibri" pitchFamily="34" charset="0"/>
+                <a:ea typeface="Microsoft YaHei UI" pitchFamily="34" charset="-122"/>
+                <a:cs typeface="Calibri" pitchFamily="34" charset="-120"/>
               </a:rPr>
               <a:t>10s</a:t>
             </a:r>
@@ -44029,9 +44029,9 @@
                     <a:alpha val="75000"/>
                   </a:srgbClr>
                 </a:solidFill>
-                <a:latin typeface="Inter" pitchFamily="34" charset="0"/>
-                <a:ea typeface="Inter" pitchFamily="34" charset="-122"/>
-                <a:cs typeface="Inter" pitchFamily="34" charset="-120"/>
+                <a:latin typeface="Calibri" pitchFamily="34" charset="0"/>
+                <a:ea typeface="Microsoft YaHei UI" pitchFamily="34" charset="-122"/>
+                <a:cs typeface="Calibri" pitchFamily="34" charset="-120"/>
               </a:rPr>
               <a:t>720p</a:t>
             </a:r>
@@ -44073,9 +44073,9 @@
                 <a:solidFill>
                   <a:srgbClr val="22C55E"/>
                 </a:solidFill>
-                <a:latin typeface="Inter" pitchFamily="34" charset="0"/>
-                <a:ea typeface="Inter" pitchFamily="34" charset="-122"/>
-                <a:cs typeface="Inter" pitchFamily="34" charset="-120"/>
+                <a:latin typeface="Calibri" pitchFamily="34" charset="0"/>
+                <a:ea typeface="Microsoft YaHei UI" pitchFamily="34" charset="-122"/>
+                <a:cs typeface="Calibri" pitchFamily="34" charset="-120"/>
               </a:rPr>
               <a:t>✓</a:t>
             </a:r>
@@ -44146,9 +44146,9 @@
                 <a:solidFill>
                   <a:srgbClr val="00D4FF"/>
                 </a:solidFill>
-                <a:latin typeface="Inter" pitchFamily="34" charset="0"/>
-                <a:ea typeface="Inter" pitchFamily="34" charset="-122"/>
-                <a:cs typeface="Inter" pitchFamily="34" charset="-120"/>
+                <a:latin typeface="Calibri" pitchFamily="34" charset="0"/>
+                <a:ea typeface="Microsoft YaHei UI" pitchFamily="34" charset="-122"/>
+                <a:cs typeface="Calibri" pitchFamily="34" charset="-120"/>
               </a:rPr>
               <a:t>已集成</a:t>
             </a:r>
@@ -44190,9 +44190,9 @@
                 <a:solidFill>
                   <a:srgbClr val="FFFFFF"/>
                 </a:solidFill>
-                <a:latin typeface="Space Grotesk" pitchFamily="34" charset="0"/>
-                <a:ea typeface="Space Grotesk" pitchFamily="34" charset="-122"/>
-                <a:cs typeface="Space Grotesk" pitchFamily="34" charset="-120"/>
+                <a:latin typeface="Calibri" pitchFamily="34" charset="0"/>
+                <a:ea typeface="Microsoft YaHei UI" pitchFamily="34" charset="-122"/>
+                <a:cs typeface="Calibri" pitchFamily="34" charset="-120"/>
               </a:rPr>
               <a:t>Seedance 1.5 Pro</a:t>
             </a:r>
@@ -44234,9 +44234,9 @@
                 <a:solidFill>
                   <a:srgbClr val="8B949E"/>
                 </a:solidFill>
-                <a:latin typeface="Inter" pitchFamily="34" charset="0"/>
-                <a:ea typeface="Inter" pitchFamily="34" charset="-122"/>
-                <a:cs typeface="Inter" pitchFamily="34" charset="-120"/>
+                <a:latin typeface="Calibri" pitchFamily="34" charset="0"/>
+                <a:ea typeface="Microsoft YaHei UI" pitchFamily="34" charset="-122"/>
+                <a:cs typeface="Calibri" pitchFamily="34" charset="-120"/>
               </a:rPr>
               <a:t>doubao-seedance-1-5-pro-251215</a:t>
             </a:r>
@@ -44307,9 +44307,9 @@
                 <a:solidFill>
                   <a:srgbClr val="00D4FF"/>
                 </a:solidFill>
-                <a:latin typeface="Inter" pitchFamily="34" charset="0"/>
-                <a:ea typeface="Inter" pitchFamily="34" charset="-122"/>
-                <a:cs typeface="Inter" pitchFamily="34" charset="-120"/>
+                <a:latin typeface="Calibri" pitchFamily="34" charset="0"/>
+                <a:ea typeface="Microsoft YaHei UI" pitchFamily="34" charset="-122"/>
+                <a:cs typeface="Calibri" pitchFamily="34" charset="-120"/>
               </a:rPr>
               <a:t>火山引擎</a:t>
             </a:r>
@@ -44353,9 +44353,9 @@
                     <a:alpha val="75000"/>
                   </a:srgbClr>
                 </a:solidFill>
-                <a:latin typeface="Inter" pitchFamily="34" charset="0"/>
-                <a:ea typeface="Inter" pitchFamily="34" charset="-122"/>
-                <a:cs typeface="Inter" pitchFamily="34" charset="-120"/>
+                <a:latin typeface="Calibri" pitchFamily="34" charset="0"/>
+                <a:ea typeface="Microsoft YaHei UI" pitchFamily="34" charset="-122"/>
+                <a:cs typeface="Calibri" pitchFamily="34" charset="-120"/>
               </a:rPr>
               <a:t>10s</a:t>
             </a:r>
@@ -44399,9 +44399,9 @@
                     <a:alpha val="75000"/>
                   </a:srgbClr>
                 </a:solidFill>
-                <a:latin typeface="Inter" pitchFamily="34" charset="0"/>
-                <a:ea typeface="Inter" pitchFamily="34" charset="-122"/>
-                <a:cs typeface="Inter" pitchFamily="34" charset="-120"/>
+                <a:latin typeface="Calibri" pitchFamily="34" charset="0"/>
+                <a:ea typeface="Microsoft YaHei UI" pitchFamily="34" charset="-122"/>
+                <a:cs typeface="Calibri" pitchFamily="34" charset="-120"/>
               </a:rPr>
               <a:t>1080p</a:t>
             </a:r>
@@ -44443,9 +44443,9 @@
                 <a:solidFill>
                   <a:srgbClr val="22C55E"/>
                 </a:solidFill>
-                <a:latin typeface="Inter" pitchFamily="34" charset="0"/>
-                <a:ea typeface="Inter" pitchFamily="34" charset="-122"/>
-                <a:cs typeface="Inter" pitchFamily="34" charset="-120"/>
+                <a:latin typeface="Calibri" pitchFamily="34" charset="0"/>
+                <a:ea typeface="Microsoft YaHei UI" pitchFamily="34" charset="-122"/>
+                <a:cs typeface="Calibri" pitchFamily="34" charset="-120"/>
               </a:rPr>
               <a:t>✓</a:t>
             </a:r>
@@ -44516,9 +44516,9 @@
                 <a:solidFill>
                   <a:srgbClr val="00D4FF"/>
                 </a:solidFill>
-                <a:latin typeface="Inter" pitchFamily="34" charset="0"/>
-                <a:ea typeface="Inter" pitchFamily="34" charset="-122"/>
-                <a:cs typeface="Inter" pitchFamily="34" charset="-120"/>
+                <a:latin typeface="Calibri" pitchFamily="34" charset="0"/>
+                <a:ea typeface="Microsoft YaHei UI" pitchFamily="34" charset="-122"/>
+                <a:cs typeface="Calibri" pitchFamily="34" charset="-120"/>
               </a:rPr>
               <a:t>已集成</a:t>
             </a:r>
@@ -44602,9 +44602,9 @@
                 <a:solidFill>
                   <a:srgbClr val="FFFFFF"/>
                 </a:solidFill>
-                <a:latin typeface="Space Grotesk" pitchFamily="34" charset="0"/>
-                <a:ea typeface="Space Grotesk" pitchFamily="34" charset="-122"/>
-                <a:cs typeface="Space Grotesk" pitchFamily="34" charset="-120"/>
+                <a:latin typeface="Calibri" pitchFamily="34" charset="0"/>
+                <a:ea typeface="Microsoft YaHei UI" pitchFamily="34" charset="-122"/>
+                <a:cs typeface="Calibri" pitchFamily="34" charset="-120"/>
               </a:rPr>
               <a:t>Kling / Sora</a:t>
             </a:r>
@@ -44646,9 +44646,9 @@
                 <a:solidFill>
                   <a:srgbClr val="8B949E"/>
                 </a:solidFill>
-                <a:latin typeface="Inter" pitchFamily="34" charset="0"/>
-                <a:ea typeface="Inter" pitchFamily="34" charset="-122"/>
-                <a:cs typeface="Inter" pitchFamily="34" charset="-120"/>
+                <a:latin typeface="Calibri" pitchFamily="34" charset="0"/>
+                <a:ea typeface="Microsoft YaHei UI" pitchFamily="34" charset="-122"/>
+                <a:cs typeface="Calibri" pitchFamily="34" charset="-120"/>
               </a:rPr>
               <a:t>快手 / OpenAI</a:t>
             </a:r>
@@ -44719,9 +44719,9 @@
                 <a:solidFill>
                   <a:srgbClr val="8B949E"/>
                 </a:solidFill>
-                <a:latin typeface="Inter" pitchFamily="34" charset="0"/>
-                <a:ea typeface="Inter" pitchFamily="34" charset="-122"/>
-                <a:cs typeface="Inter" pitchFamily="34" charset="-120"/>
+                <a:latin typeface="Calibri" pitchFamily="34" charset="0"/>
+                <a:ea typeface="Microsoft YaHei UI" pitchFamily="34" charset="-122"/>
+                <a:cs typeface="Calibri" pitchFamily="34" charset="-120"/>
               </a:rPr>
               <a:t>备选</a:t>
             </a:r>
@@ -44765,9 +44765,9 @@
                     <a:alpha val="75000"/>
                   </a:srgbClr>
                 </a:solidFill>
-                <a:latin typeface="Inter" pitchFamily="34" charset="0"/>
-                <a:ea typeface="Inter" pitchFamily="34" charset="-122"/>
-                <a:cs typeface="Inter" pitchFamily="34" charset="-120"/>
+                <a:latin typeface="Calibri" pitchFamily="34" charset="0"/>
+                <a:ea typeface="Microsoft YaHei UI" pitchFamily="34" charset="-122"/>
+                <a:cs typeface="Calibri" pitchFamily="34" charset="-120"/>
               </a:rPr>
               <a:t>3min+</a:t>
             </a:r>
@@ -44811,9 +44811,9 @@
                     <a:alpha val="75000"/>
                   </a:srgbClr>
                 </a:solidFill>
-                <a:latin typeface="Inter" pitchFamily="34" charset="0"/>
-                <a:ea typeface="Inter" pitchFamily="34" charset="-122"/>
-                <a:cs typeface="Inter" pitchFamily="34" charset="-120"/>
+                <a:latin typeface="Calibri" pitchFamily="34" charset="0"/>
+                <a:ea typeface="Microsoft YaHei UI" pitchFamily="34" charset="-122"/>
+                <a:cs typeface="Calibri" pitchFamily="34" charset="-120"/>
               </a:rPr>
               <a:t>1080p</a:t>
             </a:r>
@@ -44855,9 +44855,9 @@
                 <a:solidFill>
                   <a:srgbClr val="22C55E"/>
                 </a:solidFill>
-                <a:latin typeface="Inter" pitchFamily="34" charset="0"/>
-                <a:ea typeface="Inter" pitchFamily="34" charset="-122"/>
-                <a:cs typeface="Inter" pitchFamily="34" charset="-120"/>
+                <a:latin typeface="Calibri" pitchFamily="34" charset="0"/>
+                <a:ea typeface="Microsoft YaHei UI" pitchFamily="34" charset="-122"/>
+                <a:cs typeface="Calibri" pitchFamily="34" charset="-120"/>
               </a:rPr>
               <a:t>✓</a:t>
             </a:r>
@@ -44928,9 +44928,9 @@
                 <a:solidFill>
                   <a:srgbClr val="8B949E"/>
                 </a:solidFill>
-                <a:latin typeface="Inter" pitchFamily="34" charset="0"/>
-                <a:ea typeface="Inter" pitchFamily="34" charset="-122"/>
-                <a:cs typeface="Inter" pitchFamily="34" charset="-120"/>
+                <a:latin typeface="Calibri" pitchFamily="34" charset="0"/>
+                <a:ea typeface="Microsoft YaHei UI" pitchFamily="34" charset="-122"/>
+                <a:cs typeface="Calibri" pitchFamily="34" charset="-120"/>
               </a:rPr>
               <a:t>规划中</a:t>
             </a:r>
@@ -44972,9 +44972,9 @@
                 <a:solidFill>
                   <a:srgbClr val="7C3AED"/>
                 </a:solidFill>
-                <a:latin typeface="Inter" pitchFamily="34" charset="0"/>
-                <a:ea typeface="Inter" pitchFamily="34" charset="-122"/>
-                <a:cs typeface="Inter" pitchFamily="34" charset="-120"/>
+                <a:latin typeface="Calibri" pitchFamily="34" charset="0"/>
+                <a:ea typeface="Microsoft YaHei UI" pitchFamily="34" charset="-122"/>
+                <a:cs typeface="Calibri" pitchFamily="34" charset="-120"/>
               </a:rPr>
               <a:t>多模型路由策略</a:t>
             </a:r>
@@ -45043,9 +45043,9 @@
                 <a:solidFill>
                   <a:srgbClr val="FFFFFF"/>
                 </a:solidFill>
-                <a:latin typeface="Space Grotesk" pitchFamily="34" charset="0"/>
-                <a:ea typeface="Space Grotesk" pitchFamily="34" charset="-122"/>
-                <a:cs typeface="Space Grotesk" pitchFamily="34" charset="-120"/>
+                <a:latin typeface="Calibri" pitchFamily="34" charset="0"/>
+                <a:ea typeface="Microsoft YaHei UI" pitchFamily="34" charset="-122"/>
+                <a:cs typeface="Calibri" pitchFamily="34" charset="-120"/>
               </a:rPr>
               <a:t>质量优先模式</a:t>
             </a:r>
@@ -45087,9 +45087,9 @@
                 <a:solidFill>
                   <a:srgbClr val="00D4FF"/>
                 </a:solidFill>
-                <a:latin typeface="Space Grotesk" pitchFamily="34" charset="0"/>
-                <a:ea typeface="Space Grotesk" pitchFamily="34" charset="-122"/>
-                <a:cs typeface="Space Grotesk" pitchFamily="34" charset="-120"/>
+                <a:latin typeface="Calibri" pitchFamily="34" charset="0"/>
+                <a:ea typeface="Microsoft YaHei UI" pitchFamily="34" charset="-122"/>
+                <a:cs typeface="Calibri" pitchFamily="34" charset="-120"/>
               </a:rPr>
               <a:t>→ Pro / Pro 1.5</a:t>
             </a:r>
@@ -45131,9 +45131,9 @@
                 <a:solidFill>
                   <a:srgbClr val="8B949E"/>
                 </a:solidFill>
-                <a:latin typeface="Inter" pitchFamily="34" charset="0"/>
-                <a:ea typeface="Inter" pitchFamily="34" charset="-122"/>
-                <a:cs typeface="Inter" pitchFamily="34" charset="-120"/>
+                <a:latin typeface="Calibri" pitchFamily="34" charset="0"/>
+                <a:ea typeface="Microsoft YaHei UI" pitchFamily="34" charset="-122"/>
+                <a:cs typeface="Calibri" pitchFamily="34" charset="-120"/>
               </a:rPr>
               <a:t>用于品牌宣传片、高价值内容；1080p 输出，生成时间约 60–90s，适合不赶时间的精品创作</a:t>
             </a:r>
@@ -45202,9 +45202,9 @@
                 <a:solidFill>
                   <a:srgbClr val="FFFFFF"/>
                 </a:solidFill>
-                <a:latin typeface="Space Grotesk" pitchFamily="34" charset="0"/>
-                <a:ea typeface="Space Grotesk" pitchFamily="34" charset="-122"/>
-                <a:cs typeface="Space Grotesk" pitchFamily="34" charset="-120"/>
+                <a:latin typeface="Calibri" pitchFamily="34" charset="0"/>
+                <a:ea typeface="Microsoft YaHei UI" pitchFamily="34" charset="-122"/>
+                <a:cs typeface="Calibri" pitchFamily="34" charset="-120"/>
               </a:rPr>
               <a:t>速度优先模式</a:t>
             </a:r>
@@ -45246,9 +45246,9 @@
                 <a:solidFill>
                   <a:srgbClr val="00D4FF"/>
                 </a:solidFill>
-                <a:latin typeface="Space Grotesk" pitchFamily="34" charset="0"/>
-                <a:ea typeface="Space Grotesk" pitchFamily="34" charset="-122"/>
-                <a:cs typeface="Space Grotesk" pitchFamily="34" charset="-120"/>
+                <a:latin typeface="Calibri" pitchFamily="34" charset="0"/>
+                <a:ea typeface="Microsoft YaHei UI" pitchFamily="34" charset="-122"/>
+                <a:cs typeface="Calibri" pitchFamily="34" charset="-120"/>
               </a:rPr>
               <a:t>→ Pro Fast</a:t>
             </a:r>
@@ -45290,9 +45290,9 @@
                 <a:solidFill>
                   <a:srgbClr val="8B949E"/>
                 </a:solidFill>
-                <a:latin typeface="Inter" pitchFamily="34" charset="0"/>
-                <a:ea typeface="Inter" pitchFamily="34" charset="-122"/>
-                <a:cs typeface="Inter" pitchFamily="34" charset="-120"/>
+                <a:latin typeface="Calibri" pitchFamily="34" charset="0"/>
+                <a:ea typeface="Microsoft YaHei UI" pitchFamily="34" charset="-122"/>
+                <a:cs typeface="Calibri" pitchFamily="34" charset="-120"/>
               </a:rPr>
               <a:t>追热点场景，生成速度提升约 40%；适合需要快速产出、抢占热点时间窗口的内容</a:t>
             </a:r>
@@ -45361,9 +45361,9 @@
                 <a:solidFill>
                   <a:srgbClr val="FFFFFF"/>
                 </a:solidFill>
-                <a:latin typeface="Space Grotesk" pitchFamily="34" charset="0"/>
-                <a:ea typeface="Space Grotesk" pitchFamily="34" charset="-122"/>
-                <a:cs typeface="Space Grotesk" pitchFamily="34" charset="-120"/>
+                <a:latin typeface="Calibri" pitchFamily="34" charset="0"/>
+                <a:ea typeface="Microsoft YaHei UI" pitchFamily="34" charset="-122"/>
+                <a:cs typeface="Calibri" pitchFamily="34" charset="-120"/>
               </a:rPr>
               <a:t>图生视频模式</a:t>
             </a:r>
@@ -45405,9 +45405,9 @@
                 <a:solidFill>
                   <a:srgbClr val="00D4FF"/>
                 </a:solidFill>
-                <a:latin typeface="Space Grotesk" pitchFamily="34" charset="0"/>
-                <a:ea typeface="Space Grotesk" pitchFamily="34" charset="-122"/>
-                <a:cs typeface="Space Grotesk" pitchFamily="34" charset="-120"/>
+                <a:latin typeface="Calibri" pitchFamily="34" charset="0"/>
+                <a:ea typeface="Microsoft YaHei UI" pitchFamily="34" charset="-122"/>
+                <a:cs typeface="Calibri" pitchFamily="34" charset="-120"/>
               </a:rPr>
               <a:t>→ Lite I2V / Pro 1.5</a:t>
             </a:r>
@@ -45449,9 +45449,9 @@
                 <a:solidFill>
                   <a:srgbClr val="8B949E"/>
                 </a:solidFill>
-                <a:latin typeface="Inter" pitchFamily="34" charset="0"/>
-                <a:ea typeface="Inter" pitchFamily="34" charset="-122"/>
-                <a:cs typeface="Inter" pitchFamily="34" charset="-120"/>
+                <a:latin typeface="Calibri" pitchFamily="34" charset="0"/>
+                <a:ea typeface="Microsoft YaHei UI" pitchFamily="34" charset="-122"/>
+                <a:cs typeface="Calibri" pitchFamily="34" charset="-120"/>
               </a:rPr>
               <a:t>用户上传图片作为首帧，AI 生成动态视频；提升内容与创作者风格的一致性，降低出镜门槛</a:t>
             </a:r>
@@ -45522,9 +45522,9 @@
                 <a:solidFill>
                   <a:srgbClr val="A78BFA"/>
                 </a:solidFill>
-                <a:latin typeface="Inter" pitchFamily="34" charset="0"/>
-                <a:ea typeface="Inter" pitchFamily="34" charset="-122"/>
-                <a:cs typeface="Inter" pitchFamily="34" charset="-120"/>
+                <a:latin typeface="Calibri" pitchFamily="34" charset="0"/>
+                <a:ea typeface="Microsoft YaHei UI" pitchFamily="34" charset="-122"/>
+                <a:cs typeface="Calibri" pitchFamily="34" charset="-120"/>
               </a:rPr>
               <a:t>当前集成信息</a:t>
             </a:r>
@@ -45572,9 +45572,9 @@
                 <a:solidFill>
                   <a:srgbClr val="FFFFFF"/>
                 </a:solidFill>
-                <a:latin typeface="Inter" pitchFamily="34" charset="0"/>
-                <a:ea typeface="Inter" pitchFamily="34" charset="-122"/>
-                <a:cs typeface="Inter" pitchFamily="34" charset="-120"/>
+                <a:latin typeface="Calibri" pitchFamily="34" charset="0"/>
+                <a:ea typeface="Microsoft YaHei UI" pitchFamily="34" charset="-122"/>
+                <a:cs typeface="Calibri" pitchFamily="34" charset="-120"/>
               </a:rPr>
               <a:t>API 端点：</a:t>
             </a:r>
@@ -45591,9 +45591,9 @@
                     <a:alpha val="75000"/>
                   </a:srgbClr>
                 </a:solidFill>
-                <a:latin typeface="Inter" pitchFamily="34" charset="0"/>
-                <a:ea typeface="Inter" pitchFamily="34" charset="-122"/>
-                <a:cs typeface="Inter" pitchFamily="34" charset="-120"/>
+                <a:latin typeface="Calibri" pitchFamily="34" charset="0"/>
+                <a:ea typeface="Microsoft YaHei UI" pitchFamily="34" charset="-122"/>
+                <a:cs typeface="Calibri" pitchFamily="34" charset="-120"/>
               </a:rPr>
               <a:t>ark.cn-beijing.volces.com（火山引擎方舟·北京）</a:t>
             </a:r>
@@ -45610,9 +45610,9 @@
                     <a:alpha val="75000"/>
                   </a:srgbClr>
                 </a:solidFill>
-                <a:latin typeface="Inter" pitchFamily="34" charset="0"/>
-                <a:ea typeface="Inter" pitchFamily="34" charset="-122"/>
-                <a:cs typeface="Inter" pitchFamily="34" charset="-120"/>
+                <a:latin typeface="Calibri" pitchFamily="34" charset="0"/>
+                <a:ea typeface="Microsoft YaHei UI" pitchFamily="34" charset="-122"/>
+                <a:cs typeface="Calibri" pitchFamily="34" charset="-120"/>
               </a:rPr>
               <a:t>
 </a:t>
@@ -45630,9 +45630,9 @@
                     <a:alpha val="75000"/>
                   </a:srgbClr>
                 </a:solidFill>
-                <a:latin typeface="Inter" pitchFamily="34" charset="0"/>
-                <a:ea typeface="Inter" pitchFamily="34" charset="-122"/>
-                <a:cs typeface="Inter" pitchFamily="34" charset="-120"/>
+                <a:latin typeface="Calibri" pitchFamily="34" charset="0"/>
+                <a:ea typeface="Microsoft YaHei UI" pitchFamily="34" charset="-122"/>
+                <a:cs typeface="Calibri" pitchFamily="34" charset="-120"/>
               </a:rPr>
               <a:t> </a:t>
             </a:r>
@@ -45647,9 +45647,9 @@
                 <a:solidFill>
                   <a:srgbClr val="FFFFFF"/>
                 </a:solidFill>
-                <a:latin typeface="Inter" pitchFamily="34" charset="0"/>
-                <a:ea typeface="Inter" pitchFamily="34" charset="-122"/>
-                <a:cs typeface="Inter" pitchFamily="34" charset="-120"/>
+                <a:latin typeface="Calibri" pitchFamily="34" charset="0"/>
+                <a:ea typeface="Microsoft YaHei UI" pitchFamily="34" charset="-122"/>
+                <a:cs typeface="Calibri" pitchFamily="34" charset="-120"/>
               </a:rPr>
               <a:t>认证方式：</a:t>
             </a:r>
@@ -45666,9 +45666,9 @@
                     <a:alpha val="75000"/>
                   </a:srgbClr>
                 </a:solidFill>
-                <a:latin typeface="Inter" pitchFamily="34" charset="0"/>
-                <a:ea typeface="Inter" pitchFamily="34" charset="-122"/>
-                <a:cs typeface="Inter" pitchFamily="34" charset="-120"/>
+                <a:latin typeface="Calibri" pitchFamily="34" charset="0"/>
+                <a:ea typeface="Microsoft YaHei UI" pitchFamily="34" charset="-122"/>
+                <a:cs typeface="Calibri" pitchFamily="34" charset="-120"/>
               </a:rPr>
               <a:t>SEEDANCE_API_KEY 内置注入，用户无需配置</a:t>
             </a:r>
@@ -45685,9 +45685,9 @@
                     <a:alpha val="75000"/>
                   </a:srgbClr>
                 </a:solidFill>
-                <a:latin typeface="Inter" pitchFamily="34" charset="0"/>
-                <a:ea typeface="Inter" pitchFamily="34" charset="-122"/>
-                <a:cs typeface="Inter" pitchFamily="34" charset="-120"/>
+                <a:latin typeface="Calibri" pitchFamily="34" charset="0"/>
+                <a:ea typeface="Microsoft YaHei UI" pitchFamily="34" charset="-122"/>
+                <a:cs typeface="Calibri" pitchFamily="34" charset="-120"/>
               </a:rPr>
               <a:t>
 </a:t>
@@ -45705,9 +45705,9 @@
                     <a:alpha val="75000"/>
                   </a:srgbClr>
                 </a:solidFill>
-                <a:latin typeface="Inter" pitchFamily="34" charset="0"/>
-                <a:ea typeface="Inter" pitchFamily="34" charset="-122"/>
-                <a:cs typeface="Inter" pitchFamily="34" charset="-120"/>
+                <a:latin typeface="Calibri" pitchFamily="34" charset="0"/>
+                <a:ea typeface="Microsoft YaHei UI" pitchFamily="34" charset="-122"/>
+                <a:cs typeface="Calibri" pitchFamily="34" charset="-120"/>
               </a:rPr>
               <a:t> </a:t>
             </a:r>
@@ -45722,9 +45722,9 @@
                 <a:solidFill>
                   <a:srgbClr val="FFFFFF"/>
                 </a:solidFill>
-                <a:latin typeface="Inter" pitchFamily="34" charset="0"/>
-                <a:ea typeface="Inter" pitchFamily="34" charset="-122"/>
-                <a:cs typeface="Inter" pitchFamily="34" charset="-120"/>
+                <a:latin typeface="Calibri" pitchFamily="34" charset="0"/>
+                <a:ea typeface="Microsoft YaHei UI" pitchFamily="34" charset="-122"/>
+                <a:cs typeface="Calibri" pitchFamily="34" charset="-120"/>
               </a:rPr>
               <a:t>计费单位：</a:t>
             </a:r>
@@ -45741,9 +45741,9 @@
                     <a:alpha val="75000"/>
                   </a:srgbClr>
                 </a:solidFill>
-                <a:latin typeface="Inter" pitchFamily="34" charset="0"/>
-                <a:ea typeface="Inter" pitchFamily="34" charset="-122"/>
-                <a:cs typeface="Inter" pitchFamily="34" charset="-120"/>
+                <a:latin typeface="Calibri" pitchFamily="34" charset="0"/>
+                <a:ea typeface="Microsoft YaHei UI" pitchFamily="34" charset="-122"/>
+                <a:cs typeface="Calibri" pitchFamily="34" charset="-120"/>
               </a:rPr>
               <a:t>按视频时长（秒）× 分辨率系数计费</a:t>
             </a:r>
@@ -45827,9 +45827,9 @@
                 <a:solidFill>
                   <a:srgbClr val="FFFFFF"/>
                 </a:solidFill>
-                <a:latin typeface="Inter" pitchFamily="34" charset="0"/>
-                <a:ea typeface="Inter" pitchFamily="34" charset="-122"/>
-                <a:cs typeface="Inter" pitchFamily="34" charset="-120"/>
+                <a:latin typeface="Calibri" pitchFamily="34" charset="0"/>
+                <a:ea typeface="Microsoft YaHei UI" pitchFamily="34" charset="-122"/>
+                <a:cs typeface="Calibri" pitchFamily="34" charset="-120"/>
               </a:rPr>
               <a:t>选型逻辑：</a:t>
             </a:r>
@@ -45846,9 +45846,9 @@
                     <a:alpha val="70000"/>
                   </a:srgbClr>
                 </a:solidFill>
-                <a:latin typeface="Inter" pitchFamily="34" charset="0"/>
-                <a:ea typeface="Inter" pitchFamily="34" charset="-122"/>
-                <a:cs typeface="Inter" pitchFamily="34" charset="-120"/>
+                <a:latin typeface="Calibri" pitchFamily="34" charset="0"/>
+                <a:ea typeface="Microsoft YaHei UI" pitchFamily="34" charset="-122"/>
+                <a:cs typeface="Calibri" pitchFamily="34" charset="-120"/>
               </a:rPr>
               <a:t>优先选用火山引擎 doubao-seedance 系列，原因是其在中文内容场景下语义理解更准确，且与国内网络环境延迟更低。后续规划接入 Kling（快手）作为备选，通过多模型路由在成本、速度、质量三维度动态调度。</a:t>
             </a:r>
